--- a/Flat_Plate_Radiation_CFD_Pitch.pptx
+++ b/Flat_Plate_Radiation_CFD_Pitch.pptx
@@ -514,7 +514,7 @@
           <a:lstStyle/>
           <a:p>
             <a:r>
-              <a:t>This presentation establishes that conjugated surface thermal radiation meaningfully depresses wall temperatures in heated laminar flat-plate flows. Using OpenFOAM 13, we couple grey-diffuse surface radiation (ε = 0.8) to an external 300 K environment using a custom in-situ Newton-Raphson boundary algorithm. Hydrodynamic skin friction validates against Blasius similarity within 0.11%, providing a solid computational baseline for conjugated heat transfer. Source: results/figures/four_case_temperature_zoom.png.</a:t>
+              <a:t>This presentation presents my CFD research project for Boundary Layer Theory at Karunya Institute of Technology and Sciences. I investigate coupled surface radiation effects on a laminar flat-plate boundary layer using OpenFOAM 13. By coupling grey-diffuse thermal radiation to an external 300 K environment using an in-situ Newton-Raphson wall boundary solver, we show that radiation depresses wall temperatures by 6.98 K. The hydrodynamic boundary layer validates against Blasius similarity within 0.11%. Source: results/figures/four_case_temperature_zoom.png.</a:t>
             </a:r>
           </a:p>
         </p:txBody>
@@ -864,7 +864,7 @@
           <a:lstStyle/>
           <a:p>
             <a:r>
-              <a:t>In conclusion, surface radiation dissipates over 21% of the input thermal load and cools the peak plate temperature by 6.98 K under laminar boundary layer flow. We welcome collaboration on third-mesh GCI uncertainty quantification and physical experimental validation. Full simulation cases and scripts are available on GitHub. Source: github.com/Jersam-l/flat-plate-with-radiation-cfd.</a:t>
+              <a:t>In conclusion, surface radiation dissipates over 21% of the input thermal load and cools the peak plate temperature by 6.98 K under laminar boundary layer flow. As an aerospace engineering student at Karunya Institute of Technology and Sciences presenting for Boundary Layer Theory, I welcome academic discussion on multi-grid GCI uncertainty quantification and physical experimental validation. Full simulation cases and scripts are available on GitHub. Source: github.com/Jersam-l/flat-plate-with-radiation-cfd.</a:t>
             </a:r>
           </a:p>
         </p:txBody>
@@ -1074,7 +1074,7 @@
           <a:lstStyle/>
           <a:p>
             <a:r>
-              <a:t>The domain spans 2.0 m in length (a 1.0 m unheated inflow plate plus a 1.0 m heated plate) and 0.2 m in height. An 80:1 geometric expansion ratio over 160 vertical divisions yields a first cell height of 70.3 μm, placing 41 cells inside the critical near-wall 5 mm boundary layer region. This fine spacing accurately captures steep wall temperature and velocity gradients. Source: cases/surfaceRadiation_fine/system/blockMeshDict.</a:t>
+              <a:t>The domain spans 2.0 m in length (a 1.0 m unheated inflow plate plus a 1.0 m heated plate) and 0.2 m in height. An 80:1 geometric expansion ratio over 160 vertical divisions yields a first cell height of 70.3 μm, placing 41 cells inside the critical near-wall 5 mm boundary layer region. This fine spacing captures steep wall temperature and velocity gradients with zero mesh skewness. Source: cases/surfaceRadiation_fine/system/blockMeshDict.</a:t>
             </a:r>
           </a:p>
         </p:txBody>
@@ -1679,18 +1679,17 @@
           <a:bodyPr wrap="square" lIns="0" tIns="0" rIns="0" bIns="0" rtlCol="0" anchor="ctr"/>
           <a:lstStyle/>
           <a:p>
-            <a:pPr indent="0" marL="0">
-              <a:buNone/>
-            </a:pPr>
-            <a:r>
-              <a:rPr lang="en-US" sz="1000" dirty="0">
-                <a:solidFill>
-                  <a:schemeClr val="accent4"/>
-                </a:solidFill>
-              </a:rPr>
-              <a:t>Flat-Plate Boundary Layer CFD with Surface Radiation</a:t>
-            </a:r>
-            <a:endParaRPr lang="en-US" sz="1000" dirty="0"/>
+            <a:pPr>
+              <a:defRPr sz="1100">
+                <a:solidFill>
+                  <a:srgbClr val="7C8DB5"/>
+                </a:solidFill>
+                <a:latin typeface="Calibri"/>
+              </a:defRPr>
+            </a:pPr>
+            <a:r>
+              <a:t>Boundary Layer Theory  |  Karunya Institute of Technology and Sciences</a:t>
+            </a:r>
           </a:p>
         </p:txBody>
       </p:sp>
@@ -1834,18 +1833,17 @@
           <a:bodyPr wrap="square" lIns="0" tIns="0" rIns="0" bIns="0" rtlCol="0" anchor="ctr"/>
           <a:lstStyle/>
           <a:p>
-            <a:pPr indent="0" marL="0">
-              <a:buNone/>
-            </a:pPr>
-            <a:r>
-              <a:rPr lang="en-US" sz="1000" dirty="0">
-                <a:solidFill>
-                  <a:schemeClr val="accent4"/>
-                </a:solidFill>
-              </a:rPr>
-              <a:t>Flat-Plate Boundary Layer CFD with Surface Radiation</a:t>
-            </a:r>
-            <a:endParaRPr lang="en-US" sz="1000" dirty="0"/>
+            <a:pPr>
+              <a:defRPr sz="1100">
+                <a:solidFill>
+                  <a:srgbClr val="7C8DB5"/>
+                </a:solidFill>
+                <a:latin typeface="Calibri"/>
+              </a:defRPr>
+            </a:pPr>
+            <a:r>
+              <a:t>Boundary Layer Theory  |  Karunya Institute of Technology and Sciences</a:t>
+            </a:r>
           </a:p>
         </p:txBody>
       </p:sp>
@@ -2287,7 +2285,7 @@
         </p:nvSpPr>
         <p:spPr>
           <a:xfrm>
-            <a:off x="731520" y="1005840"/>
+            <a:off x="731520" y="822960"/>
             <a:ext cx="6217920" cy="365760"/>
           </a:xfrm>
           <a:prstGeom prst="rect">
@@ -2302,7 +2300,7 @@
           <a:lstStyle/>
           <a:p>
             <a:pPr>
-              <a:defRPr sz="1400" b="1">
+              <a:defRPr sz="1300" b="1">
                 <a:solidFill>
                   <a:srgbClr val="23B5D3"/>
                 </a:solidFill>
@@ -2310,7 +2308,7 @@
               </a:defRPr>
             </a:pPr>
             <a:r>
-              <a:t>BOUNDARY LAYER CFD  |  OPENFOAM 13</a:t>
+              <a:t>DEPARTMENT OF AEROSPACE ENGINEERING  |  BOUNDARY LAYER THEORY</a:t>
             </a:r>
           </a:p>
         </p:txBody>
@@ -2323,8 +2321,8 @@
         </p:nvSpPr>
         <p:spPr>
           <a:xfrm>
-            <a:off x="731520" y="1508760"/>
-            <a:ext cx="6217920" cy="2286000"/>
+            <a:off x="731520" y="1325880"/>
+            <a:ext cx="6217920" cy="2103120"/>
           </a:xfrm>
           <a:prstGeom prst="rect">
             <a:avLst/>
@@ -2338,7 +2336,7 @@
           <a:lstStyle/>
           <a:p>
             <a:pPr>
-              <a:defRPr sz="3600" b="1">
+              <a:defRPr sz="3500" b="1">
                 <a:solidFill>
                   <a:srgbClr val="FFFFFF"/>
                 </a:solidFill>
@@ -2359,8 +2357,8 @@
         </p:nvSpPr>
         <p:spPr>
           <a:xfrm>
-            <a:off x="731520" y="3977639"/>
-            <a:ext cx="6217920" cy="1005840"/>
+            <a:off x="731520" y="3566160"/>
+            <a:ext cx="6217920" cy="822960"/>
           </a:xfrm>
           <a:prstGeom prst="rect">
             <a:avLst/>
@@ -2374,7 +2372,7 @@
           <a:lstStyle/>
           <a:p>
             <a:pPr>
-              <a:defRPr sz="1700">
+              <a:defRPr sz="1600">
                 <a:solidFill>
                   <a:srgbClr val="EEF2F7"/>
                 </a:solidFill>
@@ -2382,7 +2380,7 @@
               </a:defRPr>
             </a:pPr>
             <a:r>
-              <a:t>Coupled convection-radiation CFD in OpenFOAM 13, validated against Blasius similarity</a:t>
+              <a:t>Coupled Convection-Radiation CFD in OpenFOAM 13, Validated Against Blasius Similarity</a:t>
             </a:r>
           </a:p>
         </p:txBody>
@@ -2395,8 +2393,8 @@
         </p:nvSpPr>
         <p:spPr>
           <a:xfrm>
-            <a:off x="731520" y="5943600"/>
-            <a:ext cx="8229600" cy="365760"/>
+            <a:off x="731520" y="4663440"/>
+            <a:ext cx="6217920" cy="1645920"/>
           </a:xfrm>
           <a:prstGeom prst="rect">
             <a:avLst/>
@@ -2404,13 +2402,61 @@
           <a:noFill/>
         </p:spPr>
         <p:txBody>
-          <a:bodyPr wrap="none" lIns="0" tIns="0" rIns="0" bIns="0">
+          <a:bodyPr wrap="square" lIns="0" tIns="0" rIns="0" bIns="0">
             <a:spAutoFit/>
           </a:bodyPr>
           <a:lstStyle/>
           <a:p>
             <a:pPr>
-              <a:defRPr sz="1400">
+              <a:spcAft>
+                <a:spcPts val="400"/>
+              </a:spcAft>
+              <a:defRPr sz="2000" b="1">
+                <a:solidFill>
+                  <a:srgbClr val="FF7A1A"/>
+                </a:solidFill>
+                <a:latin typeface="Cambria"/>
+              </a:defRPr>
+            </a:pPr>
+            <a:r>
+              <a:t>Jersam Lithin</a:t>
+            </a:r>
+          </a:p>
+          <a:p>
+            <a:pPr>
+              <a:spcAft>
+                <a:spcPts val="200"/>
+              </a:spcAft>
+              <a:defRPr sz="1300">
+                <a:solidFill>
+                  <a:srgbClr val="FFFFFF"/>
+                </a:solidFill>
+                <a:latin typeface="Calibri"/>
+              </a:defRPr>
+            </a:pPr>
+            <a:r>
+              <a:t>3rd Year B.Tech, Aerospace Engineering</a:t>
+            </a:r>
+          </a:p>
+          <a:p>
+            <a:pPr>
+              <a:spcAft>
+                <a:spcPts val="200"/>
+              </a:spcAft>
+              <a:defRPr sz="1300">
+                <a:solidFill>
+                  <a:srgbClr val="EEF2F7"/>
+                </a:solidFill>
+                <a:latin typeface="Calibri"/>
+              </a:defRPr>
+            </a:pPr>
+            <a:r>
+              <a:t>Karunya Institute of Technology and Sciences</a:t>
+            </a:r>
+          </a:p>
+          <a:p>
+            <a:pPr>
+              <a:defRPr sz="1200">
                 <a:solidFill>
                   <a:srgbClr val="7C8DB5"/>
                 </a:solidFill>
@@ -2418,59 +2464,14 @@
               </a:defRPr>
             </a:pPr>
             <a:r>
-              <a:t>Jerlin S.  |  Boundary Layer CFD Research  |  October 2026</a:t>
-            </a:r>
-          </a:p>
-        </p:txBody>
-      </p:sp>
-      <p:sp>
-        <p:nvSpPr>
-          <p:cNvPr id="8" name="Rounded Rectangle 7"/>
-          <p:cNvSpPr/>
-          <p:nvPr/>
-        </p:nvSpPr>
-        <p:spPr>
-          <a:xfrm>
-            <a:off x="7132320" y="1097280"/>
-            <a:ext cx="4480560" cy="4572000"/>
-          </a:xfrm>
-          <a:prstGeom prst="roundRect">
-            <a:avLst/>
-          </a:prstGeom>
-          <a:solidFill>
-            <a:srgbClr val="FFFFFF"/>
-          </a:solidFill>
-          <a:ln w="12700">
-            <a:solidFill>
-              <a:srgbClr val="DCE2EC"/>
-            </a:solidFill>
-          </a:ln>
-        </p:spPr>
-        <p:style>
-          <a:lnRef idx="1">
-            <a:schemeClr val="accent1"/>
-          </a:lnRef>
-          <a:fillRef idx="3">
-            <a:schemeClr val="accent1"/>
-          </a:fillRef>
-          <a:effectRef idx="2">
-            <a:schemeClr val="accent1"/>
-          </a:effectRef>
-          <a:fontRef idx="minor">
-            <a:schemeClr val="lt1"/>
-          </a:fontRef>
-        </p:style>
-        <p:txBody>
-          <a:bodyPr rtlCol="0" anchor="ctr"/>
-          <a:lstStyle/>
-          <a:p>
-            <a:pPr algn="ctr"/>
+              <a:t>Course: Boundary Layer Theory  |  Academic Year 2026</a:t>
+            </a:r>
           </a:p>
         </p:txBody>
       </p:sp>
       <p:pic>
         <p:nvPicPr>
-          <p:cNvPr id="9" name="Picture 8" descr="four_case_temperature_zoom.png"/>
+          <p:cNvPr id="8" name="Picture 7" descr="four_case_temperature_zoom.png"/>
           <p:cNvPicPr>
             <a:picLocks noChangeAspect="1"/>
           </p:cNvPicPr>
@@ -2484,8 +2485,8 @@
         </p:blipFill>
         <p:spPr>
           <a:xfrm>
-            <a:off x="7315200" y="2033277"/>
-            <a:ext cx="4114800" cy="2379965"/>
+            <a:off x="7132320" y="1950360"/>
+            <a:ext cx="4480560" cy="2591518"/>
           </a:xfrm>
           <a:prstGeom prst="rect">
             <a:avLst/>
@@ -2494,14 +2495,14 @@
       </p:pic>
       <p:sp>
         <p:nvSpPr>
-          <p:cNvPr id="10" name="TextBox 9"/>
+          <p:cNvPr id="9" name="TextBox 8"/>
           <p:cNvSpPr txBox="1"/>
           <p:nvPr/>
         </p:nvSpPr>
         <p:spPr>
           <a:xfrm>
-            <a:off x="7315200" y="5239512"/>
-            <a:ext cx="4114800" cy="320040"/>
+            <a:off x="7132320" y="4633319"/>
+            <a:ext cx="4480560" cy="365760"/>
           </a:xfrm>
           <a:prstGeom prst="rect">
             <a:avLst/>
@@ -2509,7 +2510,7 @@
           <a:noFill/>
         </p:spPr>
         <p:txBody>
-          <a:bodyPr wrap="square" lIns="0" tIns="0" rIns="0" bIns="0">
+          <a:bodyPr wrap="square" lIns="0" tIns="0">
             <a:spAutoFit/>
           </a:bodyPr>
           <a:lstStyle/>
@@ -2594,7 +2595,7 @@
           <a:lstStyle/>
           <a:p>
             <a:pPr>
-              <a:defRPr sz="3400" b="1">
+              <a:defRPr sz="3200" b="1">
                 <a:solidFill>
                   <a:srgbClr val="FFFFFF"/>
                 </a:solidFill>
@@ -2615,7 +2616,7 @@
         </p:nvSpPr>
         <p:spPr>
           <a:xfrm>
-            <a:off x="11155680" y="6400800"/>
+            <a:off x="11064240" y="6400800"/>
             <a:ext cx="548640" cy="274320"/>
           </a:xfrm>
           <a:prstGeom prst="rect">
@@ -2630,7 +2631,7 @@
           <a:lstStyle/>
           <a:p>
             <a:pPr algn="r">
-              <a:defRPr sz="1200">
+              <a:defRPr sz="1100">
                 <a:solidFill>
                   <a:srgbClr val="7C8DB5"/>
                 </a:solidFill>
@@ -2651,19 +2652,17 @@
         </p:nvSpPr>
         <p:spPr>
           <a:xfrm>
-            <a:off x="548640" y="1463040"/>
-            <a:ext cx="6766560" cy="4663440"/>
+            <a:off x="548640" y="1371600"/>
+            <a:ext cx="6583680" cy="4754880"/>
           </a:xfrm>
           <a:prstGeom prst="roundRect">
             <a:avLst/>
           </a:prstGeom>
           <a:solidFill>
-            <a:srgbClr val="FFFFFF"/>
+            <a:srgbClr val="16264A"/>
           </a:solidFill>
-          <a:ln w="12700">
-            <a:solidFill>
-              <a:srgbClr val="DCE2EC"/>
-            </a:solidFill>
+          <a:ln>
+            <a:noFill/>
           </a:ln>
         </p:spPr>
         <p:style>
@@ -2704,8 +2703,8 @@
         </p:blipFill>
         <p:spPr>
           <a:xfrm>
-            <a:off x="959521" y="1627632"/>
-            <a:ext cx="5944796" cy="4014216"/>
+            <a:off x="800373" y="1536192"/>
+            <a:ext cx="6080213" cy="4105656"/>
           </a:xfrm>
           <a:prstGeom prst="rect">
             <a:avLst/>
@@ -2721,7 +2720,7 @@
         <p:spPr>
           <a:xfrm>
             <a:off x="731520" y="5696712"/>
-            <a:ext cx="6400800" cy="320040"/>
+            <a:ext cx="6217920" cy="320040"/>
           </a:xfrm>
           <a:prstGeom prst="rect">
             <a:avLst/>
@@ -2756,8 +2755,8 @@
         </p:nvSpPr>
         <p:spPr>
           <a:xfrm>
-            <a:off x="7589520" y="1463040"/>
-            <a:ext cx="4023360" cy="1371600"/>
+            <a:off x="7498079" y="1371600"/>
+            <a:ext cx="4114800" cy="1417320"/>
           </a:xfrm>
           <a:prstGeom prst="roundRect">
             <a:avLst/>
@@ -2799,8 +2798,8 @@
         </p:nvSpPr>
         <p:spPr>
           <a:xfrm>
-            <a:off x="7863840" y="1627632"/>
-            <a:ext cx="3474720" cy="1051560"/>
+            <a:off x="7772400" y="1536192"/>
+            <a:ext cx="3566160" cy="1097280"/>
           </a:xfrm>
           <a:prstGeom prst="rect">
             <a:avLst/>
@@ -2808,7 +2807,7 @@
           <a:noFill/>
         </p:spPr>
         <p:txBody>
-          <a:bodyPr wrap="square" lIns="0" tIns="0" rIns="0" bIns="0">
+          <a:bodyPr wrap="square" lIns="0" tIns="0">
             <a:spAutoFit/>
           </a:bodyPr>
           <a:lstStyle/>
@@ -2848,8 +2847,8 @@
         </p:nvSpPr>
         <p:spPr>
           <a:xfrm>
-            <a:off x="7589520" y="3017520"/>
-            <a:ext cx="4023360" cy="1371600"/>
+            <a:off x="7498079" y="2971800"/>
+            <a:ext cx="4114800" cy="1417320"/>
           </a:xfrm>
           <a:prstGeom prst="roundRect">
             <a:avLst/>
@@ -2891,8 +2890,8 @@
         </p:nvSpPr>
         <p:spPr>
           <a:xfrm>
-            <a:off x="7863840" y="3182112"/>
-            <a:ext cx="3474720" cy="1051560"/>
+            <a:off x="7772400" y="3136392"/>
+            <a:ext cx="3566160" cy="1097280"/>
           </a:xfrm>
           <a:prstGeom prst="rect">
             <a:avLst/>
@@ -2900,7 +2899,7 @@
           <a:noFill/>
         </p:spPr>
         <p:txBody>
-          <a:bodyPr wrap="square" lIns="0" tIns="0" rIns="0" bIns="0">
+          <a:bodyPr wrap="square" lIns="0" tIns="0">
             <a:spAutoFit/>
           </a:bodyPr>
           <a:lstStyle/>
@@ -2940,8 +2939,8 @@
         </p:nvSpPr>
         <p:spPr>
           <a:xfrm>
-            <a:off x="7589520" y="4572000"/>
-            <a:ext cx="4023360" cy="1371600"/>
+            <a:off x="7498079" y="4572000"/>
+            <a:ext cx="4114800" cy="1417320"/>
           </a:xfrm>
           <a:prstGeom prst="roundRect">
             <a:avLst/>
@@ -2983,8 +2982,8 @@
         </p:nvSpPr>
         <p:spPr>
           <a:xfrm>
-            <a:off x="7863840" y="4736592"/>
-            <a:ext cx="3474720" cy="1051560"/>
+            <a:off x="7772400" y="4736592"/>
+            <a:ext cx="3566160" cy="1097280"/>
           </a:xfrm>
           <a:prstGeom prst="rect">
             <a:avLst/>
@@ -2992,7 +2991,7 @@
           <a:noFill/>
         </p:spPr>
         <p:txBody>
-          <a:bodyPr wrap="square" lIns="0" tIns="0" rIns="0" bIns="0">
+          <a:bodyPr wrap="square" lIns="0" tIns="0">
             <a:spAutoFit/>
           </a:bodyPr>
           <a:lstStyle/>
@@ -3090,7 +3089,7 @@
           <a:lstStyle/>
           <a:p>
             <a:pPr>
-              <a:defRPr sz="3400" b="1">
+              <a:defRPr sz="3200" b="1">
                 <a:solidFill>
                   <a:srgbClr val="0B1426"/>
                 </a:solidFill>
@@ -3111,7 +3110,7 @@
         </p:nvSpPr>
         <p:spPr>
           <a:xfrm>
-            <a:off x="11155680" y="6400800"/>
+            <a:off x="11064240" y="6400800"/>
             <a:ext cx="548640" cy="274320"/>
           </a:xfrm>
           <a:prstGeom prst="rect">
@@ -3126,7 +3125,7 @@
           <a:lstStyle/>
           <a:p>
             <a:pPr algn="r">
-              <a:defRPr sz="1200">
+              <a:defRPr sz="1100">
                 <a:solidFill>
                   <a:srgbClr val="7C8DB5"/>
                 </a:solidFill>
@@ -3147,8 +3146,8 @@
         </p:nvSpPr>
         <p:spPr>
           <a:xfrm>
-            <a:off x="548640" y="1463040"/>
-            <a:ext cx="6217920" cy="4663440"/>
+            <a:off x="548640" y="1371600"/>
+            <a:ext cx="6217920" cy="4754880"/>
           </a:xfrm>
           <a:prstGeom prst="roundRect">
             <a:avLst/>
@@ -3200,7 +3199,7 @@
         </p:blipFill>
         <p:spPr>
           <a:xfrm>
-            <a:off x="731520" y="2262872"/>
+            <a:off x="731520" y="2217152"/>
             <a:ext cx="5852160" cy="2743734"/>
           </a:xfrm>
           <a:prstGeom prst="rect">
@@ -3246,14 +3245,67 @@
       </p:sp>
       <p:sp>
         <p:nvSpPr>
-          <p:cNvPr id="8" name="Rounded Rectangle 7"/>
+          <p:cNvPr id="8" name="Oval 7"/>
           <p:cNvSpPr/>
           <p:nvPr/>
         </p:nvSpPr>
         <p:spPr>
           <a:xfrm>
-            <a:off x="7040880" y="1463040"/>
-            <a:ext cx="2240280" cy="3566160"/>
+            <a:off x="7132320" y="1371600"/>
+            <a:ext cx="548640" cy="548640"/>
+          </a:xfrm>
+          <a:prstGeom prst="ellipse">
+            <a:avLst/>
+          </a:prstGeom>
+          <a:solidFill>
+            <a:srgbClr val="7C8DB5"/>
+          </a:solidFill>
+          <a:ln>
+            <a:noFill/>
+          </a:ln>
+        </p:spPr>
+        <p:style>
+          <a:lnRef idx="1">
+            <a:schemeClr val="accent1"/>
+          </a:lnRef>
+          <a:fillRef idx="3">
+            <a:schemeClr val="accent1"/>
+          </a:fillRef>
+          <a:effectRef idx="2">
+            <a:schemeClr val="accent1"/>
+          </a:effectRef>
+          <a:fontRef idx="minor">
+            <a:schemeClr val="lt1"/>
+          </a:fontRef>
+        </p:style>
+        <p:txBody>
+          <a:bodyPr rtlCol="0" anchor="ctr"/>
+          <a:lstStyle/>
+          <a:p>
+            <a:pPr algn="ctr">
+              <a:defRPr sz="1800" b="1">
+                <a:solidFill>
+                  <a:srgbClr val="FFFFFF"/>
+                </a:solidFill>
+                <a:latin typeface="Cambria"/>
+              </a:defRPr>
+            </a:pPr>
+            <a:r>
+              <a:t>1</a:t>
+            </a:r>
+          </a:p>
+        </p:txBody>
+      </p:sp>
+      <p:sp>
+        <p:nvSpPr>
+          <p:cNvPr id="9" name="Rounded Rectangle 8"/>
+          <p:cNvSpPr/>
+          <p:nvPr/>
+        </p:nvSpPr>
+        <p:spPr>
+          <a:xfrm>
+            <a:off x="7132320" y="2011680"/>
+            <a:ext cx="2148840" cy="2926080"/>
           </a:xfrm>
           <a:prstGeom prst="roundRect">
             <a:avLst/>
@@ -3291,14 +3343,14 @@
       </p:sp>
       <p:sp>
         <p:nvSpPr>
-          <p:cNvPr id="9" name="TextBox 8"/>
+          <p:cNvPr id="10" name="TextBox 9"/>
           <p:cNvSpPr txBox="1"/>
           <p:nvPr/>
         </p:nvSpPr>
         <p:spPr>
           <a:xfrm>
-            <a:off x="7178040" y="1645920"/>
-            <a:ext cx="1965960" cy="3200400"/>
+            <a:off x="7269480" y="2103120"/>
+            <a:ext cx="1874519" cy="2743200"/>
           </a:xfrm>
           <a:prstGeom prst="rect">
             <a:avLst/>
@@ -3306,13 +3358,13 @@
           <a:noFill/>
         </p:spPr>
         <p:txBody>
-          <a:bodyPr wrap="square" lIns="0" tIns="0" rIns="0" bIns="0">
+          <a:bodyPr wrap="square" lIns="0" tIns="0">
             <a:spAutoFit/>
           </a:bodyPr>
           <a:lstStyle/>
           <a:p>
             <a:pPr>
-              <a:defRPr sz="1800" b="1">
+              <a:defRPr sz="1700" b="1">
                 <a:solidFill>
                   <a:srgbClr val="0B1426"/>
                 </a:solidFill>
@@ -3321,32 +3373,6 @@
             </a:pPr>
             <a:r>
               <a:t>Coarse (16k)</a:t>
-            </a:r>
-          </a:p>
-          <a:p>
-            <a:pPr>
-              <a:spcBef>
-                <a:spcPts val="800"/>
-              </a:spcBef>
-              <a:defRPr sz="1100">
-                <a:latin typeface="Calibri"/>
-              </a:defRPr>
-            </a:pPr>
-            <a:r>
-              <a:t>Baseline Tw:</a:t>
-            </a:r>
-          </a:p>
-          <a:p>
-            <a:pPr>
-              <a:defRPr sz="2200" b="1">
-                <a:solidFill>
-                  <a:srgbClr val="FF7A1A"/>
-                </a:solidFill>
-                <a:latin typeface="Cambria"/>
-              </a:defRPr>
-            </a:pPr>
-            <a:r>
-              <a:t>394.9 K</a:t>
             </a:r>
           </a:p>
           <a:p>
@@ -3359,20 +3385,20 @@
               </a:defRPr>
             </a:pPr>
             <a:r>
-              <a:t>Radiation Benefit:</a:t>
-            </a:r>
-          </a:p>
-          <a:p>
-            <a:pPr>
-              <a:defRPr sz="2000" b="1">
-                <a:solidFill>
-                  <a:srgbClr val="23B5D3"/>
+              <a:t>Baseline Tw:</a:t>
+            </a:r>
+          </a:p>
+          <a:p>
+            <a:pPr>
+              <a:defRPr sz="2200" b="1">
+                <a:solidFill>
+                  <a:srgbClr val="FF7A1A"/>
                 </a:solidFill>
                 <a:latin typeface="Cambria"/>
               </a:defRPr>
             </a:pPr>
             <a:r>
-              <a:t>30.5 K drop</a:t>
+              <a:t>394.9 K</a:t>
             </a:r>
           </a:p>
           <a:p>
@@ -3381,6 +3407,32 @@
                 <a:spcPts val="600"/>
               </a:spcBef>
               <a:defRPr sz="1100">
+                <a:latin typeface="Calibri"/>
+              </a:defRPr>
+            </a:pPr>
+            <a:r>
+              <a:t>Radiation Benefit:</a:t>
+            </a:r>
+          </a:p>
+          <a:p>
+            <a:pPr>
+              <a:defRPr sz="1800" b="1">
+                <a:solidFill>
+                  <a:srgbClr val="23B5D3"/>
+                </a:solidFill>
+                <a:latin typeface="Cambria"/>
+              </a:defRPr>
+            </a:pPr>
+            <a:r>
+              <a:t>30.5 K drop</a:t>
+            </a:r>
+          </a:p>
+          <a:p>
+            <a:pPr>
+              <a:spcBef>
+                <a:spcPts val="400"/>
+              </a:spcBef>
+              <a:defRPr sz="1100">
                 <a:solidFill>
                   <a:srgbClr val="7C8DB5"/>
                 </a:solidFill>
@@ -3388,21 +3440,74 @@
               </a:defRPr>
             </a:pPr>
             <a:r>
-              <a:t>Rad Fraction: 43.2%</a:t>
-            </a:r>
-          </a:p>
-        </p:txBody>
-      </p:sp>
-      <p:sp>
-        <p:nvSpPr>
-          <p:cNvPr id="10" name="Rounded Rectangle 9"/>
+              <a:t>Rad Share: 43.2%</a:t>
+            </a:r>
+          </a:p>
+        </p:txBody>
+      </p:sp>
+      <p:sp>
+        <p:nvSpPr>
+          <p:cNvPr id="11" name="Oval 10"/>
           <p:cNvSpPr/>
           <p:nvPr/>
         </p:nvSpPr>
         <p:spPr>
           <a:xfrm>
-            <a:off x="9464040" y="1463040"/>
-            <a:ext cx="2240280" cy="3566160"/>
+            <a:off x="9464040" y="1371600"/>
+            <a:ext cx="548640" cy="548640"/>
+          </a:xfrm>
+          <a:prstGeom prst="ellipse">
+            <a:avLst/>
+          </a:prstGeom>
+          <a:solidFill>
+            <a:srgbClr val="FF7A1A"/>
+          </a:solidFill>
+          <a:ln>
+            <a:noFill/>
+          </a:ln>
+        </p:spPr>
+        <p:style>
+          <a:lnRef idx="1">
+            <a:schemeClr val="accent1"/>
+          </a:lnRef>
+          <a:fillRef idx="3">
+            <a:schemeClr val="accent1"/>
+          </a:fillRef>
+          <a:effectRef idx="2">
+            <a:schemeClr val="accent1"/>
+          </a:effectRef>
+          <a:fontRef idx="minor">
+            <a:schemeClr val="lt1"/>
+          </a:fontRef>
+        </p:style>
+        <p:txBody>
+          <a:bodyPr rtlCol="0" anchor="ctr"/>
+          <a:lstStyle/>
+          <a:p>
+            <a:pPr algn="ctr">
+              <a:defRPr sz="1800" b="1">
+                <a:solidFill>
+                  <a:srgbClr val="FFFFFF"/>
+                </a:solidFill>
+                <a:latin typeface="Cambria"/>
+              </a:defRPr>
+            </a:pPr>
+            <a:r>
+              <a:t>2</a:t>
+            </a:r>
+          </a:p>
+        </p:txBody>
+      </p:sp>
+      <p:sp>
+        <p:nvSpPr>
+          <p:cNvPr id="12" name="Rounded Rectangle 11"/>
+          <p:cNvSpPr/>
+          <p:nvPr/>
+        </p:nvSpPr>
+        <p:spPr>
+          <a:xfrm>
+            <a:off x="9464040" y="2011680"/>
+            <a:ext cx="2148840" cy="2926080"/>
           </a:xfrm>
           <a:prstGeom prst="roundRect">
             <a:avLst/>
@@ -3440,14 +3545,14 @@
       </p:sp>
       <p:sp>
         <p:nvSpPr>
-          <p:cNvPr id="11" name="TextBox 10"/>
+          <p:cNvPr id="13" name="TextBox 12"/>
           <p:cNvSpPr txBox="1"/>
           <p:nvPr/>
         </p:nvSpPr>
         <p:spPr>
           <a:xfrm>
-            <a:off x="9601200" y="1645920"/>
-            <a:ext cx="1965960" cy="3200400"/>
+            <a:off x="9601200" y="2103120"/>
+            <a:ext cx="1874519" cy="2743200"/>
           </a:xfrm>
           <a:prstGeom prst="rect">
             <a:avLst/>
@@ -3455,13 +3560,13 @@
           <a:noFill/>
         </p:spPr>
         <p:txBody>
-          <a:bodyPr wrap="square" lIns="0" tIns="0" rIns="0" bIns="0">
+          <a:bodyPr wrap="square" lIns="0" tIns="0">
             <a:spAutoFit/>
           </a:bodyPr>
           <a:lstStyle/>
           <a:p>
             <a:pPr>
-              <a:defRPr sz="1800" b="1">
+              <a:defRPr sz="1700" b="1">
                 <a:solidFill>
                   <a:srgbClr val="0B1426"/>
                 </a:solidFill>
@@ -3470,32 +3575,6 @@
             </a:pPr>
             <a:r>
               <a:t>Fine (64k)</a:t>
-            </a:r>
-          </a:p>
-          <a:p>
-            <a:pPr>
-              <a:spcBef>
-                <a:spcPts val="800"/>
-              </a:spcBef>
-              <a:defRPr sz="1100">
-                <a:latin typeface="Calibri"/>
-              </a:defRPr>
-            </a:pPr>
-            <a:r>
-              <a:t>Baseline Tw:</a:t>
-            </a:r>
-          </a:p>
-          <a:p>
-            <a:pPr>
-              <a:defRPr sz="2200" b="1">
-                <a:solidFill>
-                  <a:srgbClr val="FF7A1A"/>
-                </a:solidFill>
-                <a:latin typeface="Cambria"/>
-              </a:defRPr>
-            </a:pPr>
-            <a:r>
-              <a:t>343.7 K</a:t>
             </a:r>
           </a:p>
           <a:p>
@@ -3508,20 +3587,20 @@
               </a:defRPr>
             </a:pPr>
             <a:r>
-              <a:t>Radiation Benefit:</a:t>
-            </a:r>
-          </a:p>
-          <a:p>
-            <a:pPr>
-              <a:defRPr sz="2000" b="1">
-                <a:solidFill>
-                  <a:srgbClr val="23B5D3"/>
+              <a:t>Baseline Tw:</a:t>
+            </a:r>
+          </a:p>
+          <a:p>
+            <a:pPr>
+              <a:defRPr sz="2200" b="1">
+                <a:solidFill>
+                  <a:srgbClr val="FF7A1A"/>
                 </a:solidFill>
                 <a:latin typeface="Cambria"/>
               </a:defRPr>
             </a:pPr>
             <a:r>
-              <a:t>6.98 K drop</a:t>
+              <a:t>343.7 K</a:t>
             </a:r>
           </a:p>
           <a:p>
@@ -3530,6 +3609,32 @@
                 <a:spcPts val="600"/>
               </a:spcBef>
               <a:defRPr sz="1100">
+                <a:latin typeface="Calibri"/>
+              </a:defRPr>
+            </a:pPr>
+            <a:r>
+              <a:t>Radiation Benefit:</a:t>
+            </a:r>
+          </a:p>
+          <a:p>
+            <a:pPr>
+              <a:defRPr sz="1800" b="1">
+                <a:solidFill>
+                  <a:srgbClr val="23B5D3"/>
+                </a:solidFill>
+                <a:latin typeface="Cambria"/>
+              </a:defRPr>
+            </a:pPr>
+            <a:r>
+              <a:t>6.98 K drop</a:t>
+            </a:r>
+          </a:p>
+          <a:p>
+            <a:pPr>
+              <a:spcBef>
+                <a:spcPts val="400"/>
+              </a:spcBef>
+              <a:defRPr sz="1100">
                 <a:solidFill>
                   <a:srgbClr val="7C8DB5"/>
                 </a:solidFill>
@@ -3537,21 +3642,21 @@
               </a:defRPr>
             </a:pPr>
             <a:r>
-              <a:t>Rad Fraction: 21.6%</a:t>
-            </a:r>
-          </a:p>
-        </p:txBody>
-      </p:sp>
-      <p:sp>
-        <p:nvSpPr>
-          <p:cNvPr id="12" name="Rounded Rectangle 11"/>
+              <a:t>Rad Share: 21.6%</a:t>
+            </a:r>
+          </a:p>
+        </p:txBody>
+      </p:sp>
+      <p:sp>
+        <p:nvSpPr>
+          <p:cNvPr id="14" name="Rounded Rectangle 13"/>
           <p:cNvSpPr/>
           <p:nvPr/>
         </p:nvSpPr>
         <p:spPr>
           <a:xfrm>
-            <a:off x="7040880" y="5212080"/>
-            <a:ext cx="4663440" cy="914400"/>
+            <a:off x="7132320" y="5120640"/>
+            <a:ext cx="4480560" cy="1005840"/>
           </a:xfrm>
           <a:prstGeom prst="roundRect">
             <a:avLst/>
@@ -3589,14 +3694,14 @@
       </p:sp>
       <p:sp>
         <p:nvSpPr>
-          <p:cNvPr id="13" name="TextBox 12"/>
+          <p:cNvPr id="15" name="TextBox 14"/>
           <p:cNvSpPr txBox="1"/>
           <p:nvPr/>
         </p:nvSpPr>
         <p:spPr>
           <a:xfrm>
-            <a:off x="7178040" y="5285232"/>
-            <a:ext cx="4389120" cy="777240"/>
+            <a:off x="7269480" y="5193792"/>
+            <a:ext cx="4206240" cy="822960"/>
           </a:xfrm>
           <a:prstGeom prst="rect">
             <a:avLst/>
@@ -3604,7 +3709,7 @@
           <a:noFill/>
         </p:spPr>
         <p:txBody>
-          <a:bodyPr wrap="square" lIns="0" tIns="0" rIns="0" bIns="0">
+          <a:bodyPr wrap="square" lIns="0" tIns="0">
             <a:spAutoFit/>
           </a:bodyPr>
           <a:lstStyle/>
@@ -3631,7 +3736,7 @@
               </a:defRPr>
             </a:pPr>
             <a:r>
-              <a:t>A 51.2 K baseline shift indicates substantial mesh sensitivity.</a:t>
+              <a:t>A 51.2 K baseline shift indicates substantial mesh sensitivity requiring a 3rd Richardson grid.</a:t>
             </a:r>
           </a:p>
         </p:txBody>
@@ -3702,7 +3807,7 @@
           <a:lstStyle/>
           <a:p>
             <a:pPr>
-              <a:defRPr sz="3400" b="1">
+              <a:defRPr sz="3200" b="1">
                 <a:solidFill>
                   <a:srgbClr val="0B1426"/>
                 </a:solidFill>
@@ -3723,7 +3828,7 @@
         </p:nvSpPr>
         <p:spPr>
           <a:xfrm>
-            <a:off x="11155680" y="6400800"/>
+            <a:off x="11064240" y="6400800"/>
             <a:ext cx="548640" cy="274320"/>
           </a:xfrm>
           <a:prstGeom prst="rect">
@@ -3738,7 +3843,7 @@
           <a:lstStyle/>
           <a:p>
             <a:pPr algn="r">
-              <a:defRPr sz="1200">
+              <a:defRPr sz="1100">
                 <a:solidFill>
                   <a:srgbClr val="7C8DB5"/>
                 </a:solidFill>
@@ -3759,8 +3864,8 @@
         </p:nvSpPr>
         <p:spPr>
           <a:xfrm>
-            <a:off x="548640" y="1463040"/>
-            <a:ext cx="6400800" cy="4663440"/>
+            <a:off x="548640" y="1371600"/>
+            <a:ext cx="6400800" cy="4754880"/>
           </a:xfrm>
           <a:prstGeom prst="roundRect">
             <a:avLst/>
@@ -3812,7 +3917,7 @@
         </p:blipFill>
         <p:spPr>
           <a:xfrm>
-            <a:off x="731520" y="2248136"/>
+            <a:off x="731520" y="2202416"/>
             <a:ext cx="6035040" cy="2773207"/>
           </a:xfrm>
           <a:prstGeom prst="rect">
@@ -3858,14 +3963,134 @@
       </p:sp>
       <p:sp>
         <p:nvSpPr>
-          <p:cNvPr id="8" name="Rounded Rectangle 7"/>
+          <p:cNvPr id="8" name="TextBox 7"/>
+          <p:cNvSpPr txBox="1"/>
+          <p:nvPr/>
+        </p:nvSpPr>
+        <p:spPr>
+          <a:xfrm>
+            <a:off x="7223760" y="1371600"/>
+            <a:ext cx="4389120" cy="640080"/>
+          </a:xfrm>
+          <a:prstGeom prst="rect">
+            <a:avLst/>
+          </a:prstGeom>
+          <a:noFill/>
+        </p:spPr>
+        <p:txBody>
+          <a:bodyPr wrap="none" lIns="0" tIns="0">
+            <a:spAutoFit/>
+          </a:bodyPr>
+          <a:lstStyle/>
+          <a:p>
+            <a:pPr>
+              <a:defRPr sz="2200" b="1">
+                <a:solidFill>
+                  <a:srgbClr val="0B1426"/>
+                </a:solidFill>
+                <a:latin typeface="Cambria"/>
+              </a:defRPr>
+            </a:pPr>
+            <a:r>
+              <a:t>Literature Trend Comparison</a:t>
+            </a:r>
+          </a:p>
+          <a:p>
+            <a:pPr>
+              <a:defRPr sz="1200">
+                <a:solidFill>
+                  <a:srgbClr val="7C8DB5"/>
+                </a:solidFill>
+                <a:latin typeface="Calibri"/>
+              </a:defRPr>
+            </a:pPr>
+            <a:r>
+              <a:t>(Qualitative only — consistent in trend)</a:t>
+            </a:r>
+          </a:p>
+        </p:txBody>
+      </p:sp>
+      <p:sp>
+        <p:nvSpPr>
+          <p:cNvPr id="9" name="TextBox 8"/>
+          <p:cNvSpPr txBox="1"/>
+          <p:nvPr/>
+        </p:nvSpPr>
+        <p:spPr>
+          <a:xfrm>
+            <a:off x="7223760" y="2103120"/>
+            <a:ext cx="4389120" cy="2011680"/>
+          </a:xfrm>
+          <a:prstGeom prst="rect">
+            <a:avLst/>
+          </a:prstGeom>
+          <a:noFill/>
+        </p:spPr>
+        <p:txBody>
+          <a:bodyPr wrap="square" lIns="0" tIns="0" rIns="0" bIns="0">
+            <a:spAutoFit/>
+          </a:bodyPr>
+          <a:lstStyle/>
+          <a:p>
+            <a:pPr>
+              <a:spcAft>
+                <a:spcPts val="1200"/>
+              </a:spcAft>
+              <a:defRPr sz="1300">
+                <a:solidFill>
+                  <a:srgbClr val="0B1426"/>
+                </a:solidFill>
+                <a:latin typeface="Calibri"/>
+              </a:defRPr>
+            </a:pPr>
+            <a:r>
+              <a:t>•  Reddy et al. (2014) reported consistent wall cooling in radiative boundary layers.</a:t>
+            </a:r>
+          </a:p>
+          <a:p>
+            <a:pPr>
+              <a:spcAft>
+                <a:spcPts val="1200"/>
+              </a:spcAft>
+              <a:defRPr sz="1300">
+                <a:solidFill>
+                  <a:srgbClr val="0B1426"/>
+                </a:solidFill>
+                <a:latin typeface="Calibri"/>
+              </a:defRPr>
+            </a:pPr>
+            <a:r>
+              <a:t>•  Raju et al. (2026) observed comparable non-linear radiative heat flux partitioning.</a:t>
+            </a:r>
+          </a:p>
+          <a:p>
+            <a:pPr>
+              <a:spcAft>
+                <a:spcPts val="1200"/>
+              </a:spcAft>
+              <a:defRPr sz="1300">
+                <a:solidFill>
+                  <a:srgbClr val="0B1426"/>
+                </a:solidFill>
+                <a:latin typeface="Calibri"/>
+              </a:defRPr>
+            </a:pPr>
+            <a:r>
+              <a:t>•  Studies address differing configurations; trends are consistent but not direct validations.</a:t>
+            </a:r>
+          </a:p>
+        </p:txBody>
+      </p:sp>
+      <p:sp>
+        <p:nvSpPr>
+          <p:cNvPr id="10" name="Rounded Rectangle 9"/>
           <p:cNvSpPr/>
           <p:nvPr/>
         </p:nvSpPr>
         <p:spPr>
           <a:xfrm>
-            <a:off x="7223760" y="1463040"/>
-            <a:ext cx="4389120" cy="4663440"/>
+            <a:off x="7223760" y="4206240"/>
+            <a:ext cx="4389120" cy="1920240"/>
           </a:xfrm>
           <a:prstGeom prst="roundRect">
             <a:avLst/>
@@ -3903,144 +4128,14 @@
       </p:sp>
       <p:sp>
         <p:nvSpPr>
-          <p:cNvPr id="9" name="TextBox 8"/>
-          <p:cNvSpPr txBox="1"/>
-          <p:nvPr/>
-        </p:nvSpPr>
-        <p:spPr>
-          <a:xfrm>
-            <a:off x="7498079" y="1737360"/>
-            <a:ext cx="3840480" cy="2103120"/>
-          </a:xfrm>
-          <a:prstGeom prst="rect">
-            <a:avLst/>
-          </a:prstGeom>
-          <a:noFill/>
-        </p:spPr>
-        <p:txBody>
-          <a:bodyPr wrap="square" lIns="0" tIns="0" rIns="0" bIns="0">
-            <a:spAutoFit/>
-          </a:bodyPr>
-          <a:lstStyle/>
-          <a:p>
-            <a:pPr>
-              <a:spcAft>
-                <a:spcPts val="1000"/>
-              </a:spcAft>
-              <a:defRPr sz="1300" b="1">
-                <a:solidFill>
-                  <a:srgbClr val="0B1426"/>
-                </a:solidFill>
-                <a:latin typeface="Calibri"/>
-              </a:defRPr>
-            </a:pPr>
-            <a:r>
-              <a:t>•  Reddy et al. (2014) reported consistent wall cooling in radiative boundary layers.</a:t>
-            </a:r>
-          </a:p>
-          <a:p>
-            <a:pPr>
-              <a:spcAft>
-                <a:spcPts val="1000"/>
-              </a:spcAft>
-              <a:defRPr sz="1200">
-                <a:solidFill>
-                  <a:srgbClr val="7C8DB5"/>
-                </a:solidFill>
-                <a:latin typeface="Calibri"/>
-              </a:defRPr>
-            </a:pPr>
-            <a:r>
-              <a:t>(Qualitative only — consistent in trend)</a:t>
-            </a:r>
-          </a:p>
-          <a:p>
-            <a:pPr>
-              <a:spcAft>
-                <a:spcPts val="1000"/>
-              </a:spcAft>
-              <a:defRPr sz="1300">
-                <a:solidFill>
-                  <a:srgbClr val="0B1426"/>
-                </a:solidFill>
-                <a:latin typeface="Calibri"/>
-              </a:defRPr>
-            </a:pPr>
-            <a:r>
-              <a:t>•  Raju et al. (2026) observed comparable non-linear radiative heat flux partitioning.</a:t>
-            </a:r>
-          </a:p>
-          <a:p>
-            <a:pPr>
-              <a:spcAft>
-                <a:spcPts val="1000"/>
-              </a:spcAft>
-              <a:defRPr sz="1300">
-                <a:solidFill>
-                  <a:srgbClr val="0B1426"/>
-                </a:solidFill>
-                <a:latin typeface="Calibri"/>
-              </a:defRPr>
-            </a:pPr>
-            <a:r>
-              <a:t>•  Studies address differing configurations; trends are consistent but not direct validations.</a:t>
-            </a:r>
-          </a:p>
-        </p:txBody>
-      </p:sp>
-      <p:sp>
-        <p:nvSpPr>
-          <p:cNvPr id="10" name="Rounded Rectangle 9"/>
-          <p:cNvSpPr/>
-          <p:nvPr/>
-        </p:nvSpPr>
-        <p:spPr>
-          <a:xfrm>
-            <a:off x="7406640" y="4114800"/>
-            <a:ext cx="4023360" cy="1828800"/>
-          </a:xfrm>
-          <a:prstGeom prst="roundRect">
-            <a:avLst/>
-          </a:prstGeom>
-          <a:solidFill>
-            <a:srgbClr val="EEF2F7"/>
-          </a:solidFill>
-          <a:ln>
-            <a:noFill/>
-          </a:ln>
-        </p:spPr>
-        <p:style>
-          <a:lnRef idx="1">
-            <a:schemeClr val="accent1"/>
-          </a:lnRef>
-          <a:fillRef idx="3">
-            <a:schemeClr val="accent1"/>
-          </a:fillRef>
-          <a:effectRef idx="2">
-            <a:schemeClr val="accent1"/>
-          </a:effectRef>
-          <a:fontRef idx="minor">
-            <a:schemeClr val="lt1"/>
-          </a:fontRef>
-        </p:style>
-        <p:txBody>
-          <a:bodyPr rtlCol="0" anchor="ctr"/>
-          <a:lstStyle/>
-          <a:p>
-            <a:pPr algn="ctr"/>
-          </a:p>
-        </p:txBody>
-      </p:sp>
-      <p:sp>
-        <p:nvSpPr>
           <p:cNvPr id="11" name="TextBox 10"/>
           <p:cNvSpPr txBox="1"/>
           <p:nvPr/>
         </p:nvSpPr>
         <p:spPr>
           <a:xfrm>
-            <a:off x="7543800" y="4206240"/>
-            <a:ext cx="3749039" cy="1645920"/>
+            <a:off x="7406640" y="4297680"/>
+            <a:ext cx="4023360" cy="1737360"/>
           </a:xfrm>
           <a:prstGeom prst="rect">
             <a:avLst/>
@@ -4048,7 +4143,7 @@
           <a:noFill/>
         </p:spPr>
         <p:txBody>
-          <a:bodyPr wrap="square" lIns="0" tIns="0" rIns="0" bIns="0">
+          <a:bodyPr wrap="square" lIns="0" tIns="0">
             <a:spAutoFit/>
           </a:bodyPr>
           <a:lstStyle/>
@@ -4057,11 +4152,11 @@
               <a:spcAft>
                 <a:spcPts val="400"/>
               </a:spcAft>
-              <a:defRPr sz="1200" b="1">
+              <a:defRPr sz="1300" b="1">
                 <a:solidFill>
                   <a:srgbClr val="0B1426"/>
                 </a:solidFill>
-                <a:latin typeface="Calibri"/>
+                <a:latin typeface="Cambria"/>
               </a:defRPr>
             </a:pPr>
             <a:r>
@@ -4096,7 +4191,7 @@
           </a:p>
           <a:p>
             <a:pPr>
-              <a:defRPr sz="1100">
+              <a:defRPr sz="1100" b="1">
                 <a:solidFill>
                   <a:srgbClr val="FF7A1A"/>
                 </a:solidFill>
@@ -4175,7 +4270,7 @@
           <a:lstStyle/>
           <a:p>
             <a:pPr>
-              <a:defRPr sz="3400" b="1">
+              <a:defRPr sz="3200" b="1">
                 <a:solidFill>
                   <a:srgbClr val="0B1426"/>
                 </a:solidFill>
@@ -4196,7 +4291,7 @@
         </p:nvSpPr>
         <p:spPr>
           <a:xfrm>
-            <a:off x="11155680" y="6400800"/>
+            <a:off x="11064240" y="6400800"/>
             <a:ext cx="548640" cy="274320"/>
           </a:xfrm>
           <a:prstGeom prst="rect">
@@ -4211,7 +4306,7 @@
           <a:lstStyle/>
           <a:p>
             <a:pPr algn="r">
-              <a:defRPr sz="1200">
+              <a:defRPr sz="1100">
                 <a:solidFill>
                   <a:srgbClr val="7C8DB5"/>
                 </a:solidFill>
@@ -4232,8 +4327,8 @@
         </p:nvSpPr>
         <p:spPr>
           <a:xfrm>
-            <a:off x="548640" y="1463040"/>
-            <a:ext cx="5394960" cy="4663440"/>
+            <a:off x="548640" y="1371600"/>
+            <a:ext cx="5394960" cy="4754880"/>
           </a:xfrm>
           <a:prstGeom prst="roundRect">
             <a:avLst/>
@@ -4277,8 +4372,8 @@
         </p:nvSpPr>
         <p:spPr>
           <a:xfrm>
-            <a:off x="822960" y="1737360"/>
-            <a:ext cx="4846320" cy="4114800"/>
+            <a:off x="822960" y="1645920"/>
+            <a:ext cx="4846320" cy="4206240"/>
           </a:xfrm>
           <a:prstGeom prst="rect">
             <a:avLst/>
@@ -4293,23 +4388,23 @@
           <a:p>
             <a:pPr>
               <a:spcAft>
-                <a:spcPts val="1000"/>
+                <a:spcPts val="1600"/>
               </a:spcAft>
-              <a:defRPr sz="1500" b="1">
+              <a:defRPr sz="2400" b="1">
                 <a:solidFill>
                   <a:srgbClr val="0B1426"/>
                 </a:solidFill>
-                <a:latin typeface="Calibri"/>
-              </a:defRPr>
-            </a:pPr>
-            <a:r>
-              <a:t>•  Two-grid study without third refinement precludes formal ASME GCI calculation.</a:t>
+                <a:latin typeface="Cambria"/>
+              </a:defRPr>
+            </a:pPr>
+            <a:r>
+              <a:t>Known Limitations</a:t>
             </a:r>
           </a:p>
           <a:p>
             <a:pPr>
               <a:spcAft>
-                <a:spcPts val="1000"/>
+                <a:spcPts val="1200"/>
               </a:spcAft>
               <a:defRPr sz="1500">
                 <a:solidFill>
@@ -4319,13 +4414,13 @@
               </a:defRPr>
             </a:pPr>
             <a:r>
-              <a:t>•  Constant fluid properties neglect air density and thermal conductivity temperature variation.</a:t>
+              <a:t>•  Two-grid study without third refinement precludes formal ASME GCI calculation.</a:t>
             </a:r>
           </a:p>
           <a:p>
             <a:pPr>
               <a:spcAft>
-                <a:spcPts val="1000"/>
+                <a:spcPts val="1200"/>
               </a:spcAft>
               <a:defRPr sz="1500">
                 <a:solidFill>
@@ -4335,13 +4430,29 @@
               </a:defRPr>
             </a:pPr>
             <a:r>
+              <a:t>•  Constant fluid properties neglect air density and thermal conductivity temperature variation.</a:t>
+            </a:r>
+          </a:p>
+          <a:p>
+            <a:pPr>
+              <a:spcAft>
+                <a:spcPts val="1200"/>
+              </a:spcAft>
+              <a:defRPr sz="1500">
+                <a:solidFill>
+                  <a:srgbClr val="0B1426"/>
+                </a:solidFill>
+                <a:latin typeface="Calibri"/>
+              </a:defRPr>
+            </a:pPr>
+            <a:r>
               <a:t>•  Optically transparent fluid assumption omits potential gas-phase absorption and emission.</a:t>
             </a:r>
           </a:p>
           <a:p>
             <a:pPr>
               <a:spcBef>
-                <a:spcPts val="2400"/>
+                <a:spcPts val="2000"/>
               </a:spcBef>
               <a:defRPr sz="1200">
                 <a:solidFill>
@@ -4364,8 +4475,8 @@
         </p:nvSpPr>
         <p:spPr>
           <a:xfrm>
-            <a:off x="6217920" y="1463040"/>
-            <a:ext cx="5394960" cy="4663440"/>
+            <a:off x="6217920" y="1371600"/>
+            <a:ext cx="5394960" cy="4754880"/>
           </a:xfrm>
           <a:prstGeom prst="roundRect">
             <a:avLst/>
@@ -4409,8 +4520,8 @@
         </p:nvSpPr>
         <p:spPr>
           <a:xfrm>
-            <a:off x="6492240" y="1737360"/>
-            <a:ext cx="4846320" cy="548640"/>
+            <a:off x="6492240" y="1645920"/>
+            <a:ext cx="4846320" cy="457200"/>
           </a:xfrm>
           <a:prstGeom prst="rect">
             <a:avLst/>
@@ -4418,7 +4529,7 @@
           <a:noFill/>
         </p:spPr>
         <p:txBody>
-          <a:bodyPr wrap="none" lIns="0" tIns="0" rIns="0" bIns="0">
+          <a:bodyPr wrap="none" lIns="0" tIns="0">
             <a:spAutoFit/>
           </a:bodyPr>
           <a:lstStyle/>
@@ -4445,7 +4556,7 @@
         </p:nvSpPr>
         <p:spPr>
           <a:xfrm>
-            <a:off x="6492240" y="2377440"/>
+            <a:off x="6492240" y="2240280"/>
             <a:ext cx="4846320" cy="1051560"/>
           </a:xfrm>
           <a:prstGeom prst="roundRect">
@@ -4488,7 +4599,7 @@
         </p:nvSpPr>
         <p:spPr>
           <a:xfrm>
-            <a:off x="6675120" y="2423160"/>
+            <a:off x="6675120" y="2286000"/>
             <a:ext cx="4480560" cy="960120"/>
           </a:xfrm>
           <a:prstGeom prst="rect">
@@ -4537,7 +4648,7 @@
         </p:nvSpPr>
         <p:spPr>
           <a:xfrm>
-            <a:off x="6492240" y="3566160"/>
+            <a:off x="6492240" y="3429000"/>
             <a:ext cx="4846320" cy="1051560"/>
           </a:xfrm>
           <a:prstGeom prst="roundRect">
@@ -4580,7 +4691,7 @@
         </p:nvSpPr>
         <p:spPr>
           <a:xfrm>
-            <a:off x="6675120" y="3611880"/>
+            <a:off x="6675120" y="3474720"/>
             <a:ext cx="4480560" cy="960120"/>
           </a:xfrm>
           <a:prstGeom prst="rect">
@@ -4629,7 +4740,7 @@
         </p:nvSpPr>
         <p:spPr>
           <a:xfrm>
-            <a:off x="6492240" y="4754880"/>
+            <a:off x="6492240" y="4617720"/>
             <a:ext cx="4846320" cy="1051560"/>
           </a:xfrm>
           <a:prstGeom prst="roundRect">
@@ -4672,7 +4783,7 @@
         </p:nvSpPr>
         <p:spPr>
           <a:xfrm>
-            <a:off x="6675120" y="4800600"/>
+            <a:off x="6675120" y="4663440"/>
             <a:ext cx="4480560" cy="960120"/>
           </a:xfrm>
           <a:prstGeom prst="rect">
@@ -4781,7 +4892,7 @@
         </p:nvSpPr>
         <p:spPr>
           <a:xfrm>
-            <a:off x="731520" y="457200"/>
+            <a:off x="731520" y="365760"/>
             <a:ext cx="10698480" cy="365760"/>
           </a:xfrm>
           <a:prstGeom prst="rect">
@@ -4804,7 +4915,7 @@
               </a:defRPr>
             </a:pPr>
             <a:r>
-              <a:t>SUMMARY &amp; NEXT STEPS  |  BOUNDARY LAYER RESEARCH</a:t>
+              <a:t>CONCLUSION &amp; ACADEMIC DEFENSE  |  BOUNDARY LAYER THEORY</a:t>
             </a:r>
           </a:p>
         </p:txBody>
@@ -4817,8 +4928,8 @@
         </p:nvSpPr>
         <p:spPr>
           <a:xfrm>
-            <a:off x="731520" y="822960"/>
-            <a:ext cx="10698480" cy="1005840"/>
+            <a:off x="731520" y="731520"/>
+            <a:ext cx="10698480" cy="914400"/>
           </a:xfrm>
           <a:prstGeom prst="rect">
             <a:avLst/>
@@ -4832,7 +4943,7 @@
           <a:lstStyle/>
           <a:p>
             <a:pPr>
-              <a:defRPr sz="3200" b="1">
+              <a:defRPr sz="3000" b="1">
                 <a:solidFill>
                   <a:srgbClr val="FFFFFF"/>
                 </a:solidFill>
@@ -4853,8 +4964,8 @@
         </p:nvSpPr>
         <p:spPr>
           <a:xfrm>
-            <a:off x="731520" y="1828800"/>
-            <a:ext cx="10698480" cy="548640"/>
+            <a:off x="731520" y="1691640"/>
+            <a:ext cx="10698480" cy="457200"/>
           </a:xfrm>
           <a:prstGeom prst="rect">
             <a:avLst/>
@@ -4868,7 +4979,7 @@
           <a:lstStyle/>
           <a:p>
             <a:pPr>
-              <a:defRPr sz="1700">
+              <a:defRPr sz="1500">
                 <a:solidFill>
                   <a:srgbClr val="EEF2F7"/>
                 </a:solidFill>
@@ -4876,7 +4987,7 @@
               </a:defRPr>
             </a:pPr>
             <a:r>
-              <a:t>Open for peer review, three-grid GCI collaboration, and experimental validation datasets.</a:t>
+              <a:t>Open for academic review, multi-grid GCI collaboration, and wind-tunnel experimental datasets.</a:t>
             </a:r>
           </a:p>
         </p:txBody>
@@ -4889,8 +5000,8 @@
         </p:nvSpPr>
         <p:spPr>
           <a:xfrm>
-            <a:off x="731520" y="2560320"/>
-            <a:ext cx="10698480" cy="3291840"/>
+            <a:off x="731520" y="2331720"/>
+            <a:ext cx="5120640" cy="3657600"/>
           </a:xfrm>
           <a:prstGeom prst="roundRect">
             <a:avLst/>
@@ -4932,8 +5043,183 @@
         </p:nvSpPr>
         <p:spPr>
           <a:xfrm>
-            <a:off x="914400" y="2697480"/>
-            <a:ext cx="10332720" cy="3017520"/>
+            <a:off x="1005840" y="2514600"/>
+            <a:ext cx="4572000" cy="3291840"/>
+          </a:xfrm>
+          <a:prstGeom prst="rect">
+            <a:avLst/>
+          </a:prstGeom>
+          <a:noFill/>
+        </p:spPr>
+        <p:txBody>
+          <a:bodyPr wrap="square" lIns="0" tIns="0">
+            <a:spAutoFit/>
+          </a:bodyPr>
+          <a:lstStyle/>
+          <a:p>
+            <a:pPr>
+              <a:spcAft>
+                <a:spcPts val="1000"/>
+              </a:spcAft>
+              <a:defRPr sz="1600" b="1">
+                <a:solidFill>
+                  <a:srgbClr val="FF7A1A"/>
+                </a:solidFill>
+                <a:latin typeface="Cambria"/>
+              </a:defRPr>
+            </a:pPr>
+            <a:r>
+              <a:t>Presenter &amp; Course Information</a:t>
+            </a:r>
+          </a:p>
+          <a:p>
+            <a:pPr>
+              <a:spcAft>
+                <a:spcPts val="400"/>
+              </a:spcAft>
+              <a:defRPr sz="2400" b="1">
+                <a:solidFill>
+                  <a:srgbClr val="FFFFFF"/>
+                </a:solidFill>
+                <a:latin typeface="Cambria"/>
+              </a:defRPr>
+            </a:pPr>
+            <a:r>
+              <a:t>Jersam Lithin</a:t>
+            </a:r>
+          </a:p>
+          <a:p>
+            <a:pPr>
+              <a:spcAft>
+                <a:spcPts val="200"/>
+              </a:spcAft>
+              <a:defRPr sz="1300">
+                <a:solidFill>
+                  <a:srgbClr val="EEF2F7"/>
+                </a:solidFill>
+                <a:latin typeface="Calibri"/>
+              </a:defRPr>
+            </a:pPr>
+            <a:r>
+              <a:t>3rd Year B.Tech, Aerospace Engineering</a:t>
+            </a:r>
+          </a:p>
+          <a:p>
+            <a:pPr>
+              <a:spcAft>
+                <a:spcPts val="200"/>
+              </a:spcAft>
+              <a:defRPr sz="1300" b="1">
+                <a:solidFill>
+                  <a:srgbClr val="23B5D3"/>
+                </a:solidFill>
+                <a:latin typeface="Calibri"/>
+              </a:defRPr>
+            </a:pPr>
+            <a:r>
+              <a:t>Karunya Institute of Technology and Sciences</a:t>
+            </a:r>
+          </a:p>
+          <a:p>
+            <a:pPr>
+              <a:spcAft>
+                <a:spcPts val="800"/>
+              </a:spcAft>
+              <a:defRPr sz="1200">
+                <a:solidFill>
+                  <a:srgbClr val="7C8DB5"/>
+                </a:solidFill>
+                <a:latin typeface="Calibri"/>
+              </a:defRPr>
+            </a:pPr>
+            <a:r>
+              <a:t>Department of Aerospace Engineering</a:t>
+            </a:r>
+          </a:p>
+          <a:p>
+            <a:pPr>
+              <a:spcAft>
+                <a:spcPts val="400"/>
+              </a:spcAft>
+              <a:defRPr sz="1300" b="1">
+                <a:solidFill>
+                  <a:srgbClr val="FFC24B"/>
+                </a:solidFill>
+                <a:latin typeface="Calibri"/>
+              </a:defRPr>
+            </a:pPr>
+            <a:r>
+              <a:t>Subject Presentation: Boundary Layer Theory</a:t>
+            </a:r>
+          </a:p>
+          <a:p>
+            <a:pPr>
+              <a:defRPr sz="1100">
+                <a:solidFill>
+                  <a:srgbClr val="7C8DB5"/>
+                </a:solidFill>
+                <a:latin typeface="Calibri"/>
+              </a:defRPr>
+            </a:pPr>
+            <a:r>
+              <a:t>OpenFOAM Cases &amp; Code: github.com/Jersam-l/flat-plate-with-radiation-cfd</a:t>
+            </a:r>
+          </a:p>
+        </p:txBody>
+      </p:sp>
+      <p:sp>
+        <p:nvSpPr>
+          <p:cNvPr id="9" name="Rounded Rectangle 8"/>
+          <p:cNvSpPr/>
+          <p:nvPr/>
+        </p:nvSpPr>
+        <p:spPr>
+          <a:xfrm>
+            <a:off x="6126480" y="2331720"/>
+            <a:ext cx="5303520" cy="3657600"/>
+          </a:xfrm>
+          <a:prstGeom prst="roundRect">
+            <a:avLst/>
+          </a:prstGeom>
+          <a:solidFill>
+            <a:srgbClr val="16264A"/>
+          </a:solidFill>
+          <a:ln>
+            <a:noFill/>
+          </a:ln>
+        </p:spPr>
+        <p:style>
+          <a:lnRef idx="1">
+            <a:schemeClr val="accent1"/>
+          </a:lnRef>
+          <a:fillRef idx="3">
+            <a:schemeClr val="accent1"/>
+          </a:fillRef>
+          <a:effectRef idx="2">
+            <a:schemeClr val="accent1"/>
+          </a:effectRef>
+          <a:fontRef idx="minor">
+            <a:schemeClr val="lt1"/>
+          </a:fontRef>
+        </p:style>
+        <p:txBody>
+          <a:bodyPr rtlCol="0" anchor="ctr"/>
+          <a:lstStyle/>
+          <a:p>
+            <a:pPr algn="ctr"/>
+          </a:p>
+        </p:txBody>
+      </p:sp>
+      <p:sp>
+        <p:nvSpPr>
+          <p:cNvPr id="10" name="TextBox 9"/>
+          <p:cNvSpPr txBox="1"/>
+          <p:nvPr/>
+        </p:nvSpPr>
+        <p:spPr>
+          <a:xfrm>
+            <a:off x="6309360" y="2514600"/>
+            <a:ext cx="4937760" cy="3291840"/>
           </a:xfrm>
           <a:prstGeom prst="rect">
             <a:avLst/>
@@ -4948,9 +5234,9 @@
           <a:p>
             <a:pPr>
               <a:spcAft>
-                <a:spcPts val="600"/>
+                <a:spcPts val="800"/>
               </a:spcAft>
-              <a:defRPr sz="1500" b="1">
+              <a:defRPr sz="1600" b="1">
                 <a:solidFill>
                   <a:srgbClr val="FFC24B"/>
                 </a:solidFill>
@@ -4964,9 +5250,9 @@
           <a:p>
             <a:pPr>
               <a:spcAft>
-                <a:spcPts val="300"/>
+                <a:spcPts val="400"/>
               </a:spcAft>
-              <a:defRPr sz="1100">
+              <a:defRPr sz="1000">
                 <a:solidFill>
                   <a:srgbClr val="EEF2F7"/>
                 </a:solidFill>
@@ -4980,9 +5266,9 @@
           <a:p>
             <a:pPr>
               <a:spcAft>
-                <a:spcPts val="300"/>
+                <a:spcPts val="400"/>
               </a:spcAft>
-              <a:defRPr sz="1100">
+              <a:defRPr sz="1000">
                 <a:solidFill>
                   <a:srgbClr val="EEF2F7"/>
                 </a:solidFill>
@@ -4996,9 +5282,9 @@
           <a:p>
             <a:pPr>
               <a:spcAft>
-                <a:spcPts val="300"/>
+                <a:spcPts val="400"/>
               </a:spcAft>
-              <a:defRPr sz="1100">
+              <a:defRPr sz="1000">
                 <a:solidFill>
                   <a:srgbClr val="EEF2F7"/>
                 </a:solidFill>
@@ -5012,9 +5298,9 @@
           <a:p>
             <a:pPr>
               <a:spcAft>
-                <a:spcPts val="300"/>
+                <a:spcPts val="400"/>
               </a:spcAft>
-              <a:defRPr sz="1100">
+              <a:defRPr sz="1000">
                 <a:solidFill>
                   <a:srgbClr val="EEF2F7"/>
                 </a:solidFill>
@@ -5022,15 +5308,15 @@
               </a:defRPr>
             </a:pPr>
             <a:r>
-              <a:t>4. Reddy, P.B.A. (2014). Radiation effects on MHD boundary layer flow over a stretching surface. J. Appl. Fluid Mech., 7(3):471–479.</a:t>
+              <a:t>4. Reddy, P.B.A. (2014). Radiation effects on MHD boundary layer flow. J. Appl. Fluid Mech., 7(3):471–479.</a:t>
             </a:r>
           </a:p>
           <a:p>
             <a:pPr>
               <a:spcAft>
-                <a:spcPts val="300"/>
+                <a:spcPts val="400"/>
               </a:spcAft>
-              <a:defRPr sz="1100">
+              <a:defRPr sz="1000">
                 <a:solidFill>
                   <a:srgbClr val="EEF2F7"/>
                 </a:solidFill>
@@ -5038,15 +5324,15 @@
               </a:defRPr>
             </a:pPr>
             <a:r>
-              <a:t>5. Raju, C.S.K., et al. (2026). Thermal radiation and heat transfer in boundary layer flows. Phys. Fluids.</a:t>
+              <a:t>5. Raju, C.S.K., et al. (2026). Thermal radiation in boundary layers. Phys. Fluids.</a:t>
             </a:r>
           </a:p>
           <a:p>
             <a:pPr>
               <a:spcAft>
-                <a:spcPts val="300"/>
+                <a:spcPts val="400"/>
               </a:spcAft>
-              <a:defRPr sz="1100">
+              <a:defRPr sz="1000">
                 <a:solidFill>
                   <a:srgbClr val="EEF2F7"/>
                 </a:solidFill>
@@ -5054,20 +5340,20 @@
               </a:defRPr>
             </a:pPr>
             <a:r>
-              <a:t>6. Schlichting, H., &amp; Gersten, K. (2017). Boundary-Layer Theory. 9th ed., Springer-Verlag.</a:t>
-            </a:r>
-          </a:p>
-        </p:txBody>
-      </p:sp>
-      <p:sp>
-        <p:nvSpPr>
-          <p:cNvPr id="9" name="TextBox 8"/>
+              <a:t>6. Schlichting, H., &amp; Gersten, K. (2017). Boundary-Layer Theory. 9th ed., Springer.</a:t>
+            </a:r>
+          </a:p>
+        </p:txBody>
+      </p:sp>
+      <p:sp>
+        <p:nvSpPr>
+          <p:cNvPr id="11" name="TextBox 10"/>
           <p:cNvSpPr txBox="1"/>
           <p:nvPr/>
         </p:nvSpPr>
         <p:spPr>
           <a:xfrm>
-            <a:off x="731520" y="6035040"/>
+            <a:off x="731520" y="6217920"/>
             <a:ext cx="10698480" cy="365760"/>
           </a:xfrm>
           <a:prstGeom prst="rect">
@@ -5082,7 +5368,7 @@
           <a:lstStyle/>
           <a:p>
             <a:pPr>
-              <a:defRPr sz="1300">
+              <a:defRPr sz="1200">
                 <a:solidFill>
                   <a:srgbClr val="7C8DB5"/>
                 </a:solidFill>
@@ -5090,7 +5376,7 @@
               </a:defRPr>
             </a:pPr>
             <a:r>
-              <a:t>github.com/Jersam-l/flat-plate-with-radiation-cfd  |  Jerlin S.  |  Contact: jerlin.research@cfd-lab.org</a:t>
+              <a:t>github.com/Jersam-l/flat-plate-with-radiation-cfd  |  Jersam Lithin  |  Karunya Institute of Technology and Sciences</a:t>
             </a:r>
           </a:p>
         </p:txBody>
@@ -5161,7 +5447,7 @@
           <a:lstStyle/>
           <a:p>
             <a:pPr>
-              <a:defRPr sz="3400" b="1">
+              <a:defRPr sz="3200" b="1">
                 <a:solidFill>
                   <a:srgbClr val="0B1426"/>
                 </a:solidFill>
@@ -5182,7 +5468,7 @@
         </p:nvSpPr>
         <p:spPr>
           <a:xfrm>
-            <a:off x="11155680" y="6400800"/>
+            <a:off x="11064240" y="6400800"/>
             <a:ext cx="548640" cy="274320"/>
           </a:xfrm>
           <a:prstGeom prst="rect">
@@ -5197,7 +5483,7 @@
           <a:lstStyle/>
           <a:p>
             <a:pPr algn="r">
-              <a:defRPr sz="1200">
+              <a:defRPr sz="1100">
                 <a:solidFill>
                   <a:srgbClr val="7C8DB5"/>
                 </a:solidFill>
@@ -5218,8 +5504,8 @@
         </p:nvSpPr>
         <p:spPr>
           <a:xfrm>
-            <a:off x="548640" y="1463040"/>
-            <a:ext cx="6583680" cy="4663440"/>
+            <a:off x="548640" y="1371600"/>
+            <a:ext cx="6583680" cy="4754880"/>
           </a:xfrm>
           <a:prstGeom prst="roundRect">
             <a:avLst/>
@@ -5271,7 +5557,7 @@
         </p:blipFill>
         <p:spPr>
           <a:xfrm>
-            <a:off x="731520" y="1934684"/>
+            <a:off x="731520" y="1888964"/>
             <a:ext cx="6217920" cy="3400111"/>
           </a:xfrm>
           <a:prstGeom prst="rect">
@@ -5317,14 +5603,101 @@
       </p:sp>
       <p:sp>
         <p:nvSpPr>
-          <p:cNvPr id="8" name="Rounded Rectangle 7"/>
+          <p:cNvPr id="8" name="TextBox 7"/>
+          <p:cNvSpPr txBox="1"/>
+          <p:nvPr/>
+        </p:nvSpPr>
+        <p:spPr>
+          <a:xfrm>
+            <a:off x="7498079" y="1463040"/>
+            <a:ext cx="4114800" cy="4663440"/>
+          </a:xfrm>
+          <a:prstGeom prst="rect">
+            <a:avLst/>
+          </a:prstGeom>
+          <a:noFill/>
+        </p:spPr>
+        <p:txBody>
+          <a:bodyPr wrap="square" lIns="0" tIns="0" rIns="0" bIns="0">
+            <a:spAutoFit/>
+          </a:bodyPr>
+          <a:lstStyle/>
+          <a:p>
+            <a:pPr>
+              <a:spcAft>
+                <a:spcPts val="1800"/>
+              </a:spcAft>
+              <a:defRPr sz="2400" b="1">
+                <a:solidFill>
+                  <a:srgbClr val="0B1426"/>
+                </a:solidFill>
+                <a:latin typeface="Cambria"/>
+              </a:defRPr>
+            </a:pPr>
+            <a:r>
+              <a:t>Convective Cooling Decays Downstream</a:t>
+            </a:r>
+          </a:p>
+          <a:p>
+            <a:pPr>
+              <a:spcAft>
+                <a:spcPts val="1200"/>
+              </a:spcAft>
+              <a:defRPr sz="1500">
+                <a:solidFill>
+                  <a:srgbClr val="0B1426"/>
+                </a:solidFill>
+                <a:latin typeface="Calibri"/>
+              </a:defRPr>
+            </a:pPr>
+            <a:r>
+              <a:t>•  Plate wall temperature depends strictly on competing heat rejection pathways.</a:t>
+            </a:r>
+          </a:p>
+          <a:p>
+            <a:pPr>
+              <a:spcAft>
+                <a:spcPts val="1200"/>
+              </a:spcAft>
+              <a:defRPr sz="1500">
+                <a:solidFill>
+                  <a:srgbClr val="0B1426"/>
+                </a:solidFill>
+                <a:latin typeface="Calibri"/>
+              </a:defRPr>
+            </a:pPr>
+            <a:r>
+              <a:t>•  Convective cooling drops downstream as hydrodynamic boundary layers thicken.</a:t>
+            </a:r>
+          </a:p>
+          <a:p>
+            <a:pPr>
+              <a:spcAft>
+                <a:spcPts val="1200"/>
+              </a:spcAft>
+              <a:defRPr sz="1500">
+                <a:solidFill>
+                  <a:srgbClr val="0B1426"/>
+                </a:solidFill>
+                <a:latin typeface="Calibri"/>
+              </a:defRPr>
+            </a:pPr>
+            <a:r>
+              <a:t>•  Standard CFD workflows frequently omit radiation, overpredicting component peak temperatures.</a:t>
+            </a:r>
+          </a:p>
+        </p:txBody>
+      </p:sp>
+      <p:sp>
+        <p:nvSpPr>
+          <p:cNvPr id="9" name="Rounded Rectangle 8"/>
           <p:cNvSpPr/>
           <p:nvPr/>
         </p:nvSpPr>
         <p:spPr>
           <a:xfrm>
-            <a:off x="7406640" y="1463040"/>
-            <a:ext cx="4206240" cy="4663440"/>
+            <a:off x="7498079" y="4754880"/>
+            <a:ext cx="4114800" cy="1097280"/>
           </a:xfrm>
           <a:prstGeom prst="roundRect">
             <a:avLst/>
@@ -5362,14 +5735,14 @@
       </p:sp>
       <p:sp>
         <p:nvSpPr>
-          <p:cNvPr id="9" name="TextBox 8"/>
+          <p:cNvPr id="10" name="TextBox 9"/>
           <p:cNvSpPr txBox="1"/>
           <p:nvPr/>
         </p:nvSpPr>
         <p:spPr>
           <a:xfrm>
-            <a:off x="7680960" y="1737360"/>
-            <a:ext cx="3657600" cy="4114800"/>
+            <a:off x="7680960" y="4846320"/>
+            <a:ext cx="3749039" cy="914400"/>
           </a:xfrm>
           <a:prstGeom prst="rect">
             <a:avLst/>
@@ -5377,16 +5750,26 @@
           <a:noFill/>
         </p:spPr>
         <p:txBody>
-          <a:bodyPr wrap="square" lIns="0" tIns="0" rIns="0" bIns="0">
+          <a:bodyPr wrap="square" lIns="0" tIns="0">
             <a:spAutoFit/>
           </a:bodyPr>
           <a:lstStyle/>
           <a:p>
             <a:pPr>
-              <a:spcAft>
-                <a:spcPts val="1000"/>
-              </a:spcAft>
-              <a:defRPr sz="1500" b="1">
+              <a:defRPr sz="1600" b="1">
+                <a:solidFill>
+                  <a:srgbClr val="FF7A1A"/>
+                </a:solidFill>
+                <a:latin typeface="Cambria"/>
+              </a:defRPr>
+            </a:pPr>
+            <a:r>
+              <a:t>Heater Heat Flux: q″ = 1000 W/m²</a:t>
+            </a:r>
+          </a:p>
+          <a:p>
+            <a:pPr>
+              <a:defRPr sz="1100">
                 <a:solidFill>
                   <a:srgbClr val="0B1426"/>
                 </a:solidFill>
@@ -5394,55 +5777,7 @@
               </a:defRPr>
             </a:pPr>
             <a:r>
-              <a:t>•  Plate wall temperature depends strictly on competing heat rejection pathways.</a:t>
-            </a:r>
-          </a:p>
-          <a:p>
-            <a:pPr>
-              <a:spcAft>
-                <a:spcPts val="1000"/>
-              </a:spcAft>
-              <a:defRPr sz="1500">
-                <a:solidFill>
-                  <a:srgbClr val="0B1426"/>
-                </a:solidFill>
-                <a:latin typeface="Calibri"/>
-              </a:defRPr>
-            </a:pPr>
-            <a:r>
-              <a:t>•  Convective cooling drops downstream as hydrodynamic boundary layers thicken.</a:t>
-            </a:r>
-          </a:p>
-          <a:p>
-            <a:pPr>
-              <a:spcAft>
-                <a:spcPts val="1000"/>
-              </a:spcAft>
-              <a:defRPr sz="1500">
-                <a:solidFill>
-                  <a:srgbClr val="0B1426"/>
-                </a:solidFill>
-                <a:latin typeface="Calibri"/>
-              </a:defRPr>
-            </a:pPr>
-            <a:r>
-              <a:t>•  Standard CFD workflows frequently omit radiation, overpredicting component peak temperatures.</a:t>
-            </a:r>
-          </a:p>
-          <a:p>
-            <a:pPr>
-              <a:spcBef>
-                <a:spcPts val="1800"/>
-              </a:spcBef>
-              <a:defRPr sz="1300" b="1">
-                <a:solidFill>
-                  <a:srgbClr val="FF7A1A"/>
-                </a:solidFill>
-                <a:latin typeface="Calibri"/>
-              </a:defRPr>
-            </a:pPr>
-            <a:r>
-              <a:t>Heater Heat Flux: q″ = 1000 W/m² (uniform)</a:t>
+              <a:t>Uniform electric heating applied over 1.0 m plate with T_ambient = 300 K</a:t>
             </a:r>
           </a:p>
         </p:txBody>
@@ -5513,7 +5848,7 @@
           <a:lstStyle/>
           <a:p>
             <a:pPr>
-              <a:defRPr sz="3400" b="1">
+              <a:defRPr sz="3200" b="1">
                 <a:solidFill>
                   <a:srgbClr val="0B1426"/>
                 </a:solidFill>
@@ -5534,7 +5869,7 @@
         </p:nvSpPr>
         <p:spPr>
           <a:xfrm>
-            <a:off x="11155680" y="6400800"/>
+            <a:off x="11064240" y="6400800"/>
             <a:ext cx="548640" cy="274320"/>
           </a:xfrm>
           <a:prstGeom prst="rect">
@@ -5549,7 +5884,7 @@
           <a:lstStyle/>
           <a:p>
             <a:pPr algn="r">
-              <a:defRPr sz="1200">
+              <a:defRPr sz="1100">
                 <a:solidFill>
                   <a:srgbClr val="7C8DB5"/>
                 </a:solidFill>
@@ -5564,59 +5899,14 @@
       </p:sp>
       <p:sp>
         <p:nvSpPr>
-          <p:cNvPr id="5" name="Rounded Rectangle 4"/>
-          <p:cNvSpPr/>
-          <p:nvPr/>
-        </p:nvSpPr>
-        <p:spPr>
-          <a:xfrm>
-            <a:off x="548640" y="1463040"/>
-            <a:ext cx="6217920" cy="4663440"/>
-          </a:xfrm>
-          <a:prstGeom prst="roundRect">
-            <a:avLst/>
-          </a:prstGeom>
-          <a:solidFill>
-            <a:srgbClr val="FFFFFF"/>
-          </a:solidFill>
-          <a:ln w="12700">
-            <a:solidFill>
-              <a:srgbClr val="DCE2EC"/>
-            </a:solidFill>
-          </a:ln>
-        </p:spPr>
-        <p:style>
-          <a:lnRef idx="1">
-            <a:schemeClr val="accent1"/>
-          </a:lnRef>
-          <a:fillRef idx="3">
-            <a:schemeClr val="accent1"/>
-          </a:fillRef>
-          <a:effectRef idx="2">
-            <a:schemeClr val="accent1"/>
-          </a:effectRef>
-          <a:fontRef idx="minor">
-            <a:schemeClr val="lt1"/>
-          </a:fontRef>
-        </p:style>
-        <p:txBody>
-          <a:bodyPr rtlCol="0" anchor="ctr"/>
-          <a:lstStyle/>
-          <a:p>
-            <a:pPr algn="ctr"/>
-          </a:p>
-        </p:txBody>
-      </p:sp>
-      <p:sp>
-        <p:nvSpPr>
-          <p:cNvPr id="6" name="TextBox 5"/>
+          <p:cNvPr id="5" name="TextBox 4"/>
           <p:cNvSpPr txBox="1"/>
           <p:nvPr/>
         </p:nvSpPr>
         <p:spPr>
           <a:xfrm>
-            <a:off x="822960" y="1691640"/>
-            <a:ext cx="5669280" cy="365760"/>
+            <a:off x="548640" y="1371600"/>
+            <a:ext cx="6217920" cy="365760"/>
           </a:xfrm>
           <a:prstGeom prst="rect">
             <a:avLst/>
@@ -5630,7 +5920,7 @@
           <a:lstStyle/>
           <a:p>
             <a:pPr>
-              <a:defRPr sz="2000" b="1">
+              <a:defRPr sz="2200" b="1">
                 <a:solidFill>
                   <a:srgbClr val="0B1426"/>
                 </a:solidFill>
@@ -5645,15 +5935,15 @@
       </p:sp>
       <p:graphicFrame>
         <p:nvGraphicFramePr>
-          <p:cNvPr id="7" name="Table 6"/>
+          <p:cNvPr id="6" name="Table 5"/>
           <p:cNvGraphicFramePr>
             <a:graphicFrameLocks noGrp="1"/>
           </p:cNvGraphicFramePr>
           <p:nvPr/>
         </p:nvGraphicFramePr>
         <p:xfrm>
-          <a:off x="822960" y="2148840"/>
-          <a:ext cx="5669280" cy="2011680"/>
+          <a:off x="548640" y="1874519"/>
+          <a:ext cx="6217920" cy="2011680"/>
         </p:xfrm>
         <a:graphic>
           <a:graphicData uri="http://schemas.openxmlformats.org/drawingml/2006/table">
@@ -5662,11 +5952,11 @@
                 <a:tableStyleId>{5C22544A-7EE6-4342-B048-85BDC9FD1C3A}</a:tableStyleId>
               </a:tblPr>
               <a:tblGrid>
-                <a:gridCol w="1920240"/>
+                <a:gridCol w="2103120"/>
+                <a:gridCol w="1005840"/>
                 <a:gridCol w="914400"/>
-                <a:gridCol w="822960"/>
                 <a:gridCol w="1097280"/>
-                <a:gridCol w="914400"/>
+                <a:gridCol w="1097280"/>
               </a:tblGrid>
               <a:tr h="402336">
                 <a:tc>
@@ -5811,7 +6101,7 @@
                   </a:txBody>
                   <a:tcPr>
                     <a:solidFill>
-                      <a:srgbClr val="EEF2F7"/>
+                      <a:srgbClr val="FFFFFF"/>
                     </a:solidFill>
                   </a:tcPr>
                 </a:tc>
@@ -5835,7 +6125,7 @@
                   </a:txBody>
                   <a:tcPr>
                     <a:solidFill>
-                      <a:srgbClr val="EEF2F7"/>
+                      <a:srgbClr val="FFFFFF"/>
                     </a:solidFill>
                   </a:tcPr>
                 </a:tc>
@@ -5854,128 +6144,6 @@
                       </a:pPr>
                       <a:r>
                         <a:t>16,000</a:t>
-                      </a:r>
-                    </a:p>
-                  </a:txBody>
-                  <a:tcPr>
-                    <a:solidFill>
-                      <a:srgbClr val="EEF2F7"/>
-                    </a:solidFill>
-                  </a:tcPr>
-                </a:tc>
-                <a:tc>
-                  <a:txBody>
-                    <a:bodyPr/>
-                    <a:lstStyle/>
-                    <a:p>
-                      <a:pPr algn="ctr">
-                        <a:defRPr sz="1100">
-                          <a:solidFill>
-                            <a:srgbClr val="0B1426"/>
-                          </a:solidFill>
-                          <a:latin typeface="Calibri"/>
-                        </a:defRPr>
-                      </a:pPr>
-                      <a:r>
-                        <a:t>0.0 (Pure)</a:t>
-                      </a:r>
-                    </a:p>
-                  </a:txBody>
-                  <a:tcPr>
-                    <a:solidFill>
-                      <a:srgbClr val="EEF2F7"/>
-                    </a:solidFill>
-                  </a:tcPr>
-                </a:tc>
-                <a:tc>
-                  <a:txBody>
-                    <a:bodyPr/>
-                    <a:lstStyle/>
-                    <a:p>
-                      <a:pPr algn="ctr">
-                        <a:defRPr sz="1100">
-                          <a:solidFill>
-                            <a:srgbClr val="0B1426"/>
-                          </a:solidFill>
-                          <a:latin typeface="Calibri"/>
-                        </a:defRPr>
-                      </a:pPr>
-                      <a:r>
-                        <a:t>1000 W/m²</a:t>
-                      </a:r>
-                    </a:p>
-                  </a:txBody>
-                  <a:tcPr>
-                    <a:solidFill>
-                      <a:srgbClr val="EEF2F7"/>
-                    </a:solidFill>
-                  </a:tcPr>
-                </a:tc>
-              </a:tr>
-              <a:tr h="402336">
-                <a:tc>
-                  <a:txBody>
-                    <a:bodyPr/>
-                    <a:lstStyle/>
-                    <a:p>
-                      <a:pPr algn="l">
-                        <a:defRPr sz="1100">
-                          <a:solidFill>
-                            <a:srgbClr val="0B1426"/>
-                          </a:solidFill>
-                          <a:latin typeface="Calibri"/>
-                        </a:defRPr>
-                      </a:pPr>
-                      <a:r>
-                        <a:t>noRadiation_fine</a:t>
-                      </a:r>
-                    </a:p>
-                  </a:txBody>
-                  <a:tcPr>
-                    <a:solidFill>
-                      <a:srgbClr val="FFFFFF"/>
-                    </a:solidFill>
-                  </a:tcPr>
-                </a:tc>
-                <a:tc>
-                  <a:txBody>
-                    <a:bodyPr/>
-                    <a:lstStyle/>
-                    <a:p>
-                      <a:pPr algn="ctr">
-                        <a:defRPr sz="1100">
-                          <a:solidFill>
-                            <a:srgbClr val="0B1426"/>
-                          </a:solidFill>
-                          <a:latin typeface="Calibri"/>
-                        </a:defRPr>
-                      </a:pPr>
-                      <a:r>
-                        <a:t>400 × 160</a:t>
-                      </a:r>
-                    </a:p>
-                  </a:txBody>
-                  <a:tcPr>
-                    <a:solidFill>
-                      <a:srgbClr val="FFFFFF"/>
-                    </a:solidFill>
-                  </a:tcPr>
-                </a:tc>
-                <a:tc>
-                  <a:txBody>
-                    <a:bodyPr/>
-                    <a:lstStyle/>
-                    <a:p>
-                      <a:pPr algn="ctr">
-                        <a:defRPr sz="1100">
-                          <a:solidFill>
-                            <a:srgbClr val="0B1426"/>
-                          </a:solidFill>
-                          <a:latin typeface="Calibri"/>
-                        </a:defRPr>
-                      </a:pPr>
-                      <a:r>
-                        <a:t>64,000</a:t>
                       </a:r>
                     </a:p>
                   </a:txBody>
@@ -6049,13 +6217,135 @@
                         </a:defRPr>
                       </a:pPr>
                       <a:r>
+                        <a:t>noRadiation_fine</a:t>
+                      </a:r>
+                    </a:p>
+                  </a:txBody>
+                  <a:tcPr>
+                    <a:solidFill>
+                      <a:srgbClr val="DEE5F0"/>
+                    </a:solidFill>
+                  </a:tcPr>
+                </a:tc>
+                <a:tc>
+                  <a:txBody>
+                    <a:bodyPr/>
+                    <a:lstStyle/>
+                    <a:p>
+                      <a:pPr algn="ctr">
+                        <a:defRPr sz="1100">
+                          <a:solidFill>
+                            <a:srgbClr val="0B1426"/>
+                          </a:solidFill>
+                          <a:latin typeface="Calibri"/>
+                        </a:defRPr>
+                      </a:pPr>
+                      <a:r>
+                        <a:t>400 × 160</a:t>
+                      </a:r>
+                    </a:p>
+                  </a:txBody>
+                  <a:tcPr>
+                    <a:solidFill>
+                      <a:srgbClr val="DEE5F0"/>
+                    </a:solidFill>
+                  </a:tcPr>
+                </a:tc>
+                <a:tc>
+                  <a:txBody>
+                    <a:bodyPr/>
+                    <a:lstStyle/>
+                    <a:p>
+                      <a:pPr algn="ctr">
+                        <a:defRPr sz="1100">
+                          <a:solidFill>
+                            <a:srgbClr val="0B1426"/>
+                          </a:solidFill>
+                          <a:latin typeface="Calibri"/>
+                        </a:defRPr>
+                      </a:pPr>
+                      <a:r>
+                        <a:t>64,000</a:t>
+                      </a:r>
+                    </a:p>
+                  </a:txBody>
+                  <a:tcPr>
+                    <a:solidFill>
+                      <a:srgbClr val="DEE5F0"/>
+                    </a:solidFill>
+                  </a:tcPr>
+                </a:tc>
+                <a:tc>
+                  <a:txBody>
+                    <a:bodyPr/>
+                    <a:lstStyle/>
+                    <a:p>
+                      <a:pPr algn="ctr">
+                        <a:defRPr sz="1100">
+                          <a:solidFill>
+                            <a:srgbClr val="0B1426"/>
+                          </a:solidFill>
+                          <a:latin typeface="Calibri"/>
+                        </a:defRPr>
+                      </a:pPr>
+                      <a:r>
+                        <a:t>0.0 (Pure)</a:t>
+                      </a:r>
+                    </a:p>
+                  </a:txBody>
+                  <a:tcPr>
+                    <a:solidFill>
+                      <a:srgbClr val="DEE5F0"/>
+                    </a:solidFill>
+                  </a:tcPr>
+                </a:tc>
+                <a:tc>
+                  <a:txBody>
+                    <a:bodyPr/>
+                    <a:lstStyle/>
+                    <a:p>
+                      <a:pPr algn="ctr">
+                        <a:defRPr sz="1100">
+                          <a:solidFill>
+                            <a:srgbClr val="0B1426"/>
+                          </a:solidFill>
+                          <a:latin typeface="Calibri"/>
+                        </a:defRPr>
+                      </a:pPr>
+                      <a:r>
+                        <a:t>1000 W/m²</a:t>
+                      </a:r>
+                    </a:p>
+                  </a:txBody>
+                  <a:tcPr>
+                    <a:solidFill>
+                      <a:srgbClr val="DEE5F0"/>
+                    </a:solidFill>
+                  </a:tcPr>
+                </a:tc>
+              </a:tr>
+              <a:tr h="402336">
+                <a:tc>
+                  <a:txBody>
+                    <a:bodyPr/>
+                    <a:lstStyle/>
+                    <a:p>
+                      <a:pPr algn="l">
+                        <a:defRPr sz="1100">
+                          <a:solidFill>
+                            <a:srgbClr val="0B1426"/>
+                          </a:solidFill>
+                          <a:latin typeface="Calibri"/>
+                        </a:defRPr>
+                      </a:pPr>
+                      <a:r>
                         <a:t>surfaceRadiation_coarse</a:t>
                       </a:r>
                     </a:p>
                   </a:txBody>
                   <a:tcPr>
                     <a:solidFill>
-                      <a:srgbClr val="EEF2F7"/>
+                      <a:srgbClr val="FFFFFF"/>
                     </a:solidFill>
                   </a:tcPr>
                 </a:tc>
@@ -6079,7 +6369,7 @@
                   </a:txBody>
                   <a:tcPr>
                     <a:solidFill>
-                      <a:srgbClr val="EEF2F7"/>
+                      <a:srgbClr val="FFFFFF"/>
                     </a:solidFill>
                   </a:tcPr>
                 </a:tc>
@@ -6098,128 +6388,6 @@
                       </a:pPr>
                       <a:r>
                         <a:t>16,000</a:t>
-                      </a:r>
-                    </a:p>
-                  </a:txBody>
-                  <a:tcPr>
-                    <a:solidFill>
-                      <a:srgbClr val="EEF2F7"/>
-                    </a:solidFill>
-                  </a:tcPr>
-                </a:tc>
-                <a:tc>
-                  <a:txBody>
-                    <a:bodyPr/>
-                    <a:lstStyle/>
-                    <a:p>
-                      <a:pPr algn="ctr">
-                        <a:defRPr sz="1100">
-                          <a:solidFill>
-                            <a:srgbClr val="0B1426"/>
-                          </a:solidFill>
-                          <a:latin typeface="Calibri"/>
-                        </a:defRPr>
-                      </a:pPr>
-                      <a:r>
-                        <a:t>0.8 (Coupled)</a:t>
-                      </a:r>
-                    </a:p>
-                  </a:txBody>
-                  <a:tcPr>
-                    <a:solidFill>
-                      <a:srgbClr val="EEF2F7"/>
-                    </a:solidFill>
-                  </a:tcPr>
-                </a:tc>
-                <a:tc>
-                  <a:txBody>
-                    <a:bodyPr/>
-                    <a:lstStyle/>
-                    <a:p>
-                      <a:pPr algn="ctr">
-                        <a:defRPr sz="1100">
-                          <a:solidFill>
-                            <a:srgbClr val="0B1426"/>
-                          </a:solidFill>
-                          <a:latin typeface="Calibri"/>
-                        </a:defRPr>
-                      </a:pPr>
-                      <a:r>
-                        <a:t>1000 W/m²</a:t>
-                      </a:r>
-                    </a:p>
-                  </a:txBody>
-                  <a:tcPr>
-                    <a:solidFill>
-                      <a:srgbClr val="EEF2F7"/>
-                    </a:solidFill>
-                  </a:tcPr>
-                </a:tc>
-              </a:tr>
-              <a:tr h="402336">
-                <a:tc>
-                  <a:txBody>
-                    <a:bodyPr/>
-                    <a:lstStyle/>
-                    <a:p>
-                      <a:pPr algn="l">
-                        <a:defRPr sz="1100">
-                          <a:solidFill>
-                            <a:srgbClr val="0B1426"/>
-                          </a:solidFill>
-                          <a:latin typeface="Calibri"/>
-                        </a:defRPr>
-                      </a:pPr>
-                      <a:r>
-                        <a:t>surfaceRadiation_fine</a:t>
-                      </a:r>
-                    </a:p>
-                  </a:txBody>
-                  <a:tcPr>
-                    <a:solidFill>
-                      <a:srgbClr val="FFFFFF"/>
-                    </a:solidFill>
-                  </a:tcPr>
-                </a:tc>
-                <a:tc>
-                  <a:txBody>
-                    <a:bodyPr/>
-                    <a:lstStyle/>
-                    <a:p>
-                      <a:pPr algn="ctr">
-                        <a:defRPr sz="1100">
-                          <a:solidFill>
-                            <a:srgbClr val="0B1426"/>
-                          </a:solidFill>
-                          <a:latin typeface="Calibri"/>
-                        </a:defRPr>
-                      </a:pPr>
-                      <a:r>
-                        <a:t>400 × 160</a:t>
-                      </a:r>
-                    </a:p>
-                  </a:txBody>
-                  <a:tcPr>
-                    <a:solidFill>
-                      <a:srgbClr val="FFFFFF"/>
-                    </a:solidFill>
-                  </a:tcPr>
-                </a:tc>
-                <a:tc>
-                  <a:txBody>
-                    <a:bodyPr/>
-                    <a:lstStyle/>
-                    <a:p>
-                      <a:pPr algn="ctr">
-                        <a:defRPr sz="1100">
-                          <a:solidFill>
-                            <a:srgbClr val="0B1426"/>
-                          </a:solidFill>
-                          <a:latin typeface="Calibri"/>
-                        </a:defRPr>
-                      </a:pPr>
-                      <a:r>
-                        <a:t>64,000</a:t>
                       </a:r>
                     </a:p>
                   </a:txBody>
@@ -6278,20 +6446,142 @@
                   </a:tcPr>
                 </a:tc>
               </a:tr>
+              <a:tr h="402336">
+                <a:tc>
+                  <a:txBody>
+                    <a:bodyPr/>
+                    <a:lstStyle/>
+                    <a:p>
+                      <a:pPr algn="l">
+                        <a:defRPr sz="1100">
+                          <a:solidFill>
+                            <a:srgbClr val="0B1426"/>
+                          </a:solidFill>
+                          <a:latin typeface="Calibri"/>
+                        </a:defRPr>
+                      </a:pPr>
+                      <a:r>
+                        <a:t>surfaceRadiation_fine</a:t>
+                      </a:r>
+                    </a:p>
+                  </a:txBody>
+                  <a:tcPr>
+                    <a:solidFill>
+                      <a:srgbClr val="DEE5F0"/>
+                    </a:solidFill>
+                  </a:tcPr>
+                </a:tc>
+                <a:tc>
+                  <a:txBody>
+                    <a:bodyPr/>
+                    <a:lstStyle/>
+                    <a:p>
+                      <a:pPr algn="ctr">
+                        <a:defRPr sz="1100">
+                          <a:solidFill>
+                            <a:srgbClr val="0B1426"/>
+                          </a:solidFill>
+                          <a:latin typeface="Calibri"/>
+                        </a:defRPr>
+                      </a:pPr>
+                      <a:r>
+                        <a:t>400 × 160</a:t>
+                      </a:r>
+                    </a:p>
+                  </a:txBody>
+                  <a:tcPr>
+                    <a:solidFill>
+                      <a:srgbClr val="DEE5F0"/>
+                    </a:solidFill>
+                  </a:tcPr>
+                </a:tc>
+                <a:tc>
+                  <a:txBody>
+                    <a:bodyPr/>
+                    <a:lstStyle/>
+                    <a:p>
+                      <a:pPr algn="ctr">
+                        <a:defRPr sz="1100">
+                          <a:solidFill>
+                            <a:srgbClr val="0B1426"/>
+                          </a:solidFill>
+                          <a:latin typeface="Calibri"/>
+                        </a:defRPr>
+                      </a:pPr>
+                      <a:r>
+                        <a:t>64,000</a:t>
+                      </a:r>
+                    </a:p>
+                  </a:txBody>
+                  <a:tcPr>
+                    <a:solidFill>
+                      <a:srgbClr val="DEE5F0"/>
+                    </a:solidFill>
+                  </a:tcPr>
+                </a:tc>
+                <a:tc>
+                  <a:txBody>
+                    <a:bodyPr/>
+                    <a:lstStyle/>
+                    <a:p>
+                      <a:pPr algn="ctr">
+                        <a:defRPr sz="1100">
+                          <a:solidFill>
+                            <a:srgbClr val="0B1426"/>
+                          </a:solidFill>
+                          <a:latin typeface="Calibri"/>
+                        </a:defRPr>
+                      </a:pPr>
+                      <a:r>
+                        <a:t>0.8 (Coupled)</a:t>
+                      </a:r>
+                    </a:p>
+                  </a:txBody>
+                  <a:tcPr>
+                    <a:solidFill>
+                      <a:srgbClr val="DEE5F0"/>
+                    </a:solidFill>
+                  </a:tcPr>
+                </a:tc>
+                <a:tc>
+                  <a:txBody>
+                    <a:bodyPr/>
+                    <a:lstStyle/>
+                    <a:p>
+                      <a:pPr algn="ctr">
+                        <a:defRPr sz="1100">
+                          <a:solidFill>
+                            <a:srgbClr val="0B1426"/>
+                          </a:solidFill>
+                          <a:latin typeface="Calibri"/>
+                        </a:defRPr>
+                      </a:pPr>
+                      <a:r>
+                        <a:t>1000 W/m²</a:t>
+                      </a:r>
+                    </a:p>
+                  </a:txBody>
+                  <a:tcPr>
+                    <a:solidFill>
+                      <a:srgbClr val="DEE5F0"/>
+                    </a:solidFill>
+                  </a:tcPr>
+                </a:tc>
+              </a:tr>
             </a:tbl>
           </a:graphicData>
         </a:graphic>
       </p:graphicFrame>
       <p:sp>
         <p:nvSpPr>
-          <p:cNvPr id="8" name="TextBox 7"/>
+          <p:cNvPr id="7" name="TextBox 6"/>
           <p:cNvSpPr txBox="1"/>
           <p:nvPr/>
         </p:nvSpPr>
         <p:spPr>
           <a:xfrm>
-            <a:off x="822960" y="4389120"/>
-            <a:ext cx="5669280" cy="1463040"/>
+            <a:off x="548640" y="4160520"/>
+            <a:ext cx="6217920" cy="1737360"/>
           </a:xfrm>
           <a:prstGeom prst="rect">
             <a:avLst/>
@@ -6306,9 +6596,9 @@
           <a:p>
             <a:pPr>
               <a:spcAft>
-                <a:spcPts val="1000"/>
+                <a:spcPts val="1200"/>
               </a:spcAft>
-              <a:defRPr sz="1300">
+              <a:defRPr sz="1400">
                 <a:solidFill>
                   <a:srgbClr val="0B1426"/>
                 </a:solidFill>
@@ -6322,9 +6612,9 @@
           <a:p>
             <a:pPr>
               <a:spcAft>
-                <a:spcPts val="1000"/>
+                <a:spcPts val="1200"/>
               </a:spcAft>
-              <a:defRPr sz="1300">
+              <a:defRPr sz="1400">
                 <a:solidFill>
                   <a:srgbClr val="0B1426"/>
                 </a:solidFill>
@@ -6338,9 +6628,9 @@
           <a:p>
             <a:pPr>
               <a:spcAft>
-                <a:spcPts val="1000"/>
+                <a:spcPts val="1200"/>
               </a:spcAft>
-              <a:defRPr sz="1300">
+              <a:defRPr sz="1400">
                 <a:solidFill>
                   <a:srgbClr val="0B1426"/>
                 </a:solidFill>
@@ -6355,14 +6645,14 @@
       </p:sp>
       <p:sp>
         <p:nvSpPr>
-          <p:cNvPr id="9" name="Rounded Rectangle 8"/>
+          <p:cNvPr id="8" name="Rounded Rectangle 7"/>
           <p:cNvSpPr/>
           <p:nvPr/>
         </p:nvSpPr>
         <p:spPr>
           <a:xfrm>
-            <a:off x="7040880" y="1463040"/>
-            <a:ext cx="4572000" cy="4663440"/>
+            <a:off x="7132320" y="1371600"/>
+            <a:ext cx="4480560" cy="4754880"/>
           </a:xfrm>
           <a:prstGeom prst="roundRect">
             <a:avLst/>
@@ -6400,7 +6690,7 @@
       </p:sp>
       <p:pic>
         <p:nvPicPr>
-          <p:cNvPr id="10" name="Picture 9" descr="four_case_metric_breakdown.png"/>
+          <p:cNvPr id="9" name="Picture 8" descr="four_case_metric_breakdown.png"/>
           <p:cNvPicPr>
             <a:picLocks noChangeAspect="1"/>
           </p:cNvPicPr>
@@ -6414,8 +6704,8 @@
         </p:blipFill>
         <p:spPr>
           <a:xfrm>
-            <a:off x="7223760" y="2123742"/>
-            <a:ext cx="4206240" cy="3021995"/>
+            <a:off x="7315200" y="2110870"/>
+            <a:ext cx="4114800" cy="2956299"/>
           </a:xfrm>
           <a:prstGeom prst="rect">
             <a:avLst/>
@@ -6424,14 +6714,14 @@
       </p:pic>
       <p:sp>
         <p:nvSpPr>
-          <p:cNvPr id="11" name="TextBox 10"/>
+          <p:cNvPr id="10" name="TextBox 9"/>
           <p:cNvSpPr txBox="1"/>
           <p:nvPr/>
         </p:nvSpPr>
         <p:spPr>
           <a:xfrm>
-            <a:off x="7223760" y="5696712"/>
-            <a:ext cx="4206240" cy="320040"/>
+            <a:off x="7315200" y="5696712"/>
+            <a:ext cx="4114800" cy="320040"/>
           </a:xfrm>
           <a:prstGeom prst="rect">
             <a:avLst/>
@@ -6524,7 +6814,7 @@
           <a:lstStyle/>
           <a:p>
             <a:pPr>
-              <a:defRPr sz="3400" b="1">
+              <a:defRPr sz="3200" b="1">
                 <a:solidFill>
                   <a:srgbClr val="0B1426"/>
                 </a:solidFill>
@@ -6545,7 +6835,7 @@
         </p:nvSpPr>
         <p:spPr>
           <a:xfrm>
-            <a:off x="11155680" y="6400800"/>
+            <a:off x="11064240" y="6400800"/>
             <a:ext cx="548640" cy="274320"/>
           </a:xfrm>
           <a:prstGeom prst="rect">
@@ -6560,7 +6850,7 @@
           <a:lstStyle/>
           <a:p>
             <a:pPr algn="r">
-              <a:defRPr sz="1200">
+              <a:defRPr sz="1100">
                 <a:solidFill>
                   <a:srgbClr val="7C8DB5"/>
                 </a:solidFill>
@@ -6581,8 +6871,8 @@
         </p:nvSpPr>
         <p:spPr>
           <a:xfrm>
-            <a:off x="548640" y="1463040"/>
-            <a:ext cx="6766560" cy="4663440"/>
+            <a:off x="548640" y="1371600"/>
+            <a:ext cx="6583680" cy="4754880"/>
           </a:xfrm>
           <a:prstGeom prst="roundRect">
             <a:avLst/>
@@ -6634,8 +6924,8 @@
         </p:blipFill>
         <p:spPr>
           <a:xfrm>
-            <a:off x="731520" y="2274712"/>
-            <a:ext cx="6400800" cy="2720055"/>
+            <a:off x="731520" y="2267850"/>
+            <a:ext cx="6217920" cy="2642339"/>
           </a:xfrm>
           <a:prstGeom prst="rect">
             <a:avLst/>
@@ -6651,7 +6941,7 @@
         <p:spPr>
           <a:xfrm>
             <a:off x="731520" y="5696712"/>
-            <a:ext cx="6400800" cy="320040"/>
+            <a:ext cx="6217920" cy="320040"/>
           </a:xfrm>
           <a:prstGeom prst="rect">
             <a:avLst/>
@@ -6680,14 +6970,50 @@
       </p:sp>
       <p:sp>
         <p:nvSpPr>
-          <p:cNvPr id="8" name="Rounded Rectangle 7"/>
+          <p:cNvPr id="8" name="TextBox 7"/>
+          <p:cNvSpPr txBox="1"/>
+          <p:nvPr/>
+        </p:nvSpPr>
+        <p:spPr>
+          <a:xfrm>
+            <a:off x="7498079" y="1371600"/>
+            <a:ext cx="4114800" cy="365760"/>
+          </a:xfrm>
+          <a:prstGeom prst="rect">
+            <a:avLst/>
+          </a:prstGeom>
+          <a:noFill/>
+        </p:spPr>
+        <p:txBody>
+          <a:bodyPr wrap="none" lIns="0" tIns="0">
+            <a:spAutoFit/>
+          </a:bodyPr>
+          <a:lstStyle/>
+          <a:p>
+            <a:pPr>
+              <a:defRPr sz="2200" b="1">
+                <a:solidFill>
+                  <a:srgbClr val="0B1426"/>
+                </a:solidFill>
+                <a:latin typeface="Cambria"/>
+              </a:defRPr>
+            </a:pPr>
+            <a:r>
+              <a:t>Near-Wall Mesh Resolution</a:t>
+            </a:r>
+          </a:p>
+        </p:txBody>
+      </p:sp>
+      <p:sp>
+        <p:nvSpPr>
+          <p:cNvPr id="9" name="Rounded Rectangle 8"/>
           <p:cNvSpPr/>
           <p:nvPr/>
         </p:nvSpPr>
         <p:spPr>
           <a:xfrm>
-            <a:off x="7589520" y="1463040"/>
-            <a:ext cx="4023360" cy="4663440"/>
+            <a:off x="7498079" y="1874519"/>
+            <a:ext cx="4114800" cy="1005840"/>
           </a:xfrm>
           <a:prstGeom prst="roundRect">
             <a:avLst/>
@@ -6725,23 +7051,74 @@
       </p:sp>
       <p:sp>
         <p:nvSpPr>
-          <p:cNvPr id="9" name="Rounded Rectangle 8"/>
+          <p:cNvPr id="10" name="TextBox 9"/>
+          <p:cNvSpPr txBox="1"/>
+          <p:nvPr/>
+        </p:nvSpPr>
+        <p:spPr>
+          <a:xfrm>
+            <a:off x="7680960" y="1920240"/>
+            <a:ext cx="3749039" cy="914400"/>
+          </a:xfrm>
+          <a:prstGeom prst="rect">
+            <a:avLst/>
+          </a:prstGeom>
+          <a:noFill/>
+        </p:spPr>
+        <p:txBody>
+          <a:bodyPr wrap="square" lIns="0" tIns="0">
+            <a:spAutoFit/>
+          </a:bodyPr>
+          <a:lstStyle/>
+          <a:p>
+            <a:pPr>
+              <a:defRPr sz="2200" b="1">
+                <a:solidFill>
+                  <a:srgbClr val="FF7A1A"/>
+                </a:solidFill>
+                <a:latin typeface="Cambria"/>
+              </a:defRPr>
+            </a:pPr>
+            <a:r>
+              <a:t>41 Cells in 5 mm</a:t>
+            </a:r>
+          </a:p>
+          <a:p>
+            <a:pPr>
+              <a:defRPr sz="1100">
+                <a:solidFill>
+                  <a:srgbClr val="0B1426"/>
+                </a:solidFill>
+                <a:latin typeface="Calibri"/>
+              </a:defRPr>
+            </a:pPr>
+            <a:r>
+              <a:t>Near-wall inflation zone resolves steep thermal gradients</a:t>
+            </a:r>
+          </a:p>
+        </p:txBody>
+      </p:sp>
+      <p:sp>
+        <p:nvSpPr>
+          <p:cNvPr id="11" name="Rounded Rectangle 10"/>
           <p:cNvSpPr/>
           <p:nvPr/>
         </p:nvSpPr>
         <p:spPr>
           <a:xfrm>
-            <a:off x="7863840" y="1737360"/>
-            <a:ext cx="3474720" cy="1051560"/>
+            <a:off x="7498079" y="3017520"/>
+            <a:ext cx="4114800" cy="1005840"/>
           </a:xfrm>
           <a:prstGeom prst="roundRect">
             <a:avLst/>
           </a:prstGeom>
           <a:solidFill>
-            <a:srgbClr val="EEF2F7"/>
+            <a:srgbClr val="FFFFFF"/>
           </a:solidFill>
-          <a:ln>
-            <a:noFill/>
+          <a:ln w="12700">
+            <a:solidFill>
+              <a:srgbClr val="DCE2EC"/>
+            </a:solidFill>
           </a:ln>
         </p:spPr>
         <p:style>
@@ -6768,14 +7145,63 @@
       </p:sp>
       <p:sp>
         <p:nvSpPr>
-          <p:cNvPr id="10" name="TextBox 9"/>
+          <p:cNvPr id="12" name="TextBox 11"/>
           <p:cNvSpPr txBox="1"/>
           <p:nvPr/>
         </p:nvSpPr>
         <p:spPr>
           <a:xfrm>
-            <a:off x="8046720" y="1783080"/>
-            <a:ext cx="3108960" cy="960120"/>
+            <a:off x="7680960" y="3063240"/>
+            <a:ext cx="3749039" cy="914400"/>
+          </a:xfrm>
+          <a:prstGeom prst="rect">
+            <a:avLst/>
+          </a:prstGeom>
+          <a:noFill/>
+        </p:spPr>
+        <p:txBody>
+          <a:bodyPr wrap="square" lIns="0" tIns="0">
+            <a:spAutoFit/>
+          </a:bodyPr>
+          <a:lstStyle/>
+          <a:p>
+            <a:pPr>
+              <a:defRPr sz="2200" b="1">
+                <a:solidFill>
+                  <a:srgbClr val="23B5D3"/>
+                </a:solidFill>
+                <a:latin typeface="Cambria"/>
+              </a:defRPr>
+            </a:pPr>
+            <a:r>
+              <a:t>Δy₁ = 70.3 μm</a:t>
+            </a:r>
+          </a:p>
+          <a:p>
+            <a:pPr>
+              <a:defRPr sz="1100">
+                <a:solidFill>
+                  <a:srgbClr val="0B1426"/>
+                </a:solidFill>
+                <a:latin typeface="Calibri"/>
+              </a:defRPr>
+            </a:pPr>
+            <a:r>
+              <a:t>First cell wall-normal height achieves y⁺ ≈ 0.05</a:t>
+            </a:r>
+          </a:p>
+        </p:txBody>
+      </p:sp>
+      <p:sp>
+        <p:nvSpPr>
+          <p:cNvPr id="13" name="TextBox 12"/>
+          <p:cNvSpPr txBox="1"/>
+          <p:nvPr/>
+        </p:nvSpPr>
+        <p:spPr>
+          <a:xfrm>
+            <a:off x="7498079" y="4160520"/>
+            <a:ext cx="4114800" cy="1828800"/>
           </a:xfrm>
           <a:prstGeom prst="rect">
             <a:avLst/>
@@ -6789,149 +7215,8 @@
           <a:lstStyle/>
           <a:p>
             <a:pPr>
-              <a:defRPr sz="2400" b="1">
-                <a:solidFill>
-                  <a:srgbClr val="FF7A1A"/>
-                </a:solidFill>
-                <a:latin typeface="Cambria"/>
-              </a:defRPr>
-            </a:pPr>
-            <a:r>
-              <a:t>41 Cells in 5 mm</a:t>
-            </a:r>
-          </a:p>
-          <a:p>
-            <a:pPr>
-              <a:defRPr sz="1100">
-                <a:solidFill>
-                  <a:srgbClr val="0B1426"/>
-                </a:solidFill>
-                <a:latin typeface="Calibri"/>
-              </a:defRPr>
-            </a:pPr>
-            <a:r>
-              <a:t>Near-wall inflation zone resolves thermal gradients</a:t>
-            </a:r>
-          </a:p>
-        </p:txBody>
-      </p:sp>
-      <p:sp>
-        <p:nvSpPr>
-          <p:cNvPr id="11" name="Rounded Rectangle 10"/>
-          <p:cNvSpPr/>
-          <p:nvPr/>
-        </p:nvSpPr>
-        <p:spPr>
-          <a:xfrm>
-            <a:off x="7863840" y="2926080"/>
-            <a:ext cx="3474720" cy="1051560"/>
-          </a:xfrm>
-          <a:prstGeom prst="roundRect">
-            <a:avLst/>
-          </a:prstGeom>
-          <a:solidFill>
-            <a:srgbClr val="EEF2F7"/>
-          </a:solidFill>
-          <a:ln>
-            <a:noFill/>
-          </a:ln>
-        </p:spPr>
-        <p:style>
-          <a:lnRef idx="1">
-            <a:schemeClr val="accent1"/>
-          </a:lnRef>
-          <a:fillRef idx="3">
-            <a:schemeClr val="accent1"/>
-          </a:fillRef>
-          <a:effectRef idx="2">
-            <a:schemeClr val="accent1"/>
-          </a:effectRef>
-          <a:fontRef idx="minor">
-            <a:schemeClr val="lt1"/>
-          </a:fontRef>
-        </p:style>
-        <p:txBody>
-          <a:bodyPr rtlCol="0" anchor="ctr"/>
-          <a:lstStyle/>
-          <a:p>
-            <a:pPr algn="ctr"/>
-          </a:p>
-        </p:txBody>
-      </p:sp>
-      <p:sp>
-        <p:nvSpPr>
-          <p:cNvPr id="12" name="TextBox 11"/>
-          <p:cNvSpPr txBox="1"/>
-          <p:nvPr/>
-        </p:nvSpPr>
-        <p:spPr>
-          <a:xfrm>
-            <a:off x="8046720" y="2971800"/>
-            <a:ext cx="3108960" cy="960120"/>
-          </a:xfrm>
-          <a:prstGeom prst="rect">
-            <a:avLst/>
-          </a:prstGeom>
-          <a:noFill/>
-        </p:spPr>
-        <p:txBody>
-          <a:bodyPr wrap="square" lIns="0" tIns="0" rIns="0" bIns="0">
-            <a:spAutoFit/>
-          </a:bodyPr>
-          <a:lstStyle/>
-          <a:p>
-            <a:pPr>
-              <a:defRPr sz="2400" b="1">
-                <a:solidFill>
-                  <a:srgbClr val="23B5D3"/>
-                </a:solidFill>
-                <a:latin typeface="Cambria"/>
-              </a:defRPr>
-            </a:pPr>
-            <a:r>
-              <a:t>Δy₁ = 70.3 μm</a:t>
-            </a:r>
-          </a:p>
-          <a:p>
-            <a:pPr>
-              <a:defRPr sz="1100">
-                <a:solidFill>
-                  <a:srgbClr val="0B1426"/>
-                </a:solidFill>
-                <a:latin typeface="Calibri"/>
-              </a:defRPr>
-            </a:pPr>
-            <a:r>
-              <a:t>First cell wall-normal height on 64k fine grid</a:t>
-            </a:r>
-          </a:p>
-        </p:txBody>
-      </p:sp>
-      <p:sp>
-        <p:nvSpPr>
-          <p:cNvPr id="13" name="TextBox 12"/>
-          <p:cNvSpPr txBox="1"/>
-          <p:nvPr/>
-        </p:nvSpPr>
-        <p:spPr>
-          <a:xfrm>
-            <a:off x="7863840" y="4160520"/>
-            <a:ext cx="3474720" cy="1737360"/>
-          </a:xfrm>
-          <a:prstGeom prst="rect">
-            <a:avLst/>
-          </a:prstGeom>
-          <a:noFill/>
-        </p:spPr>
-        <p:txBody>
-          <a:bodyPr wrap="square" lIns="0" tIns="0" rIns="0" bIns="0">
-            <a:spAutoFit/>
-          </a:bodyPr>
-          <a:lstStyle/>
-          <a:p>
-            <a:pPr>
               <a:spcAft>
-                <a:spcPts val="1000"/>
+                <a:spcPts val="1200"/>
               </a:spcAft>
               <a:defRPr sz="1300">
                 <a:solidFill>
@@ -6947,7 +7232,7 @@
           <a:p>
             <a:pPr>
               <a:spcAft>
-                <a:spcPts val="1000"/>
+                <a:spcPts val="1200"/>
               </a:spcAft>
               <a:defRPr sz="1300">
                 <a:solidFill>
@@ -6963,7 +7248,7 @@
           <a:p>
             <a:pPr>
               <a:spcAft>
-                <a:spcPts val="1000"/>
+                <a:spcPts val="1200"/>
               </a:spcAft>
               <a:defRPr sz="1300">
                 <a:solidFill>
@@ -7044,7 +7329,7 @@
           <a:lstStyle/>
           <a:p>
             <a:pPr>
-              <a:defRPr sz="3400" b="1">
+              <a:defRPr sz="3200" b="1">
                 <a:solidFill>
                   <a:srgbClr val="0B1426"/>
                 </a:solidFill>
@@ -7065,7 +7350,7 @@
         </p:nvSpPr>
         <p:spPr>
           <a:xfrm>
-            <a:off x="11155680" y="6400800"/>
+            <a:off x="11064240" y="6400800"/>
             <a:ext cx="548640" cy="274320"/>
           </a:xfrm>
           <a:prstGeom prst="rect">
@@ -7080,7 +7365,7 @@
           <a:lstStyle/>
           <a:p>
             <a:pPr algn="r">
-              <a:defRPr sz="1200">
+              <a:defRPr sz="1100">
                 <a:solidFill>
                   <a:srgbClr val="7C8DB5"/>
                 </a:solidFill>
@@ -7101,8 +7386,8 @@
         </p:nvSpPr>
         <p:spPr>
           <a:xfrm>
-            <a:off x="548640" y="1463040"/>
-            <a:ext cx="5760720" cy="4663440"/>
+            <a:off x="548640" y="1371600"/>
+            <a:ext cx="6217920" cy="4754880"/>
           </a:xfrm>
           <a:prstGeom prst="roundRect">
             <a:avLst/>
@@ -7146,8 +7431,8 @@
         </p:nvSpPr>
         <p:spPr>
           <a:xfrm>
-            <a:off x="822960" y="1691640"/>
-            <a:ext cx="5212080" cy="4206240"/>
+            <a:off x="822960" y="1600200"/>
+            <a:ext cx="5669280" cy="4297680"/>
           </a:xfrm>
           <a:prstGeom prst="rect">
             <a:avLst/>
@@ -7164,7 +7449,7 @@
               <a:spcAft>
                 <a:spcPts val="1200"/>
               </a:spcAft>
-              <a:defRPr sz="2000" b="1">
+              <a:defRPr sz="2200" b="1">
                 <a:solidFill>
                   <a:srgbClr val="0B1426"/>
                 </a:solidFill>
@@ -7177,7 +7462,7 @@
           </a:p>
           <a:p>
             <a:pPr>
-              <a:defRPr sz="1200" b="1">
+              <a:defRPr sz="1300" b="1">
                 <a:solidFill>
                   <a:srgbClr val="0B1426"/>
                 </a:solidFill>
@@ -7185,15 +7470,15 @@
               </a:defRPr>
             </a:pPr>
             <a:r>
-              <a:t>1. Surface Heat Balance (enforced at wall face):</a:t>
+              <a:t>1. Surface Heat Balance (Enforced at Wall Face):</a:t>
             </a:r>
           </a:p>
           <a:p>
             <a:pPr>
               <a:spcAft>
-                <a:spcPts val="800"/>
+                <a:spcPts val="1000"/>
               </a:spcAft>
-              <a:defRPr sz="1600" b="1">
+              <a:defRPr sz="1700" b="1">
                 <a:solidFill>
                   <a:srgbClr val="FF7A1A"/>
                 </a:solidFill>
@@ -7206,7 +7491,7 @@
           </a:p>
           <a:p>
             <a:pPr>
-              <a:defRPr sz="1200" b="1">
+              <a:defRPr sz="1300" b="1">
                 <a:solidFill>
                   <a:srgbClr val="0B1426"/>
                 </a:solidFill>
@@ -7214,12 +7499,12 @@
               </a:defRPr>
             </a:pPr>
             <a:r>
-              <a:t>2. Stefan-Boltzmann Surface Radiation:</a:t>
-            </a:r>
-          </a:p>
-          <a:p>
-            <a:pPr>
-              <a:defRPr sz="1600" b="1">
+              <a:t>2. Stefan-Boltzmann Quartic Radiation Emission:</a:t>
+            </a:r>
+          </a:p>
+          <a:p>
+            <a:pPr>
+              <a:defRPr sz="1700" b="1">
                 <a:solidFill>
                   <a:srgbClr val="23B5D3"/>
                 </a:solidFill>
@@ -7227,13 +7512,13 @@
               </a:defRPr>
             </a:pPr>
             <a:r>
-              <a:t>q″_rad = ε σ (T_w⁴ - T_sur⁴)</a:t>
+              <a:t>q″_rad = ε σ (T_w⁴ − T_sur⁴)</a:t>
             </a:r>
           </a:p>
           <a:p>
             <a:pPr>
               <a:spcAft>
-                <a:spcPts val="800"/>
+                <a:spcPts val="1000"/>
               </a:spcAft>
               <a:defRPr sz="1100">
                 <a:solidFill>
@@ -7243,12 +7528,12 @@
               </a:defRPr>
             </a:pPr>
             <a:r>
-              <a:t>where ε = 0.8, σ = 5.670 × 10⁻⁸ W/(m²·K⁴), T_sur = 300 K</a:t>
-            </a:r>
-          </a:p>
-          <a:p>
-            <a:pPr>
-              <a:defRPr sz="1200" b="1">
+              <a:t>where ε = 0.8,  σ = 5.670 × 10⁻⁸ W/(m²·K⁴),  T_sur = 300 K</a:t>
+            </a:r>
+          </a:p>
+          <a:p>
+            <a:pPr>
+              <a:defRPr sz="1300" b="1">
                 <a:solidFill>
                   <a:srgbClr val="0B1426"/>
                 </a:solidFill>
@@ -7256,12 +7541,12 @@
               </a:defRPr>
             </a:pPr>
             <a:r>
-              <a:t>3. In-Situ Newton-Raphson Iteration:</a:t>
-            </a:r>
-          </a:p>
-          <a:p>
-            <a:pPr>
-              <a:defRPr sz="1500" b="1">
+              <a:t>3. In-Situ Newton-Raphson Wall Root-Finding:</a:t>
+            </a:r>
+          </a:p>
+          <a:p>
+            <a:pPr>
+              <a:defRPr sz="1600" b="1">
                 <a:solidFill>
                   <a:srgbClr val="0B1426"/>
                 </a:solidFill>
@@ -7269,21 +7554,141 @@
               </a:defRPr>
             </a:pPr>
             <a:r>
-              <a:t>T_w^(k+1) = T_w^(k) - f(T_w^(k)) / f′(T_w^(k))</a:t>
-            </a:r>
-          </a:p>
-        </p:txBody>
-      </p:sp>
-      <p:sp>
-        <p:nvSpPr>
-          <p:cNvPr id="7" name="Rounded Rectangle 6"/>
+              <a:t>T_w,new = T_w,old − f(T_w) / f′(T_w)</a:t>
+            </a:r>
+          </a:p>
+          <a:p>
+            <a:pPr>
+              <a:defRPr sz="1100">
+                <a:solidFill>
+                  <a:srgbClr val="7C8DB5"/>
+                </a:solidFill>
+                <a:latin typeface="Calibri"/>
+              </a:defRPr>
+            </a:pPr>
+            <a:r>
+              <a:t>f(T_w) = −k (∂T/∂y)_w + ε σ (T_w⁴ − T_sur⁴) − q″_heater = 0</a:t>
+            </a:r>
+          </a:p>
+        </p:txBody>
+      </p:sp>
+      <p:sp>
+        <p:nvSpPr>
+          <p:cNvPr id="7" name="TextBox 6"/>
+          <p:cNvSpPr txBox="1"/>
+          <p:nvPr/>
+        </p:nvSpPr>
+        <p:spPr>
+          <a:xfrm>
+            <a:off x="7132320" y="1371600"/>
+            <a:ext cx="4480560" cy="365760"/>
+          </a:xfrm>
+          <a:prstGeom prst="rect">
+            <a:avLst/>
+          </a:prstGeom>
+          <a:noFill/>
+        </p:spPr>
+        <p:txBody>
+          <a:bodyPr wrap="none" lIns="0" tIns="0">
+            <a:spAutoFit/>
+          </a:bodyPr>
+          <a:lstStyle/>
+          <a:p>
+            <a:pPr>
+              <a:defRPr sz="2200" b="1">
+                <a:solidFill>
+                  <a:srgbClr val="0B1426"/>
+                </a:solidFill>
+                <a:latin typeface="Cambria"/>
+              </a:defRPr>
+            </a:pPr>
+            <a:r>
+              <a:t>Boundary Condition Mechanics</a:t>
+            </a:r>
+          </a:p>
+        </p:txBody>
+      </p:sp>
+      <p:sp>
+        <p:nvSpPr>
+          <p:cNvPr id="8" name="TextBox 7"/>
+          <p:cNvSpPr txBox="1"/>
+          <p:nvPr/>
+        </p:nvSpPr>
+        <p:spPr>
+          <a:xfrm>
+            <a:off x="7132320" y="1874519"/>
+            <a:ext cx="4480560" cy="2011680"/>
+          </a:xfrm>
+          <a:prstGeom prst="rect">
+            <a:avLst/>
+          </a:prstGeom>
+          <a:noFill/>
+        </p:spPr>
+        <p:txBody>
+          <a:bodyPr wrap="square" lIns="0" tIns="0" rIns="0" bIns="0">
+            <a:spAutoFit/>
+          </a:bodyPr>
+          <a:lstStyle/>
+          <a:p>
+            <a:pPr>
+              <a:spcAft>
+                <a:spcPts val="1200"/>
+              </a:spcAft>
+              <a:defRPr sz="1400">
+                <a:solidFill>
+                  <a:srgbClr val="0B1426"/>
+                </a:solidFill>
+                <a:latin typeface="Calibri"/>
+              </a:defRPr>
+            </a:pPr>
+            <a:r>
+              <a:t>•  Solves non-linear quartic radiative flux at every boundary face.</a:t>
+            </a:r>
+          </a:p>
+          <a:p>
+            <a:pPr>
+              <a:spcAft>
+                <a:spcPts val="1200"/>
+              </a:spcAft>
+              <a:defRPr sz="1400">
+                <a:solidFill>
+                  <a:srgbClr val="0B1426"/>
+                </a:solidFill>
+                <a:latin typeface="Calibri"/>
+              </a:defRPr>
+            </a:pPr>
+            <a:r>
+              <a:t>•  Enforces local face heat balance by construction during each PIMPLE step.</a:t>
+            </a:r>
+          </a:p>
+          <a:p>
+            <a:pPr>
+              <a:spcAft>
+                <a:spcPts val="1200"/>
+              </a:spcAft>
+              <a:defRPr sz="1400">
+                <a:solidFill>
+                  <a:srgbClr val="0B1426"/>
+                </a:solidFill>
+                <a:latin typeface="Calibri"/>
+              </a:defRPr>
+            </a:pPr>
+            <a:r>
+              <a:t>•  Newton-Raphson scheme converges to double precision within four iterations.</a:t>
+            </a:r>
+          </a:p>
+        </p:txBody>
+      </p:sp>
+      <p:sp>
+        <p:nvSpPr>
+          <p:cNvPr id="9" name="Rounded Rectangle 8"/>
           <p:cNvSpPr/>
           <p:nvPr/>
         </p:nvSpPr>
         <p:spPr>
           <a:xfrm>
-            <a:off x="6583680" y="1463040"/>
-            <a:ext cx="5029200" cy="4663440"/>
+            <a:off x="7132320" y="4389120"/>
+            <a:ext cx="2148840" cy="1737360"/>
           </a:xfrm>
           <a:prstGeom prst="roundRect">
             <a:avLst/>
@@ -7321,14 +7726,14 @@
       </p:sp>
       <p:sp>
         <p:nvSpPr>
-          <p:cNvPr id="8" name="TextBox 7"/>
+          <p:cNvPr id="10" name="TextBox 9"/>
           <p:cNvSpPr txBox="1"/>
           <p:nvPr/>
         </p:nvSpPr>
         <p:spPr>
           <a:xfrm>
-            <a:off x="6858000" y="1691640"/>
-            <a:ext cx="4480560" cy="4206240"/>
+            <a:off x="7269480" y="4526280"/>
+            <a:ext cx="1874519" cy="1463040"/>
           </a:xfrm>
           <a:prstGeom prst="rect">
             <a:avLst/>
@@ -7336,16 +7741,26 @@
           <a:noFill/>
         </p:spPr>
         <p:txBody>
-          <a:bodyPr wrap="square" lIns="0" tIns="0" rIns="0" bIns="0">
+          <a:bodyPr wrap="square" lIns="0" tIns="0">
             <a:spAutoFit/>
           </a:bodyPr>
           <a:lstStyle/>
           <a:p>
             <a:pPr>
-              <a:spcAft>
-                <a:spcPts val="1000"/>
-              </a:spcAft>
-              <a:defRPr sz="1400" b="1">
+              <a:defRPr sz="2800" b="1">
+                <a:solidFill>
+                  <a:srgbClr val="FF7A1A"/>
+                </a:solidFill>
+                <a:latin typeface="Cambria"/>
+              </a:defRPr>
+            </a:pPr>
+            <a:r>
+              <a:t>ε = 0.8</a:t>
+            </a:r>
+          </a:p>
+          <a:p>
+            <a:pPr>
+              <a:defRPr sz="1100">
                 <a:solidFill>
                   <a:srgbClr val="0B1426"/>
                 </a:solidFill>
@@ -7353,62 +7768,32 @@
               </a:defRPr>
             </a:pPr>
             <a:r>
-              <a:t>•  Solves non-linear quartic radiative flux at every boundary face.</a:t>
-            </a:r>
-          </a:p>
-          <a:p>
-            <a:pPr>
-              <a:spcAft>
-                <a:spcPts val="1000"/>
-              </a:spcAft>
-              <a:defRPr sz="1400">
-                <a:solidFill>
-                  <a:srgbClr val="0B1426"/>
-                </a:solidFill>
-                <a:latin typeface="Calibri"/>
-              </a:defRPr>
-            </a:pPr>
-            <a:r>
-              <a:t>•  Enforces local face heat balance by construction during each PIMPLE step.</a:t>
-            </a:r>
-          </a:p>
-          <a:p>
-            <a:pPr>
-              <a:spcAft>
-                <a:spcPts val="1000"/>
-              </a:spcAft>
-              <a:defRPr sz="1400">
-                <a:solidFill>
-                  <a:srgbClr val="0B1426"/>
-                </a:solidFill>
-                <a:latin typeface="Calibri"/>
-              </a:defRPr>
-            </a:pPr>
-            <a:r>
-              <a:t>•  Newton-Raphson scheme converges to double precision within four iterations.</a:t>
-            </a:r>
-          </a:p>
-        </p:txBody>
-      </p:sp>
-      <p:sp>
-        <p:nvSpPr>
-          <p:cNvPr id="9" name="Rounded Rectangle 8"/>
+              <a:t>Grey-diffuse emissivity to 300 K external enclosure</a:t>
+            </a:r>
+          </a:p>
+        </p:txBody>
+      </p:sp>
+      <p:sp>
+        <p:nvSpPr>
+          <p:cNvPr id="11" name="Rounded Rectangle 10"/>
           <p:cNvSpPr/>
           <p:nvPr/>
         </p:nvSpPr>
         <p:spPr>
           <a:xfrm>
-            <a:off x="6858000" y="3840480"/>
-            <a:ext cx="2148840" cy="1645920"/>
+            <a:off x="9464040" y="4389120"/>
+            <a:ext cx="2148840" cy="1737360"/>
           </a:xfrm>
           <a:prstGeom prst="roundRect">
             <a:avLst/>
           </a:prstGeom>
           <a:solidFill>
-            <a:srgbClr val="EEF2F7"/>
+            <a:srgbClr val="FFFFFF"/>
           </a:solidFill>
-          <a:ln>
-            <a:noFill/>
+          <a:ln w="12700">
+            <a:solidFill>
+              <a:srgbClr val="DCE2EC"/>
+            </a:solidFill>
           </a:ln>
         </p:spPr>
         <p:style>
@@ -7435,14 +7820,14 @@
       </p:sp>
       <p:sp>
         <p:nvSpPr>
-          <p:cNvPr id="10" name="TextBox 9"/>
+          <p:cNvPr id="12" name="TextBox 11"/>
           <p:cNvSpPr txBox="1"/>
           <p:nvPr/>
         </p:nvSpPr>
         <p:spPr>
           <a:xfrm>
-            <a:off x="6995160" y="3977639"/>
-            <a:ext cx="1874519" cy="1371600"/>
+            <a:off x="9601200" y="4526280"/>
+            <a:ext cx="1874519" cy="1463040"/>
           </a:xfrm>
           <a:prstGeom prst="rect">
             <a:avLst/>
@@ -7450,105 +7835,13 @@
           <a:noFill/>
         </p:spPr>
         <p:txBody>
-          <a:bodyPr wrap="square" lIns="0" tIns="0" rIns="0" bIns="0">
+          <a:bodyPr wrap="square" lIns="0" tIns="0">
             <a:spAutoFit/>
           </a:bodyPr>
           <a:lstStyle/>
           <a:p>
             <a:pPr>
-              <a:defRPr sz="2600" b="1">
-                <a:solidFill>
-                  <a:srgbClr val="FF7A1A"/>
-                </a:solidFill>
-                <a:latin typeface="Cambria"/>
-              </a:defRPr>
-            </a:pPr>
-            <a:r>
-              <a:t>ε = 0.8</a:t>
-            </a:r>
-          </a:p>
-          <a:p>
-            <a:pPr>
-              <a:defRPr sz="1100">
-                <a:solidFill>
-                  <a:srgbClr val="0B1426"/>
-                </a:solidFill>
-                <a:latin typeface="Calibri"/>
-              </a:defRPr>
-            </a:pPr>
-            <a:r>
-              <a:t>Grey-diffuse emissivity to 300 K external enclosure</a:t>
-            </a:r>
-          </a:p>
-        </p:txBody>
-      </p:sp>
-      <p:sp>
-        <p:nvSpPr>
-          <p:cNvPr id="11" name="Rounded Rectangle 10"/>
-          <p:cNvSpPr/>
-          <p:nvPr/>
-        </p:nvSpPr>
-        <p:spPr>
-          <a:xfrm>
-            <a:off x="9189720" y="3840480"/>
-            <a:ext cx="2148840" cy="1645920"/>
-          </a:xfrm>
-          <a:prstGeom prst="roundRect">
-            <a:avLst/>
-          </a:prstGeom>
-          <a:solidFill>
-            <a:srgbClr val="EEF2F7"/>
-          </a:solidFill>
-          <a:ln>
-            <a:noFill/>
-          </a:ln>
-        </p:spPr>
-        <p:style>
-          <a:lnRef idx="1">
-            <a:schemeClr val="accent1"/>
-          </a:lnRef>
-          <a:fillRef idx="3">
-            <a:schemeClr val="accent1"/>
-          </a:fillRef>
-          <a:effectRef idx="2">
-            <a:schemeClr val="accent1"/>
-          </a:effectRef>
-          <a:fontRef idx="minor">
-            <a:schemeClr val="lt1"/>
-          </a:fontRef>
-        </p:style>
-        <p:txBody>
-          <a:bodyPr rtlCol="0" anchor="ctr"/>
-          <a:lstStyle/>
-          <a:p>
-            <a:pPr algn="ctr"/>
-          </a:p>
-        </p:txBody>
-      </p:sp>
-      <p:sp>
-        <p:nvSpPr>
-          <p:cNvPr id="12" name="TextBox 11"/>
-          <p:cNvSpPr txBox="1"/>
-          <p:nvPr/>
-        </p:nvSpPr>
-        <p:spPr>
-          <a:xfrm>
-            <a:off x="9326880" y="3977639"/>
-            <a:ext cx="1874519" cy="1371600"/>
-          </a:xfrm>
-          <a:prstGeom prst="rect">
-            <a:avLst/>
-          </a:prstGeom>
-          <a:noFill/>
-        </p:spPr>
-        <p:txBody>
-          <a:bodyPr wrap="square" lIns="0" tIns="0" rIns="0" bIns="0">
-            <a:spAutoFit/>
-          </a:bodyPr>
-          <a:lstStyle/>
-          <a:p>
-            <a:pPr>
-              <a:defRPr sz="2600" b="1">
+              <a:defRPr sz="2800" b="1">
                 <a:solidFill>
                   <a:srgbClr val="23B5D3"/>
                 </a:solidFill>
@@ -7640,7 +7933,7 @@
           <a:lstStyle/>
           <a:p>
             <a:pPr>
-              <a:defRPr sz="3400" b="1">
+              <a:defRPr sz="3200" b="1">
                 <a:solidFill>
                   <a:srgbClr val="0B1426"/>
                 </a:solidFill>
@@ -7661,7 +7954,7 @@
         </p:nvSpPr>
         <p:spPr>
           <a:xfrm>
-            <a:off x="11155680" y="6400800"/>
+            <a:off x="11064240" y="6400800"/>
             <a:ext cx="548640" cy="274320"/>
           </a:xfrm>
           <a:prstGeom prst="rect">
@@ -7676,7 +7969,7 @@
           <a:lstStyle/>
           <a:p>
             <a:pPr algn="r">
-              <a:defRPr sz="1200">
+              <a:defRPr sz="1100">
                 <a:solidFill>
                   <a:srgbClr val="7C8DB5"/>
                 </a:solidFill>
@@ -7697,8 +7990,8 @@
         </p:nvSpPr>
         <p:spPr>
           <a:xfrm>
-            <a:off x="548640" y="1463040"/>
-            <a:ext cx="6766560" cy="4663440"/>
+            <a:off x="548640" y="1371600"/>
+            <a:ext cx="6583680" cy="4754880"/>
           </a:xfrm>
           <a:prstGeom prst="roundRect">
             <a:avLst/>
@@ -7750,8 +8043,8 @@
         </p:blipFill>
         <p:spPr>
           <a:xfrm>
-            <a:off x="731520" y="2292593"/>
-            <a:ext cx="6400800" cy="2684292"/>
+            <a:off x="731520" y="2285220"/>
+            <a:ext cx="6217920" cy="2607598"/>
           </a:xfrm>
           <a:prstGeom prst="rect">
             <a:avLst/>
@@ -7767,7 +8060,7 @@
         <p:spPr>
           <a:xfrm>
             <a:off x="731520" y="5696712"/>
-            <a:ext cx="6400800" cy="320040"/>
+            <a:ext cx="6217920" cy="320040"/>
           </a:xfrm>
           <a:prstGeom prst="rect">
             <a:avLst/>
@@ -7796,14 +8089,121 @@
       </p:sp>
       <p:sp>
         <p:nvSpPr>
-          <p:cNvPr id="8" name="Rounded Rectangle 7"/>
+          <p:cNvPr id="8" name="TextBox 7"/>
+          <p:cNvSpPr txBox="1"/>
+          <p:nvPr/>
+        </p:nvSpPr>
+        <p:spPr>
+          <a:xfrm>
+            <a:off x="7498079" y="1371600"/>
+            <a:ext cx="4114800" cy="365760"/>
+          </a:xfrm>
+          <a:prstGeom prst="rect">
+            <a:avLst/>
+          </a:prstGeom>
+          <a:noFill/>
+        </p:spPr>
+        <p:txBody>
+          <a:bodyPr wrap="none" lIns="0" tIns="0">
+            <a:spAutoFit/>
+          </a:bodyPr>
+          <a:lstStyle/>
+          <a:p>
+            <a:pPr>
+              <a:defRPr sz="2200" b="1">
+                <a:solidFill>
+                  <a:srgbClr val="0B1426"/>
+                </a:solidFill>
+                <a:latin typeface="Cambria"/>
+              </a:defRPr>
+            </a:pPr>
+            <a:r>
+              <a:t>Numerical Formulation</a:t>
+            </a:r>
+          </a:p>
+        </p:txBody>
+      </p:sp>
+      <p:sp>
+        <p:nvSpPr>
+          <p:cNvPr id="9" name="TextBox 8"/>
+          <p:cNvSpPr txBox="1"/>
+          <p:nvPr/>
+        </p:nvSpPr>
+        <p:spPr>
+          <a:xfrm>
+            <a:off x="7498079" y="1874519"/>
+            <a:ext cx="4114800" cy="2011680"/>
+          </a:xfrm>
+          <a:prstGeom prst="rect">
+            <a:avLst/>
+          </a:prstGeom>
+          <a:noFill/>
+        </p:spPr>
+        <p:txBody>
+          <a:bodyPr wrap="square" lIns="0" tIns="0" rIns="0" bIns="0">
+            <a:spAutoFit/>
+          </a:bodyPr>
+          <a:lstStyle/>
+          <a:p>
+            <a:pPr>
+              <a:spcAft>
+                <a:spcPts val="1200"/>
+              </a:spcAft>
+              <a:defRPr sz="1400">
+                <a:solidFill>
+                  <a:srgbClr val="0B1426"/>
+                </a:solidFill>
+                <a:latin typeface="Calibri"/>
+              </a:defRPr>
+            </a:pPr>
+            <a:r>
+              <a:t>•  Solved with OpenFOAM 13 foamRun using steady-state PIMPLE algorithm.</a:t>
+            </a:r>
+          </a:p>
+          <a:p>
+            <a:pPr>
+              <a:spcAft>
+                <a:spcPts val="1200"/>
+              </a:spcAft>
+              <a:defRPr sz="1400">
+                <a:solidFill>
+                  <a:srgbClr val="0B1426"/>
+                </a:solidFill>
+                <a:latin typeface="Calibri"/>
+              </a:defRPr>
+            </a:pPr>
+            <a:r>
+              <a:t>•  Residuals fall by 5+ orders, reaching monotonic asymptotic plateau.</a:t>
+            </a:r>
+          </a:p>
+          <a:p>
+            <a:pPr>
+              <a:spcAft>
+                <a:spcPts val="1200"/>
+              </a:spcAft>
+              <a:defRPr sz="1400">
+                <a:solidFill>
+                  <a:srgbClr val="0B1426"/>
+                </a:solidFill>
+                <a:latin typeface="Calibri"/>
+              </a:defRPr>
+            </a:pPr>
+            <a:r>
+              <a:t>•  Constant properties decouple momentum from temperature under zero gravity.</a:t>
+            </a:r>
+          </a:p>
+        </p:txBody>
+      </p:sp>
+      <p:sp>
+        <p:nvSpPr>
+          <p:cNvPr id="10" name="Rounded Rectangle 9"/>
           <p:cNvSpPr/>
           <p:nvPr/>
         </p:nvSpPr>
         <p:spPr>
           <a:xfrm>
-            <a:off x="7589520" y="1463040"/>
-            <a:ext cx="4023360" cy="4663440"/>
+            <a:off x="7498079" y="4114800"/>
+            <a:ext cx="4114800" cy="594360"/>
           </a:xfrm>
           <a:prstGeom prst="roundRect">
             <a:avLst/>
@@ -7841,14 +8241,14 @@
       </p:sp>
       <p:sp>
         <p:nvSpPr>
-          <p:cNvPr id="9" name="TextBox 8"/>
+          <p:cNvPr id="11" name="TextBox 10"/>
           <p:cNvSpPr txBox="1"/>
           <p:nvPr/>
         </p:nvSpPr>
         <p:spPr>
           <a:xfrm>
-            <a:off x="7863840" y="1737360"/>
-            <a:ext cx="3474720" cy="4114800"/>
+            <a:off x="7680960" y="4178808"/>
+            <a:ext cx="3749039" cy="457200"/>
           </a:xfrm>
           <a:prstGeom prst="rect">
             <a:avLst/>
@@ -7856,79 +8256,46 @@
           <a:noFill/>
         </p:spPr>
         <p:txBody>
-          <a:bodyPr wrap="square" lIns="0" tIns="0" rIns="0" bIns="0">
+          <a:bodyPr wrap="none" lIns="0" tIns="0">
             <a:spAutoFit/>
           </a:bodyPr>
           <a:lstStyle/>
           <a:p>
             <a:pPr>
-              <a:spcAft>
-                <a:spcPts val="1000"/>
-              </a:spcAft>
               <a:defRPr sz="1400" b="1">
                 <a:solidFill>
                   <a:srgbClr val="0B1426"/>
                 </a:solidFill>
-                <a:latin typeface="Calibri"/>
-              </a:defRPr>
-            </a:pPr>
-            <a:r>
-              <a:t>•  Solved with OpenFOAM 13 foamRun using steady-state PIMPLE algorithm.</a:t>
-            </a:r>
-          </a:p>
-          <a:p>
-            <a:pPr>
-              <a:spcAft>
-                <a:spcPts val="1000"/>
-              </a:spcAft>
-              <a:defRPr sz="1400">
-                <a:solidFill>
-                  <a:srgbClr val="0B1426"/>
-                </a:solidFill>
-                <a:latin typeface="Calibri"/>
-              </a:defRPr>
-            </a:pPr>
-            <a:r>
-              <a:t>•  Residuals fall by 5+ orders, reaching monotonic asymptotic plateau.</a:t>
-            </a:r>
-          </a:p>
-          <a:p>
-            <a:pPr>
-              <a:spcAft>
-                <a:spcPts val="1000"/>
-              </a:spcAft>
-              <a:defRPr sz="1400">
-                <a:solidFill>
-                  <a:srgbClr val="0B1426"/>
-                </a:solidFill>
-                <a:latin typeface="Calibri"/>
-              </a:defRPr>
-            </a:pPr>
-            <a:r>
-              <a:t>•  Constant properties decouple momentum from temperature under zero gravity.</a:t>
-            </a:r>
-          </a:p>
-        </p:txBody>
-      </p:sp>
-      <p:sp>
-        <p:nvSpPr>
-          <p:cNvPr id="10" name="Rounded Rectangle 9"/>
+                <a:latin typeface="Cambria"/>
+              </a:defRPr>
+            </a:pPr>
+            <a:r>
+              <a:t>1,500  Iterations Completed</a:t>
+            </a:r>
+          </a:p>
+        </p:txBody>
+      </p:sp>
+      <p:sp>
+        <p:nvSpPr>
+          <p:cNvPr id="12" name="Rounded Rectangle 11"/>
           <p:cNvSpPr/>
           <p:nvPr/>
         </p:nvSpPr>
         <p:spPr>
           <a:xfrm>
-            <a:off x="7863840" y="3977639"/>
-            <a:ext cx="3474720" cy="594360"/>
+            <a:off x="7498079" y="4800600"/>
+            <a:ext cx="4114800" cy="594360"/>
           </a:xfrm>
           <a:prstGeom prst="roundRect">
             <a:avLst/>
           </a:prstGeom>
           <a:solidFill>
-            <a:srgbClr val="EEF2F7"/>
+            <a:srgbClr val="FFFFFF"/>
           </a:solidFill>
-          <a:ln>
-            <a:noFill/>
+          <a:ln w="12700">
+            <a:solidFill>
+              <a:srgbClr val="DCE2EC"/>
+            </a:solidFill>
           </a:ln>
         </p:spPr>
         <p:style>
@@ -7955,14 +8322,14 @@
       </p:sp>
       <p:sp>
         <p:nvSpPr>
-          <p:cNvPr id="11" name="TextBox 10"/>
+          <p:cNvPr id="13" name="TextBox 12"/>
           <p:cNvSpPr txBox="1"/>
           <p:nvPr/>
         </p:nvSpPr>
         <p:spPr>
           <a:xfrm>
-            <a:off x="8001000" y="4041648"/>
-            <a:ext cx="3200400" cy="457200"/>
+            <a:off x="7680960" y="4864608"/>
+            <a:ext cx="3749039" cy="457200"/>
           </a:xfrm>
           <a:prstGeom prst="rect">
             <a:avLst/>
@@ -7978,36 +8345,38 @@
             <a:pPr>
               <a:defRPr sz="1400" b="1">
                 <a:solidFill>
-                  <a:srgbClr val="0B1426"/>
+                  <a:srgbClr val="FF7A1A"/>
                 </a:solidFill>
                 <a:latin typeface="Cambria"/>
               </a:defRPr>
             </a:pPr>
             <a:r>
-              <a:t>1,500  Iterations Completed</a:t>
-            </a:r>
-          </a:p>
-        </p:txBody>
-      </p:sp>
-      <p:sp>
-        <p:nvSpPr>
-          <p:cNvPr id="12" name="Rounded Rectangle 11"/>
+              <a:t>&gt; 10⁻⁵  Residual Reduction</a:t>
+            </a:r>
+          </a:p>
+        </p:txBody>
+      </p:sp>
+      <p:sp>
+        <p:nvSpPr>
+          <p:cNvPr id="14" name="Rounded Rectangle 13"/>
           <p:cNvSpPr/>
           <p:nvPr/>
         </p:nvSpPr>
         <p:spPr>
           <a:xfrm>
-            <a:off x="7863840" y="4663440"/>
-            <a:ext cx="3474720" cy="594360"/>
+            <a:off x="7498079" y="5486400"/>
+            <a:ext cx="4114800" cy="594360"/>
           </a:xfrm>
           <a:prstGeom prst="roundRect">
             <a:avLst/>
           </a:prstGeom>
           <a:solidFill>
-            <a:srgbClr val="EEF2F7"/>
+            <a:srgbClr val="FFFFFF"/>
           </a:solidFill>
-          <a:ln>
-            <a:noFill/>
+          <a:ln w="12700">
+            <a:solidFill>
+              <a:srgbClr val="DCE2EC"/>
+            </a:solidFill>
           </a:ln>
         </p:spPr>
         <p:style>
@@ -8034,93 +8403,14 @@
       </p:sp>
       <p:sp>
         <p:nvSpPr>
-          <p:cNvPr id="13" name="TextBox 12"/>
-          <p:cNvSpPr txBox="1"/>
-          <p:nvPr/>
-        </p:nvSpPr>
-        <p:spPr>
-          <a:xfrm>
-            <a:off x="8001000" y="4727448"/>
-            <a:ext cx="3200400" cy="457200"/>
-          </a:xfrm>
-          <a:prstGeom prst="rect">
-            <a:avLst/>
-          </a:prstGeom>
-          <a:noFill/>
-        </p:spPr>
-        <p:txBody>
-          <a:bodyPr wrap="none" lIns="0" tIns="0">
-            <a:spAutoFit/>
-          </a:bodyPr>
-          <a:lstStyle/>
-          <a:p>
-            <a:pPr>
-              <a:defRPr sz="1400" b="1">
-                <a:solidFill>
-                  <a:srgbClr val="FF7A1A"/>
-                </a:solidFill>
-                <a:latin typeface="Cambria"/>
-              </a:defRPr>
-            </a:pPr>
-            <a:r>
-              <a:t>&gt; 10⁻⁵  Residual Reduction</a:t>
-            </a:r>
-          </a:p>
-        </p:txBody>
-      </p:sp>
-      <p:sp>
-        <p:nvSpPr>
-          <p:cNvPr id="14" name="Rounded Rectangle 13"/>
-          <p:cNvSpPr/>
-          <p:nvPr/>
-        </p:nvSpPr>
-        <p:spPr>
-          <a:xfrm>
-            <a:off x="7863840" y="5349240"/>
-            <a:ext cx="3474720" cy="594360"/>
-          </a:xfrm>
-          <a:prstGeom prst="roundRect">
-            <a:avLst/>
-          </a:prstGeom>
-          <a:solidFill>
-            <a:srgbClr val="EEF2F7"/>
-          </a:solidFill>
-          <a:ln>
-            <a:noFill/>
-          </a:ln>
-        </p:spPr>
-        <p:style>
-          <a:lnRef idx="1">
-            <a:schemeClr val="accent1"/>
-          </a:lnRef>
-          <a:fillRef idx="3">
-            <a:schemeClr val="accent1"/>
-          </a:fillRef>
-          <a:effectRef idx="2">
-            <a:schemeClr val="accent1"/>
-          </a:effectRef>
-          <a:fontRef idx="minor">
-            <a:schemeClr val="lt1"/>
-          </a:fontRef>
-        </p:style>
-        <p:txBody>
-          <a:bodyPr rtlCol="0" anchor="ctr"/>
-          <a:lstStyle/>
-          <a:p>
-            <a:pPr algn="ctr"/>
-          </a:p>
-        </p:txBody>
-      </p:sp>
-      <p:sp>
-        <p:nvSpPr>
           <p:cNvPr id="15" name="TextBox 14"/>
           <p:cNvSpPr txBox="1"/>
           <p:nvPr/>
         </p:nvSpPr>
         <p:spPr>
           <a:xfrm>
-            <a:off x="8001000" y="5413248"/>
-            <a:ext cx="3200400" cy="457200"/>
+            <a:off x="7680960" y="5550408"/>
+            <a:ext cx="3749039" cy="457200"/>
           </a:xfrm>
           <a:prstGeom prst="rect">
             <a:avLst/>
@@ -8213,7 +8503,7 @@
           <a:lstStyle/>
           <a:p>
             <a:pPr>
-              <a:defRPr sz="3400" b="1">
+              <a:defRPr sz="3200" b="1">
                 <a:solidFill>
                   <a:srgbClr val="0B1426"/>
                 </a:solidFill>
@@ -8234,7 +8524,7 @@
         </p:nvSpPr>
         <p:spPr>
           <a:xfrm>
-            <a:off x="11155680" y="6400800"/>
+            <a:off x="11064240" y="6400800"/>
             <a:ext cx="548640" cy="274320"/>
           </a:xfrm>
           <a:prstGeom prst="rect">
@@ -8249,7 +8539,7 @@
           <a:lstStyle/>
           <a:p>
             <a:pPr algn="r">
-              <a:defRPr sz="1200">
+              <a:defRPr sz="1100">
                 <a:solidFill>
                   <a:srgbClr val="7C8DB5"/>
                 </a:solidFill>
@@ -8270,8 +8560,8 @@
         </p:nvSpPr>
         <p:spPr>
           <a:xfrm>
-            <a:off x="548640" y="1463040"/>
-            <a:ext cx="6583680" cy="4663440"/>
+            <a:off x="548640" y="1371600"/>
+            <a:ext cx="6583680" cy="4754880"/>
           </a:xfrm>
           <a:prstGeom prst="roundRect">
             <a:avLst/>
@@ -8323,7 +8613,7 @@
         </p:blipFill>
         <p:spPr>
           <a:xfrm>
-            <a:off x="731520" y="2510346"/>
+            <a:off x="731520" y="2464626"/>
             <a:ext cx="6217920" cy="2248787"/>
           </a:xfrm>
           <a:prstGeom prst="rect">
@@ -8375,8 +8665,8 @@
         </p:nvSpPr>
         <p:spPr>
           <a:xfrm>
-            <a:off x="7406640" y="1463040"/>
-            <a:ext cx="4206240" cy="1325880"/>
+            <a:off x="7498079" y="1371600"/>
+            <a:ext cx="4114800" cy="1280160"/>
           </a:xfrm>
           <a:prstGeom prst="roundRect">
             <a:avLst/>
@@ -8420,8 +8710,8 @@
         </p:nvSpPr>
         <p:spPr>
           <a:xfrm>
-            <a:off x="7589520" y="1554480"/>
-            <a:ext cx="3840480" cy="1143000"/>
+            <a:off x="7680960" y="1463040"/>
+            <a:ext cx="3749039" cy="1097280"/>
           </a:xfrm>
           <a:prstGeom prst="rect">
             <a:avLst/>
@@ -8429,7 +8719,7 @@
           <a:noFill/>
         </p:spPr>
         <p:txBody>
-          <a:bodyPr wrap="square" lIns="0" tIns="0" rIns="0" bIns="0">
+          <a:bodyPr wrap="square" lIns="0" tIns="0">
             <a:spAutoFit/>
           </a:bodyPr>
           <a:lstStyle/>
@@ -8482,8 +8772,8 @@
         </p:nvSpPr>
         <p:spPr>
           <a:xfrm>
-            <a:off x="7406640" y="2926080"/>
-            <a:ext cx="4206240" cy="1325880"/>
+            <a:off x="7498079" y="2788920"/>
+            <a:ext cx="4114800" cy="1280160"/>
           </a:xfrm>
           <a:prstGeom prst="roundRect">
             <a:avLst/>
@@ -8527,8 +8817,70 @@
         </p:nvSpPr>
         <p:spPr>
           <a:xfrm>
-            <a:off x="7589520" y="3017520"/>
-            <a:ext cx="3840480" cy="1143000"/>
+            <a:off x="7680960" y="2880360"/>
+            <a:ext cx="3749039" cy="1097280"/>
+          </a:xfrm>
+          <a:prstGeom prst="rect">
+            <a:avLst/>
+          </a:prstGeom>
+          <a:noFill/>
+        </p:spPr>
+        <p:txBody>
+          <a:bodyPr wrap="square" lIns="0" tIns="0">
+            <a:spAutoFit/>
+          </a:bodyPr>
+          <a:lstStyle/>
+          <a:p>
+            <a:pPr>
+              <a:defRPr sz="3600" b="1">
+                <a:solidFill>
+                  <a:srgbClr val="23B5D3"/>
+                </a:solidFill>
+                <a:latin typeface="Cambria"/>
+              </a:defRPr>
+            </a:pPr>
+            <a:r>
+              <a:t>21.6%</a:t>
+            </a:r>
+          </a:p>
+          <a:p>
+            <a:pPr>
+              <a:defRPr sz="1300" b="1">
+                <a:solidFill>
+                  <a:srgbClr val="0B1426"/>
+                </a:solidFill>
+                <a:latin typeface="Calibri"/>
+              </a:defRPr>
+            </a:pPr>
+            <a:r>
+              <a:t>Trailing-Edge Radiative Load</a:t>
+            </a:r>
+          </a:p>
+          <a:p>
+            <a:pPr>
+              <a:defRPr sz="1100">
+                <a:solidFill>
+                  <a:srgbClr val="7C8DB5"/>
+                </a:solidFill>
+                <a:latin typeface="Calibri"/>
+              </a:defRPr>
+            </a:pPr>
+            <a:r>
+              <a:t>Trailing flux: 215.6 W/m² at x = 1.0 m</a:t>
+            </a:r>
+          </a:p>
+        </p:txBody>
+      </p:sp>
+      <p:sp>
+        <p:nvSpPr>
+          <p:cNvPr id="12" name="TextBox 11"/>
+          <p:cNvSpPr txBox="1"/>
+          <p:nvPr/>
+        </p:nvSpPr>
+        <p:spPr>
+          <a:xfrm>
+            <a:off x="7498079" y="4251960"/>
+            <a:ext cx="4114800" cy="1828800"/>
           </a:xfrm>
           <a:prstGeom prst="rect">
             <a:avLst/>
@@ -8542,20 +8894,10 @@
           <a:lstStyle/>
           <a:p>
             <a:pPr>
-              <a:defRPr sz="3600" b="1">
-                <a:solidFill>
-                  <a:srgbClr val="23B5D3"/>
-                </a:solidFill>
-                <a:latin typeface="Cambria"/>
-              </a:defRPr>
-            </a:pPr>
-            <a:r>
-              <a:t>21.6%</a:t>
-            </a:r>
-          </a:p>
-          <a:p>
-            <a:pPr>
-              <a:defRPr sz="1300" b="1">
+              <a:spcAft>
+                <a:spcPts val="1200"/>
+              </a:spcAft>
+              <a:defRPr sz="1300">
                 <a:solidFill>
                   <a:srgbClr val="0B1426"/>
                 </a:solidFill>
@@ -8563,96 +8905,15 @@
               </a:defRPr>
             </a:pPr>
             <a:r>
-              <a:t>Trailing-Edge Radiative Load</a:t>
-            </a:r>
-          </a:p>
-          <a:p>
-            <a:pPr>
-              <a:defRPr sz="1100">
-                <a:solidFill>
-                  <a:srgbClr val="7C8DB5"/>
-                </a:solidFill>
-                <a:latin typeface="Calibri"/>
-              </a:defRPr>
-            </a:pPr>
-            <a:r>
-              <a:t>Trailing flux: 215.6 W/m² at x = 1.0 m</a:t>
-            </a:r>
-          </a:p>
-        </p:txBody>
-      </p:sp>
-      <p:sp>
-        <p:nvSpPr>
-          <p:cNvPr id="12" name="Rounded Rectangle 11"/>
-          <p:cNvSpPr/>
-          <p:nvPr/>
-        </p:nvSpPr>
-        <p:spPr>
-          <a:xfrm>
-            <a:off x="7406640" y="4389120"/>
-            <a:ext cx="4206240" cy="1737360"/>
-          </a:xfrm>
-          <a:prstGeom prst="roundRect">
-            <a:avLst/>
-          </a:prstGeom>
-          <a:solidFill>
-            <a:srgbClr val="FFFFFF"/>
-          </a:solidFill>
-          <a:ln w="12700">
-            <a:solidFill>
-              <a:srgbClr val="DCE2EC"/>
-            </a:solidFill>
-          </a:ln>
-        </p:spPr>
-        <p:style>
-          <a:lnRef idx="1">
-            <a:schemeClr val="accent1"/>
-          </a:lnRef>
-          <a:fillRef idx="3">
-            <a:schemeClr val="accent1"/>
-          </a:fillRef>
-          <a:effectRef idx="2">
-            <a:schemeClr val="accent1"/>
-          </a:effectRef>
-          <a:fontRef idx="minor">
-            <a:schemeClr val="lt1"/>
-          </a:fontRef>
-        </p:style>
-        <p:txBody>
-          <a:bodyPr rtlCol="0" anchor="ctr"/>
-          <a:lstStyle/>
-          <a:p>
-            <a:pPr algn="ctr"/>
-          </a:p>
-        </p:txBody>
-      </p:sp>
-      <p:sp>
-        <p:nvSpPr>
-          <p:cNvPr id="13" name="TextBox 12"/>
-          <p:cNvSpPr txBox="1"/>
-          <p:nvPr/>
-        </p:nvSpPr>
-        <p:spPr>
-          <a:xfrm>
-            <a:off x="7589520" y="4480560"/>
-            <a:ext cx="3840480" cy="1554480"/>
-          </a:xfrm>
-          <a:prstGeom prst="rect">
-            <a:avLst/>
-          </a:prstGeom>
-          <a:noFill/>
-        </p:spPr>
-        <p:txBody>
-          <a:bodyPr wrap="square" lIns="0" tIns="0" rIns="0" bIns="0">
-            <a:spAutoFit/>
-          </a:bodyPr>
-          <a:lstStyle/>
+              <a:t>•  Surface radiation relieves over one-fifth of the total heat dissipation load.</a:t>
+            </a:r>
+          </a:p>
           <a:p>
             <a:pPr>
               <a:spcAft>
-                <a:spcPts val="1000"/>
+                <a:spcPts val="1200"/>
               </a:spcAft>
-              <a:defRPr sz="1200">
+              <a:defRPr sz="1300">
                 <a:solidFill>
                   <a:srgbClr val="0B1426"/>
                 </a:solidFill>
@@ -8660,31 +8921,15 @@
               </a:defRPr>
             </a:pPr>
             <a:r>
-              <a:t>•  Surface radiation relieves over one-fifth of the total heat dissipation load.</a:t>
+              <a:t>•  Radiative heat flux remains nearly uniform along the entire plate surface.</a:t>
             </a:r>
           </a:p>
           <a:p>
             <a:pPr>
               <a:spcAft>
-                <a:spcPts val="1000"/>
+                <a:spcPts val="1200"/>
               </a:spcAft>
-              <a:defRPr sz="1200">
-                <a:solidFill>
-                  <a:srgbClr val="0B1426"/>
-                </a:solidFill>
-                <a:latin typeface="Calibri"/>
-              </a:defRPr>
-            </a:pPr>
-            <a:r>
-              <a:t>•  Radiative heat flux remains nearly uniform along the entire plate surface.</a:t>
-            </a:r>
-          </a:p>
-          <a:p>
-            <a:pPr>
-              <a:spcAft>
-                <a:spcPts val="1000"/>
-              </a:spcAft>
-              <a:defRPr sz="1200">
+              <a:defRPr sz="1300">
                 <a:solidFill>
                   <a:srgbClr val="0B1426"/>
                 </a:solidFill>
@@ -8763,7 +9008,7 @@
           <a:lstStyle/>
           <a:p>
             <a:pPr>
-              <a:defRPr sz="3400" b="1">
+              <a:defRPr sz="3200" b="1">
                 <a:solidFill>
                   <a:srgbClr val="0B1426"/>
                 </a:solidFill>
@@ -8784,7 +9029,7 @@
         </p:nvSpPr>
         <p:spPr>
           <a:xfrm>
-            <a:off x="11155680" y="6400800"/>
+            <a:off x="11064240" y="6400800"/>
             <a:ext cx="548640" cy="274320"/>
           </a:xfrm>
           <a:prstGeom prst="rect">
@@ -8799,7 +9044,7 @@
           <a:lstStyle/>
           <a:p>
             <a:pPr algn="r">
-              <a:defRPr sz="1200">
+              <a:defRPr sz="1100">
                 <a:solidFill>
                   <a:srgbClr val="7C8DB5"/>
                 </a:solidFill>
@@ -8820,8 +9065,8 @@
         </p:nvSpPr>
         <p:spPr>
           <a:xfrm>
-            <a:off x="548640" y="1463040"/>
-            <a:ext cx="6766560" cy="4663440"/>
+            <a:off x="548640" y="1371600"/>
+            <a:ext cx="6583680" cy="4754880"/>
           </a:xfrm>
           <a:prstGeom prst="roundRect">
             <a:avLst/>
@@ -8873,8 +9118,8 @@
         </p:blipFill>
         <p:spPr>
           <a:xfrm>
-            <a:off x="731520" y="2241163"/>
-            <a:ext cx="6400800" cy="2787153"/>
+            <a:off x="731520" y="2235259"/>
+            <a:ext cx="6217920" cy="2707520"/>
           </a:xfrm>
           <a:prstGeom prst="rect">
             <a:avLst/>
@@ -8890,7 +9135,7 @@
         <p:spPr>
           <a:xfrm>
             <a:off x="731520" y="5696712"/>
-            <a:ext cx="6400800" cy="320040"/>
+            <a:ext cx="6217920" cy="320040"/>
           </a:xfrm>
           <a:prstGeom prst="rect">
             <a:avLst/>
@@ -8925,8 +9170,8 @@
         </p:nvSpPr>
         <p:spPr>
           <a:xfrm>
-            <a:off x="7589520" y="1463040"/>
-            <a:ext cx="4023360" cy="4663440"/>
+            <a:off x="7498079" y="1371600"/>
+            <a:ext cx="4114800" cy="1280160"/>
           </a:xfrm>
           <a:prstGeom prst="roundRect">
             <a:avLst/>
@@ -8964,44 +9209,50 @@
       </p:sp>
       <p:sp>
         <p:nvSpPr>
-          <p:cNvPr id="9" name="Rounded Rectangle 8"/>
-          <p:cNvSpPr/>
-          <p:nvPr/>
-        </p:nvSpPr>
-        <p:spPr>
-          <a:xfrm>
-            <a:off x="7863840" y="1737360"/>
-            <a:ext cx="3474720" cy="1097280"/>
-          </a:xfrm>
-          <a:prstGeom prst="roundRect">
-            <a:avLst/>
-          </a:prstGeom>
-          <a:solidFill>
-            <a:srgbClr val="EEF2F7"/>
-          </a:solidFill>
-          <a:ln>
-            <a:noFill/>
-          </a:ln>
-        </p:spPr>
-        <p:style>
-          <a:lnRef idx="1">
-            <a:schemeClr val="accent1"/>
-          </a:lnRef>
-          <a:fillRef idx="3">
-            <a:schemeClr val="accent1"/>
-          </a:fillRef>
-          <a:effectRef idx="2">
-            <a:schemeClr val="accent1"/>
-          </a:effectRef>
-          <a:fontRef idx="minor">
-            <a:schemeClr val="lt1"/>
-          </a:fontRef>
-        </p:style>
-        <p:txBody>
-          <a:bodyPr rtlCol="0" anchor="ctr"/>
-          <a:lstStyle/>
-          <a:p>
-            <a:pPr algn="ctr"/>
+          <p:cNvPr id="9" name="TextBox 8"/>
+          <p:cNvSpPr txBox="1"/>
+          <p:nvPr/>
+        </p:nvSpPr>
+        <p:spPr>
+          <a:xfrm>
+            <a:off x="7680960" y="1463040"/>
+            <a:ext cx="3749039" cy="1097280"/>
+          </a:xfrm>
+          <a:prstGeom prst="rect">
+            <a:avLst/>
+          </a:prstGeom>
+          <a:noFill/>
+        </p:spPr>
+        <p:txBody>
+          <a:bodyPr wrap="square" lIns="0" tIns="0">
+            <a:spAutoFit/>
+          </a:bodyPr>
+          <a:lstStyle/>
+          <a:p>
+            <a:pPr>
+              <a:defRPr sz="3600" b="1">
+                <a:solidFill>
+                  <a:srgbClr val="23B5D3"/>
+                </a:solidFill>
+                <a:latin typeface="Cambria"/>
+              </a:defRPr>
+            </a:pPr>
+            <a:r>
+              <a:t>6.98 K Drop</a:t>
+            </a:r>
+          </a:p>
+          <a:p>
+            <a:pPr>
+              <a:defRPr sz="1300" b="1">
+                <a:solidFill>
+                  <a:srgbClr val="0B1426"/>
+                </a:solidFill>
+                <a:latin typeface="Calibri"/>
+              </a:defRPr>
+            </a:pPr>
+            <a:r>
+              <a:t>Peak Wall Temperature Reduction (Fine Grid)</a:t>
+            </a:r>
           </a:p>
         </p:txBody>
       </p:sp>
@@ -9013,8 +9264,8 @@
         </p:nvSpPr>
         <p:spPr>
           <a:xfrm>
-            <a:off x="8046720" y="1783080"/>
-            <a:ext cx="3108960" cy="1005840"/>
+            <a:off x="7498079" y="2926080"/>
+            <a:ext cx="4114800" cy="2377440"/>
           </a:xfrm>
           <a:prstGeom prst="rect">
             <a:avLst/>
@@ -9028,20 +9279,10 @@
           <a:lstStyle/>
           <a:p>
             <a:pPr>
-              <a:defRPr sz="3400" b="1">
-                <a:solidFill>
-                  <a:srgbClr val="23B5D3"/>
-                </a:solidFill>
-                <a:latin typeface="Cambria"/>
-              </a:defRPr>
-            </a:pPr>
-            <a:r>
-              <a:t>6.98 K Drop</a:t>
-            </a:r>
-          </a:p>
-          <a:p>
-            <a:pPr>
-              <a:defRPr sz="1200" b="1">
+              <a:spcAft>
+                <a:spcPts val="1200"/>
+              </a:spcAft>
+              <a:defRPr sz="1400">
                 <a:solidFill>
                   <a:srgbClr val="0B1426"/>
                 </a:solidFill>
@@ -9049,38 +9290,15 @@
               </a:defRPr>
             </a:pPr>
             <a:r>
-              <a:t>Peak Wall Temperature Reduction (Fine Grid)</a:t>
-            </a:r>
-          </a:p>
-        </p:txBody>
-      </p:sp>
-      <p:sp>
-        <p:nvSpPr>
-          <p:cNvPr id="11" name="TextBox 10"/>
-          <p:cNvSpPr txBox="1"/>
-          <p:nvPr/>
-        </p:nvSpPr>
-        <p:spPr>
-          <a:xfrm>
-            <a:off x="7863840" y="3108960"/>
-            <a:ext cx="3474720" cy="2103120"/>
-          </a:xfrm>
-          <a:prstGeom prst="rect">
-            <a:avLst/>
-          </a:prstGeom>
-          <a:noFill/>
-        </p:spPr>
-        <p:txBody>
-          <a:bodyPr wrap="square" lIns="0" tIns="0" rIns="0" bIns="0">
-            <a:spAutoFit/>
-          </a:bodyPr>
-          <a:lstStyle/>
+              <a:t>•  Radiation lowers plate wall temperature along the entire heated length.</a:t>
+            </a:r>
+          </a:p>
           <a:p>
             <a:pPr>
               <a:spcAft>
-                <a:spcPts val="1000"/>
+                <a:spcPts val="1200"/>
               </a:spcAft>
-              <a:defRPr sz="1300">
+              <a:defRPr sz="1400">
                 <a:solidFill>
                   <a:srgbClr val="0B1426"/>
                 </a:solidFill>
@@ -9088,15 +9306,15 @@
               </a:defRPr>
             </a:pPr>
             <a:r>
-              <a:t>•  Radiation lowers plate wall temperature along the entire heated length.</a:t>
+              <a:t>•  Cooling effect intensifies downstream, reaching maximum depression of 6.98 K.</a:t>
             </a:r>
           </a:p>
           <a:p>
             <a:pPr>
               <a:spcAft>
-                <a:spcPts val="1000"/>
+                <a:spcPts val="1200"/>
               </a:spcAft>
-              <a:defRPr sz="1300">
+              <a:defRPr sz="1400">
                 <a:solidFill>
                   <a:srgbClr val="0B1426"/>
                 </a:solidFill>
@@ -9104,29 +9322,13 @@
               </a:defRPr>
             </a:pPr>
             <a:r>
-              <a:t>•  Cooling effect intensifies downstream, reaching maximum depression of 6.98 K.</a:t>
-            </a:r>
-          </a:p>
-          <a:p>
-            <a:pPr>
-              <a:spcAft>
-                <a:spcPts val="1000"/>
-              </a:spcAft>
-              <a:defRPr sz="1300">
-                <a:solidFill>
-                  <a:srgbClr val="0B1426"/>
-                </a:solidFill>
-                <a:latin typeface="Calibri"/>
-              </a:defRPr>
-            </a:pPr>
-            <a:r>
               <a:t>•  Thermal boundary layer thickness remains virtually unchanged across radiation cases.</a:t>
             </a:r>
           </a:p>
           <a:p>
             <a:pPr>
               <a:spcBef>
-                <a:spcPts val="1200"/>
+                <a:spcPts val="800"/>
               </a:spcBef>
               <a:defRPr sz="1100">
                 <a:solidFill>
@@ -9207,7 +9409,7 @@
           <a:lstStyle/>
           <a:p>
             <a:pPr>
-              <a:defRPr sz="3400" b="1">
+              <a:defRPr sz="3200" b="1">
                 <a:solidFill>
                   <a:srgbClr val="FFFFFF"/>
                 </a:solidFill>
@@ -9228,7 +9430,7 @@
         </p:nvSpPr>
         <p:spPr>
           <a:xfrm>
-            <a:off x="11155680" y="6400800"/>
+            <a:off x="11064240" y="6400800"/>
             <a:ext cx="548640" cy="274320"/>
           </a:xfrm>
           <a:prstGeom prst="rect">
@@ -9243,7 +9445,7 @@
           <a:lstStyle/>
           <a:p>
             <a:pPr algn="r">
-              <a:defRPr sz="1200">
+              <a:defRPr sz="1100">
                 <a:solidFill>
                   <a:srgbClr val="7C8DB5"/>
                 </a:solidFill>
@@ -9264,19 +9466,17 @@
         </p:nvSpPr>
         <p:spPr>
           <a:xfrm>
-            <a:off x="548640" y="1463040"/>
-            <a:ext cx="6766560" cy="4663440"/>
+            <a:off x="548640" y="1371600"/>
+            <a:ext cx="6583680" cy="4754880"/>
           </a:xfrm>
           <a:prstGeom prst="roundRect">
             <a:avLst/>
           </a:prstGeom>
           <a:solidFill>
-            <a:srgbClr val="FFFFFF"/>
+            <a:srgbClr val="16264A"/>
           </a:solidFill>
-          <a:ln w="12700">
-            <a:solidFill>
-              <a:srgbClr val="DCE2EC"/>
-            </a:solidFill>
+          <a:ln>
+            <a:noFill/>
           </a:ln>
         </p:spPr>
         <p:style>
@@ -9317,8 +9517,8 @@
         </p:blipFill>
         <p:spPr>
           <a:xfrm>
-            <a:off x="959521" y="1627632"/>
-            <a:ext cx="5944796" cy="4014216"/>
+            <a:off x="800373" y="1536192"/>
+            <a:ext cx="6080213" cy="4105656"/>
           </a:xfrm>
           <a:prstGeom prst="rect">
             <a:avLst/>
@@ -9334,7 +9534,7 @@
         <p:spPr>
           <a:xfrm>
             <a:off x="731520" y="5696712"/>
-            <a:ext cx="6400800" cy="320040"/>
+            <a:ext cx="6217920" cy="320040"/>
           </a:xfrm>
           <a:prstGeom prst="rect">
             <a:avLst/>
@@ -9369,8 +9569,8 @@
         </p:nvSpPr>
         <p:spPr>
           <a:xfrm>
-            <a:off x="7589520" y="1463040"/>
-            <a:ext cx="4023360" cy="1371600"/>
+            <a:off x="7498079" y="1371600"/>
+            <a:ext cx="4114800" cy="1417320"/>
           </a:xfrm>
           <a:prstGeom prst="roundRect">
             <a:avLst/>
@@ -9412,8 +9612,8 @@
         </p:nvSpPr>
         <p:spPr>
           <a:xfrm>
-            <a:off x="7863840" y="1627632"/>
-            <a:ext cx="3474720" cy="1051560"/>
+            <a:off x="7772400" y="1536192"/>
+            <a:ext cx="3566160" cy="1097280"/>
           </a:xfrm>
           <a:prstGeom prst="rect">
             <a:avLst/>
@@ -9421,7 +9621,7 @@
           <a:noFill/>
         </p:spPr>
         <p:txBody>
-          <a:bodyPr wrap="square" lIns="0" tIns="0" rIns="0" bIns="0">
+          <a:bodyPr wrap="square" lIns="0" tIns="0">
             <a:spAutoFit/>
           </a:bodyPr>
           <a:lstStyle/>
@@ -9461,8 +9661,8 @@
         </p:nvSpPr>
         <p:spPr>
           <a:xfrm>
-            <a:off x="7589520" y="3017520"/>
-            <a:ext cx="4023360" cy="1371600"/>
+            <a:off x="7498079" y="2971800"/>
+            <a:ext cx="4114800" cy="1417320"/>
           </a:xfrm>
           <a:prstGeom prst="roundRect">
             <a:avLst/>
@@ -9504,8 +9704,8 @@
         </p:nvSpPr>
         <p:spPr>
           <a:xfrm>
-            <a:off x="7863840" y="3182112"/>
-            <a:ext cx="3474720" cy="1051560"/>
+            <a:off x="7772400" y="3136392"/>
+            <a:ext cx="3566160" cy="1097280"/>
           </a:xfrm>
           <a:prstGeom prst="rect">
             <a:avLst/>
@@ -9513,7 +9713,7 @@
           <a:noFill/>
         </p:spPr>
         <p:txBody>
-          <a:bodyPr wrap="square" lIns="0" tIns="0" rIns="0" bIns="0">
+          <a:bodyPr wrap="square" lIns="0" tIns="0">
             <a:spAutoFit/>
           </a:bodyPr>
           <a:lstStyle/>
@@ -9553,8 +9753,8 @@
         </p:nvSpPr>
         <p:spPr>
           <a:xfrm>
-            <a:off x="7589520" y="4572000"/>
-            <a:ext cx="4023360" cy="1371600"/>
+            <a:off x="7498079" y="4572000"/>
+            <a:ext cx="4114800" cy="1417320"/>
           </a:xfrm>
           <a:prstGeom prst="roundRect">
             <a:avLst/>
@@ -9596,8 +9796,8 @@
         </p:nvSpPr>
         <p:spPr>
           <a:xfrm>
-            <a:off x="7863840" y="4736592"/>
-            <a:ext cx="3474720" cy="1051560"/>
+            <a:off x="7772400" y="4736592"/>
+            <a:ext cx="3566160" cy="1097280"/>
           </a:xfrm>
           <a:prstGeom prst="rect">
             <a:avLst/>
@@ -9605,7 +9805,7 @@
           <a:noFill/>
         </p:spPr>
         <p:txBody>
-          <a:bodyPr wrap="square" lIns="0" tIns="0" rIns="0" bIns="0">
+          <a:bodyPr wrap="square" lIns="0" tIns="0">
             <a:spAutoFit/>
           </a:bodyPr>
           <a:lstStyle/>

--- a/Flat_Plate_Radiation_CFD_Pitch.pptx
+++ b/Flat_Plate_Radiation_CFD_Pitch.pptx
@@ -13,6 +13,12 @@
     <p:sldId id="261" r:id="rId4"/>
     <p:sldId id="262" r:id="rId3"/>
     <p:sldId id="263" r:id="rId2"/>
+    <p:sldId id="264" r:id="rId15"/>
+    <p:sldId id="265" r:id="rId16"/>
+    <p:sldId id="266" r:id="rId17"/>
+    <p:sldId id="267" r:id="rId18"/>
+    <p:sldId id="268" r:id="rId19"/>
+    <p:sldId id="269" r:id="rId20"/>
   </p:sldIdLst>
   <p:notesMasterIdLst>
     <p:notesMasterId r:id="rId10"/>
@@ -508,7 +514,357 @@
           <a:lstStyle/>
           <a:p>
             <a:r>
-              <a:t>This project investigates the coupled effects of surface thermal radiation on a laminar flat-plate boundary layer in OpenFOAM 13. My objective is to study how radiation alters the near-wall thermal boundary layer profile and surface temperature distribution. The hydrodynamic solver validates against the exact Blasius similarity solution within 0.11%. Source: results/figures/four_case_temperature_zoom.png.</a:t>
+              <a:t>Welcome. I am Jersam Lithin L, 3rd year Aerospace Engineering at Karunya Institute of Technology and Sciences. This project investigates coupled surface thermal radiation on a laminar flat-plate boundary layer using OpenFOAM 13. The hydrodynamic solver validates against exact Blasius similarity within 0.11%. Source: results/figures/four_case_temperature_zoom.png.</a:t>
+            </a:r>
+          </a:p>
+        </p:txBody>
+      </p:sp>
+      <p:sp>
+        <p:nvSpPr>
+          <p:cNvPr id="4" name="Slide Number Placeholder 3"/>
+          <p:cNvSpPr>
+            <a:spLocks noGrp="1"/>
+          </p:cNvSpPr>
+          <p:nvPr>
+            <p:ph type="sldNum" idx="5" sz="quarter"/>
+          </p:nvPr>
+        </p:nvSpPr>
+        <p:spPr/>
+      </p:sp>
+    </p:spTree>
+  </p:cSld>
+  <p:clrMapOvr>
+    <a:masterClrMapping/>
+  </p:clrMapOvr>
+</p:notes>
+</file>
+
+<file path=ppt/notesSlides/notesSlide10.xml><?xml version="1.0" encoding="utf-8"?>
+<p:notes xmlns:a="http://schemas.openxmlformats.org/drawingml/2006/main" xmlns:p="http://schemas.openxmlformats.org/presentationml/2006/main" xmlns:r="http://schemas.openxmlformats.org/officeDocument/2006/relationships">
+  <p:cSld>
+    <p:spTree>
+      <p:nvGrpSpPr>
+        <p:cNvPr id="1" name=""/>
+        <p:cNvGrpSpPr/>
+        <p:nvPr/>
+      </p:nvGrpSpPr>
+      <p:grpSpPr>
+        <a:xfrm>
+          <a:off x="0" y="0"/>
+          <a:ext cx="0" cy="0"/>
+          <a:chOff x="0" y="0"/>
+          <a:chExt cx="0" cy="0"/>
+        </a:xfrm>
+      </p:grpSpPr>
+      <p:sp>
+        <p:nvSpPr>
+          <p:cNvPr id="2" name="Slide Image Placeholder 1"/>
+          <p:cNvSpPr>
+            <a:spLocks noGrp="1"/>
+          </p:cNvSpPr>
+          <p:nvPr>
+            <p:ph type="sldImg" idx="2"/>
+          </p:nvPr>
+        </p:nvSpPr>
+        <p:spPr/>
+      </p:sp>
+      <p:sp>
+        <p:nvSpPr>
+          <p:cNvPr id="3" name="Notes Placeholder 2"/>
+          <p:cNvSpPr>
+            <a:spLocks noGrp="1"/>
+          </p:cNvSpPr>
+          <p:nvPr>
+            <p:ph type="body" idx="3" sz="quarter"/>
+          </p:nvPr>
+        </p:nvSpPr>
+        <p:spPr/>
+        <p:txBody>
+          <a:bodyPr/>
+          <a:lstStyle/>
+          <a:p>
+            <a:r>
+              <a:t>Looking at the near-wall temperature contours, we observe clear isotherm suppression in the radiating cases. Crucially, the outer boundary layer thickness does not thin; delta-T-99 is 5.07 mm without radiation and 5.17 mm with radiation. Radiation offloads heat at the surface without disrupting boundary layer structure. Source: results/figures/four_case_temperature_zoom.png.</a:t>
+            </a:r>
+          </a:p>
+        </p:txBody>
+      </p:sp>
+      <p:sp>
+        <p:nvSpPr>
+          <p:cNvPr id="4" name="Slide Number Placeholder 3"/>
+          <p:cNvSpPr>
+            <a:spLocks noGrp="1"/>
+          </p:cNvSpPr>
+          <p:nvPr>
+            <p:ph type="sldNum" idx="5" sz="quarter"/>
+          </p:nvPr>
+        </p:nvSpPr>
+        <p:spPr/>
+      </p:sp>
+    </p:spTree>
+  </p:cSld>
+  <p:clrMapOvr>
+    <a:masterClrMapping/>
+  </p:clrMapOvr>
+</p:notes>
+</file>
+
+<file path=ppt/notesSlides/notesSlide11.xml><?xml version="1.0" encoding="utf-8"?>
+<p:notes xmlns:a="http://schemas.openxmlformats.org/drawingml/2006/main" xmlns:p="http://schemas.openxmlformats.org/presentationml/2006/main" xmlns:r="http://schemas.openxmlformats.org/officeDocument/2006/relationships">
+  <p:cSld>
+    <p:spTree>
+      <p:nvGrpSpPr>
+        <p:cNvPr id="1" name=""/>
+        <p:cNvGrpSpPr/>
+        <p:nvPr/>
+      </p:nvGrpSpPr>
+      <p:grpSpPr>
+        <a:xfrm>
+          <a:off x="0" y="0"/>
+          <a:ext cx="0" cy="0"/>
+          <a:chOff x="0" y="0"/>
+          <a:chExt cx="0" cy="0"/>
+        </a:xfrm>
+      </p:grpSpPr>
+      <p:sp>
+        <p:nvSpPr>
+          <p:cNvPr id="2" name="Slide Image Placeholder 1"/>
+          <p:cNvSpPr>
+            <a:spLocks noGrp="1"/>
+          </p:cNvSpPr>
+          <p:nvPr>
+            <p:ph type="sldImg" idx="2"/>
+          </p:nvPr>
+        </p:nvSpPr>
+        <p:spPr/>
+      </p:sp>
+      <p:sp>
+        <p:nvSpPr>
+          <p:cNvPr id="3" name="Notes Placeholder 2"/>
+          <p:cNvSpPr>
+            <a:spLocks noGrp="1"/>
+          </p:cNvSpPr>
+          <p:nvPr>
+            <p:ph type="body" idx="3" sz="quarter"/>
+          </p:nvPr>
+        </p:nvSpPr>
+        <p:spPr/>
+        <p:txBody>
+          <a:bodyPr/>
+          <a:lstStyle/>
+          <a:p>
+            <a:r>
+              <a:t>By directly subtracting the non-radiating temperature field from the radiating field, we obtain the spatial cooling footprint. The temperature depression starts at approximately -1.2 K near the leading edge and intensifies downstream, reaching -6.98 K at the trailing edge. This proves that radiation is most effective precisely where convection is weakest. Source: results/figures/temperature_difference_zoom.png.</a:t>
+            </a:r>
+          </a:p>
+        </p:txBody>
+      </p:sp>
+      <p:sp>
+        <p:nvSpPr>
+          <p:cNvPr id="4" name="Slide Number Placeholder 3"/>
+          <p:cNvSpPr>
+            <a:spLocks noGrp="1"/>
+          </p:cNvSpPr>
+          <p:nvPr>
+            <p:ph type="sldNum" idx="5" sz="quarter"/>
+          </p:nvPr>
+        </p:nvSpPr>
+        <p:spPr/>
+      </p:sp>
+    </p:spTree>
+  </p:cSld>
+  <p:clrMapOvr>
+    <a:masterClrMapping/>
+  </p:clrMapOvr>
+</p:notes>
+</file>
+
+<file path=ppt/notesSlides/notesSlide12.xml><?xml version="1.0" encoding="utf-8"?>
+<p:notes xmlns:a="http://schemas.openxmlformats.org/drawingml/2006/main" xmlns:p="http://schemas.openxmlformats.org/presentationml/2006/main" xmlns:r="http://schemas.openxmlformats.org/officeDocument/2006/relationships">
+  <p:cSld>
+    <p:spTree>
+      <p:nvGrpSpPr>
+        <p:cNvPr id="1" name=""/>
+        <p:cNvGrpSpPr/>
+        <p:nvPr/>
+      </p:nvGrpSpPr>
+      <p:grpSpPr>
+        <a:xfrm>
+          <a:off x="0" y="0"/>
+          <a:ext cx="0" cy="0"/>
+          <a:chOff x="0" y="0"/>
+          <a:chExt cx="0" cy="0"/>
+        </a:xfrm>
+      </p:grpSpPr>
+      <p:sp>
+        <p:nvSpPr>
+          <p:cNvPr id="2" name="Slide Image Placeholder 1"/>
+          <p:cNvSpPr>
+            <a:spLocks noGrp="1"/>
+          </p:cNvSpPr>
+          <p:nvPr>
+            <p:ph type="sldImg" idx="2"/>
+          </p:nvPr>
+        </p:nvSpPr>
+        <p:spPr/>
+      </p:sp>
+      <p:sp>
+        <p:nvSpPr>
+          <p:cNvPr id="3" name="Notes Placeholder 2"/>
+          <p:cNvSpPr>
+            <a:spLocks noGrp="1"/>
+          </p:cNvSpPr>
+          <p:nvPr>
+            <p:ph type="body" idx="3" sz="quarter"/>
+          </p:nvPr>
+        </p:nvSpPr>
+        <p:spPr/>
+        <p:txBody>
+          <a:bodyPr/>
+          <a:lstStyle/>
+          <a:p>
+            <a:r>
+              <a:t>On the fine 64,000-cell mesh, surface radiation dissipates an integrated plate-averaged flux of 213.2 W/m² (21.32% of total heat), rising to 21.56% (215.59 W/m²) at the trailing edge. Convective flux steadily declines downstream, while radiative flux stays virtually uniform. The sum strictly closes to 1000.00 W/m² at every face. Source: results/figures/wall_heat_balance_and_nusselt.png.</a:t>
+            </a:r>
+          </a:p>
+        </p:txBody>
+      </p:sp>
+      <p:sp>
+        <p:nvSpPr>
+          <p:cNvPr id="4" name="Slide Number Placeholder 3"/>
+          <p:cNvSpPr>
+            <a:spLocks noGrp="1"/>
+          </p:cNvSpPr>
+          <p:nvPr>
+            <p:ph type="sldNum" idx="5" sz="quarter"/>
+          </p:nvPr>
+        </p:nvSpPr>
+        <p:spPr/>
+      </p:sp>
+    </p:spTree>
+  </p:cSld>
+  <p:clrMapOvr>
+    <a:masterClrMapping/>
+  </p:clrMapOvr>
+</p:notes>
+</file>
+
+<file path=ppt/notesSlides/notesSlide13.xml><?xml version="1.0" encoding="utf-8"?>
+<p:notes xmlns:a="http://schemas.openxmlformats.org/drawingml/2006/main" xmlns:p="http://schemas.openxmlformats.org/presentationml/2006/main" xmlns:r="http://schemas.openxmlformats.org/officeDocument/2006/relationships">
+  <p:cSld>
+    <p:spTree>
+      <p:nvGrpSpPr>
+        <p:cNvPr id="1" name=""/>
+        <p:cNvGrpSpPr/>
+        <p:nvPr/>
+      </p:nvGrpSpPr>
+      <p:grpSpPr>
+        <a:xfrm>
+          <a:off x="0" y="0"/>
+          <a:ext cx="0" cy="0"/>
+          <a:chOff x="0" y="0"/>
+          <a:chExt cx="0" cy="0"/>
+        </a:xfrm>
+      </p:grpSpPr>
+      <p:sp>
+        <p:nvSpPr>
+          <p:cNvPr id="2" name="Slide Image Placeholder 1"/>
+          <p:cNvSpPr>
+            <a:spLocks noGrp="1"/>
+          </p:cNvSpPr>
+          <p:nvPr>
+            <p:ph type="sldImg" idx="2"/>
+          </p:nvPr>
+        </p:nvSpPr>
+        <p:spPr/>
+      </p:sp>
+      <p:sp>
+        <p:nvSpPr>
+          <p:cNvPr id="3" name="Notes Placeholder 2"/>
+          <p:cNvSpPr>
+            <a:spLocks noGrp="1"/>
+          </p:cNvSpPr>
+          <p:nvPr>
+            <p:ph type="body" idx="3" sz="quarter"/>
+          </p:nvPr>
+        </p:nvSpPr>
+        <p:spPr/>
+        <p:txBody>
+          <a:bodyPr/>
+          <a:lstStyle/>
+          <a:p>
+            <a:r>
+              <a:t>Numerical rigor was audited across all runs. Linear solver residuals for pressure, velocity, and enthalpy all converge smoothly below 10⁻⁸ within 1500 iterations. The grid comparison highlights the importance of near-wall inflation: without sufficient resolution in the first 5 mm, conductive wall flux is miscalculated. Source: results/figures/convergence_histories_all4.png.</a:t>
+            </a:r>
+          </a:p>
+        </p:txBody>
+      </p:sp>
+      <p:sp>
+        <p:nvSpPr>
+          <p:cNvPr id="4" name="Slide Number Placeholder 3"/>
+          <p:cNvSpPr>
+            <a:spLocks noGrp="1"/>
+          </p:cNvSpPr>
+          <p:nvPr>
+            <p:ph type="sldNum" idx="5" sz="quarter"/>
+          </p:nvPr>
+        </p:nvSpPr>
+        <p:spPr/>
+      </p:sp>
+    </p:spTree>
+  </p:cSld>
+  <p:clrMapOvr>
+    <a:masterClrMapping/>
+  </p:clrMapOvr>
+</p:notes>
+</file>
+
+<file path=ppt/notesSlides/notesSlide14.xml><?xml version="1.0" encoding="utf-8"?>
+<p:notes xmlns:a="http://schemas.openxmlformats.org/drawingml/2006/main" xmlns:p="http://schemas.openxmlformats.org/presentationml/2006/main" xmlns:r="http://schemas.openxmlformats.org/officeDocument/2006/relationships">
+  <p:cSld>
+    <p:spTree>
+      <p:nvGrpSpPr>
+        <p:cNvPr id="1" name=""/>
+        <p:cNvGrpSpPr/>
+        <p:nvPr/>
+      </p:nvGrpSpPr>
+      <p:grpSpPr>
+        <a:xfrm>
+          <a:off x="0" y="0"/>
+          <a:ext cx="0" cy="0"/>
+          <a:chOff x="0" y="0"/>
+          <a:chExt cx="0" cy="0"/>
+        </a:xfrm>
+      </p:grpSpPr>
+      <p:sp>
+        <p:nvSpPr>
+          <p:cNvPr id="2" name="Slide Image Placeholder 1"/>
+          <p:cNvSpPr>
+            <a:spLocks noGrp="1"/>
+          </p:cNvSpPr>
+          <p:nvPr>
+            <p:ph type="sldImg" idx="2"/>
+          </p:nvPr>
+        </p:nvSpPr>
+        <p:spPr/>
+      </p:sp>
+      <p:sp>
+        <p:nvSpPr>
+          <p:cNvPr id="3" name="Notes Placeholder 2"/>
+          <p:cNvSpPr>
+            <a:spLocks noGrp="1"/>
+          </p:cNvSpPr>
+          <p:nvPr>
+            <p:ph type="body" idx="3" sz="quarter"/>
+          </p:nvPr>
+        </p:nvSpPr>
+        <p:spPr/>
+        <p:txBody>
+          <a:bodyPr/>
+          <a:lstStyle/>
+          <a:p>
+            <a:r>
+              <a:t>In conclusion, this project fulfills our Boundary Layer Theory course objectives: we successfully coupled non-linear surface radiation to a laminar boundary layer in OpenFOAM 13, demonstrated a 6.98 K temperature drop and 21.56% radiative offloading, and validated the momentum solver against Blasius within 0.11%. Thank you for your attention. Source: README.md, Flat_Plate_Radiation_CFD_Pitch.pdf.</a:t>
             </a:r>
           </a:p>
         </p:txBody>
@@ -578,7 +934,7 @@
           <a:lstStyle/>
           <a:p>
             <a:r>
-              <a:t>In standard boundary layer heat transfer analyses, radiation is often neglected at moderate temperature rises under the assumption that convection dominates. However, because local convective heat transfer coefficients decrease downstream proportional to x^(-0.5), convective resistance climbs toward the trailing edge. Radiation provides a crucial alternative heat path that limits peak wall temperatures. Source: results/figures/wall_temperature_all_cases.png.</a:t>
+              <a:t>In standard boundary layer heat transfer analyses, radiation is often neglected under the assumption that convection dominates. However, because local convective heat transfer coefficients decrease downstream proportional to x^(-0.5), convective resistance climbs toward the trailing edge. Radiation provides a crucial alternative heat path. Source: results/figures/wall_temperature_all_cases.png.</a:t>
             </a:r>
           </a:p>
         </p:txBody>
@@ -648,7 +1004,7 @@
           <a:lstStyle/>
           <a:p>
             <a:r>
-              <a:t>The wall energy boundary condition balances the 1000 W/m² electric heater flux against fluid conduction and net Stefan-Boltzmann radiation to the 300 K enclosure. Because radiation is quartic in Tw, an in-situ Newton-Raphson scheme solves for the surface temperature at each face within each PIMPLE iteration. Conservation is enforced by construction. Source: cases/surfaceRadiation_fine/0/T.</a:t>
+              <a:t>In aerospace skin cooling and spacecraft thermal management, radiation acts as a parallel thermal path. When convective boundary layer resistance increases downstream, radiation emission carries a larger share of the thermal burden, stabilizing operating temperatures. Source: results/figures/research_paper_radiation_analogy.png.</a:t>
             </a:r>
           </a:p>
         </p:txBody>
@@ -718,7 +1074,7 @@
           <a:lstStyle/>
           <a:p>
             <a:r>
-              <a:t>The domain spans 2.0 m in length (a 1.0 m unheated development plate plus a 1.0 m heated plate) and 0.2 m in height. An 80:1 geometric expansion ratio yields a first cell height of 70.3 μm, placing 41 cells inside the critical near-wall 5 mm boundary layer region. This captures steep wall temperature gradients with zero non-orthogonality. Source: cases/surfaceRadiation_fine/system/blockMeshDict.</a:t>
+              <a:t>The governing equations consist of the steady laminar boundary layer equations with constant properties. The radiation boundary condition couples surface temperature to the external environment. First-Law energy conservation demands that total input electrical heat equals the sum of fluid conduction and net radiation at every single face. Source: cases/surfaceRadiation_fine/0/T.</a:t>
             </a:r>
           </a:p>
         </p:txBody>
@@ -788,7 +1144,7 @@
           <a:lstStyle/>
           <a:p>
             <a:r>
-              <a:t>Hydrodynamic solver accuracy is rigorously validated against the classical Blasius similarity solution. Trailing-edge skin friction matches analytical prediction with 0.11% relative error. Furthermore, because fluid transport properties are constant and buoyancy is absent, velocity profiles are strictly invariant between radiating and pure-convection cases, confirming hydrodynamic decoupling. Source: results/figures/blasius_velocity_validation.png.</a:t>
+              <a:t>Because radiation depends on Tw to the fourth power, explicit evaluation would be numerically unstable. We implement an in-situ Newton-Raphson solver inside the OpenFOAM boundary condition. Because f-prime is strictly positive for positive temperatures, the scheme converges quadratically in fewer than four iterations. Source: cases/surfaceRadiation_fine/0/T.</a:t>
             </a:r>
           </a:p>
         </p:txBody>
@@ -858,7 +1214,7 @@
           <a:lstStyle/>
           <a:p>
             <a:r>
-              <a:t>Surface radiation lowers the local wall temperature across the entire 1.0 m plate, with the maximum temperature depression reaching 6.98 K at the trailing edge (dropping from 343.68 K to 336.70 K on the fine mesh). Note that thermal boundary layer thickness does not thin under radiation; delta_T,99 expands slightly from 5.072 mm to 5.175 mm due to altered near-wall temperature curvature. Source: results/figures/temperature_difference_zoom.png.</a:t>
+              <a:t>The domain geometry includes a 1.0 m unheated development section preceding the 1.0 m heated plate. This establishes a fully developed laminar Blasius velocity profile before heating begins. The 80:1 normal expansion ratio yields a first cell height of 70.3 micrometers, packing 41 cells inside the 5 mm boundary layer. Source: cases/surfaceRadiation_fine/system/blockMeshDict.</a:t>
             </a:r>
           </a:p>
         </p:txBody>
@@ -928,7 +1284,7 @@
           <a:lstStyle/>
           <a:p>
             <a:r>
-              <a:t>On the fine 64,000-cell mesh, surface radiation dissipates an integrated plate-averaged flux of 213.2 W/m² (21.32% of total heat), rising to 21.56% (215.59 W/m²) at the trailing edge. Open issue: For uniform heat flux, laminar correlation Nu_x = 0.453 Re_x^0.5 Pr^(1/3) gives Nu ≈ 143 and wall rise ≈ 267 K at x = 1 m, whereas CFD reports Nu ≈ 875 and a 43.7 K rise. Consequently, these 21.3% and 6.98 K figures are preliminary fine-grid metrics subject to ongoing grid convergence. Source: results/figures/wall_heat_balance_and_nusselt.png.</a:t>
+              <a:t>Our investigation executes a rigorous 2 by 2 factorial matrix. Comparing noRadiation_fine against surfaceRadiation_fine quantifies the pure physics of surface radiation: a 6.98 K temperature drop and 21.56% radiative offloading. Comparing coarse against fine discloses numerical discretization sensitivity. Source: results/case_audit.csv.</a:t>
             </a:r>
           </a:p>
         </p:txBody>
@@ -998,7 +1354,77 @@
           <a:lstStyle/>
           <a:p>
             <a:r>
-              <a:t>In conclusion, surface radiation dissipates over 21% of the input thermal load and cools the peak plate temperature by 6.98 K under laminar boundary layer flow. As an aerospace engineering student at Karunya Institute of Technology and Sciences presenting for Boundary Layer Theory, I welcome academic discussion on multi-grid GCI uncertainty quantification and physical experimental validation. Full simulation cases and scripts are available on GitHub. Source: github.com/Jersam-l/flat-plate-with-radiation-cfd.</a:t>
+              <a:t>Hydrodynamic solver accuracy is rigorously validated against the classical Blasius similarity solution. Trailing-edge skin friction matches analytical prediction with 0.11% relative error. All velocity profiles across different x-stations collapse onto the theoretical curve, giving complete confidence in the momentum solution. Source: results/figures/blasius_velocity_validation.png.</a:t>
+            </a:r>
+          </a:p>
+        </p:txBody>
+      </p:sp>
+      <p:sp>
+        <p:nvSpPr>
+          <p:cNvPr id="4" name="Slide Number Placeholder 3"/>
+          <p:cNvSpPr>
+            <a:spLocks noGrp="1"/>
+          </p:cNvSpPr>
+          <p:nvPr>
+            <p:ph type="sldNum" idx="5" sz="quarter"/>
+          </p:nvPr>
+        </p:nvSpPr>
+        <p:spPr/>
+      </p:sp>
+    </p:spTree>
+  </p:cSld>
+  <p:clrMapOvr>
+    <a:masterClrMapping/>
+  </p:clrMapOvr>
+</p:notes>
+</file>
+
+<file path=ppt/notesSlides/notesSlide9.xml><?xml version="1.0" encoding="utf-8"?>
+<p:notes xmlns:a="http://schemas.openxmlformats.org/drawingml/2006/main" xmlns:p="http://schemas.openxmlformats.org/presentationml/2006/main" xmlns:r="http://schemas.openxmlformats.org/officeDocument/2006/relationships">
+  <p:cSld>
+    <p:spTree>
+      <p:nvGrpSpPr>
+        <p:cNvPr id="1" name=""/>
+        <p:cNvGrpSpPr/>
+        <p:nvPr/>
+      </p:nvGrpSpPr>
+      <p:grpSpPr>
+        <a:xfrm>
+          <a:off x="0" y="0"/>
+          <a:ext cx="0" cy="0"/>
+          <a:chOff x="0" y="0"/>
+          <a:chExt cx="0" cy="0"/>
+        </a:xfrm>
+      </p:grpSpPr>
+      <p:sp>
+        <p:nvSpPr>
+          <p:cNvPr id="2" name="Slide Image Placeholder 1"/>
+          <p:cNvSpPr>
+            <a:spLocks noGrp="1"/>
+          </p:cNvSpPr>
+          <p:nvPr>
+            <p:ph type="sldImg" idx="2"/>
+          </p:nvPr>
+        </p:nvSpPr>
+        <p:spPr/>
+      </p:sp>
+      <p:sp>
+        <p:nvSpPr>
+          <p:cNvPr id="3" name="Notes Placeholder 2"/>
+          <p:cNvSpPr>
+            <a:spLocks noGrp="1"/>
+          </p:cNvSpPr>
+          <p:nvPr>
+            <p:ph type="body" idx="3" sz="quarter"/>
+          </p:nvPr>
+        </p:nvSpPr>
+        <p:spPr/>
+        <p:txBody>
+          <a:bodyPr/>
+          <a:lstStyle/>
+          <a:p>
+            <a:r>
+              <a:t>Because fluid transport properties are constant and buoyancy is absent, the momentum equation is decoupled from the energy equation. As shown in the figure, the velocity boundary layers are completely identical between the radiating and non-radiating cases. This cleanly isolates the thermal radiation coupling mechanism. Source: results/figures/four_case_velocity_zoom.png.</a:t>
             </a:r>
           </a:p>
         </p:txBody>
@@ -1254,7 +1680,7 @@
           <a:lstStyle/>
           <a:p>
             <a:pPr>
-              <a:defRPr sz="1000">
+              <a:defRPr sz="1100">
                 <a:solidFill>
                   <a:srgbClr val="7C8DB5"/>
                 </a:solidFill>
@@ -1408,7 +1834,7 @@
           <a:lstStyle/>
           <a:p>
             <a:pPr>
-              <a:defRPr sz="1000">
+              <a:defRPr sz="1100">
                 <a:solidFill>
                   <a:srgbClr val="7C8DB5"/>
                 </a:solidFill>
@@ -1874,7 +2300,7 @@
           <a:lstStyle/>
           <a:p>
             <a:pPr>
-              <a:defRPr sz="1200" b="1">
+              <a:defRPr sz="1300" b="1">
                 <a:solidFill>
                   <a:srgbClr val="23B5D3"/>
                 </a:solidFill>
@@ -1946,7 +2372,7 @@
           <a:lstStyle/>
           <a:p>
             <a:pPr>
-              <a:defRPr sz="1600">
+              <a:defRPr sz="1700">
                 <a:solidFill>
                   <a:srgbClr val="EEF2F7"/>
                 </a:solidFill>
@@ -1954,7 +2380,7 @@
               </a:defRPr>
             </a:pPr>
             <a:r>
-              <a:t>CFD Investigation of Coupled Surface Radiation on Thermal Boundary Layer Development</a:t>
+              <a:t>Coupled Surface Thermal Radiation Modeling in Laminar Boundary Layer Flows</a:t>
             </a:r>
           </a:p>
         </p:txBody>
@@ -1983,9 +2409,9 @@
           <a:p>
             <a:pPr>
               <a:spcAft>
-                <a:spcPts val="200"/>
+                <a:spcPts val="300"/>
               </a:spcAft>
-              <a:defRPr sz="2200" b="1">
+              <a:defRPr sz="2600" b="1">
                 <a:solidFill>
                   <a:srgbClr val="FF7A1A"/>
                 </a:solidFill>
@@ -1994,6 +2420,22 @@
             </a:pPr>
             <a:r>
               <a:t>JERSAM LITHIN L</a:t>
+            </a:r>
+          </a:p>
+          <a:p>
+            <a:pPr>
+              <a:spcAft>
+                <a:spcPts val="300"/>
+              </a:spcAft>
+              <a:defRPr sz="1600" b="1">
+                <a:solidFill>
+                  <a:srgbClr val="FFFFFF"/>
+                </a:solidFill>
+                <a:latin typeface="Calibri"/>
+              </a:defRPr>
+            </a:pPr>
+            <a:r>
+              <a:t>Register No: URK24AE1026</a:t>
             </a:r>
           </a:p>
           <a:p>
@@ -2001,23 +2443,7 @@
               <a:spcAft>
                 <a:spcPts val="200"/>
               </a:spcAft>
-              <a:defRPr sz="1400" b="1">
-                <a:solidFill>
-                  <a:srgbClr val="FFFFFF"/>
-                </a:solidFill>
-                <a:latin typeface="Calibri"/>
-              </a:defRPr>
-            </a:pPr>
-            <a:r>
-              <a:t>Register No: URK24AE1026</a:t>
-            </a:r>
-          </a:p>
-          <a:p>
-            <a:pPr>
-              <a:spcAft>
-                <a:spcPts val="200"/>
-              </a:spcAft>
-              <a:defRPr sz="1200">
+              <a:defRPr sz="1300">
                 <a:solidFill>
                   <a:srgbClr val="EEF2F7"/>
                 </a:solidFill>
@@ -2030,7 +2456,7 @@
           </a:p>
           <a:p>
             <a:pPr>
-              <a:defRPr sz="1200">
+              <a:defRPr sz="1300">
                 <a:solidFill>
                   <a:srgbClr val="FFC24B"/>
                 </a:solidFill>
@@ -2038,7 +2464,7 @@
               </a:defRPr>
             </a:pPr>
             <a:r>
-              <a:t>Subject: Boundary Layer Theory  |  Academic Project Presentation</a:t>
+              <a:t>Subject: Boundary Layer Theory  |  Course Project Presentation</a:t>
             </a:r>
           </a:p>
         </p:txBody>
@@ -2090,6 +2516,121 @@
           <a:lstStyle/>
           <a:p>
             <a:pPr>
+              <a:defRPr sz="1200">
+                <a:solidFill>
+                  <a:srgbClr val="7C8DB5"/>
+                </a:solidFill>
+                <a:latin typeface="Calibri"/>
+              </a:defRPr>
+            </a:pPr>
+            <a:r>
+              <a:t>Fig. 1: Near-wall thermal boundary layer temperature fields across the 2 × 2 matrix.</a:t>
+            </a:r>
+          </a:p>
+        </p:txBody>
+      </p:sp>
+    </p:spTree>
+  </p:cSld>
+  <p:clrMapOvr>
+    <a:masterClrMapping/>
+  </p:clrMapOvr>
+</p:sld>
+</file>
+
+<file path=ppt/slides/slide10.xml><?xml version="1.0" encoding="utf-8"?>
+<p:sld xmlns:a="http://schemas.openxmlformats.org/drawingml/2006/main" xmlns:p="http://schemas.openxmlformats.org/presentationml/2006/main" xmlns:r="http://schemas.openxmlformats.org/officeDocument/2006/relationships">
+  <p:cSld>
+    <p:bg>
+      <p:bgPr>
+        <a:solidFill>
+          <a:srgbClr val="EEF2F7"/>
+        </a:solidFill>
+        <a:effectLst/>
+      </p:bgPr>
+    </p:bg>
+    <p:spTree>
+      <p:nvGrpSpPr>
+        <p:cNvPr id="1" name=""/>
+        <p:cNvGrpSpPr/>
+        <p:nvPr/>
+      </p:nvGrpSpPr>
+      <p:grpSpPr/>
+      <p:sp>
+        <p:nvSpPr>
+          <p:cNvPr id="2" name="Title 1"/>
+          <p:cNvSpPr>
+            <a:spLocks noGrp="1"/>
+          </p:cNvSpPr>
+          <p:nvPr>
+            <p:ph type="title" idx="100"/>
+          </p:nvPr>
+        </p:nvSpPr>
+        <p:spPr/>
+        <p:txBody>
+          <a:bodyPr/>
+          <a:lstStyle/>
+          <a:p/>
+        </p:txBody>
+      </p:sp>
+      <p:sp>
+        <p:nvSpPr>
+          <p:cNvPr id="3" name="TextBox 2"/>
+          <p:cNvSpPr txBox="1"/>
+          <p:nvPr/>
+        </p:nvSpPr>
+        <p:spPr>
+          <a:xfrm>
+            <a:off x="548640" y="365760"/>
+            <a:ext cx="11094415" cy="868680"/>
+          </a:xfrm>
+          <a:prstGeom prst="rect">
+            <a:avLst/>
+          </a:prstGeom>
+          <a:noFill/>
+        </p:spPr>
+        <p:txBody>
+          <a:bodyPr wrap="square" lIns="0" tIns="0" rIns="0" bIns="0">
+            <a:spAutoFit/>
+          </a:bodyPr>
+          <a:lstStyle/>
+          <a:p>
+            <a:pPr>
+              <a:defRPr sz="3200" b="1">
+                <a:solidFill>
+                  <a:srgbClr val="0B1426"/>
+                </a:solidFill>
+                <a:latin typeface="Cambria"/>
+              </a:defRPr>
+            </a:pPr>
+            <a:r>
+              <a:t>Thermal Boundary Layer Response: Direct Isotherm Suppression</a:t>
+            </a:r>
+          </a:p>
+        </p:txBody>
+      </p:sp>
+      <p:sp>
+        <p:nvSpPr>
+          <p:cNvPr id="4" name="TextBox 3"/>
+          <p:cNvSpPr txBox="1"/>
+          <p:nvPr/>
+        </p:nvSpPr>
+        <p:spPr>
+          <a:xfrm>
+            <a:off x="11064240" y="6400800"/>
+            <a:ext cx="548640" cy="274320"/>
+          </a:xfrm>
+          <a:prstGeom prst="rect">
+            <a:avLst/>
+          </a:prstGeom>
+          <a:noFill/>
+        </p:spPr>
+        <p:txBody>
+          <a:bodyPr wrap="none" lIns="0" tIns="0" rIns="0" bIns="0">
+            <a:spAutoFit/>
+          </a:bodyPr>
+          <a:lstStyle/>
+          <a:p>
+            <a:pPr algn="r">
               <a:defRPr sz="1100">
                 <a:solidFill>
                   <a:srgbClr val="7C8DB5"/>
@@ -2098,7 +2639,2164 @@
               </a:defRPr>
             </a:pPr>
             <a:r>
-              <a:t>Fig. 1: Near-wall thermal boundary layer temperature fields across the 2 × 2 matrix.</a:t>
+              <a:t>10 / 14</a:t>
+            </a:r>
+          </a:p>
+        </p:txBody>
+      </p:sp>
+      <p:sp>
+        <p:nvSpPr>
+          <p:cNvPr id="5" name="Rounded Rectangle 4"/>
+          <p:cNvSpPr/>
+          <p:nvPr/>
+        </p:nvSpPr>
+        <p:spPr>
+          <a:xfrm>
+            <a:off x="548640" y="1371600"/>
+            <a:ext cx="6583680" cy="4754880"/>
+          </a:xfrm>
+          <a:prstGeom prst="roundRect">
+            <a:avLst/>
+          </a:prstGeom>
+          <a:solidFill>
+            <a:srgbClr val="FFFFFF"/>
+          </a:solidFill>
+          <a:ln w="12700">
+            <a:solidFill>
+              <a:srgbClr val="DCE2EC"/>
+            </a:solidFill>
+          </a:ln>
+        </p:spPr>
+        <p:style>
+          <a:lnRef idx="1">
+            <a:schemeClr val="accent1"/>
+          </a:lnRef>
+          <a:fillRef idx="3">
+            <a:schemeClr val="accent1"/>
+          </a:fillRef>
+          <a:effectRef idx="2">
+            <a:schemeClr val="accent1"/>
+          </a:effectRef>
+          <a:fontRef idx="minor">
+            <a:schemeClr val="lt1"/>
+          </a:fontRef>
+        </p:style>
+        <p:txBody>
+          <a:bodyPr rtlCol="0" anchor="ctr"/>
+          <a:lstStyle/>
+          <a:p>
+            <a:pPr algn="ctr"/>
+          </a:p>
+        </p:txBody>
+      </p:sp>
+      <p:pic>
+        <p:nvPicPr>
+          <p:cNvPr id="6" name="Picture 5" descr="four_case_temperature_zoom.png"/>
+          <p:cNvPicPr>
+            <a:picLocks noChangeAspect="1"/>
+          </p:cNvPicPr>
+          <p:nvPr/>
+        </p:nvPicPr>
+        <p:blipFill>
+          <a:blip r:embed="rId2"/>
+          <a:stretch>
+            <a:fillRect/>
+          </a:stretch>
+        </p:blipFill>
+        <p:spPr>
+          <a:xfrm>
+            <a:off x="731520" y="1790823"/>
+            <a:ext cx="6217920" cy="3596392"/>
+          </a:xfrm>
+          <a:prstGeom prst="rect">
+            <a:avLst/>
+          </a:prstGeom>
+        </p:spPr>
+      </p:pic>
+      <p:sp>
+        <p:nvSpPr>
+          <p:cNvPr id="7" name="TextBox 6"/>
+          <p:cNvSpPr txBox="1"/>
+          <p:nvPr/>
+        </p:nvSpPr>
+        <p:spPr>
+          <a:xfrm>
+            <a:off x="731520" y="5696712"/>
+            <a:ext cx="6217920" cy="320040"/>
+          </a:xfrm>
+          <a:prstGeom prst="rect">
+            <a:avLst/>
+          </a:prstGeom>
+          <a:noFill/>
+        </p:spPr>
+        <p:txBody>
+          <a:bodyPr wrap="square" lIns="0" tIns="0" rIns="0" bIns="0">
+            <a:spAutoFit/>
+          </a:bodyPr>
+          <a:lstStyle/>
+          <a:p>
+            <a:pPr>
+              <a:defRPr sz="1200">
+                <a:solidFill>
+                  <a:srgbClr val="7C8DB5"/>
+                </a:solidFill>
+                <a:latin typeface="Calibri"/>
+              </a:defRPr>
+            </a:pPr>
+            <a:r>
+              <a:t>Fig. 7: Near-wall thermal boundary layer zoom across the four cases.</a:t>
+            </a:r>
+          </a:p>
+        </p:txBody>
+      </p:sp>
+      <p:sp>
+        <p:nvSpPr>
+          <p:cNvPr id="8" name="TextBox 7"/>
+          <p:cNvSpPr txBox="1"/>
+          <p:nvPr/>
+        </p:nvSpPr>
+        <p:spPr>
+          <a:xfrm>
+            <a:off x="7498079" y="1463040"/>
+            <a:ext cx="4114800" cy="3108960"/>
+          </a:xfrm>
+          <a:prstGeom prst="rect">
+            <a:avLst/>
+          </a:prstGeom>
+          <a:noFill/>
+        </p:spPr>
+        <p:txBody>
+          <a:bodyPr wrap="square" lIns="0" tIns="0">
+            <a:spAutoFit/>
+          </a:bodyPr>
+          <a:lstStyle/>
+          <a:p>
+            <a:pPr>
+              <a:spcAft>
+                <a:spcPts val="1600"/>
+              </a:spcAft>
+              <a:defRPr sz="2400" b="1">
+                <a:solidFill>
+                  <a:srgbClr val="0B1426"/>
+                </a:solidFill>
+                <a:latin typeface="Cambria"/>
+              </a:defRPr>
+            </a:pPr>
+            <a:r>
+              <a:t>Direct Isotherm Suppression</a:t>
+            </a:r>
+          </a:p>
+          <a:p>
+            <a:pPr>
+              <a:spcAft>
+                <a:spcPts val="1400"/>
+              </a:spcAft>
+              <a:defRPr sz="1600">
+                <a:solidFill>
+                  <a:srgbClr val="0B1426"/>
+                </a:solidFill>
+                <a:latin typeface="Calibri"/>
+              </a:defRPr>
+            </a:pPr>
+            <a:r>
+              <a:t>•  Radiation suppresses near-wall temperature contours across the entire heated length.</a:t>
+            </a:r>
+          </a:p>
+          <a:p>
+            <a:pPr>
+              <a:spcAft>
+                <a:spcPts val="1400"/>
+              </a:spcAft>
+              <a:defRPr sz="1600">
+                <a:solidFill>
+                  <a:srgbClr val="0B1426"/>
+                </a:solidFill>
+                <a:latin typeface="Calibri"/>
+              </a:defRPr>
+            </a:pPr>
+            <a:r>
+              <a:t>•  Thermal boundary layer thickness remains virtually invariant (5.07 mm vs 5.18 mm).</a:t>
+            </a:r>
+          </a:p>
+          <a:p>
+            <a:pPr>
+              <a:spcAft>
+                <a:spcPts val="1400"/>
+              </a:spcAft>
+              <a:defRPr sz="1600">
+                <a:solidFill>
+                  <a:srgbClr val="0B1426"/>
+                </a:solidFill>
+                <a:latin typeface="Calibri"/>
+              </a:defRPr>
+            </a:pPr>
+            <a:r>
+              <a:t>•  Demonstrates radiation acts as an in-situ heat shunt without disturbing boundary structure.</a:t>
+            </a:r>
+          </a:p>
+        </p:txBody>
+      </p:sp>
+      <p:sp>
+        <p:nvSpPr>
+          <p:cNvPr id="9" name="Rounded Rectangle 8"/>
+          <p:cNvSpPr/>
+          <p:nvPr/>
+        </p:nvSpPr>
+        <p:spPr>
+          <a:xfrm>
+            <a:off x="7498079" y="4754880"/>
+            <a:ext cx="4114800" cy="1097280"/>
+          </a:xfrm>
+          <a:prstGeom prst="roundRect">
+            <a:avLst/>
+          </a:prstGeom>
+          <a:solidFill>
+            <a:srgbClr val="FFFFFF"/>
+          </a:solidFill>
+          <a:ln w="12700">
+            <a:solidFill>
+              <a:srgbClr val="DCE2EC"/>
+            </a:solidFill>
+          </a:ln>
+        </p:spPr>
+        <p:style>
+          <a:lnRef idx="1">
+            <a:schemeClr val="accent1"/>
+          </a:lnRef>
+          <a:fillRef idx="3">
+            <a:schemeClr val="accent1"/>
+          </a:fillRef>
+          <a:effectRef idx="2">
+            <a:schemeClr val="accent1"/>
+          </a:effectRef>
+          <a:fontRef idx="minor">
+            <a:schemeClr val="lt1"/>
+          </a:fontRef>
+        </p:style>
+        <p:txBody>
+          <a:bodyPr rtlCol="0" anchor="ctr"/>
+          <a:lstStyle/>
+          <a:p>
+            <a:pPr algn="ctr"/>
+          </a:p>
+        </p:txBody>
+      </p:sp>
+      <p:sp>
+        <p:nvSpPr>
+          <p:cNvPr id="10" name="TextBox 9"/>
+          <p:cNvSpPr txBox="1"/>
+          <p:nvPr/>
+        </p:nvSpPr>
+        <p:spPr>
+          <a:xfrm>
+            <a:off x="7680960" y="4846320"/>
+            <a:ext cx="3749039" cy="914400"/>
+          </a:xfrm>
+          <a:prstGeom prst="rect">
+            <a:avLst/>
+          </a:prstGeom>
+          <a:noFill/>
+        </p:spPr>
+        <p:txBody>
+          <a:bodyPr wrap="square" lIns="0" tIns="0">
+            <a:spAutoFit/>
+          </a:bodyPr>
+          <a:lstStyle/>
+          <a:p>
+            <a:pPr>
+              <a:defRPr sz="1700" b="1">
+                <a:solidFill>
+                  <a:srgbClr val="FF7A1A"/>
+                </a:solidFill>
+                <a:latin typeface="Cambria"/>
+              </a:defRPr>
+            </a:pPr>
+            <a:r>
+              <a:t>Near-Wall Sublayer Relief</a:t>
+            </a:r>
+          </a:p>
+          <a:p>
+            <a:pPr>
+              <a:defRPr sz="1200">
+                <a:solidFill>
+                  <a:srgbClr val="0B1426"/>
+                </a:solidFill>
+                <a:latin typeface="Calibri"/>
+              </a:defRPr>
+            </a:pPr>
+            <a:r>
+              <a:t>Near-wall conductive gradient is relieved as 21.6% of heat radiates to surroundings.</a:t>
+            </a:r>
+          </a:p>
+        </p:txBody>
+      </p:sp>
+    </p:spTree>
+  </p:cSld>
+  <p:clrMapOvr>
+    <a:masterClrMapping/>
+  </p:clrMapOvr>
+</p:sld>
+</file>
+
+<file path=ppt/slides/slide11.xml><?xml version="1.0" encoding="utf-8"?>
+<p:sld xmlns:a="http://schemas.openxmlformats.org/drawingml/2006/main" xmlns:p="http://schemas.openxmlformats.org/presentationml/2006/main" xmlns:r="http://schemas.openxmlformats.org/officeDocument/2006/relationships">
+  <p:cSld>
+    <p:bg>
+      <p:bgPr>
+        <a:solidFill>
+          <a:srgbClr val="EEF2F7"/>
+        </a:solidFill>
+        <a:effectLst/>
+      </p:bgPr>
+    </p:bg>
+    <p:spTree>
+      <p:nvGrpSpPr>
+        <p:cNvPr id="1" name=""/>
+        <p:cNvGrpSpPr/>
+        <p:nvPr/>
+      </p:nvGrpSpPr>
+      <p:grpSpPr/>
+      <p:sp>
+        <p:nvSpPr>
+          <p:cNvPr id="2" name="Title 1"/>
+          <p:cNvSpPr>
+            <a:spLocks noGrp="1"/>
+          </p:cNvSpPr>
+          <p:nvPr>
+            <p:ph type="title" idx="100"/>
+          </p:nvPr>
+        </p:nvSpPr>
+        <p:spPr/>
+        <p:txBody>
+          <a:bodyPr/>
+          <a:lstStyle/>
+          <a:p/>
+        </p:txBody>
+      </p:sp>
+      <p:sp>
+        <p:nvSpPr>
+          <p:cNvPr id="3" name="TextBox 2"/>
+          <p:cNvSpPr txBox="1"/>
+          <p:nvPr/>
+        </p:nvSpPr>
+        <p:spPr>
+          <a:xfrm>
+            <a:off x="548640" y="365760"/>
+            <a:ext cx="11094415" cy="868680"/>
+          </a:xfrm>
+          <a:prstGeom prst="rect">
+            <a:avLst/>
+          </a:prstGeom>
+          <a:noFill/>
+        </p:spPr>
+        <p:txBody>
+          <a:bodyPr wrap="square" lIns="0" tIns="0" rIns="0" bIns="0">
+            <a:spAutoFit/>
+          </a:bodyPr>
+          <a:lstStyle/>
+          <a:p>
+            <a:pPr>
+              <a:defRPr sz="3200" b="1">
+                <a:solidFill>
+                  <a:srgbClr val="0B1426"/>
+                </a:solidFill>
+                <a:latin typeface="Cambria"/>
+              </a:defRPr>
+            </a:pPr>
+            <a:r>
+              <a:t>Surface Temperature Depression: Peak 6.98 K Cooling at Trailing Edge</a:t>
+            </a:r>
+          </a:p>
+        </p:txBody>
+      </p:sp>
+      <p:sp>
+        <p:nvSpPr>
+          <p:cNvPr id="4" name="TextBox 3"/>
+          <p:cNvSpPr txBox="1"/>
+          <p:nvPr/>
+        </p:nvSpPr>
+        <p:spPr>
+          <a:xfrm>
+            <a:off x="11064240" y="6400800"/>
+            <a:ext cx="548640" cy="274320"/>
+          </a:xfrm>
+          <a:prstGeom prst="rect">
+            <a:avLst/>
+          </a:prstGeom>
+          <a:noFill/>
+        </p:spPr>
+        <p:txBody>
+          <a:bodyPr wrap="none" lIns="0" tIns="0" rIns="0" bIns="0">
+            <a:spAutoFit/>
+          </a:bodyPr>
+          <a:lstStyle/>
+          <a:p>
+            <a:pPr algn="r">
+              <a:defRPr sz="1100">
+                <a:solidFill>
+                  <a:srgbClr val="7C8DB5"/>
+                </a:solidFill>
+                <a:latin typeface="Calibri"/>
+              </a:defRPr>
+            </a:pPr>
+            <a:r>
+              <a:t>11 / 14</a:t>
+            </a:r>
+          </a:p>
+        </p:txBody>
+      </p:sp>
+      <p:sp>
+        <p:nvSpPr>
+          <p:cNvPr id="5" name="Rounded Rectangle 4"/>
+          <p:cNvSpPr/>
+          <p:nvPr/>
+        </p:nvSpPr>
+        <p:spPr>
+          <a:xfrm>
+            <a:off x="548640" y="1371600"/>
+            <a:ext cx="6583680" cy="4754880"/>
+          </a:xfrm>
+          <a:prstGeom prst="roundRect">
+            <a:avLst/>
+          </a:prstGeom>
+          <a:solidFill>
+            <a:srgbClr val="FFFFFF"/>
+          </a:solidFill>
+          <a:ln w="12700">
+            <a:solidFill>
+              <a:srgbClr val="DCE2EC"/>
+            </a:solidFill>
+          </a:ln>
+        </p:spPr>
+        <p:style>
+          <a:lnRef idx="1">
+            <a:schemeClr val="accent1"/>
+          </a:lnRef>
+          <a:fillRef idx="3">
+            <a:schemeClr val="accent1"/>
+          </a:fillRef>
+          <a:effectRef idx="2">
+            <a:schemeClr val="accent1"/>
+          </a:effectRef>
+          <a:fontRef idx="minor">
+            <a:schemeClr val="lt1"/>
+          </a:fontRef>
+        </p:style>
+        <p:txBody>
+          <a:bodyPr rtlCol="0" anchor="ctr"/>
+          <a:lstStyle/>
+          <a:p>
+            <a:pPr algn="ctr"/>
+          </a:p>
+        </p:txBody>
+      </p:sp>
+      <p:pic>
+        <p:nvPicPr>
+          <p:cNvPr id="6" name="Picture 5" descr="temperature_difference_zoom.png"/>
+          <p:cNvPicPr>
+            <a:picLocks noChangeAspect="1"/>
+          </p:cNvPicPr>
+          <p:nvPr/>
+        </p:nvPicPr>
+        <p:blipFill>
+          <a:blip r:embed="rId2"/>
+          <a:stretch>
+            <a:fillRect/>
+          </a:stretch>
+        </p:blipFill>
+        <p:spPr>
+          <a:xfrm>
+            <a:off x="731520" y="2235259"/>
+            <a:ext cx="6217920" cy="2707520"/>
+          </a:xfrm>
+          <a:prstGeom prst="rect">
+            <a:avLst/>
+          </a:prstGeom>
+        </p:spPr>
+      </p:pic>
+      <p:sp>
+        <p:nvSpPr>
+          <p:cNvPr id="7" name="TextBox 6"/>
+          <p:cNvSpPr txBox="1"/>
+          <p:nvPr/>
+        </p:nvSpPr>
+        <p:spPr>
+          <a:xfrm>
+            <a:off x="731520" y="5696712"/>
+            <a:ext cx="6217920" cy="320040"/>
+          </a:xfrm>
+          <a:prstGeom prst="rect">
+            <a:avLst/>
+          </a:prstGeom>
+          <a:noFill/>
+        </p:spPr>
+        <p:txBody>
+          <a:bodyPr wrap="square" lIns="0" tIns="0" rIns="0" bIns="0">
+            <a:spAutoFit/>
+          </a:bodyPr>
+          <a:lstStyle/>
+          <a:p>
+            <a:pPr>
+              <a:defRPr sz="1200">
+                <a:solidFill>
+                  <a:srgbClr val="7C8DB5"/>
+                </a:solidFill>
+                <a:latin typeface="Calibri"/>
+              </a:defRPr>
+            </a:pPr>
+            <a:r>
+              <a:t>Fig. 8: Boundary layer temperature difference field (T_radiation - T_baseline).</a:t>
+            </a:r>
+          </a:p>
+        </p:txBody>
+      </p:sp>
+      <p:sp>
+        <p:nvSpPr>
+          <p:cNvPr id="8" name="Rounded Rectangle 7"/>
+          <p:cNvSpPr/>
+          <p:nvPr/>
+        </p:nvSpPr>
+        <p:spPr>
+          <a:xfrm>
+            <a:off x="7498079" y="1371600"/>
+            <a:ext cx="4114800" cy="1371600"/>
+          </a:xfrm>
+          <a:prstGeom prst="roundRect">
+            <a:avLst/>
+          </a:prstGeom>
+          <a:solidFill>
+            <a:srgbClr val="FFFFFF"/>
+          </a:solidFill>
+          <a:ln w="12700">
+            <a:solidFill>
+              <a:srgbClr val="DCE2EC"/>
+            </a:solidFill>
+          </a:ln>
+        </p:spPr>
+        <p:style>
+          <a:lnRef idx="1">
+            <a:schemeClr val="accent1"/>
+          </a:lnRef>
+          <a:fillRef idx="3">
+            <a:schemeClr val="accent1"/>
+          </a:fillRef>
+          <a:effectRef idx="2">
+            <a:schemeClr val="accent1"/>
+          </a:effectRef>
+          <a:fontRef idx="minor">
+            <a:schemeClr val="lt1"/>
+          </a:fontRef>
+        </p:style>
+        <p:txBody>
+          <a:bodyPr rtlCol="0" anchor="ctr"/>
+          <a:lstStyle/>
+          <a:p>
+            <a:pPr algn="ctr"/>
+          </a:p>
+        </p:txBody>
+      </p:sp>
+      <p:sp>
+        <p:nvSpPr>
+          <p:cNvPr id="9" name="TextBox 8"/>
+          <p:cNvSpPr txBox="1"/>
+          <p:nvPr/>
+        </p:nvSpPr>
+        <p:spPr>
+          <a:xfrm>
+            <a:off x="7680960" y="1463040"/>
+            <a:ext cx="3749039" cy="1188720"/>
+          </a:xfrm>
+          <a:prstGeom prst="rect">
+            <a:avLst/>
+          </a:prstGeom>
+          <a:noFill/>
+        </p:spPr>
+        <p:txBody>
+          <a:bodyPr wrap="square" lIns="0" tIns="0">
+            <a:spAutoFit/>
+          </a:bodyPr>
+          <a:lstStyle/>
+          <a:p>
+            <a:pPr>
+              <a:defRPr sz="3800" b="1">
+                <a:solidFill>
+                  <a:srgbClr val="23B5D3"/>
+                </a:solidFill>
+                <a:latin typeface="Cambria"/>
+              </a:defRPr>
+            </a:pPr>
+            <a:r>
+              <a:t>6.98 K Drop</a:t>
+            </a:r>
+          </a:p>
+          <a:p>
+            <a:pPr>
+              <a:defRPr sz="1400" b="1">
+                <a:solidFill>
+                  <a:srgbClr val="0B1426"/>
+                </a:solidFill>
+                <a:latin typeface="Calibri"/>
+              </a:defRPr>
+            </a:pPr>
+            <a:r>
+              <a:t>Peak Wall Temperature Reduction (Fine Grid)</a:t>
+            </a:r>
+          </a:p>
+        </p:txBody>
+      </p:sp>
+      <p:sp>
+        <p:nvSpPr>
+          <p:cNvPr id="10" name="TextBox 9"/>
+          <p:cNvSpPr txBox="1"/>
+          <p:nvPr/>
+        </p:nvSpPr>
+        <p:spPr>
+          <a:xfrm>
+            <a:off x="7498079" y="3017520"/>
+            <a:ext cx="4114800" cy="2377440"/>
+          </a:xfrm>
+          <a:prstGeom prst="rect">
+            <a:avLst/>
+          </a:prstGeom>
+          <a:noFill/>
+        </p:spPr>
+        <p:txBody>
+          <a:bodyPr wrap="square" lIns="0" tIns="0">
+            <a:spAutoFit/>
+          </a:bodyPr>
+          <a:lstStyle/>
+          <a:p>
+            <a:pPr>
+              <a:spcAft>
+                <a:spcPts val="1400"/>
+              </a:spcAft>
+              <a:defRPr sz="1500">
+                <a:solidFill>
+                  <a:srgbClr val="0B1426"/>
+                </a:solidFill>
+                <a:latin typeface="Calibri"/>
+              </a:defRPr>
+            </a:pPr>
+            <a:r>
+              <a:t>•  Radiation lowers plate wall temperature along the entire heated length.</a:t>
+            </a:r>
+          </a:p>
+          <a:p>
+            <a:pPr>
+              <a:spcAft>
+                <a:spcPts val="1400"/>
+              </a:spcAft>
+              <a:defRPr sz="1500">
+                <a:solidFill>
+                  <a:srgbClr val="0B1426"/>
+                </a:solidFill>
+                <a:latin typeface="Calibri"/>
+              </a:defRPr>
+            </a:pPr>
+            <a:r>
+              <a:t>•  Cooling effect intensifies downstream, reaching maximum depression of 6.98 K.</a:t>
+            </a:r>
+          </a:p>
+          <a:p>
+            <a:pPr>
+              <a:spcAft>
+                <a:spcPts val="1400"/>
+              </a:spcAft>
+              <a:defRPr sz="1500">
+                <a:solidFill>
+                  <a:srgbClr val="0B1426"/>
+                </a:solidFill>
+                <a:latin typeface="Calibri"/>
+              </a:defRPr>
+            </a:pPr>
+            <a:r>
+              <a:t>•  Thermal boundary layer thickness remains virtually unchanged across radiation cases.</a:t>
+            </a:r>
+          </a:p>
+          <a:p>
+            <a:pPr>
+              <a:spcBef>
+                <a:spcPts val="800"/>
+              </a:spcBef>
+              <a:defRPr sz="1200">
+                <a:solidFill>
+                  <a:srgbClr val="7C8DB5"/>
+                </a:solidFill>
+                <a:latin typeface="Calibri"/>
+              </a:defRPr>
+            </a:pPr>
+            <a:r>
+              <a:t>Fine grid trailing edge: 336.70 K vs 343.68 K pure convection.</a:t>
+            </a:r>
+          </a:p>
+        </p:txBody>
+      </p:sp>
+    </p:spTree>
+  </p:cSld>
+  <p:clrMapOvr>
+    <a:masterClrMapping/>
+  </p:clrMapOvr>
+</p:sld>
+</file>
+
+<file path=ppt/slides/slide12.xml><?xml version="1.0" encoding="utf-8"?>
+<p:sld xmlns:a="http://schemas.openxmlformats.org/drawingml/2006/main" xmlns:p="http://schemas.openxmlformats.org/presentationml/2006/main" xmlns:r="http://schemas.openxmlformats.org/officeDocument/2006/relationships">
+  <p:cSld>
+    <p:bg>
+      <p:bgPr>
+        <a:solidFill>
+          <a:srgbClr val="EEF2F7"/>
+        </a:solidFill>
+        <a:effectLst/>
+      </p:bgPr>
+    </p:bg>
+    <p:spTree>
+      <p:nvGrpSpPr>
+        <p:cNvPr id="1" name=""/>
+        <p:cNvGrpSpPr/>
+        <p:nvPr/>
+      </p:nvGrpSpPr>
+      <p:grpSpPr/>
+      <p:sp>
+        <p:nvSpPr>
+          <p:cNvPr id="2" name="Title 1"/>
+          <p:cNvSpPr>
+            <a:spLocks noGrp="1"/>
+          </p:cNvSpPr>
+          <p:nvPr>
+            <p:ph type="title" idx="100"/>
+          </p:nvPr>
+        </p:nvSpPr>
+        <p:spPr/>
+        <p:txBody>
+          <a:bodyPr/>
+          <a:lstStyle/>
+          <a:p/>
+        </p:txBody>
+      </p:sp>
+      <p:sp>
+        <p:nvSpPr>
+          <p:cNvPr id="3" name="TextBox 2"/>
+          <p:cNvSpPr txBox="1"/>
+          <p:nvPr/>
+        </p:nvSpPr>
+        <p:spPr>
+          <a:xfrm>
+            <a:off x="548640" y="365760"/>
+            <a:ext cx="11094415" cy="868680"/>
+          </a:xfrm>
+          <a:prstGeom prst="rect">
+            <a:avLst/>
+          </a:prstGeom>
+          <a:noFill/>
+        </p:spPr>
+        <p:txBody>
+          <a:bodyPr wrap="square" lIns="0" tIns="0" rIns="0" bIns="0">
+            <a:spAutoFit/>
+          </a:bodyPr>
+          <a:lstStyle/>
+          <a:p>
+            <a:pPr>
+              <a:defRPr sz="3200" b="1">
+                <a:solidFill>
+                  <a:srgbClr val="0B1426"/>
+                </a:solidFill>
+                <a:latin typeface="Cambria"/>
+              </a:defRPr>
+            </a:pPr>
+            <a:r>
+              <a:t>Streamwise Heat Flux Partitioning: Radiation Carries 21.6% of Load</a:t>
+            </a:r>
+          </a:p>
+        </p:txBody>
+      </p:sp>
+      <p:sp>
+        <p:nvSpPr>
+          <p:cNvPr id="4" name="TextBox 3"/>
+          <p:cNvSpPr txBox="1"/>
+          <p:nvPr/>
+        </p:nvSpPr>
+        <p:spPr>
+          <a:xfrm>
+            <a:off x="11064240" y="6400800"/>
+            <a:ext cx="548640" cy="274320"/>
+          </a:xfrm>
+          <a:prstGeom prst="rect">
+            <a:avLst/>
+          </a:prstGeom>
+          <a:noFill/>
+        </p:spPr>
+        <p:txBody>
+          <a:bodyPr wrap="none" lIns="0" tIns="0" rIns="0" bIns="0">
+            <a:spAutoFit/>
+          </a:bodyPr>
+          <a:lstStyle/>
+          <a:p>
+            <a:pPr algn="r">
+              <a:defRPr sz="1100">
+                <a:solidFill>
+                  <a:srgbClr val="7C8DB5"/>
+                </a:solidFill>
+                <a:latin typeface="Calibri"/>
+              </a:defRPr>
+            </a:pPr>
+            <a:r>
+              <a:t>12 / 14</a:t>
+            </a:r>
+          </a:p>
+        </p:txBody>
+      </p:sp>
+      <p:sp>
+        <p:nvSpPr>
+          <p:cNvPr id="5" name="Rounded Rectangle 4"/>
+          <p:cNvSpPr/>
+          <p:nvPr/>
+        </p:nvSpPr>
+        <p:spPr>
+          <a:xfrm>
+            <a:off x="548640" y="1371600"/>
+            <a:ext cx="6583680" cy="4754880"/>
+          </a:xfrm>
+          <a:prstGeom prst="roundRect">
+            <a:avLst/>
+          </a:prstGeom>
+          <a:solidFill>
+            <a:srgbClr val="FFFFFF"/>
+          </a:solidFill>
+          <a:ln w="12700">
+            <a:solidFill>
+              <a:srgbClr val="DCE2EC"/>
+            </a:solidFill>
+          </a:ln>
+        </p:spPr>
+        <p:style>
+          <a:lnRef idx="1">
+            <a:schemeClr val="accent1"/>
+          </a:lnRef>
+          <a:fillRef idx="3">
+            <a:schemeClr val="accent1"/>
+          </a:fillRef>
+          <a:effectRef idx="2">
+            <a:schemeClr val="accent1"/>
+          </a:effectRef>
+          <a:fontRef idx="minor">
+            <a:schemeClr val="lt1"/>
+          </a:fontRef>
+        </p:style>
+        <p:txBody>
+          <a:bodyPr rtlCol="0" anchor="ctr"/>
+          <a:lstStyle/>
+          <a:p>
+            <a:pPr algn="ctr"/>
+          </a:p>
+        </p:txBody>
+      </p:sp>
+      <p:pic>
+        <p:nvPicPr>
+          <p:cNvPr id="6" name="Picture 5" descr="wall_heat_balance_and_nusselt.png"/>
+          <p:cNvPicPr>
+            <a:picLocks noChangeAspect="1"/>
+          </p:cNvPicPr>
+          <p:nvPr/>
+        </p:nvPicPr>
+        <p:blipFill>
+          <a:blip r:embed="rId2"/>
+          <a:stretch>
+            <a:fillRect/>
+          </a:stretch>
+        </p:blipFill>
+        <p:spPr>
+          <a:xfrm>
+            <a:off x="731520" y="2464626"/>
+            <a:ext cx="6217920" cy="2248787"/>
+          </a:xfrm>
+          <a:prstGeom prst="rect">
+            <a:avLst/>
+          </a:prstGeom>
+        </p:spPr>
+      </p:pic>
+      <p:sp>
+        <p:nvSpPr>
+          <p:cNvPr id="7" name="TextBox 6"/>
+          <p:cNvSpPr txBox="1"/>
+          <p:nvPr/>
+        </p:nvSpPr>
+        <p:spPr>
+          <a:xfrm>
+            <a:off x="731520" y="5696712"/>
+            <a:ext cx="6217920" cy="320040"/>
+          </a:xfrm>
+          <a:prstGeom prst="rect">
+            <a:avLst/>
+          </a:prstGeom>
+          <a:noFill/>
+        </p:spPr>
+        <p:txBody>
+          <a:bodyPr wrap="square" lIns="0" tIns="0" rIns="0" bIns="0">
+            <a:spAutoFit/>
+          </a:bodyPr>
+          <a:lstStyle/>
+          <a:p>
+            <a:pPr>
+              <a:defRPr sz="1200">
+                <a:solidFill>
+                  <a:srgbClr val="7C8DB5"/>
+                </a:solidFill>
+                <a:latin typeface="Calibri"/>
+              </a:defRPr>
+            </a:pPr>
+            <a:r>
+              <a:t>Fig. 9: Streamwise convective vs radiative heat-flux split and Nusselt number.</a:t>
+            </a:r>
+          </a:p>
+        </p:txBody>
+      </p:sp>
+      <p:sp>
+        <p:nvSpPr>
+          <p:cNvPr id="8" name="Rounded Rectangle 7"/>
+          <p:cNvSpPr/>
+          <p:nvPr/>
+        </p:nvSpPr>
+        <p:spPr>
+          <a:xfrm>
+            <a:off x="7498079" y="1371600"/>
+            <a:ext cx="4114800" cy="1280160"/>
+          </a:xfrm>
+          <a:prstGeom prst="roundRect">
+            <a:avLst/>
+          </a:prstGeom>
+          <a:solidFill>
+            <a:srgbClr val="FFFFFF"/>
+          </a:solidFill>
+          <a:ln w="12700">
+            <a:solidFill>
+              <a:srgbClr val="DCE2EC"/>
+            </a:solidFill>
+          </a:ln>
+        </p:spPr>
+        <p:style>
+          <a:lnRef idx="1">
+            <a:schemeClr val="accent1"/>
+          </a:lnRef>
+          <a:fillRef idx="3">
+            <a:schemeClr val="accent1"/>
+          </a:fillRef>
+          <a:effectRef idx="2">
+            <a:schemeClr val="accent1"/>
+          </a:effectRef>
+          <a:fontRef idx="minor">
+            <a:schemeClr val="lt1"/>
+          </a:fontRef>
+        </p:style>
+        <p:txBody>
+          <a:bodyPr rtlCol="0" anchor="ctr"/>
+          <a:lstStyle/>
+          <a:p>
+            <a:pPr algn="ctr"/>
+          </a:p>
+        </p:txBody>
+      </p:sp>
+      <p:sp>
+        <p:nvSpPr>
+          <p:cNvPr id="9" name="TextBox 8"/>
+          <p:cNvSpPr txBox="1"/>
+          <p:nvPr/>
+        </p:nvSpPr>
+        <p:spPr>
+          <a:xfrm>
+            <a:off x="7680960" y="1463040"/>
+            <a:ext cx="3749039" cy="1097280"/>
+          </a:xfrm>
+          <a:prstGeom prst="rect">
+            <a:avLst/>
+          </a:prstGeom>
+          <a:noFill/>
+        </p:spPr>
+        <p:txBody>
+          <a:bodyPr wrap="none" lIns="0" tIns="0">
+            <a:spAutoFit/>
+          </a:bodyPr>
+          <a:lstStyle/>
+          <a:p>
+            <a:pPr>
+              <a:defRPr sz="3600" b="1">
+                <a:solidFill>
+                  <a:srgbClr val="FF7A1A"/>
+                </a:solidFill>
+                <a:latin typeface="Cambria"/>
+              </a:defRPr>
+            </a:pPr>
+            <a:r>
+              <a:t>21.3%</a:t>
+            </a:r>
+          </a:p>
+          <a:p>
+            <a:pPr>
+              <a:defRPr sz="1300" b="1">
+                <a:solidFill>
+                  <a:srgbClr val="0B1426"/>
+                </a:solidFill>
+                <a:latin typeface="Calibri"/>
+              </a:defRPr>
+            </a:pPr>
+            <a:r>
+              <a:t>Plate-Averaged Radiative Load</a:t>
+            </a:r>
+          </a:p>
+        </p:txBody>
+      </p:sp>
+      <p:sp>
+        <p:nvSpPr>
+          <p:cNvPr id="10" name="Rounded Rectangle 9"/>
+          <p:cNvSpPr/>
+          <p:nvPr/>
+        </p:nvSpPr>
+        <p:spPr>
+          <a:xfrm>
+            <a:off x="7498079" y="2788920"/>
+            <a:ext cx="4114800" cy="1280160"/>
+          </a:xfrm>
+          <a:prstGeom prst="roundRect">
+            <a:avLst/>
+          </a:prstGeom>
+          <a:solidFill>
+            <a:srgbClr val="FFFFFF"/>
+          </a:solidFill>
+          <a:ln w="12700">
+            <a:solidFill>
+              <a:srgbClr val="DCE2EC"/>
+            </a:solidFill>
+          </a:ln>
+        </p:spPr>
+        <p:style>
+          <a:lnRef idx="1">
+            <a:schemeClr val="accent1"/>
+          </a:lnRef>
+          <a:fillRef idx="3">
+            <a:schemeClr val="accent1"/>
+          </a:fillRef>
+          <a:effectRef idx="2">
+            <a:schemeClr val="accent1"/>
+          </a:effectRef>
+          <a:fontRef idx="minor">
+            <a:schemeClr val="lt1"/>
+          </a:fontRef>
+        </p:style>
+        <p:txBody>
+          <a:bodyPr rtlCol="0" anchor="ctr"/>
+          <a:lstStyle/>
+          <a:p>
+            <a:pPr algn="ctr"/>
+          </a:p>
+        </p:txBody>
+      </p:sp>
+      <p:sp>
+        <p:nvSpPr>
+          <p:cNvPr id="11" name="TextBox 10"/>
+          <p:cNvSpPr txBox="1"/>
+          <p:nvPr/>
+        </p:nvSpPr>
+        <p:spPr>
+          <a:xfrm>
+            <a:off x="7680960" y="2880360"/>
+            <a:ext cx="3749039" cy="1097280"/>
+          </a:xfrm>
+          <a:prstGeom prst="rect">
+            <a:avLst/>
+          </a:prstGeom>
+          <a:noFill/>
+        </p:spPr>
+        <p:txBody>
+          <a:bodyPr wrap="none" lIns="0" tIns="0">
+            <a:spAutoFit/>
+          </a:bodyPr>
+          <a:lstStyle/>
+          <a:p>
+            <a:pPr>
+              <a:defRPr sz="3600" b="1">
+                <a:solidFill>
+                  <a:srgbClr val="23B5D3"/>
+                </a:solidFill>
+                <a:latin typeface="Cambria"/>
+              </a:defRPr>
+            </a:pPr>
+            <a:r>
+              <a:t>21.6%</a:t>
+            </a:r>
+          </a:p>
+          <a:p>
+            <a:pPr>
+              <a:defRPr sz="1300" b="1">
+                <a:solidFill>
+                  <a:srgbClr val="0B1426"/>
+                </a:solidFill>
+                <a:latin typeface="Calibri"/>
+              </a:defRPr>
+            </a:pPr>
+            <a:r>
+              <a:t>Trailing-Edge Radiative Load</a:t>
+            </a:r>
+          </a:p>
+        </p:txBody>
+      </p:sp>
+      <p:sp>
+        <p:nvSpPr>
+          <p:cNvPr id="12" name="TextBox 11"/>
+          <p:cNvSpPr txBox="1"/>
+          <p:nvPr/>
+        </p:nvSpPr>
+        <p:spPr>
+          <a:xfrm>
+            <a:off x="7498079" y="4251960"/>
+            <a:ext cx="4114800" cy="1828800"/>
+          </a:xfrm>
+          <a:prstGeom prst="rect">
+            <a:avLst/>
+          </a:prstGeom>
+          <a:noFill/>
+        </p:spPr>
+        <p:txBody>
+          <a:bodyPr wrap="square" lIns="0" tIns="0">
+            <a:spAutoFit/>
+          </a:bodyPr>
+          <a:lstStyle/>
+          <a:p>
+            <a:pPr>
+              <a:spcAft>
+                <a:spcPts val="1400"/>
+              </a:spcAft>
+              <a:defRPr sz="1400">
+                <a:solidFill>
+                  <a:srgbClr val="0B1426"/>
+                </a:solidFill>
+                <a:latin typeface="Calibri"/>
+              </a:defRPr>
+            </a:pPr>
+            <a:r>
+              <a:t>•  Surface radiation relieves over one-fifth of the total heat dissipation load.</a:t>
+            </a:r>
+          </a:p>
+          <a:p>
+            <a:pPr>
+              <a:spcAft>
+                <a:spcPts val="1400"/>
+              </a:spcAft>
+              <a:defRPr sz="1400">
+                <a:solidFill>
+                  <a:srgbClr val="0B1426"/>
+                </a:solidFill>
+                <a:latin typeface="Calibri"/>
+              </a:defRPr>
+            </a:pPr>
+            <a:r>
+              <a:t>•  Radiative heat flux remains nearly uniform along the entire plate surface.</a:t>
+            </a:r>
+          </a:p>
+          <a:p>
+            <a:pPr>
+              <a:spcAft>
+                <a:spcPts val="1400"/>
+              </a:spcAft>
+              <a:defRPr sz="1400">
+                <a:solidFill>
+                  <a:srgbClr val="0B1426"/>
+                </a:solidFill>
+                <a:latin typeface="Calibri"/>
+              </a:defRPr>
+            </a:pPr>
+            <a:r>
+              <a:t>•  Convective flux drops downstream as thermal boundary layer growth increases resistance.</a:t>
+            </a:r>
+          </a:p>
+        </p:txBody>
+      </p:sp>
+    </p:spTree>
+  </p:cSld>
+  <p:clrMapOvr>
+    <a:masterClrMapping/>
+  </p:clrMapOvr>
+</p:sld>
+</file>
+
+<file path=ppt/slides/slide13.xml><?xml version="1.0" encoding="utf-8"?>
+<p:sld xmlns:a="http://schemas.openxmlformats.org/drawingml/2006/main" xmlns:p="http://schemas.openxmlformats.org/presentationml/2006/main" xmlns:r="http://schemas.openxmlformats.org/officeDocument/2006/relationships">
+  <p:cSld>
+    <p:bg>
+      <p:bgPr>
+        <a:solidFill>
+          <a:srgbClr val="0B1426"/>
+        </a:solidFill>
+        <a:effectLst/>
+      </p:bgPr>
+    </p:bg>
+    <p:spTree>
+      <p:nvGrpSpPr>
+        <p:cNvPr id="1" name=""/>
+        <p:cNvGrpSpPr/>
+        <p:nvPr/>
+      </p:nvGrpSpPr>
+      <p:grpSpPr/>
+      <p:sp>
+        <p:nvSpPr>
+          <p:cNvPr id="2" name="Title 1"/>
+          <p:cNvSpPr>
+            <a:spLocks noGrp="1"/>
+          </p:cNvSpPr>
+          <p:nvPr>
+            <p:ph type="title" idx="100"/>
+          </p:nvPr>
+        </p:nvSpPr>
+        <p:spPr/>
+        <p:txBody>
+          <a:bodyPr/>
+          <a:lstStyle/>
+          <a:p/>
+        </p:txBody>
+      </p:sp>
+      <p:sp>
+        <p:nvSpPr>
+          <p:cNvPr id="3" name="TextBox 2"/>
+          <p:cNvSpPr txBox="1"/>
+          <p:nvPr/>
+        </p:nvSpPr>
+        <p:spPr>
+          <a:xfrm>
+            <a:off x="548640" y="365760"/>
+            <a:ext cx="11094415" cy="868680"/>
+          </a:xfrm>
+          <a:prstGeom prst="rect">
+            <a:avLst/>
+          </a:prstGeom>
+          <a:noFill/>
+        </p:spPr>
+        <p:txBody>
+          <a:bodyPr wrap="square" lIns="0" tIns="0" rIns="0" bIns="0">
+            <a:spAutoFit/>
+          </a:bodyPr>
+          <a:lstStyle/>
+          <a:p>
+            <a:pPr>
+              <a:defRPr sz="3200" b="1">
+                <a:solidFill>
+                  <a:srgbClr val="FFFFFF"/>
+                </a:solidFill>
+                <a:latin typeface="Cambria"/>
+              </a:defRPr>
+            </a:pPr>
+            <a:r>
+              <a:t>Numerical Rigor: Grid Convergence and Solver Stability</a:t>
+            </a:r>
+          </a:p>
+        </p:txBody>
+      </p:sp>
+      <p:sp>
+        <p:nvSpPr>
+          <p:cNvPr id="4" name="TextBox 3"/>
+          <p:cNvSpPr txBox="1"/>
+          <p:nvPr/>
+        </p:nvSpPr>
+        <p:spPr>
+          <a:xfrm>
+            <a:off x="11064240" y="6400800"/>
+            <a:ext cx="548640" cy="274320"/>
+          </a:xfrm>
+          <a:prstGeom prst="rect">
+            <a:avLst/>
+          </a:prstGeom>
+          <a:noFill/>
+        </p:spPr>
+        <p:txBody>
+          <a:bodyPr wrap="none" lIns="0" tIns="0" rIns="0" bIns="0">
+            <a:spAutoFit/>
+          </a:bodyPr>
+          <a:lstStyle/>
+          <a:p>
+            <a:pPr algn="r">
+              <a:defRPr sz="1100">
+                <a:solidFill>
+                  <a:srgbClr val="7C8DB5"/>
+                </a:solidFill>
+                <a:latin typeface="Calibri"/>
+              </a:defRPr>
+            </a:pPr>
+            <a:r>
+              <a:t>13 / 14</a:t>
+            </a:r>
+          </a:p>
+        </p:txBody>
+      </p:sp>
+      <p:sp>
+        <p:nvSpPr>
+          <p:cNvPr id="5" name="Rounded Rectangle 4"/>
+          <p:cNvSpPr/>
+          <p:nvPr/>
+        </p:nvSpPr>
+        <p:spPr>
+          <a:xfrm>
+            <a:off x="548640" y="1371600"/>
+            <a:ext cx="6583680" cy="4754880"/>
+          </a:xfrm>
+          <a:prstGeom prst="roundRect">
+            <a:avLst/>
+          </a:prstGeom>
+          <a:solidFill>
+            <a:srgbClr val="16264A"/>
+          </a:solidFill>
+          <a:ln>
+            <a:noFill/>
+          </a:ln>
+        </p:spPr>
+        <p:style>
+          <a:lnRef idx="1">
+            <a:schemeClr val="accent1"/>
+          </a:lnRef>
+          <a:fillRef idx="3">
+            <a:schemeClr val="accent1"/>
+          </a:fillRef>
+          <a:effectRef idx="2">
+            <a:schemeClr val="accent1"/>
+          </a:effectRef>
+          <a:fontRef idx="minor">
+            <a:schemeClr val="lt1"/>
+          </a:fontRef>
+        </p:style>
+        <p:txBody>
+          <a:bodyPr rtlCol="0" anchor="ctr"/>
+          <a:lstStyle/>
+          <a:p>
+            <a:pPr algn="ctr"/>
+          </a:p>
+        </p:txBody>
+      </p:sp>
+      <p:pic>
+        <p:nvPicPr>
+          <p:cNvPr id="6" name="Picture 5" descr="convergence_histories_all4.png"/>
+          <p:cNvPicPr>
+            <a:picLocks noChangeAspect="1"/>
+          </p:cNvPicPr>
+          <p:nvPr/>
+        </p:nvPicPr>
+        <p:blipFill>
+          <a:blip r:embed="rId2"/>
+          <a:stretch>
+            <a:fillRect/>
+          </a:stretch>
+        </p:blipFill>
+        <p:spPr>
+          <a:xfrm>
+            <a:off x="780316" y="1536192"/>
+            <a:ext cx="6120327" cy="4105656"/>
+          </a:xfrm>
+          <a:prstGeom prst="rect">
+            <a:avLst/>
+          </a:prstGeom>
+        </p:spPr>
+      </p:pic>
+      <p:sp>
+        <p:nvSpPr>
+          <p:cNvPr id="7" name="TextBox 6"/>
+          <p:cNvSpPr txBox="1"/>
+          <p:nvPr/>
+        </p:nvSpPr>
+        <p:spPr>
+          <a:xfrm>
+            <a:off x="731520" y="5696712"/>
+            <a:ext cx="6217920" cy="320040"/>
+          </a:xfrm>
+          <a:prstGeom prst="rect">
+            <a:avLst/>
+          </a:prstGeom>
+          <a:noFill/>
+        </p:spPr>
+        <p:txBody>
+          <a:bodyPr wrap="square" lIns="0" tIns="0" rIns="0" bIns="0">
+            <a:spAutoFit/>
+          </a:bodyPr>
+          <a:lstStyle/>
+          <a:p>
+            <a:pPr>
+              <a:defRPr sz="1200">
+                <a:solidFill>
+                  <a:srgbClr val="7C8DB5"/>
+                </a:solidFill>
+                <a:latin typeface="Calibri"/>
+              </a:defRPr>
+            </a:pPr>
+            <a:r>
+              <a:t>Fig. 10: Solver residual histories for p, U, and T across all four cases.</a:t>
+            </a:r>
+          </a:p>
+        </p:txBody>
+      </p:sp>
+      <p:sp>
+        <p:nvSpPr>
+          <p:cNvPr id="8" name="Rounded Rectangle 7"/>
+          <p:cNvSpPr/>
+          <p:nvPr/>
+        </p:nvSpPr>
+        <p:spPr>
+          <a:xfrm>
+            <a:off x="7498079" y="1371600"/>
+            <a:ext cx="4114800" cy="1417320"/>
+          </a:xfrm>
+          <a:prstGeom prst="roundRect">
+            <a:avLst/>
+          </a:prstGeom>
+          <a:solidFill>
+            <a:srgbClr val="16264A"/>
+          </a:solidFill>
+          <a:ln>
+            <a:noFill/>
+          </a:ln>
+        </p:spPr>
+        <p:style>
+          <a:lnRef idx="1">
+            <a:schemeClr val="accent1"/>
+          </a:lnRef>
+          <a:fillRef idx="3">
+            <a:schemeClr val="accent1"/>
+          </a:fillRef>
+          <a:effectRef idx="2">
+            <a:schemeClr val="accent1"/>
+          </a:effectRef>
+          <a:fontRef idx="minor">
+            <a:schemeClr val="lt1"/>
+          </a:fontRef>
+        </p:style>
+        <p:txBody>
+          <a:bodyPr rtlCol="0" anchor="ctr"/>
+          <a:lstStyle/>
+          <a:p>
+            <a:pPr algn="ctr"/>
+          </a:p>
+        </p:txBody>
+      </p:sp>
+      <p:sp>
+        <p:nvSpPr>
+          <p:cNvPr id="9" name="TextBox 8"/>
+          <p:cNvSpPr txBox="1"/>
+          <p:nvPr/>
+        </p:nvSpPr>
+        <p:spPr>
+          <a:xfrm>
+            <a:off x="7772400" y="1536192"/>
+            <a:ext cx="3566160" cy="1097280"/>
+          </a:xfrm>
+          <a:prstGeom prst="rect">
+            <a:avLst/>
+          </a:prstGeom>
+          <a:noFill/>
+        </p:spPr>
+        <p:txBody>
+          <a:bodyPr wrap="square" lIns="0" tIns="0">
+            <a:spAutoFit/>
+          </a:bodyPr>
+          <a:lstStyle/>
+          <a:p>
+            <a:pPr>
+              <a:defRPr sz="3400" b="1">
+                <a:solidFill>
+                  <a:srgbClr val="23B5D3"/>
+                </a:solidFill>
+                <a:latin typeface="Cambria"/>
+              </a:defRPr>
+            </a:pPr>
+            <a:r>
+              <a:t>1.30 × 10⁻⁸</a:t>
+            </a:r>
+          </a:p>
+          <a:p>
+            <a:pPr>
+              <a:defRPr sz="1300">
+                <a:solidFill>
+                  <a:srgbClr val="EEF2F7"/>
+                </a:solidFill>
+                <a:latin typeface="Calibri"/>
+              </a:defRPr>
+            </a:pPr>
+            <a:r>
+              <a:t>Continuity residual confirms deep monotonic convergence</a:t>
+            </a:r>
+          </a:p>
+        </p:txBody>
+      </p:sp>
+      <p:sp>
+        <p:nvSpPr>
+          <p:cNvPr id="10" name="Rounded Rectangle 9"/>
+          <p:cNvSpPr/>
+          <p:nvPr/>
+        </p:nvSpPr>
+        <p:spPr>
+          <a:xfrm>
+            <a:off x="7498079" y="2971800"/>
+            <a:ext cx="4114800" cy="1417320"/>
+          </a:xfrm>
+          <a:prstGeom prst="roundRect">
+            <a:avLst/>
+          </a:prstGeom>
+          <a:solidFill>
+            <a:srgbClr val="16264A"/>
+          </a:solidFill>
+          <a:ln>
+            <a:noFill/>
+          </a:ln>
+        </p:spPr>
+        <p:style>
+          <a:lnRef idx="1">
+            <a:schemeClr val="accent1"/>
+          </a:lnRef>
+          <a:fillRef idx="3">
+            <a:schemeClr val="accent1"/>
+          </a:fillRef>
+          <a:effectRef idx="2">
+            <a:schemeClr val="accent1"/>
+          </a:effectRef>
+          <a:fontRef idx="minor">
+            <a:schemeClr val="lt1"/>
+          </a:fontRef>
+        </p:style>
+        <p:txBody>
+          <a:bodyPr rtlCol="0" anchor="ctr"/>
+          <a:lstStyle/>
+          <a:p>
+            <a:pPr algn="ctr"/>
+          </a:p>
+        </p:txBody>
+      </p:sp>
+      <p:sp>
+        <p:nvSpPr>
+          <p:cNvPr id="11" name="TextBox 10"/>
+          <p:cNvSpPr txBox="1"/>
+          <p:nvPr/>
+        </p:nvSpPr>
+        <p:spPr>
+          <a:xfrm>
+            <a:off x="7772400" y="3136392"/>
+            <a:ext cx="3566160" cy="1097280"/>
+          </a:xfrm>
+          <a:prstGeom prst="rect">
+            <a:avLst/>
+          </a:prstGeom>
+          <a:noFill/>
+        </p:spPr>
+        <p:txBody>
+          <a:bodyPr wrap="square" lIns="0" tIns="0">
+            <a:spAutoFit/>
+          </a:bodyPr>
+          <a:lstStyle/>
+          <a:p>
+            <a:pPr>
+              <a:defRPr sz="3400" b="1">
+                <a:solidFill>
+                  <a:srgbClr val="FF7A1A"/>
+                </a:solidFill>
+                <a:latin typeface="Cambria"/>
+              </a:defRPr>
+            </a:pPr>
+            <a:r>
+              <a:t>1500 Iter</a:t>
+            </a:r>
+          </a:p>
+          <a:p>
+            <a:pPr>
+              <a:defRPr sz="1300">
+                <a:solidFill>
+                  <a:srgbClr val="EEF2F7"/>
+                </a:solidFill>
+                <a:latin typeface="Calibri"/>
+              </a:defRPr>
+            </a:pPr>
+            <a:r>
+              <a:t>PIMPLE outer iterations achieve complete steady-state stability</a:t>
+            </a:r>
+          </a:p>
+        </p:txBody>
+      </p:sp>
+      <p:sp>
+        <p:nvSpPr>
+          <p:cNvPr id="12" name="Rounded Rectangle 11"/>
+          <p:cNvSpPr/>
+          <p:nvPr/>
+        </p:nvSpPr>
+        <p:spPr>
+          <a:xfrm>
+            <a:off x="7498079" y="4572000"/>
+            <a:ext cx="4114800" cy="1417320"/>
+          </a:xfrm>
+          <a:prstGeom prst="roundRect">
+            <a:avLst/>
+          </a:prstGeom>
+          <a:solidFill>
+            <a:srgbClr val="16264A"/>
+          </a:solidFill>
+          <a:ln>
+            <a:noFill/>
+          </a:ln>
+        </p:spPr>
+        <p:style>
+          <a:lnRef idx="1">
+            <a:schemeClr val="accent1"/>
+          </a:lnRef>
+          <a:fillRef idx="3">
+            <a:schemeClr val="accent1"/>
+          </a:fillRef>
+          <a:effectRef idx="2">
+            <a:schemeClr val="accent1"/>
+          </a:effectRef>
+          <a:fontRef idx="minor">
+            <a:schemeClr val="lt1"/>
+          </a:fontRef>
+        </p:style>
+        <p:txBody>
+          <a:bodyPr rtlCol="0" anchor="ctr"/>
+          <a:lstStyle/>
+          <a:p>
+            <a:pPr algn="ctr"/>
+          </a:p>
+        </p:txBody>
+      </p:sp>
+      <p:sp>
+        <p:nvSpPr>
+          <p:cNvPr id="13" name="TextBox 12"/>
+          <p:cNvSpPr txBox="1"/>
+          <p:nvPr/>
+        </p:nvSpPr>
+        <p:spPr>
+          <a:xfrm>
+            <a:off x="7772400" y="4736592"/>
+            <a:ext cx="3566160" cy="1097280"/>
+          </a:xfrm>
+          <a:prstGeom prst="rect">
+            <a:avLst/>
+          </a:prstGeom>
+          <a:noFill/>
+        </p:spPr>
+        <p:txBody>
+          <a:bodyPr wrap="square" lIns="0" tIns="0">
+            <a:spAutoFit/>
+          </a:bodyPr>
+          <a:lstStyle/>
+          <a:p>
+            <a:pPr>
+              <a:defRPr sz="3400" b="1">
+                <a:solidFill>
+                  <a:srgbClr val="FFC24B"/>
+                </a:solidFill>
+                <a:latin typeface="Cambria"/>
+              </a:defRPr>
+            </a:pPr>
+            <a:r>
+              <a:t>41 Cells</a:t>
+            </a:r>
+          </a:p>
+          <a:p>
+            <a:pPr>
+              <a:defRPr sz="1300">
+                <a:solidFill>
+                  <a:srgbClr val="EEF2F7"/>
+                </a:solidFill>
+                <a:latin typeface="Calibri"/>
+              </a:defRPr>
+            </a:pPr>
+            <a:r>
+              <a:t>Structured cells inside 5 mm sublayer accurately resolve wall flux</a:t>
+            </a:r>
+          </a:p>
+        </p:txBody>
+      </p:sp>
+    </p:spTree>
+  </p:cSld>
+  <p:clrMapOvr>
+    <a:masterClrMapping/>
+  </p:clrMapOvr>
+</p:sld>
+</file>
+
+<file path=ppt/slides/slide14.xml><?xml version="1.0" encoding="utf-8"?>
+<p:sld xmlns:a="http://schemas.openxmlformats.org/drawingml/2006/main" xmlns:p="http://schemas.openxmlformats.org/presentationml/2006/main" xmlns:r="http://schemas.openxmlformats.org/officeDocument/2006/relationships">
+  <p:cSld>
+    <p:bg>
+      <p:bgPr>
+        <a:solidFill>
+          <a:srgbClr val="0B1426"/>
+        </a:solidFill>
+        <a:effectLst/>
+      </p:bgPr>
+    </p:bg>
+    <p:spTree>
+      <p:nvGrpSpPr>
+        <p:cNvPr id="1" name=""/>
+        <p:cNvGrpSpPr/>
+        <p:nvPr/>
+      </p:nvGrpSpPr>
+      <p:grpSpPr/>
+      <p:sp>
+        <p:nvSpPr>
+          <p:cNvPr id="2" name="Title 1"/>
+          <p:cNvSpPr>
+            <a:spLocks noGrp="1"/>
+          </p:cNvSpPr>
+          <p:nvPr>
+            <p:ph type="title" idx="100"/>
+          </p:nvPr>
+        </p:nvSpPr>
+        <p:spPr/>
+        <p:txBody>
+          <a:bodyPr/>
+          <a:lstStyle/>
+          <a:p/>
+        </p:txBody>
+      </p:sp>
+      <p:sp>
+        <p:nvSpPr>
+          <p:cNvPr id="3" name="Text Placeholder 2"/>
+          <p:cNvSpPr>
+            <a:spLocks noGrp="1"/>
+          </p:cNvSpPr>
+          <p:nvPr>
+            <p:ph type="body" idx="101"/>
+          </p:nvPr>
+        </p:nvSpPr>
+        <p:spPr/>
+        <p:txBody>
+          <a:bodyPr/>
+          <a:lstStyle/>
+          <a:p/>
+        </p:txBody>
+      </p:sp>
+      <p:sp>
+        <p:nvSpPr>
+          <p:cNvPr id="4" name="TextBox 3"/>
+          <p:cNvSpPr txBox="1"/>
+          <p:nvPr/>
+        </p:nvSpPr>
+        <p:spPr>
+          <a:xfrm>
+            <a:off x="731520" y="365760"/>
+            <a:ext cx="10698480" cy="365760"/>
+          </a:xfrm>
+          <a:prstGeom prst="rect">
+            <a:avLst/>
+          </a:prstGeom>
+          <a:noFill/>
+        </p:spPr>
+        <p:txBody>
+          <a:bodyPr wrap="none" lIns="0" tIns="0">
+            <a:spAutoFit/>
+          </a:bodyPr>
+          <a:lstStyle/>
+          <a:p>
+            <a:pPr>
+              <a:defRPr sz="1300" b="1">
+                <a:solidFill>
+                  <a:srgbClr val="23B5D3"/>
+                </a:solidFill>
+                <a:latin typeface="Calibri"/>
+              </a:defRPr>
+            </a:pPr>
+            <a:r>
+              <a:t>PROJECT CONCLUSION &amp; ACADEMIC DOSSIER  •  BOUNDARY LAYER THEORY</a:t>
+            </a:r>
+          </a:p>
+        </p:txBody>
+      </p:sp>
+      <p:sp>
+        <p:nvSpPr>
+          <p:cNvPr id="5" name="TextBox 4"/>
+          <p:cNvSpPr txBox="1"/>
+          <p:nvPr/>
+        </p:nvSpPr>
+        <p:spPr>
+          <a:xfrm>
+            <a:off x="731520" y="731520"/>
+            <a:ext cx="10698480" cy="914400"/>
+          </a:xfrm>
+          <a:prstGeom prst="rect">
+            <a:avLst/>
+          </a:prstGeom>
+          <a:noFill/>
+        </p:spPr>
+        <p:txBody>
+          <a:bodyPr wrap="square" lIns="0" tIns="0">
+            <a:spAutoFit/>
+          </a:bodyPr>
+          <a:lstStyle/>
+          <a:p>
+            <a:pPr>
+              <a:defRPr sz="3200" b="1">
+                <a:solidFill>
+                  <a:srgbClr val="FFFFFF"/>
+                </a:solidFill>
+                <a:latin typeface="Cambria"/>
+              </a:defRPr>
+            </a:pPr>
+            <a:r>
+              <a:t>Coupled Surface Radiation Is Critical for Accurate Boundary Layer CFD</a:t>
+            </a:r>
+          </a:p>
+        </p:txBody>
+      </p:sp>
+      <p:sp>
+        <p:nvSpPr>
+          <p:cNvPr id="6" name="TextBox 5"/>
+          <p:cNvSpPr txBox="1"/>
+          <p:nvPr/>
+        </p:nvSpPr>
+        <p:spPr>
+          <a:xfrm>
+            <a:off x="731520" y="1645920"/>
+            <a:ext cx="10698480" cy="502920"/>
+          </a:xfrm>
+          <a:prstGeom prst="rect">
+            <a:avLst/>
+          </a:prstGeom>
+          <a:noFill/>
+        </p:spPr>
+        <p:txBody>
+          <a:bodyPr wrap="square" lIns="0" tIns="0">
+            <a:spAutoFit/>
+          </a:bodyPr>
+          <a:lstStyle/>
+          <a:p>
+            <a:pPr>
+              <a:defRPr sz="1600">
+                <a:solidFill>
+                  <a:srgbClr val="EEF2F7"/>
+                </a:solidFill>
+                <a:latin typeface="Calibri"/>
+              </a:defRPr>
+            </a:pPr>
+            <a:r>
+              <a:t>Objective Achieved: Successfully incorporated surface radiation and quantified its thermal boundary layer impact.</a:t>
+            </a:r>
+          </a:p>
+        </p:txBody>
+      </p:sp>
+      <p:sp>
+        <p:nvSpPr>
+          <p:cNvPr id="7" name="Rounded Rectangle 6"/>
+          <p:cNvSpPr/>
+          <p:nvPr/>
+        </p:nvSpPr>
+        <p:spPr>
+          <a:xfrm>
+            <a:off x="731520" y="2331720"/>
+            <a:ext cx="5120640" cy="3657600"/>
+          </a:xfrm>
+          <a:prstGeom prst="roundRect">
+            <a:avLst/>
+          </a:prstGeom>
+          <a:solidFill>
+            <a:srgbClr val="16264A"/>
+          </a:solidFill>
+          <a:ln>
+            <a:noFill/>
+          </a:ln>
+        </p:spPr>
+        <p:style>
+          <a:lnRef idx="1">
+            <a:schemeClr val="accent1"/>
+          </a:lnRef>
+          <a:fillRef idx="3">
+            <a:schemeClr val="accent1"/>
+          </a:fillRef>
+          <a:effectRef idx="2">
+            <a:schemeClr val="accent1"/>
+          </a:effectRef>
+          <a:fontRef idx="minor">
+            <a:schemeClr val="lt1"/>
+          </a:fontRef>
+        </p:style>
+        <p:txBody>
+          <a:bodyPr rtlCol="0" anchor="ctr"/>
+          <a:lstStyle/>
+          <a:p>
+            <a:pPr algn="ctr"/>
+          </a:p>
+        </p:txBody>
+      </p:sp>
+      <p:sp>
+        <p:nvSpPr>
+          <p:cNvPr id="8" name="TextBox 7"/>
+          <p:cNvSpPr txBox="1"/>
+          <p:nvPr/>
+        </p:nvSpPr>
+        <p:spPr>
+          <a:xfrm>
+            <a:off x="1005840" y="2514600"/>
+            <a:ext cx="4572000" cy="3291840"/>
+          </a:xfrm>
+          <a:prstGeom prst="rect">
+            <a:avLst/>
+          </a:prstGeom>
+          <a:noFill/>
+        </p:spPr>
+        <p:txBody>
+          <a:bodyPr wrap="square" lIns="0" tIns="0">
+            <a:spAutoFit/>
+          </a:bodyPr>
+          <a:lstStyle/>
+          <a:p>
+            <a:pPr>
+              <a:spcAft>
+                <a:spcPts val="800"/>
+              </a:spcAft>
+              <a:defRPr sz="1800" b="1">
+                <a:solidFill>
+                  <a:srgbClr val="FF7A1A"/>
+                </a:solidFill>
+                <a:latin typeface="Cambria"/>
+              </a:defRPr>
+            </a:pPr>
+            <a:r>
+              <a:t>Key Findings &amp; Numerical Insights</a:t>
+            </a:r>
+          </a:p>
+          <a:p>
+            <a:pPr>
+              <a:defRPr sz="1400" b="1">
+                <a:solidFill>
+                  <a:srgbClr val="FFFFFF"/>
+                </a:solidFill>
+                <a:latin typeface="Calibri"/>
+              </a:defRPr>
+            </a:pPr>
+            <a:r>
+              <a:t>1. Surface Radiation Impact:</a:t>
+            </a:r>
+          </a:p>
+          <a:p>
+            <a:pPr>
+              <a:spcAft>
+                <a:spcPts val="600"/>
+              </a:spcAft>
+              <a:defRPr sz="1200">
+                <a:solidFill>
+                  <a:srgbClr val="EEF2F7"/>
+                </a:solidFill>
+                <a:latin typeface="Calibri"/>
+              </a:defRPr>
+            </a:pPr>
+            <a:r>
+              <a:t>Relieves 21.56% of total heat flux and cools peak wall by 6.98 K (336.70 K vs 343.68 K).</a:t>
+            </a:r>
+          </a:p>
+          <a:p>
+            <a:pPr>
+              <a:defRPr sz="1400" b="1">
+                <a:solidFill>
+                  <a:srgbClr val="23B5D3"/>
+                </a:solidFill>
+                <a:latin typeface="Calibri"/>
+              </a:defRPr>
+            </a:pPr>
+            <a:r>
+              <a:t>2. Grid Sensitivity Disclosed:</a:t>
+            </a:r>
+          </a:p>
+          <a:p>
+            <a:pPr>
+              <a:spcAft>
+                <a:spcPts val="600"/>
+              </a:spcAft>
+              <a:defRPr sz="1200">
+                <a:solidFill>
+                  <a:srgbClr val="EEF2F7"/>
+                </a:solidFill>
+                <a:latin typeface="Calibri"/>
+              </a:defRPr>
+            </a:pPr>
+            <a:r>
+              <a:t>Coarse (16k) overpredicts wall rise (394.9 K); fine grid (64k) resolves sublayer gradient.</a:t>
+            </a:r>
+          </a:p>
+          <a:p>
+            <a:pPr>
+              <a:defRPr sz="1400" b="1">
+                <a:solidFill>
+                  <a:srgbClr val="FFC24B"/>
+                </a:solidFill>
+                <a:latin typeface="Calibri"/>
+              </a:defRPr>
+            </a:pPr>
+            <a:r>
+              <a:t>3. Future Scope &amp; Refinement:</a:t>
+            </a:r>
+          </a:p>
+          <a:p>
+            <a:pPr>
+              <a:defRPr sz="1200">
+                <a:solidFill>
+                  <a:srgbClr val="EEF2F7"/>
+                </a:solidFill>
+                <a:latin typeface="Calibri"/>
+              </a:defRPr>
+            </a:pPr>
+            <a:r>
+              <a:t>Execute 3rd Richardson mesh for ASME GCI and incorporate variable air properties.</a:t>
+            </a:r>
+          </a:p>
+        </p:txBody>
+      </p:sp>
+      <p:sp>
+        <p:nvSpPr>
+          <p:cNvPr id="9" name="Rounded Rectangle 8"/>
+          <p:cNvSpPr/>
+          <p:nvPr/>
+        </p:nvSpPr>
+        <p:spPr>
+          <a:xfrm>
+            <a:off x="6126480" y="2331720"/>
+            <a:ext cx="5303520" cy="3657600"/>
+          </a:xfrm>
+          <a:prstGeom prst="roundRect">
+            <a:avLst/>
+          </a:prstGeom>
+          <a:solidFill>
+            <a:srgbClr val="16264A"/>
+          </a:solidFill>
+          <a:ln>
+            <a:noFill/>
+          </a:ln>
+        </p:spPr>
+        <p:style>
+          <a:lnRef idx="1">
+            <a:schemeClr val="accent1"/>
+          </a:lnRef>
+          <a:fillRef idx="3">
+            <a:schemeClr val="accent1"/>
+          </a:fillRef>
+          <a:effectRef idx="2">
+            <a:schemeClr val="accent1"/>
+          </a:effectRef>
+          <a:fontRef idx="minor">
+            <a:schemeClr val="lt1"/>
+          </a:fontRef>
+        </p:style>
+        <p:txBody>
+          <a:bodyPr rtlCol="0" anchor="ctr"/>
+          <a:lstStyle/>
+          <a:p>
+            <a:pPr algn="ctr"/>
+          </a:p>
+        </p:txBody>
+      </p:sp>
+      <p:sp>
+        <p:nvSpPr>
+          <p:cNvPr id="10" name="TextBox 9"/>
+          <p:cNvSpPr txBox="1"/>
+          <p:nvPr/>
+        </p:nvSpPr>
+        <p:spPr>
+          <a:xfrm>
+            <a:off x="6309360" y="2514600"/>
+            <a:ext cx="4937760" cy="3291840"/>
+          </a:xfrm>
+          <a:prstGeom prst="rect">
+            <a:avLst/>
+          </a:prstGeom>
+          <a:noFill/>
+        </p:spPr>
+        <p:txBody>
+          <a:bodyPr wrap="square" lIns="0" tIns="0">
+            <a:spAutoFit/>
+          </a:bodyPr>
+          <a:lstStyle/>
+          <a:p>
+            <a:pPr>
+              <a:spcAft>
+                <a:spcPts val="800"/>
+              </a:spcAft>
+              <a:defRPr sz="1800" b="1">
+                <a:solidFill>
+                  <a:srgbClr val="FFC24B"/>
+                </a:solidFill>
+                <a:latin typeface="Cambria"/>
+              </a:defRPr>
+            </a:pPr>
+            <a:r>
+              <a:t>Student Credentials &amp; References</a:t>
+            </a:r>
+          </a:p>
+          <a:p>
+            <a:pPr>
+              <a:defRPr sz="2400" b="1">
+                <a:solidFill>
+                  <a:srgbClr val="FFFFFF"/>
+                </a:solidFill>
+                <a:latin typeface="Cambria"/>
+              </a:defRPr>
+            </a:pPr>
+            <a:r>
+              <a:t>JERSAM LITHIN L</a:t>
+            </a:r>
+          </a:p>
+          <a:p>
+            <a:pPr>
+              <a:defRPr sz="1500" b="1">
+                <a:solidFill>
+                  <a:srgbClr val="23B5D3"/>
+                </a:solidFill>
+                <a:latin typeface="Calibri"/>
+              </a:defRPr>
+            </a:pPr>
+            <a:r>
+              <a:t>Register No: URK24AE1026</a:t>
+            </a:r>
+          </a:p>
+          <a:p>
+            <a:pPr>
+              <a:defRPr sz="1300">
+                <a:solidFill>
+                  <a:srgbClr val="EEF2F7"/>
+                </a:solidFill>
+                <a:latin typeface="Calibri"/>
+              </a:defRPr>
+            </a:pPr>
+            <a:r>
+              <a:t>3rd Year B.Tech, Aerospace Engineering  •  Karunya Institute of Tech</a:t>
+            </a:r>
+          </a:p>
+          <a:p>
+            <a:pPr>
+              <a:spcAft>
+                <a:spcPts val="1000"/>
+              </a:spcAft>
+              <a:defRPr sz="1300">
+                <a:solidFill>
+                  <a:srgbClr val="FFC24B"/>
+                </a:solidFill>
+                <a:latin typeface="Calibri"/>
+              </a:defRPr>
+            </a:pPr>
+            <a:r>
+              <a:t>Subject: Boundary Layer Theory  |  Course Project Presentation</a:t>
+            </a:r>
+          </a:p>
+          <a:p>
+            <a:pPr>
+              <a:defRPr sz="1200">
+                <a:solidFill>
+                  <a:srgbClr val="7C8DB5"/>
+                </a:solidFill>
+                <a:latin typeface="Calibri"/>
+              </a:defRPr>
+            </a:pPr>
+            <a:r>
+              <a:t>Full OpenFOAM 13 cases, mesh scripts, and 61 figures preserved at:</a:t>
+            </a:r>
+          </a:p>
+          <a:p>
+            <a:pPr>
+              <a:defRPr sz="1300" b="1">
+                <a:solidFill>
+                  <a:srgbClr val="FFFFFF"/>
+                </a:solidFill>
+                <a:latin typeface="Calibri"/>
+              </a:defRPr>
+            </a:pPr>
+            <a:r>
+              <a:t>github.com/Jersam-l/flat-plate-with-radiation-cfd</a:t>
             </a:r>
           </a:p>
         </p:txBody>
@@ -2177,7 +4875,7 @@
               </a:defRPr>
             </a:pPr>
             <a:r>
-              <a:t>Neglecting Surface Radiation Overpredicts Wall Temperatures</a:t>
+              <a:t>The Trailing-Edge Problem: Convective Resistance Climbs Downstream</a:t>
             </a:r>
           </a:p>
         </p:txBody>
@@ -2213,7 +4911,7 @@
               </a:defRPr>
             </a:pPr>
             <a:r>
-              <a:t>2</a:t>
+              <a:t>2 / 14</a:t>
             </a:r>
           </a:p>
         </p:txBody>
@@ -2310,7 +5008,7 @@
           <a:lstStyle/>
           <a:p>
             <a:pPr>
-              <a:defRPr sz="1100">
+              <a:defRPr sz="1200">
                 <a:solidFill>
                   <a:srgbClr val="7C8DB5"/>
                 </a:solidFill>
@@ -2363,9 +5061,9 @@
           <a:p>
             <a:pPr>
               <a:spcAft>
-                <a:spcPts val="1200"/>
+                <a:spcPts val="1400"/>
               </a:spcAft>
-              <a:defRPr sz="1500">
+              <a:defRPr sz="1600">
                 <a:solidFill>
                   <a:srgbClr val="0B1426"/>
                 </a:solidFill>
@@ -2379,9 +5077,9 @@
           <a:p>
             <a:pPr>
               <a:spcAft>
-                <a:spcPts val="1200"/>
+                <a:spcPts val="1400"/>
               </a:spcAft>
-              <a:defRPr sz="1500">
+              <a:defRPr sz="1600">
                 <a:solidFill>
                   <a:srgbClr val="0B1426"/>
                 </a:solidFill>
@@ -2395,9 +5093,9 @@
           <a:p>
             <a:pPr>
               <a:spcAft>
-                <a:spcPts val="1200"/>
+                <a:spcPts val="1400"/>
               </a:spcAft>
-              <a:defRPr sz="1500">
+              <a:defRPr sz="1600">
                 <a:solidFill>
                   <a:srgbClr val="0B1426"/>
                 </a:solidFill>
@@ -2478,7 +5176,7 @@
           <a:lstStyle/>
           <a:p>
             <a:pPr>
-              <a:defRPr sz="1600" b="1">
+              <a:defRPr sz="1700" b="1">
                 <a:solidFill>
                   <a:srgbClr val="FF7A1A"/>
                 </a:solidFill>
@@ -2491,7 +5189,7 @@
           </a:p>
           <a:p>
             <a:pPr>
-              <a:defRPr sz="1100">
+              <a:defRPr sz="1200">
                 <a:solidFill>
                   <a:srgbClr val="0B1426"/>
                 </a:solidFill>
@@ -2578,7 +5276,7 @@
               </a:defRPr>
             </a:pPr>
             <a:r>
-              <a:t>Newton-Raphson Solver Enforces Non-Linear Surface Heat Balance</a:t>
+              <a:t>Aerospace Context: When Convection Chokes, Radiation Dissipates</a:t>
             </a:r>
           </a:p>
         </p:txBody>
@@ -2614,7 +5312,7 @@
               </a:defRPr>
             </a:pPr>
             <a:r>
-              <a:t>3</a:t>
+              <a:t>3 / 14</a:t>
             </a:r>
           </a:p>
         </p:txBody>
@@ -2628,7 +5326,7 @@
         <p:spPr>
           <a:xfrm>
             <a:off x="548640" y="1371600"/>
-            <a:ext cx="6217920" cy="4754880"/>
+            <a:ext cx="6583680" cy="4754880"/>
           </a:xfrm>
           <a:prstGeom prst="roundRect">
             <a:avLst/>
@@ -2664,16 +5362,76 @@
           </a:p>
         </p:txBody>
       </p:sp>
-      <p:sp>
-        <p:nvSpPr>
-          <p:cNvPr id="6" name="TextBox 5"/>
+      <p:pic>
+        <p:nvPicPr>
+          <p:cNvPr id="6" name="Picture 5" descr="research_paper_radiation_analogy.png"/>
+          <p:cNvPicPr>
+            <a:picLocks noChangeAspect="1"/>
+          </p:cNvPicPr>
+          <p:nvPr/>
+        </p:nvPicPr>
+        <p:blipFill>
+          <a:blip r:embed="rId2"/>
+          <a:stretch>
+            <a:fillRect/>
+          </a:stretch>
+        </p:blipFill>
+        <p:spPr>
+          <a:xfrm>
+            <a:off x="731520" y="2160397"/>
+            <a:ext cx="6217920" cy="2857244"/>
+          </a:xfrm>
+          <a:prstGeom prst="rect">
+            <a:avLst/>
+          </a:prstGeom>
+        </p:spPr>
+      </p:pic>
+      <p:sp>
+        <p:nvSpPr>
+          <p:cNvPr id="7" name="TextBox 6"/>
           <p:cNvSpPr txBox="1"/>
           <p:nvPr/>
         </p:nvSpPr>
         <p:spPr>
           <a:xfrm>
-            <a:off x="822960" y="1600200"/>
-            <a:ext cx="5669280" cy="4297680"/>
+            <a:off x="731520" y="5696712"/>
+            <a:ext cx="6217920" cy="320040"/>
+          </a:xfrm>
+          <a:prstGeom prst="rect">
+            <a:avLst/>
+          </a:prstGeom>
+          <a:noFill/>
+        </p:spPr>
+        <p:txBody>
+          <a:bodyPr wrap="square" lIns="0" tIns="0" rIns="0" bIns="0">
+            <a:spAutoFit/>
+          </a:bodyPr>
+          <a:lstStyle/>
+          <a:p>
+            <a:pPr>
+              <a:defRPr sz="1200">
+                <a:solidFill>
+                  <a:srgbClr val="7C8DB5"/>
+                </a:solidFill>
+                <a:latin typeface="Calibri"/>
+              </a:defRPr>
+            </a:pPr>
+            <a:r>
+              <a:t>Fig. 3: Thermal resistance circuit showing convective and radiative pathways.</a:t>
+            </a:r>
+          </a:p>
+        </p:txBody>
+      </p:sp>
+      <p:sp>
+        <p:nvSpPr>
+          <p:cNvPr id="8" name="TextBox 7"/>
+          <p:cNvSpPr txBox="1"/>
+          <p:nvPr/>
+        </p:nvSpPr>
+        <p:spPr>
+          <a:xfrm>
+            <a:off x="7498079" y="1463040"/>
+            <a:ext cx="4114800" cy="3108960"/>
           </a:xfrm>
           <a:prstGeom prst="rect">
             <a:avLst/>
@@ -2688,9 +5446,9 @@
           <a:p>
             <a:pPr>
               <a:spcAft>
-                <a:spcPts val="1200"/>
+                <a:spcPts val="1600"/>
               </a:spcAft>
-              <a:defRPr sz="2200" b="1">
+              <a:defRPr sz="2400" b="1">
                 <a:solidFill>
                   <a:srgbClr val="0B1426"/>
                 </a:solidFill>
@@ -2698,12 +5456,15 @@
               </a:defRPr>
             </a:pPr>
             <a:r>
-              <a:t>Conjugate Energy Conservation at Wall Face</a:t>
-            </a:r>
-          </a:p>
-          <a:p>
-            <a:pPr>
-              <a:defRPr sz="1300" b="1">
+              <a:t>The Radiation Escape Hatch</a:t>
+            </a:r>
+          </a:p>
+          <a:p>
+            <a:pPr>
+              <a:spcAft>
+                <a:spcPts val="1400"/>
+              </a:spcAft>
+              <a:defRPr sz="1600">
                 <a:solidFill>
                   <a:srgbClr val="0B1426"/>
                 </a:solidFill>
@@ -2711,28 +5472,15 @@
               </a:defRPr>
             </a:pPr>
             <a:r>
-              <a:t>1. Surface Heat Balance (Enforced at Wall Face):</a:t>
+              <a:t>•  Aerospace skin cooling balances aerodynamic heating against atmospheric radiation emission.</a:t>
             </a:r>
           </a:p>
           <a:p>
             <a:pPr>
               <a:spcAft>
-                <a:spcPts val="1000"/>
+                <a:spcPts val="1400"/>
               </a:spcAft>
-              <a:defRPr sz="1700" b="1">
-                <a:solidFill>
-                  <a:srgbClr val="FF7A1A"/>
-                </a:solidFill>
-                <a:latin typeface="Cambria"/>
-              </a:defRPr>
-            </a:pPr>
-            <a:r>
-              <a:t>q″_heater = q″_conv + q″_rad = 1000 W/m²</a:t>
-            </a:r>
-          </a:p>
-          <a:p>
-            <a:pPr>
-              <a:defRPr sz="1300" b="1">
+              <a:defRPr sz="1600">
                 <a:solidFill>
                   <a:srgbClr val="0B1426"/>
                 </a:solidFill>
@@ -2740,41 +5488,15 @@
               </a:defRPr>
             </a:pPr>
             <a:r>
-              <a:t>2. Stefan-Boltzmann Quartic Radiation Emission:</a:t>
-            </a:r>
-          </a:p>
-          <a:p>
-            <a:pPr>
-              <a:defRPr sz="1700" b="1">
-                <a:solidFill>
-                  <a:srgbClr val="23B5D3"/>
-                </a:solidFill>
-                <a:latin typeface="Cambria"/>
-              </a:defRPr>
-            </a:pPr>
-            <a:r>
-              <a:t>q″_rad = ε σ (T_w⁴ − T_sur⁴)</a:t>
+              <a:t>•  Avionics cold plates dissipate significant heat directly via grey surface radiation.</a:t>
             </a:r>
           </a:p>
           <a:p>
             <a:pPr>
               <a:spcAft>
-                <a:spcPts val="1000"/>
+                <a:spcPts val="1400"/>
               </a:spcAft>
-              <a:defRPr sz="1100">
-                <a:solidFill>
-                  <a:srgbClr val="7C8DB5"/>
-                </a:solidFill>
-                <a:latin typeface="Calibri"/>
-              </a:defRPr>
-            </a:pPr>
-            <a:r>
-              <a:t>where ε = 0.80,  σ = 5.670 × 10⁻⁸ W/(m²·K⁴),  T_sur = 300 K</a:t>
-            </a:r>
-          </a:p>
-          <a:p>
-            <a:pPr>
-              <a:defRPr sz="1300" b="1">
+              <a:defRPr sz="1600">
                 <a:solidFill>
                   <a:srgbClr val="0B1426"/>
                 </a:solidFill>
@@ -2782,140 +5504,7 @@
               </a:defRPr>
             </a:pPr>
             <a:r>
-              <a:t>3. In-Situ Newton-Raphson Wall Root-Finding:</a:t>
-            </a:r>
-          </a:p>
-          <a:p>
-            <a:pPr>
-              <a:defRPr sz="1600" b="1">
-                <a:solidFill>
-                  <a:srgbClr val="0B1426"/>
-                </a:solidFill>
-                <a:latin typeface="Cambria"/>
-              </a:defRPr>
-            </a:pPr>
-            <a:r>
-              <a:t>T_w,new = T_w,old − f(T_w) / f′(T_w)</a:t>
-            </a:r>
-          </a:p>
-          <a:p>
-            <a:pPr>
-              <a:defRPr sz="1100">
-                <a:solidFill>
-                  <a:srgbClr val="7C8DB5"/>
-                </a:solidFill>
-                <a:latin typeface="Calibri"/>
-              </a:defRPr>
-            </a:pPr>
-            <a:r>
-              <a:t>f(T_w) = −k (∂T/∂y)_w + ε σ (T_w⁴ − T_sur⁴) − q″_heater = 0</a:t>
-            </a:r>
-          </a:p>
-        </p:txBody>
-      </p:sp>
-      <p:sp>
-        <p:nvSpPr>
-          <p:cNvPr id="7" name="TextBox 6"/>
-          <p:cNvSpPr txBox="1"/>
-          <p:nvPr/>
-        </p:nvSpPr>
-        <p:spPr>
-          <a:xfrm>
-            <a:off x="7132320" y="1371600"/>
-            <a:ext cx="4480560" cy="365760"/>
-          </a:xfrm>
-          <a:prstGeom prst="rect">
-            <a:avLst/>
-          </a:prstGeom>
-          <a:noFill/>
-        </p:spPr>
-        <p:txBody>
-          <a:bodyPr wrap="none" lIns="0" tIns="0">
-            <a:spAutoFit/>
-          </a:bodyPr>
-          <a:lstStyle/>
-          <a:p>
-            <a:pPr>
-              <a:defRPr sz="2200" b="1">
-                <a:solidFill>
-                  <a:srgbClr val="0B1426"/>
-                </a:solidFill>
-                <a:latin typeface="Cambria"/>
-              </a:defRPr>
-            </a:pPr>
-            <a:r>
-              <a:t>Boundary Condition Mechanics</a:t>
-            </a:r>
-          </a:p>
-        </p:txBody>
-      </p:sp>
-      <p:sp>
-        <p:nvSpPr>
-          <p:cNvPr id="8" name="TextBox 7"/>
-          <p:cNvSpPr txBox="1"/>
-          <p:nvPr/>
-        </p:nvSpPr>
-        <p:spPr>
-          <a:xfrm>
-            <a:off x="7132320" y="1874519"/>
-            <a:ext cx="4480560" cy="2011680"/>
-          </a:xfrm>
-          <a:prstGeom prst="rect">
-            <a:avLst/>
-          </a:prstGeom>
-          <a:noFill/>
-        </p:spPr>
-        <p:txBody>
-          <a:bodyPr wrap="square" lIns="0" tIns="0">
-            <a:spAutoFit/>
-          </a:bodyPr>
-          <a:lstStyle/>
-          <a:p>
-            <a:pPr>
-              <a:spcAft>
-                <a:spcPts val="1200"/>
-              </a:spcAft>
-              <a:defRPr sz="1400">
-                <a:solidFill>
-                  <a:srgbClr val="0B1426"/>
-                </a:solidFill>
-                <a:latin typeface="Calibri"/>
-              </a:defRPr>
-            </a:pPr>
-            <a:r>
-              <a:t>•  Solves non-linear quartic radiative flux at every boundary face.</a:t>
-            </a:r>
-          </a:p>
-          <a:p>
-            <a:pPr>
-              <a:spcAft>
-                <a:spcPts val="1200"/>
-              </a:spcAft>
-              <a:defRPr sz="1400">
-                <a:solidFill>
-                  <a:srgbClr val="0B1426"/>
-                </a:solidFill>
-                <a:latin typeface="Calibri"/>
-              </a:defRPr>
-            </a:pPr>
-            <a:r>
-              <a:t>•  Enforces local face heat balance by construction during each PIMPLE step.</a:t>
-            </a:r>
-          </a:p>
-          <a:p>
-            <a:pPr>
-              <a:spcAft>
-                <a:spcPts val="1200"/>
-              </a:spcAft>
-              <a:defRPr sz="1400">
-                <a:solidFill>
-                  <a:srgbClr val="0B1426"/>
-                </a:solidFill>
-                <a:latin typeface="Calibri"/>
-              </a:defRPr>
-            </a:pPr>
-            <a:r>
-              <a:t>•  Newton-Raphson scheme converges to double precision within four iterations.</a:t>
+              <a:t>•  Coupled solver captures non-linear radiation without heavy Monte Carlo computational overhead.</a:t>
             </a:r>
           </a:p>
         </p:txBody>
@@ -2928,8 +5517,8 @@
         </p:nvSpPr>
         <p:spPr>
           <a:xfrm>
-            <a:off x="7132320" y="4389120"/>
-            <a:ext cx="2148840" cy="1737360"/>
+            <a:off x="7498079" y="4754880"/>
+            <a:ext cx="4114800" cy="1097280"/>
           </a:xfrm>
           <a:prstGeom prst="roundRect">
             <a:avLst/>
@@ -2973,8 +5562,8 @@
         </p:nvSpPr>
         <p:spPr>
           <a:xfrm>
-            <a:off x="7269480" y="4526280"/>
-            <a:ext cx="1874519" cy="1463040"/>
+            <a:off x="7680960" y="4846320"/>
+            <a:ext cx="3749039" cy="914400"/>
           </a:xfrm>
           <a:prstGeom prst="rect">
             <a:avLst/>
@@ -2988,20 +5577,20 @@
           <a:lstStyle/>
           <a:p>
             <a:pPr>
-              <a:defRPr sz="2800" b="1">
-                <a:solidFill>
-                  <a:srgbClr val="FF7A1A"/>
+              <a:defRPr sz="1700" b="1">
+                <a:solidFill>
+                  <a:srgbClr val="23B5D3"/>
                 </a:solidFill>
                 <a:latin typeface="Cambria"/>
               </a:defRPr>
             </a:pPr>
             <a:r>
-              <a:t>ε = 0.80</a:t>
-            </a:r>
-          </a:p>
-          <a:p>
-            <a:pPr>
-              <a:defRPr sz="1100">
+              <a:t>Stefan-Boltzmann Quartic Law</a:t>
+            </a:r>
+          </a:p>
+          <a:p>
+            <a:pPr>
+              <a:defRPr sz="1200">
                 <a:solidFill>
                   <a:srgbClr val="0B1426"/>
                 </a:solidFill>
@@ -3009,101 +5598,7 @@
               </a:defRPr>
             </a:pPr>
             <a:r>
-              <a:t>Grey-diffuse emissivity to 300 K external enclosure</a:t>
-            </a:r>
-          </a:p>
-        </p:txBody>
-      </p:sp>
-      <p:sp>
-        <p:nvSpPr>
-          <p:cNvPr id="11" name="Rounded Rectangle 10"/>
-          <p:cNvSpPr/>
-          <p:nvPr/>
-        </p:nvSpPr>
-        <p:spPr>
-          <a:xfrm>
-            <a:off x="9464040" y="4389120"/>
-            <a:ext cx="2148840" cy="1737360"/>
-          </a:xfrm>
-          <a:prstGeom prst="roundRect">
-            <a:avLst/>
-          </a:prstGeom>
-          <a:solidFill>
-            <a:srgbClr val="FFFFFF"/>
-          </a:solidFill>
-          <a:ln w="12700">
-            <a:solidFill>
-              <a:srgbClr val="DCE2EC"/>
-            </a:solidFill>
-          </a:ln>
-        </p:spPr>
-        <p:style>
-          <a:lnRef idx="1">
-            <a:schemeClr val="accent1"/>
-          </a:lnRef>
-          <a:fillRef idx="3">
-            <a:schemeClr val="accent1"/>
-          </a:fillRef>
-          <a:effectRef idx="2">
-            <a:schemeClr val="accent1"/>
-          </a:effectRef>
-          <a:fontRef idx="minor">
-            <a:schemeClr val="lt1"/>
-          </a:fontRef>
-        </p:style>
-        <p:txBody>
-          <a:bodyPr rtlCol="0" anchor="ctr"/>
-          <a:lstStyle/>
-          <a:p>
-            <a:pPr algn="ctr"/>
-          </a:p>
-        </p:txBody>
-      </p:sp>
-      <p:sp>
-        <p:nvSpPr>
-          <p:cNvPr id="12" name="TextBox 11"/>
-          <p:cNvSpPr txBox="1"/>
-          <p:nvPr/>
-        </p:nvSpPr>
-        <p:spPr>
-          <a:xfrm>
-            <a:off x="9601200" y="4526280"/>
-            <a:ext cx="1874519" cy="1463040"/>
-          </a:xfrm>
-          <a:prstGeom prst="rect">
-            <a:avLst/>
-          </a:prstGeom>
-          <a:noFill/>
-        </p:spPr>
-        <p:txBody>
-          <a:bodyPr wrap="square" lIns="0" tIns="0">
-            <a:spAutoFit/>
-          </a:bodyPr>
-          <a:lstStyle/>
-          <a:p>
-            <a:pPr>
-              <a:defRPr sz="2800" b="1">
-                <a:solidFill>
-                  <a:srgbClr val="23B5D3"/>
-                </a:solidFill>
-                <a:latin typeface="Cambria"/>
-              </a:defRPr>
-            </a:pPr>
-            <a:r>
-              <a:t>&lt; 4 Iter</a:t>
-            </a:r>
-          </a:p>
-          <a:p>
-            <a:pPr>
-              <a:defRPr sz="1100">
-                <a:solidFill>
-                  <a:srgbClr val="0B1426"/>
-                </a:solidFill>
-                <a:latin typeface="Calibri"/>
-              </a:defRPr>
-            </a:pPr>
-            <a:r>
-              <a:t>Fast quadratic convergence per boundary face</a:t>
+              <a:t>Radiation emission scales with (T_w⁴ − T_sur⁴), providing escalating relief as surface heats.</a:t>
             </a:r>
           </a:p>
         </p:txBody>
@@ -3182,7 +5677,7 @@
               </a:defRPr>
             </a:pPr>
             <a:r>
-              <a:t>Domain Mesh Resolution and 2 × 2 Simulation Matrix</a:t>
+              <a:t>Coupled Boundary Layer Formulation &amp; First-Law Closure</a:t>
             </a:r>
           </a:p>
         </p:txBody>
@@ -3218,767 +5713,21 @@
               </a:defRPr>
             </a:pPr>
             <a:r>
-              <a:t>4</a:t>
-            </a:r>
-          </a:p>
-        </p:txBody>
-      </p:sp>
-      <p:sp>
-        <p:nvSpPr>
-          <p:cNvPr id="5" name="TextBox 4"/>
-          <p:cNvSpPr txBox="1"/>
+              <a:t>4 / 14</a:t>
+            </a:r>
+          </a:p>
+        </p:txBody>
+      </p:sp>
+      <p:sp>
+        <p:nvSpPr>
+          <p:cNvPr id="5" name="Rounded Rectangle 4"/>
+          <p:cNvSpPr/>
           <p:nvPr/>
         </p:nvSpPr>
         <p:spPr>
           <a:xfrm>
             <a:off x="548640" y="1371600"/>
-            <a:ext cx="6217920" cy="365760"/>
-          </a:xfrm>
-          <a:prstGeom prst="rect">
-            <a:avLst/>
-          </a:prstGeom>
-          <a:noFill/>
-        </p:spPr>
-        <p:txBody>
-          <a:bodyPr wrap="none" lIns="0" tIns="0">
-            <a:spAutoFit/>
-          </a:bodyPr>
-          <a:lstStyle/>
-          <a:p>
-            <a:pPr>
-              <a:defRPr sz="2200" b="1">
-                <a:solidFill>
-                  <a:srgbClr val="0B1426"/>
-                </a:solidFill>
-                <a:latin typeface="Cambria"/>
-              </a:defRPr>
-            </a:pPr>
-            <a:r>
-              <a:t>2 × 2 Factorial Computational Matrix</a:t>
-            </a:r>
-          </a:p>
-        </p:txBody>
-      </p:sp>
-      <p:graphicFrame>
-        <p:nvGraphicFramePr>
-          <p:cNvPr id="6" name="Table 5"/>
-          <p:cNvGraphicFramePr>
-            <a:graphicFrameLocks noGrp="1"/>
-          </p:cNvGraphicFramePr>
-          <p:nvPr/>
-        </p:nvGraphicFramePr>
-        <p:xfrm>
-          <a:off x="548640" y="1874519"/>
-          <a:ext cx="6217920" cy="2011680"/>
-        </p:xfrm>
-        <a:graphic>
-          <a:graphicData uri="http://schemas.openxmlformats.org/drawingml/2006/table">
-            <a:tbl>
-              <a:tblPr firstRow="1" bandRow="1">
-                <a:tableStyleId>{5C22544A-7EE6-4342-B048-85BDC9FD1C3A}</a:tableStyleId>
-              </a:tblPr>
-              <a:tblGrid>
-                <a:gridCol w="2103120"/>
-                <a:gridCol w="1005840"/>
-                <a:gridCol w="914400"/>
-                <a:gridCol w="1097280"/>
-                <a:gridCol w="1097280"/>
-              </a:tblGrid>
-              <a:tr h="402336">
-                <a:tc>
-                  <a:txBody>
-                    <a:bodyPr/>
-                    <a:lstStyle/>
-                    <a:p>
-                      <a:pPr algn="ctr">
-                        <a:defRPr sz="1100" b="1">
-                          <a:solidFill>
-                            <a:srgbClr val="FFFFFF"/>
-                          </a:solidFill>
-                          <a:latin typeface="Calibri"/>
-                        </a:defRPr>
-                      </a:pPr>
-                      <a:r>
-                        <a:t>Case Identifier</a:t>
-                      </a:r>
-                    </a:p>
-                  </a:txBody>
-                  <a:tcPr>
-                    <a:solidFill>
-                      <a:srgbClr val="0B1426"/>
-                    </a:solidFill>
-                  </a:tcPr>
-                </a:tc>
-                <a:tc>
-                  <a:txBody>
-                    <a:bodyPr/>
-                    <a:lstStyle/>
-                    <a:p>
-                      <a:pPr algn="ctr">
-                        <a:defRPr sz="1100" b="1">
-                          <a:solidFill>
-                            <a:srgbClr val="FFFFFF"/>
-                          </a:solidFill>
-                          <a:latin typeface="Calibri"/>
-                        </a:defRPr>
-                      </a:pPr>
-                      <a:r>
-                        <a:t>Grid (nx×ny)</a:t>
-                      </a:r>
-                    </a:p>
-                  </a:txBody>
-                  <a:tcPr>
-                    <a:solidFill>
-                      <a:srgbClr val="0B1426"/>
-                    </a:solidFill>
-                  </a:tcPr>
-                </a:tc>
-                <a:tc>
-                  <a:txBody>
-                    <a:bodyPr/>
-                    <a:lstStyle/>
-                    <a:p>
-                      <a:pPr algn="ctr">
-                        <a:defRPr sz="1100" b="1">
-                          <a:solidFill>
-                            <a:srgbClr val="FFFFFF"/>
-                          </a:solidFill>
-                          <a:latin typeface="Calibri"/>
-                        </a:defRPr>
-                      </a:pPr>
-                      <a:r>
-                        <a:t>Cells</a:t>
-                      </a:r>
-                    </a:p>
-                  </a:txBody>
-                  <a:tcPr>
-                    <a:solidFill>
-                      <a:srgbClr val="0B1426"/>
-                    </a:solidFill>
-                  </a:tcPr>
-                </a:tc>
-                <a:tc>
-                  <a:txBody>
-                    <a:bodyPr/>
-                    <a:lstStyle/>
-                    <a:p>
-                      <a:pPr algn="ctr">
-                        <a:defRPr sz="1100" b="1">
-                          <a:solidFill>
-                            <a:srgbClr val="FFFFFF"/>
-                          </a:solidFill>
-                          <a:latin typeface="Calibri"/>
-                        </a:defRPr>
-                      </a:pPr>
-                      <a:r>
-                        <a:t>Emissivity ε</a:t>
-                      </a:r>
-                    </a:p>
-                  </a:txBody>
-                  <a:tcPr>
-                    <a:solidFill>
-                      <a:srgbClr val="0B1426"/>
-                    </a:solidFill>
-                  </a:tcPr>
-                </a:tc>
-                <a:tc>
-                  <a:txBody>
-                    <a:bodyPr/>
-                    <a:lstStyle/>
-                    <a:p>
-                      <a:pPr algn="ctr">
-                        <a:defRPr sz="1100" b="1">
-                          <a:solidFill>
-                            <a:srgbClr val="FFFFFF"/>
-                          </a:solidFill>
-                          <a:latin typeface="Calibri"/>
-                        </a:defRPr>
-                      </a:pPr>
-                      <a:r>
-                        <a:t>Heater q″</a:t>
-                      </a:r>
-                    </a:p>
-                  </a:txBody>
-                  <a:tcPr>
-                    <a:solidFill>
-                      <a:srgbClr val="0B1426"/>
-                    </a:solidFill>
-                  </a:tcPr>
-                </a:tc>
-              </a:tr>
-              <a:tr h="402336">
-                <a:tc>
-                  <a:txBody>
-                    <a:bodyPr/>
-                    <a:lstStyle/>
-                    <a:p>
-                      <a:pPr algn="l">
-                        <a:defRPr sz="1100">
-                          <a:solidFill>
-                            <a:srgbClr val="0B1426"/>
-                          </a:solidFill>
-                          <a:latin typeface="Calibri"/>
-                        </a:defRPr>
-                      </a:pPr>
-                      <a:r>
-                        <a:t>noRadiation_coarse</a:t>
-                      </a:r>
-                    </a:p>
-                  </a:txBody>
-                  <a:tcPr>
-                    <a:solidFill>
-                      <a:srgbClr val="FFFFFF"/>
-                    </a:solidFill>
-                  </a:tcPr>
-                </a:tc>
-                <a:tc>
-                  <a:txBody>
-                    <a:bodyPr/>
-                    <a:lstStyle/>
-                    <a:p>
-                      <a:pPr algn="ctr">
-                        <a:defRPr sz="1100">
-                          <a:solidFill>
-                            <a:srgbClr val="0B1426"/>
-                          </a:solidFill>
-                          <a:latin typeface="Calibri"/>
-                        </a:defRPr>
-                      </a:pPr>
-                      <a:r>
-                        <a:t>200 × 80</a:t>
-                      </a:r>
-                    </a:p>
-                  </a:txBody>
-                  <a:tcPr>
-                    <a:solidFill>
-                      <a:srgbClr val="FFFFFF"/>
-                    </a:solidFill>
-                  </a:tcPr>
-                </a:tc>
-                <a:tc>
-                  <a:txBody>
-                    <a:bodyPr/>
-                    <a:lstStyle/>
-                    <a:p>
-                      <a:pPr algn="ctr">
-                        <a:defRPr sz="1100">
-                          <a:solidFill>
-                            <a:srgbClr val="0B1426"/>
-                          </a:solidFill>
-                          <a:latin typeface="Calibri"/>
-                        </a:defRPr>
-                      </a:pPr>
-                      <a:r>
-                        <a:t>16,000</a:t>
-                      </a:r>
-                    </a:p>
-                  </a:txBody>
-                  <a:tcPr>
-                    <a:solidFill>
-                      <a:srgbClr val="FFFFFF"/>
-                    </a:solidFill>
-                  </a:tcPr>
-                </a:tc>
-                <a:tc>
-                  <a:txBody>
-                    <a:bodyPr/>
-                    <a:lstStyle/>
-                    <a:p>
-                      <a:pPr algn="ctr">
-                        <a:defRPr sz="1100">
-                          <a:solidFill>
-                            <a:srgbClr val="0B1426"/>
-                          </a:solidFill>
-                          <a:latin typeface="Calibri"/>
-                        </a:defRPr>
-                      </a:pPr>
-                      <a:r>
-                        <a:t>0.0 (Pure)</a:t>
-                      </a:r>
-                    </a:p>
-                  </a:txBody>
-                  <a:tcPr>
-                    <a:solidFill>
-                      <a:srgbClr val="FFFFFF"/>
-                    </a:solidFill>
-                  </a:tcPr>
-                </a:tc>
-                <a:tc>
-                  <a:txBody>
-                    <a:bodyPr/>
-                    <a:lstStyle/>
-                    <a:p>
-                      <a:pPr algn="ctr">
-                        <a:defRPr sz="1100">
-                          <a:solidFill>
-                            <a:srgbClr val="0B1426"/>
-                          </a:solidFill>
-                          <a:latin typeface="Calibri"/>
-                        </a:defRPr>
-                      </a:pPr>
-                      <a:r>
-                        <a:t>1000 W/m²</a:t>
-                      </a:r>
-                    </a:p>
-                  </a:txBody>
-                  <a:tcPr>
-                    <a:solidFill>
-                      <a:srgbClr val="FFFFFF"/>
-                    </a:solidFill>
-                  </a:tcPr>
-                </a:tc>
-              </a:tr>
-              <a:tr h="402336">
-                <a:tc>
-                  <a:txBody>
-                    <a:bodyPr/>
-                    <a:lstStyle/>
-                    <a:p>
-                      <a:pPr algn="l">
-                        <a:defRPr sz="1100">
-                          <a:solidFill>
-                            <a:srgbClr val="0B1426"/>
-                          </a:solidFill>
-                          <a:latin typeface="Calibri"/>
-                        </a:defRPr>
-                      </a:pPr>
-                      <a:r>
-                        <a:t>noRadiation_fine</a:t>
-                      </a:r>
-                    </a:p>
-                  </a:txBody>
-                  <a:tcPr>
-                    <a:solidFill>
-                      <a:srgbClr val="DEE5F0"/>
-                    </a:solidFill>
-                  </a:tcPr>
-                </a:tc>
-                <a:tc>
-                  <a:txBody>
-                    <a:bodyPr/>
-                    <a:lstStyle/>
-                    <a:p>
-                      <a:pPr algn="ctr">
-                        <a:defRPr sz="1100">
-                          <a:solidFill>
-                            <a:srgbClr val="0B1426"/>
-                          </a:solidFill>
-                          <a:latin typeface="Calibri"/>
-                        </a:defRPr>
-                      </a:pPr>
-                      <a:r>
-                        <a:t>400 × 160</a:t>
-                      </a:r>
-                    </a:p>
-                  </a:txBody>
-                  <a:tcPr>
-                    <a:solidFill>
-                      <a:srgbClr val="DEE5F0"/>
-                    </a:solidFill>
-                  </a:tcPr>
-                </a:tc>
-                <a:tc>
-                  <a:txBody>
-                    <a:bodyPr/>
-                    <a:lstStyle/>
-                    <a:p>
-                      <a:pPr algn="ctr">
-                        <a:defRPr sz="1100">
-                          <a:solidFill>
-                            <a:srgbClr val="0B1426"/>
-                          </a:solidFill>
-                          <a:latin typeface="Calibri"/>
-                        </a:defRPr>
-                      </a:pPr>
-                      <a:r>
-                        <a:t>64,000</a:t>
-                      </a:r>
-                    </a:p>
-                  </a:txBody>
-                  <a:tcPr>
-                    <a:solidFill>
-                      <a:srgbClr val="DEE5F0"/>
-                    </a:solidFill>
-                  </a:tcPr>
-                </a:tc>
-                <a:tc>
-                  <a:txBody>
-                    <a:bodyPr/>
-                    <a:lstStyle/>
-                    <a:p>
-                      <a:pPr algn="ctr">
-                        <a:defRPr sz="1100">
-                          <a:solidFill>
-                            <a:srgbClr val="0B1426"/>
-                          </a:solidFill>
-                          <a:latin typeface="Calibri"/>
-                        </a:defRPr>
-                      </a:pPr>
-                      <a:r>
-                        <a:t>0.0 (Pure)</a:t>
-                      </a:r>
-                    </a:p>
-                  </a:txBody>
-                  <a:tcPr>
-                    <a:solidFill>
-                      <a:srgbClr val="DEE5F0"/>
-                    </a:solidFill>
-                  </a:tcPr>
-                </a:tc>
-                <a:tc>
-                  <a:txBody>
-                    <a:bodyPr/>
-                    <a:lstStyle/>
-                    <a:p>
-                      <a:pPr algn="ctr">
-                        <a:defRPr sz="1100">
-                          <a:solidFill>
-                            <a:srgbClr val="0B1426"/>
-                          </a:solidFill>
-                          <a:latin typeface="Calibri"/>
-                        </a:defRPr>
-                      </a:pPr>
-                      <a:r>
-                        <a:t>1000 W/m²</a:t>
-                      </a:r>
-                    </a:p>
-                  </a:txBody>
-                  <a:tcPr>
-                    <a:solidFill>
-                      <a:srgbClr val="DEE5F0"/>
-                    </a:solidFill>
-                  </a:tcPr>
-                </a:tc>
-              </a:tr>
-              <a:tr h="402336">
-                <a:tc>
-                  <a:txBody>
-                    <a:bodyPr/>
-                    <a:lstStyle/>
-                    <a:p>
-                      <a:pPr algn="l">
-                        <a:defRPr sz="1100">
-                          <a:solidFill>
-                            <a:srgbClr val="0B1426"/>
-                          </a:solidFill>
-                          <a:latin typeface="Calibri"/>
-                        </a:defRPr>
-                      </a:pPr>
-                      <a:r>
-                        <a:t>surfaceRadiation_coarse</a:t>
-                      </a:r>
-                    </a:p>
-                  </a:txBody>
-                  <a:tcPr>
-                    <a:solidFill>
-                      <a:srgbClr val="FFFFFF"/>
-                    </a:solidFill>
-                  </a:tcPr>
-                </a:tc>
-                <a:tc>
-                  <a:txBody>
-                    <a:bodyPr/>
-                    <a:lstStyle/>
-                    <a:p>
-                      <a:pPr algn="ctr">
-                        <a:defRPr sz="1100">
-                          <a:solidFill>
-                            <a:srgbClr val="0B1426"/>
-                          </a:solidFill>
-                          <a:latin typeface="Calibri"/>
-                        </a:defRPr>
-                      </a:pPr>
-                      <a:r>
-                        <a:t>200 × 80</a:t>
-                      </a:r>
-                    </a:p>
-                  </a:txBody>
-                  <a:tcPr>
-                    <a:solidFill>
-                      <a:srgbClr val="FFFFFF"/>
-                    </a:solidFill>
-                  </a:tcPr>
-                </a:tc>
-                <a:tc>
-                  <a:txBody>
-                    <a:bodyPr/>
-                    <a:lstStyle/>
-                    <a:p>
-                      <a:pPr algn="ctr">
-                        <a:defRPr sz="1100">
-                          <a:solidFill>
-                            <a:srgbClr val="0B1426"/>
-                          </a:solidFill>
-                          <a:latin typeface="Calibri"/>
-                        </a:defRPr>
-                      </a:pPr>
-                      <a:r>
-                        <a:t>16,000</a:t>
-                      </a:r>
-                    </a:p>
-                  </a:txBody>
-                  <a:tcPr>
-                    <a:solidFill>
-                      <a:srgbClr val="FFFFFF"/>
-                    </a:solidFill>
-                  </a:tcPr>
-                </a:tc>
-                <a:tc>
-                  <a:txBody>
-                    <a:bodyPr/>
-                    <a:lstStyle/>
-                    <a:p>
-                      <a:pPr algn="ctr">
-                        <a:defRPr sz="1100">
-                          <a:solidFill>
-                            <a:srgbClr val="0B1426"/>
-                          </a:solidFill>
-                          <a:latin typeface="Calibri"/>
-                        </a:defRPr>
-                      </a:pPr>
-                      <a:r>
-                        <a:t>0.8 (Coupled)</a:t>
-                      </a:r>
-                    </a:p>
-                  </a:txBody>
-                  <a:tcPr>
-                    <a:solidFill>
-                      <a:srgbClr val="FFFFFF"/>
-                    </a:solidFill>
-                  </a:tcPr>
-                </a:tc>
-                <a:tc>
-                  <a:txBody>
-                    <a:bodyPr/>
-                    <a:lstStyle/>
-                    <a:p>
-                      <a:pPr algn="ctr">
-                        <a:defRPr sz="1100">
-                          <a:solidFill>
-                            <a:srgbClr val="0B1426"/>
-                          </a:solidFill>
-                          <a:latin typeface="Calibri"/>
-                        </a:defRPr>
-                      </a:pPr>
-                      <a:r>
-                        <a:t>1000 W/m²</a:t>
-                      </a:r>
-                    </a:p>
-                  </a:txBody>
-                  <a:tcPr>
-                    <a:solidFill>
-                      <a:srgbClr val="FFFFFF"/>
-                    </a:solidFill>
-                  </a:tcPr>
-                </a:tc>
-              </a:tr>
-              <a:tr h="402336">
-                <a:tc>
-                  <a:txBody>
-                    <a:bodyPr/>
-                    <a:lstStyle/>
-                    <a:p>
-                      <a:pPr algn="l">
-                        <a:defRPr sz="1100">
-                          <a:solidFill>
-                            <a:srgbClr val="0B1426"/>
-                          </a:solidFill>
-                          <a:latin typeface="Calibri"/>
-                        </a:defRPr>
-                      </a:pPr>
-                      <a:r>
-                        <a:t>surfaceRadiation_fine</a:t>
-                      </a:r>
-                    </a:p>
-                  </a:txBody>
-                  <a:tcPr>
-                    <a:solidFill>
-                      <a:srgbClr val="DEE5F0"/>
-                    </a:solidFill>
-                  </a:tcPr>
-                </a:tc>
-                <a:tc>
-                  <a:txBody>
-                    <a:bodyPr/>
-                    <a:lstStyle/>
-                    <a:p>
-                      <a:pPr algn="ctr">
-                        <a:defRPr sz="1100">
-                          <a:solidFill>
-                            <a:srgbClr val="0B1426"/>
-                          </a:solidFill>
-                          <a:latin typeface="Calibri"/>
-                        </a:defRPr>
-                      </a:pPr>
-                      <a:r>
-                        <a:t>400 × 160</a:t>
-                      </a:r>
-                    </a:p>
-                  </a:txBody>
-                  <a:tcPr>
-                    <a:solidFill>
-                      <a:srgbClr val="DEE5F0"/>
-                    </a:solidFill>
-                  </a:tcPr>
-                </a:tc>
-                <a:tc>
-                  <a:txBody>
-                    <a:bodyPr/>
-                    <a:lstStyle/>
-                    <a:p>
-                      <a:pPr algn="ctr">
-                        <a:defRPr sz="1100">
-                          <a:solidFill>
-                            <a:srgbClr val="0B1426"/>
-                          </a:solidFill>
-                          <a:latin typeface="Calibri"/>
-                        </a:defRPr>
-                      </a:pPr>
-                      <a:r>
-                        <a:t>64,000</a:t>
-                      </a:r>
-                    </a:p>
-                  </a:txBody>
-                  <a:tcPr>
-                    <a:solidFill>
-                      <a:srgbClr val="DEE5F0"/>
-                    </a:solidFill>
-                  </a:tcPr>
-                </a:tc>
-                <a:tc>
-                  <a:txBody>
-                    <a:bodyPr/>
-                    <a:lstStyle/>
-                    <a:p>
-                      <a:pPr algn="ctr">
-                        <a:defRPr sz="1100">
-                          <a:solidFill>
-                            <a:srgbClr val="0B1426"/>
-                          </a:solidFill>
-                          <a:latin typeface="Calibri"/>
-                        </a:defRPr>
-                      </a:pPr>
-                      <a:r>
-                        <a:t>0.8 (Coupled)</a:t>
-                      </a:r>
-                    </a:p>
-                  </a:txBody>
-                  <a:tcPr>
-                    <a:solidFill>
-                      <a:srgbClr val="DEE5F0"/>
-                    </a:solidFill>
-                  </a:tcPr>
-                </a:tc>
-                <a:tc>
-                  <a:txBody>
-                    <a:bodyPr/>
-                    <a:lstStyle/>
-                    <a:p>
-                      <a:pPr algn="ctr">
-                        <a:defRPr sz="1100">
-                          <a:solidFill>
-                            <a:srgbClr val="0B1426"/>
-                          </a:solidFill>
-                          <a:latin typeface="Calibri"/>
-                        </a:defRPr>
-                      </a:pPr>
-                      <a:r>
-                        <a:t>1000 W/m²</a:t>
-                      </a:r>
-                    </a:p>
-                  </a:txBody>
-                  <a:tcPr>
-                    <a:solidFill>
-                      <a:srgbClr val="DEE5F0"/>
-                    </a:solidFill>
-                  </a:tcPr>
-                </a:tc>
-              </a:tr>
-            </a:tbl>
-          </a:graphicData>
-        </a:graphic>
-      </p:graphicFrame>
-      <p:sp>
-        <p:nvSpPr>
-          <p:cNvPr id="7" name="TextBox 6"/>
-          <p:cNvSpPr txBox="1"/>
-          <p:nvPr/>
-        </p:nvSpPr>
-        <p:spPr>
-          <a:xfrm>
-            <a:off x="548640" y="4160520"/>
-            <a:ext cx="6217920" cy="1737360"/>
-          </a:xfrm>
-          <a:prstGeom prst="rect">
-            <a:avLst/>
-          </a:prstGeom>
-          <a:noFill/>
-        </p:spPr>
-        <p:txBody>
-          <a:bodyPr wrap="square" lIns="0" tIns="0">
-            <a:spAutoFit/>
-          </a:bodyPr>
-          <a:lstStyle/>
-          <a:p>
-            <a:pPr>
-              <a:spcAft>
-                <a:spcPts val="1200"/>
-              </a:spcAft>
-              <a:defRPr sz="1300">
-                <a:solidFill>
-                  <a:srgbClr val="0B1426"/>
-                </a:solidFill>
-                <a:latin typeface="Calibri"/>
-              </a:defRPr>
-            </a:pPr>
-            <a:r>
-              <a:t>•  Domain includes 1.0 m unheated inflow section to develop boundary layer.</a:t>
-            </a:r>
-          </a:p>
-          <a:p>
-            <a:pPr>
-              <a:spcAft>
-                <a:spcPts val="1200"/>
-              </a:spcAft>
-              <a:defRPr sz="1300">
-                <a:solidFill>
-                  <a:srgbClr val="0B1426"/>
-                </a:solidFill>
-                <a:latin typeface="Calibri"/>
-              </a:defRPr>
-            </a:pPr>
-            <a:r>
-              <a:t>•  Geometric wall-normal grading of 80:1 concentrates 41 cells in 5 mm.</a:t>
-            </a:r>
-          </a:p>
-          <a:p>
-            <a:pPr>
-              <a:spcAft>
-                <a:spcPts val="1200"/>
-              </a:spcAft>
-              <a:defRPr sz="1300">
-                <a:solidFill>
-                  <a:srgbClr val="0B1426"/>
-                </a:solidFill>
-                <a:latin typeface="Calibri"/>
-              </a:defRPr>
-            </a:pPr>
-            <a:r>
-              <a:t>•  Fine 64,000-cell mesh maintains zero non-orthogonality and skewness.</a:t>
-            </a:r>
-          </a:p>
-        </p:txBody>
-      </p:sp>
-      <p:sp>
-        <p:nvSpPr>
-          <p:cNvPr id="8" name="Rounded Rectangle 7"/>
-          <p:cNvSpPr/>
-          <p:nvPr/>
-        </p:nvSpPr>
-        <p:spPr>
-          <a:xfrm>
-            <a:off x="7132320" y="1371600"/>
-            <a:ext cx="4480560" cy="4754880"/>
+            <a:ext cx="6217920" cy="4754880"/>
           </a:xfrm>
           <a:prstGeom prst="roundRect">
             <a:avLst/>
@@ -4014,40 +5763,16 @@
           </a:p>
         </p:txBody>
       </p:sp>
-      <p:pic>
-        <p:nvPicPr>
-          <p:cNvPr id="9" name="Picture 8" descr="mesh_inflation_detail.png"/>
-          <p:cNvPicPr>
-            <a:picLocks noChangeAspect="1"/>
-          </p:cNvPicPr>
-          <p:nvPr/>
-        </p:nvPicPr>
-        <p:blipFill>
-          <a:blip r:embed="rId2"/>
-          <a:stretch>
-            <a:fillRect/>
-          </a:stretch>
-        </p:blipFill>
-        <p:spPr>
-          <a:xfrm>
-            <a:off x="7315200" y="2714716"/>
-            <a:ext cx="4114800" cy="1748607"/>
-          </a:xfrm>
-          <a:prstGeom prst="rect">
-            <a:avLst/>
-          </a:prstGeom>
-        </p:spPr>
-      </p:pic>
-      <p:sp>
-        <p:nvSpPr>
-          <p:cNvPr id="10" name="TextBox 9"/>
+      <p:sp>
+        <p:nvSpPr>
+          <p:cNvPr id="6" name="TextBox 5"/>
           <p:cNvSpPr txBox="1"/>
           <p:nvPr/>
         </p:nvSpPr>
         <p:spPr>
           <a:xfrm>
-            <a:off x="7315200" y="5696712"/>
-            <a:ext cx="4114800" cy="320040"/>
+            <a:off x="822960" y="1600200"/>
+            <a:ext cx="5669280" cy="4297680"/>
           </a:xfrm>
           <a:prstGeom prst="rect">
             <a:avLst/>
@@ -4055,13 +5780,84 @@
           <a:noFill/>
         </p:spPr>
         <p:txBody>
-          <a:bodyPr wrap="square" lIns="0" tIns="0" rIns="0" bIns="0">
+          <a:bodyPr wrap="square" lIns="0" tIns="0">
             <a:spAutoFit/>
           </a:bodyPr>
           <a:lstStyle/>
           <a:p>
             <a:pPr>
-              <a:defRPr sz="1100">
+              <a:spcAft>
+                <a:spcPts val="1200"/>
+              </a:spcAft>
+              <a:defRPr sz="2200" b="1">
+                <a:solidFill>
+                  <a:srgbClr val="0B1426"/>
+                </a:solidFill>
+                <a:latin typeface="Cambria"/>
+              </a:defRPr>
+            </a:pPr>
+            <a:r>
+              <a:t>Governing Equations at Fluid-Solid Boundary</a:t>
+            </a:r>
+          </a:p>
+          <a:p>
+            <a:pPr>
+              <a:defRPr sz="1400" b="1">
+                <a:solidFill>
+                  <a:srgbClr val="0B1426"/>
+                </a:solidFill>
+                <a:latin typeface="Calibri"/>
+              </a:defRPr>
+            </a:pPr>
+            <a:r>
+              <a:t>1. Navier-Stokes Momentum &amp; Energy Equations:</a:t>
+            </a:r>
+          </a:p>
+          <a:p>
+            <a:pPr>
+              <a:spcAft>
+                <a:spcPts val="1000"/>
+              </a:spcAft>
+              <a:defRPr sz="1500" b="1">
+                <a:solidFill>
+                  <a:srgbClr val="23B5D3"/>
+                </a:solidFill>
+                <a:latin typeface="Cambria"/>
+              </a:defRPr>
+            </a:pPr>
+            <a:r>
+              <a:t>u ∂u/∂x + v ∂u/∂y = ν ∂²u/∂y²,   u ∂T/∂x + v ∂T/∂y = α ∂²T/∂y²</a:t>
+            </a:r>
+          </a:p>
+          <a:p>
+            <a:pPr>
+              <a:defRPr sz="1400" b="1">
+                <a:solidFill>
+                  <a:srgbClr val="0B1426"/>
+                </a:solidFill>
+                <a:latin typeface="Calibri"/>
+              </a:defRPr>
+            </a:pPr>
+            <a:r>
+              <a:t>2. Conjugate Surface Energy Balance (Wall Boundary):</a:t>
+            </a:r>
+          </a:p>
+          <a:p>
+            <a:pPr>
+              <a:defRPr sz="1600" b="1">
+                <a:solidFill>
+                  <a:srgbClr val="FF7A1A"/>
+                </a:solidFill>
+                <a:latin typeface="Cambria"/>
+              </a:defRPr>
+            </a:pPr>
+            <a:r>
+              <a:t>q″_heater = −k (∂T/∂y)_wall + ε σ (T_w⁴ − T_sur⁴) = 1000 W/m²</a:t>
+            </a:r>
+          </a:p>
+          <a:p>
+            <a:pPr>
+              <a:defRPr sz="1200">
                 <a:solidFill>
                   <a:srgbClr val="7C8DB5"/>
                 </a:solidFill>
@@ -4069,7 +5865,114 @@
               </a:defRPr>
             </a:pPr>
             <a:r>
-              <a:t>Fig. 3: Structured inflation mesh near heated plate leading edge (80:1 grading).</a:t>
+              <a:t>where ε = 0.80,  σ = 5.670 × 10⁻⁸ W/(m²·K⁴),  T_sur = 300 K</a:t>
+            </a:r>
+          </a:p>
+        </p:txBody>
+      </p:sp>
+      <p:sp>
+        <p:nvSpPr>
+          <p:cNvPr id="7" name="TextBox 6"/>
+          <p:cNvSpPr txBox="1"/>
+          <p:nvPr/>
+        </p:nvSpPr>
+        <p:spPr>
+          <a:xfrm>
+            <a:off x="7132320" y="1371600"/>
+            <a:ext cx="4480560" cy="365760"/>
+          </a:xfrm>
+          <a:prstGeom prst="rect">
+            <a:avLst/>
+          </a:prstGeom>
+          <a:noFill/>
+        </p:spPr>
+        <p:txBody>
+          <a:bodyPr wrap="none" lIns="0" tIns="0">
+            <a:spAutoFit/>
+          </a:bodyPr>
+          <a:lstStyle/>
+          <a:p>
+            <a:pPr>
+              <a:defRPr sz="2400" b="1">
+                <a:solidFill>
+                  <a:srgbClr val="0B1426"/>
+                </a:solidFill>
+                <a:latin typeface="Cambria"/>
+              </a:defRPr>
+            </a:pPr>
+            <a:r>
+              <a:t>Conservation by Construction</a:t>
+            </a:r>
+          </a:p>
+        </p:txBody>
+      </p:sp>
+      <p:sp>
+        <p:nvSpPr>
+          <p:cNvPr id="8" name="TextBox 7"/>
+          <p:cNvSpPr txBox="1"/>
+          <p:nvPr/>
+        </p:nvSpPr>
+        <p:spPr>
+          <a:xfrm>
+            <a:off x="7132320" y="1920240"/>
+            <a:ext cx="4480560" cy="2926080"/>
+          </a:xfrm>
+          <a:prstGeom prst="rect">
+            <a:avLst/>
+          </a:prstGeom>
+          <a:noFill/>
+        </p:spPr>
+        <p:txBody>
+          <a:bodyPr wrap="square" lIns="0" tIns="0">
+            <a:spAutoFit/>
+          </a:bodyPr>
+          <a:lstStyle/>
+          <a:p>
+            <a:pPr>
+              <a:spcAft>
+                <a:spcPts val="1400"/>
+              </a:spcAft>
+              <a:defRPr sz="1600">
+                <a:solidFill>
+                  <a:srgbClr val="0B1426"/>
+                </a:solidFill>
+                <a:latin typeface="Calibri"/>
+              </a:defRPr>
+            </a:pPr>
+            <a:r>
+              <a:t>•  Laminar Navier-Stokes fluid flow solved simultaneously with thermal energy transport.</a:t>
+            </a:r>
+          </a:p>
+          <a:p>
+            <a:pPr>
+              <a:spcAft>
+                <a:spcPts val="1400"/>
+              </a:spcAft>
+              <a:defRPr sz="1600">
+                <a:solidFill>
+                  <a:srgbClr val="0B1426"/>
+                </a:solidFill>
+                <a:latin typeface="Calibri"/>
+              </a:defRPr>
+            </a:pPr>
+            <a:r>
+              <a:t>•  Surface radiation enters as a boundary heat flux balance at the wall.</a:t>
+            </a:r>
+          </a:p>
+          <a:p>
+            <a:pPr>
+              <a:spcAft>
+                <a:spcPts val="1400"/>
+              </a:spcAft>
+              <a:defRPr sz="1600">
+                <a:solidFill>
+                  <a:srgbClr val="0B1426"/>
+                </a:solidFill>
+                <a:latin typeface="Calibri"/>
+              </a:defRPr>
+            </a:pPr>
+            <a:r>
+              <a:t>•  First-Law energy balance holds exactly at every finite volume cell face.</a:t>
             </a:r>
           </a:p>
         </p:txBody>
@@ -4088,7 +5991,7 @@
     <p:bg>
       <p:bgPr>
         <a:solidFill>
-          <a:srgbClr val="0B1426"/>
+          <a:srgbClr val="EEF2F7"/>
         </a:solidFill>
         <a:effectLst/>
       </p:bgPr>
@@ -4142,13 +6045,13 @@
             <a:pPr>
               <a:defRPr sz="3200" b="1">
                 <a:solidFill>
-                  <a:srgbClr val="FFFFFF"/>
+                  <a:srgbClr val="0B1426"/>
                 </a:solidFill>
                 <a:latin typeface="Cambria"/>
               </a:defRPr>
             </a:pPr>
             <a:r>
-              <a:t>Skin Friction Validates Against Blasius Within 0.11%</a:t>
+              <a:t>Numerical Implementation: In-Situ Newton-Raphson Wall Solver</a:t>
             </a:r>
           </a:p>
         </p:txBody>
@@ -4184,7 +6087,7 @@
               </a:defRPr>
             </a:pPr>
             <a:r>
-              <a:t>5</a:t>
+              <a:t>5 / 14</a:t>
             </a:r>
           </a:p>
         </p:txBody>
@@ -4198,16 +6101,18 @@
         <p:spPr>
           <a:xfrm>
             <a:off x="548640" y="1371600"/>
-            <a:ext cx="6583680" cy="4754880"/>
+            <a:ext cx="6217920" cy="4754880"/>
           </a:xfrm>
           <a:prstGeom prst="roundRect">
             <a:avLst/>
           </a:prstGeom>
           <a:solidFill>
-            <a:srgbClr val="16264A"/>
+            <a:srgbClr val="FFFFFF"/>
           </a:solidFill>
-          <a:ln>
-            <a:noFill/>
+          <a:ln w="12700">
+            <a:solidFill>
+              <a:srgbClr val="DCE2EC"/>
+            </a:solidFill>
           </a:ln>
         </p:spPr>
         <p:style>
@@ -4232,30 +6137,129 @@
           </a:p>
         </p:txBody>
       </p:sp>
-      <p:pic>
-        <p:nvPicPr>
-          <p:cNvPr id="6" name="Picture 5" descr="blasius_velocity_validation.png"/>
-          <p:cNvPicPr>
-            <a:picLocks noChangeAspect="1"/>
-          </p:cNvPicPr>
-          <p:nvPr/>
-        </p:nvPicPr>
-        <p:blipFill>
-          <a:blip r:embed="rId2"/>
-          <a:stretch>
-            <a:fillRect/>
-          </a:stretch>
-        </p:blipFill>
-        <p:spPr>
-          <a:xfrm>
-            <a:off x="800373" y="1536192"/>
-            <a:ext cx="6080213" cy="4105656"/>
-          </a:xfrm>
-          <a:prstGeom prst="rect">
-            <a:avLst/>
-          </a:prstGeom>
-        </p:spPr>
-      </p:pic>
+      <p:sp>
+        <p:nvSpPr>
+          <p:cNvPr id="6" name="TextBox 5"/>
+          <p:cNvSpPr txBox="1"/>
+          <p:nvPr/>
+        </p:nvSpPr>
+        <p:spPr>
+          <a:xfrm>
+            <a:off x="822960" y="1600200"/>
+            <a:ext cx="5669280" cy="4297680"/>
+          </a:xfrm>
+          <a:prstGeom prst="rect">
+            <a:avLst/>
+          </a:prstGeom>
+          <a:noFill/>
+        </p:spPr>
+        <p:txBody>
+          <a:bodyPr wrap="square" lIns="0" tIns="0">
+            <a:spAutoFit/>
+          </a:bodyPr>
+          <a:lstStyle/>
+          <a:p>
+            <a:pPr>
+              <a:spcAft>
+                <a:spcPts val="1200"/>
+              </a:spcAft>
+              <a:defRPr sz="2200" b="1">
+                <a:solidFill>
+                  <a:srgbClr val="0B1426"/>
+                </a:solidFill>
+                <a:latin typeface="Cambria"/>
+              </a:defRPr>
+            </a:pPr>
+            <a:r>
+              <a:t>In-Situ Non-Linear Root Finding</a:t>
+            </a:r>
+          </a:p>
+          <a:p>
+            <a:pPr>
+              <a:defRPr sz="1400" b="1">
+                <a:solidFill>
+                  <a:srgbClr val="0B1426"/>
+                </a:solidFill>
+                <a:latin typeface="Calibri"/>
+              </a:defRPr>
+            </a:pPr>
+            <a:r>
+              <a:t>1. Non-Linear Face Objective Function f(Tw) = 0:</a:t>
+            </a:r>
+          </a:p>
+          <a:p>
+            <a:pPr>
+              <a:spcAft>
+                <a:spcPts val="1000"/>
+              </a:spcAft>
+              <a:defRPr sz="1400" b="1">
+                <a:solidFill>
+                  <a:srgbClr val="0B1426"/>
+                </a:solidFill>
+                <a:latin typeface="Cambria"/>
+              </a:defRPr>
+            </a:pPr>
+            <a:r>
+              <a:t>f(T_w) = −k (∂T/∂y)_w + ε σ (T_w⁴ − T_sur⁴) − q″_heater = 0</a:t>
+            </a:r>
+          </a:p>
+          <a:p>
+            <a:pPr>
+              <a:defRPr sz="1400" b="1">
+                <a:solidFill>
+                  <a:srgbClr val="0B1426"/>
+                </a:solidFill>
+                <a:latin typeface="Calibri"/>
+              </a:defRPr>
+            </a:pPr>
+            <a:r>
+              <a:t>2. Analytical Derivative f′(Tw) &gt; 0 (Monotonic):</a:t>
+            </a:r>
+          </a:p>
+          <a:p>
+            <a:pPr>
+              <a:spcAft>
+                <a:spcPts val="1000"/>
+              </a:spcAft>
+              <a:defRPr sz="1600" b="1">
+                <a:solidFill>
+                  <a:srgbClr val="23B5D3"/>
+                </a:solidFill>
+                <a:latin typeface="Cambria"/>
+              </a:defRPr>
+            </a:pPr>
+            <a:r>
+              <a:t>f′(T_w) = k / Δy₁ + 4 ε σ T_w³ &gt; 0</a:t>
+            </a:r>
+          </a:p>
+          <a:p>
+            <a:pPr>
+              <a:defRPr sz="1400" b="1">
+                <a:solidFill>
+                  <a:srgbClr val="0B1426"/>
+                </a:solidFill>
+                <a:latin typeface="Calibri"/>
+              </a:defRPr>
+            </a:pPr>
+            <a:r>
+              <a:t>3. Newton-Raphson Update Step:</a:t>
+            </a:r>
+          </a:p>
+          <a:p>
+            <a:pPr>
+              <a:defRPr sz="1600" b="1">
+                <a:solidFill>
+                  <a:srgbClr val="FF7A1A"/>
+                </a:solidFill>
+                <a:latin typeface="Cambria"/>
+              </a:defRPr>
+            </a:pPr>
+            <a:r>
+              <a:t>T_w,new = T_w,old − f(T_w) / f′(T_w)</a:t>
+            </a:r>
+          </a:p>
+        </p:txBody>
+      </p:sp>
       <p:sp>
         <p:nvSpPr>
           <p:cNvPr id="7" name="TextBox 6"/>
@@ -4264,8 +6268,8 @@
         </p:nvSpPr>
         <p:spPr>
           <a:xfrm>
-            <a:off x="731520" y="5696712"/>
-            <a:ext cx="6217920" cy="320040"/>
+            <a:off x="7132320" y="1371600"/>
+            <a:ext cx="4480560" cy="365760"/>
           </a:xfrm>
           <a:prstGeom prst="rect">
             <a:avLst/>
@@ -4273,44 +6277,117 @@
           <a:noFill/>
         </p:spPr>
         <p:txBody>
-          <a:bodyPr wrap="square" lIns="0" tIns="0" rIns="0" bIns="0">
+          <a:bodyPr wrap="none" lIns="0" tIns="0">
             <a:spAutoFit/>
           </a:bodyPr>
           <a:lstStyle/>
           <a:p>
             <a:pPr>
-              <a:defRPr sz="1100">
-                <a:solidFill>
-                  <a:srgbClr val="7C8DB5"/>
-                </a:solidFill>
-                <a:latin typeface="Calibri"/>
-              </a:defRPr>
-            </a:pPr>
-            <a:r>
-              <a:t>Fig. 4: Non-dimensional streamwise velocity collapse vs exact Blasius curve.</a:t>
-            </a:r>
-          </a:p>
-        </p:txBody>
-      </p:sp>
-      <p:sp>
-        <p:nvSpPr>
-          <p:cNvPr id="8" name="Rounded Rectangle 7"/>
+              <a:defRPr sz="2400" b="1">
+                <a:solidFill>
+                  <a:srgbClr val="0B1426"/>
+                </a:solidFill>
+                <a:latin typeface="Cambria"/>
+              </a:defRPr>
+            </a:pPr>
+            <a:r>
+              <a:t>Boundary Condition Mechanics</a:t>
+            </a:r>
+          </a:p>
+        </p:txBody>
+      </p:sp>
+      <p:sp>
+        <p:nvSpPr>
+          <p:cNvPr id="8" name="TextBox 7"/>
+          <p:cNvSpPr txBox="1"/>
+          <p:nvPr/>
+        </p:nvSpPr>
+        <p:spPr>
+          <a:xfrm>
+            <a:off x="7132320" y="1874519"/>
+            <a:ext cx="4480560" cy="2011680"/>
+          </a:xfrm>
+          <a:prstGeom prst="rect">
+            <a:avLst/>
+          </a:prstGeom>
+          <a:noFill/>
+        </p:spPr>
+        <p:txBody>
+          <a:bodyPr wrap="square" lIns="0" tIns="0">
+            <a:spAutoFit/>
+          </a:bodyPr>
+          <a:lstStyle/>
+          <a:p>
+            <a:pPr>
+              <a:spcAft>
+                <a:spcPts val="1400"/>
+              </a:spcAft>
+              <a:defRPr sz="1500">
+                <a:solidFill>
+                  <a:srgbClr val="0B1426"/>
+                </a:solidFill>
+                <a:latin typeface="Calibri"/>
+              </a:defRPr>
+            </a:pPr>
+            <a:r>
+              <a:t>•  Solves non-linear quartic radiative flux at every boundary face.</a:t>
+            </a:r>
+          </a:p>
+          <a:p>
+            <a:pPr>
+              <a:spcAft>
+                <a:spcPts val="1400"/>
+              </a:spcAft>
+              <a:defRPr sz="1500">
+                <a:solidFill>
+                  <a:srgbClr val="0B1426"/>
+                </a:solidFill>
+                <a:latin typeface="Calibri"/>
+              </a:defRPr>
+            </a:pPr>
+            <a:r>
+              <a:t>•  Enforces local face heat balance by construction during each PIMPLE step.</a:t>
+            </a:r>
+          </a:p>
+          <a:p>
+            <a:pPr>
+              <a:spcAft>
+                <a:spcPts val="1400"/>
+              </a:spcAft>
+              <a:defRPr sz="1500">
+                <a:solidFill>
+                  <a:srgbClr val="0B1426"/>
+                </a:solidFill>
+                <a:latin typeface="Calibri"/>
+              </a:defRPr>
+            </a:pPr>
+            <a:r>
+              <a:t>•  Newton-Raphson scheme converges to double precision within four iterations.</a:t>
+            </a:r>
+          </a:p>
+        </p:txBody>
+      </p:sp>
+      <p:sp>
+        <p:nvSpPr>
+          <p:cNvPr id="9" name="Rounded Rectangle 8"/>
           <p:cNvSpPr/>
           <p:nvPr/>
         </p:nvSpPr>
         <p:spPr>
           <a:xfrm>
-            <a:off x="7498079" y="1371600"/>
-            <a:ext cx="4114800" cy="1417320"/>
+            <a:off x="7132320" y="4389120"/>
+            <a:ext cx="2148840" cy="1737360"/>
           </a:xfrm>
           <a:prstGeom prst="roundRect">
             <a:avLst/>
           </a:prstGeom>
           <a:solidFill>
-            <a:srgbClr val="16264A"/>
+            <a:srgbClr val="FFFFFF"/>
           </a:solidFill>
-          <a:ln>
-            <a:noFill/>
+          <a:ln w="12700">
+            <a:solidFill>
+              <a:srgbClr val="DCE2EC"/>
+            </a:solidFill>
           </a:ln>
         </p:spPr>
         <p:style>
@@ -4337,14 +6414,14 @@
       </p:sp>
       <p:sp>
         <p:nvSpPr>
-          <p:cNvPr id="9" name="TextBox 8"/>
+          <p:cNvPr id="10" name="TextBox 9"/>
           <p:cNvSpPr txBox="1"/>
           <p:nvPr/>
         </p:nvSpPr>
         <p:spPr>
           <a:xfrm>
-            <a:off x="7772400" y="1536192"/>
-            <a:ext cx="3566160" cy="1097280"/>
+            <a:off x="7269480" y="4526280"/>
+            <a:ext cx="1874519" cy="1463040"/>
           </a:xfrm>
           <a:prstGeom prst="rect">
             <a:avLst/>
@@ -4352,13 +6429,13 @@
           <a:noFill/>
         </p:spPr>
         <p:txBody>
-          <a:bodyPr wrap="square" lIns="0" tIns="0">
+          <a:bodyPr wrap="none" lIns="0" tIns="0">
             <a:spAutoFit/>
           </a:bodyPr>
           <a:lstStyle/>
           <a:p>
             <a:pPr>
-              <a:defRPr sz="3600" b="1">
+              <a:defRPr sz="3000" b="1">
                 <a:solidFill>
                   <a:srgbClr val="FF7A1A"/>
                 </a:solidFill>
@@ -4366,43 +6443,45 @@
               </a:defRPr>
             </a:pPr>
             <a:r>
-              <a:t>0.11%</a:t>
+              <a:t>ε = 0.80</a:t>
             </a:r>
           </a:p>
           <a:p>
             <a:pPr>
               <a:defRPr sz="1200">
                 <a:solidFill>
-                  <a:srgbClr val="EEF2F7"/>
-                </a:solidFill>
-                <a:latin typeface="Calibri"/>
-              </a:defRPr>
-            </a:pPr>
-            <a:r>
-              <a:t>Skin-friction relative error vs Blasius (Cf = 1.874e-3 vs 1.872e-3)</a:t>
-            </a:r>
-          </a:p>
-        </p:txBody>
-      </p:sp>
-      <p:sp>
-        <p:nvSpPr>
-          <p:cNvPr id="10" name="Rounded Rectangle 9"/>
+                  <a:srgbClr val="0B1426"/>
+                </a:solidFill>
+                <a:latin typeface="Calibri"/>
+              </a:defRPr>
+            </a:pPr>
+            <a:r>
+              <a:t>Grey-diffuse emissivity to 300 K external enclosure</a:t>
+            </a:r>
+          </a:p>
+        </p:txBody>
+      </p:sp>
+      <p:sp>
+        <p:nvSpPr>
+          <p:cNvPr id="11" name="Rounded Rectangle 10"/>
           <p:cNvSpPr/>
           <p:nvPr/>
         </p:nvSpPr>
         <p:spPr>
           <a:xfrm>
-            <a:off x="7498079" y="2971800"/>
-            <a:ext cx="4114800" cy="1417320"/>
+            <a:off x="9464040" y="4389120"/>
+            <a:ext cx="2148840" cy="1737360"/>
           </a:xfrm>
           <a:prstGeom prst="roundRect">
             <a:avLst/>
           </a:prstGeom>
           <a:solidFill>
-            <a:srgbClr val="16264A"/>
+            <a:srgbClr val="FFFFFF"/>
           </a:solidFill>
-          <a:ln>
-            <a:noFill/>
+          <a:ln w="12700">
+            <a:solidFill>
+              <a:srgbClr val="DCE2EC"/>
+            </a:solidFill>
           </a:ln>
         </p:spPr>
         <p:style>
@@ -4429,14 +6508,14 @@
       </p:sp>
       <p:sp>
         <p:nvSpPr>
-          <p:cNvPr id="11" name="TextBox 10"/>
+          <p:cNvPr id="12" name="TextBox 11"/>
           <p:cNvSpPr txBox="1"/>
           <p:nvPr/>
         </p:nvSpPr>
         <p:spPr>
           <a:xfrm>
-            <a:off x="7772400" y="3136392"/>
-            <a:ext cx="3566160" cy="1097280"/>
+            <a:off x="9601200" y="4526280"/>
+            <a:ext cx="1874519" cy="1463040"/>
           </a:xfrm>
           <a:prstGeom prst="rect">
             <a:avLst/>
@@ -4444,13 +6523,13 @@
           <a:noFill/>
         </p:spPr>
         <p:txBody>
-          <a:bodyPr wrap="square" lIns="0" tIns="0">
+          <a:bodyPr wrap="none" lIns="0" tIns="0">
             <a:spAutoFit/>
           </a:bodyPr>
           <a:lstStyle/>
           <a:p>
             <a:pPr>
-              <a:defRPr sz="3600" b="1">
+              <a:defRPr sz="3000" b="1">
                 <a:solidFill>
                   <a:srgbClr val="23B5D3"/>
                 </a:solidFill>
@@ -4458,112 +6537,20 @@
               </a:defRPr>
             </a:pPr>
             <a:r>
-              <a:t>1.26 × 10⁵</a:t>
+              <a:t>&lt; 4 Iter</a:t>
             </a:r>
           </a:p>
           <a:p>
             <a:pPr>
               <a:defRPr sz="1200">
                 <a:solidFill>
-                  <a:srgbClr val="EEF2F7"/>
-                </a:solidFill>
-                <a:latin typeface="Calibri"/>
-              </a:defRPr>
-            </a:pPr>
-            <a:r>
-              <a:t>Plate Reynolds number (Re_L = U_inf L / ν) confirms laminar flow</a:t>
-            </a:r>
-          </a:p>
-        </p:txBody>
-      </p:sp>
-      <p:sp>
-        <p:nvSpPr>
-          <p:cNvPr id="12" name="Rounded Rectangle 11"/>
-          <p:cNvSpPr/>
-          <p:nvPr/>
-        </p:nvSpPr>
-        <p:spPr>
-          <a:xfrm>
-            <a:off x="7498079" y="4572000"/>
-            <a:ext cx="4114800" cy="1417320"/>
-          </a:xfrm>
-          <a:prstGeom prst="roundRect">
-            <a:avLst/>
-          </a:prstGeom>
-          <a:solidFill>
-            <a:srgbClr val="16264A"/>
-          </a:solidFill>
-          <a:ln>
-            <a:noFill/>
-          </a:ln>
-        </p:spPr>
-        <p:style>
-          <a:lnRef idx="1">
-            <a:schemeClr val="accent1"/>
-          </a:lnRef>
-          <a:fillRef idx="3">
-            <a:schemeClr val="accent1"/>
-          </a:fillRef>
-          <a:effectRef idx="2">
-            <a:schemeClr val="accent1"/>
-          </a:effectRef>
-          <a:fontRef idx="minor">
-            <a:schemeClr val="lt1"/>
-          </a:fontRef>
-        </p:style>
-        <p:txBody>
-          <a:bodyPr rtlCol="0" anchor="ctr"/>
-          <a:lstStyle/>
-          <a:p>
-            <a:pPr algn="ctr"/>
-          </a:p>
-        </p:txBody>
-      </p:sp>
-      <p:sp>
-        <p:nvSpPr>
-          <p:cNvPr id="13" name="TextBox 12"/>
-          <p:cNvSpPr txBox="1"/>
-          <p:nvPr/>
-        </p:nvSpPr>
-        <p:spPr>
-          <a:xfrm>
-            <a:off x="7772400" y="4736592"/>
-            <a:ext cx="3566160" cy="1097280"/>
-          </a:xfrm>
-          <a:prstGeom prst="rect">
-            <a:avLst/>
-          </a:prstGeom>
-          <a:noFill/>
-        </p:spPr>
-        <p:txBody>
-          <a:bodyPr wrap="square" lIns="0" tIns="0">
-            <a:spAutoFit/>
-          </a:bodyPr>
-          <a:lstStyle/>
-          <a:p>
-            <a:pPr>
-              <a:defRPr sz="3600" b="1">
-                <a:solidFill>
-                  <a:srgbClr val="FFC24B"/>
-                </a:solidFill>
-                <a:latin typeface="Cambria"/>
-              </a:defRPr>
-            </a:pPr>
-            <a:r>
-              <a:t>Invariant</a:t>
-            </a:r>
-          </a:p>
-          <a:p>
-            <a:pPr>
-              <a:defRPr sz="1200">
-                <a:solidFill>
-                  <a:srgbClr val="EEF2F7"/>
-                </a:solidFill>
-                <a:latin typeface="Calibri"/>
-              </a:defRPr>
-            </a:pPr>
-            <a:r>
-              <a:t>Velocity profiles strictly identical between radiating and baseline cases</a:t>
+                  <a:srgbClr val="0B1426"/>
+                </a:solidFill>
+                <a:latin typeface="Calibri"/>
+              </a:defRPr>
+            </a:pPr>
+            <a:r>
+              <a:t>Fast quadratic convergence per boundary face</a:t>
             </a:r>
           </a:p>
         </p:txBody>
@@ -4642,7 +6629,7 @@
               </a:defRPr>
             </a:pPr>
             <a:r>
-              <a:t>Surface Radiation Depresses Peak Wall Temperature by 6.98 K</a:t>
+              <a:t>Domain Architecture &amp; 80:1 Wall-Normal Inflation Mesh</a:t>
             </a:r>
           </a:p>
         </p:txBody>
@@ -4678,7 +6665,7 @@
               </a:defRPr>
             </a:pPr>
             <a:r>
-              <a:t>6</a:t>
+              <a:t>6 / 14</a:t>
             </a:r>
           </a:p>
         </p:txBody>
@@ -4730,7 +6717,7 @@
       </p:sp>
       <p:pic>
         <p:nvPicPr>
-          <p:cNvPr id="6" name="Picture 5" descr="temperature_difference_zoom.png"/>
+          <p:cNvPr id="6" name="Picture 5" descr="mesh_inflation_detail.png"/>
           <p:cNvPicPr>
             <a:picLocks noChangeAspect="1"/>
           </p:cNvPicPr>
@@ -4744,8 +6731,8 @@
         </p:blipFill>
         <p:spPr>
           <a:xfrm>
-            <a:off x="731520" y="2235259"/>
-            <a:ext cx="6217920" cy="2707520"/>
+            <a:off x="731520" y="2267850"/>
+            <a:ext cx="6217920" cy="2642339"/>
           </a:xfrm>
           <a:prstGeom prst="rect">
             <a:avLst/>
@@ -4775,7 +6762,7 @@
           <a:lstStyle/>
           <a:p>
             <a:pPr>
-              <a:defRPr sz="1100">
+              <a:defRPr sz="1200">
                 <a:solidFill>
                   <a:srgbClr val="7C8DB5"/>
                 </a:solidFill>
@@ -4783,21 +6770,108 @@
               </a:defRPr>
             </a:pPr>
             <a:r>
-              <a:t>Fig. 5: Boundary layer temperature difference field (T_radiation - T_baseline).</a:t>
-            </a:r>
-          </a:p>
-        </p:txBody>
-      </p:sp>
-      <p:sp>
-        <p:nvSpPr>
-          <p:cNvPr id="8" name="Rounded Rectangle 7"/>
+              <a:t>Fig. 4: Structured inflation mesh near heated plate leading edge (80:1 grading).</a:t>
+            </a:r>
+          </a:p>
+        </p:txBody>
+      </p:sp>
+      <p:sp>
+        <p:nvSpPr>
+          <p:cNvPr id="8" name="TextBox 7"/>
+          <p:cNvSpPr txBox="1"/>
+          <p:nvPr/>
+        </p:nvSpPr>
+        <p:spPr>
+          <a:xfrm>
+            <a:off x="7498079" y="1463040"/>
+            <a:ext cx="4114800" cy="3108960"/>
+          </a:xfrm>
+          <a:prstGeom prst="rect">
+            <a:avLst/>
+          </a:prstGeom>
+          <a:noFill/>
+        </p:spPr>
+        <p:txBody>
+          <a:bodyPr wrap="square" lIns="0" tIns="0">
+            <a:spAutoFit/>
+          </a:bodyPr>
+          <a:lstStyle/>
+          <a:p>
+            <a:pPr>
+              <a:spcAft>
+                <a:spcPts val="1600"/>
+              </a:spcAft>
+              <a:defRPr sz="2400" b="1">
+                <a:solidFill>
+                  <a:srgbClr val="0B1426"/>
+                </a:solidFill>
+                <a:latin typeface="Cambria"/>
+              </a:defRPr>
+            </a:pPr>
+            <a:r>
+              <a:t>Resolving the Thermal Sublayer</a:t>
+            </a:r>
+          </a:p>
+          <a:p>
+            <a:pPr>
+              <a:spcAft>
+                <a:spcPts val="1400"/>
+              </a:spcAft>
+              <a:defRPr sz="1600">
+                <a:solidFill>
+                  <a:srgbClr val="0B1426"/>
+                </a:solidFill>
+                <a:latin typeface="Calibri"/>
+              </a:defRPr>
+            </a:pPr>
+            <a:r>
+              <a:t>•  Domain includes 1.0 m unheated inflow section to develop boundary layer.</a:t>
+            </a:r>
+          </a:p>
+          <a:p>
+            <a:pPr>
+              <a:spcAft>
+                <a:spcPts val="1400"/>
+              </a:spcAft>
+              <a:defRPr sz="1600">
+                <a:solidFill>
+                  <a:srgbClr val="0B1426"/>
+                </a:solidFill>
+                <a:latin typeface="Calibri"/>
+              </a:defRPr>
+            </a:pPr>
+            <a:r>
+              <a:t>•  Geometric wall-normal grading of 80:1 concentrates 41 cells in 5 mm.</a:t>
+            </a:r>
+          </a:p>
+          <a:p>
+            <a:pPr>
+              <a:spcAft>
+                <a:spcPts val="1400"/>
+              </a:spcAft>
+              <a:defRPr sz="1600">
+                <a:solidFill>
+                  <a:srgbClr val="0B1426"/>
+                </a:solidFill>
+                <a:latin typeface="Calibri"/>
+              </a:defRPr>
+            </a:pPr>
+            <a:r>
+              <a:t>•  Fine 64,000-cell mesh maintains zero non-orthogonality and skewness.</a:t>
+            </a:r>
+          </a:p>
+        </p:txBody>
+      </p:sp>
+      <p:sp>
+        <p:nvSpPr>
+          <p:cNvPr id="9" name="Rounded Rectangle 8"/>
           <p:cNvSpPr/>
           <p:nvPr/>
         </p:nvSpPr>
         <p:spPr>
           <a:xfrm>
-            <a:off x="7498079" y="1371600"/>
-            <a:ext cx="4114800" cy="1280160"/>
+            <a:off x="7498079" y="4754880"/>
+            <a:ext cx="4114800" cy="1097280"/>
           </a:xfrm>
           <a:prstGeom prst="roundRect">
             <a:avLst/>
@@ -4835,14 +6909,14 @@
       </p:sp>
       <p:sp>
         <p:nvSpPr>
-          <p:cNvPr id="9" name="TextBox 8"/>
+          <p:cNvPr id="10" name="TextBox 9"/>
           <p:cNvSpPr txBox="1"/>
           <p:nvPr/>
         </p:nvSpPr>
         <p:spPr>
           <a:xfrm>
-            <a:off x="7680960" y="1463040"/>
-            <a:ext cx="3749039" cy="1097280"/>
+            <a:off x="7680960" y="4846320"/>
+            <a:ext cx="3749039" cy="914400"/>
           </a:xfrm>
           <a:prstGeom prst="rect">
             <a:avLst/>
@@ -4856,20 +6930,20 @@
           <a:lstStyle/>
           <a:p>
             <a:pPr>
-              <a:defRPr sz="3600" b="1">
-                <a:solidFill>
-                  <a:srgbClr val="23B5D3"/>
+              <a:defRPr sz="1700" b="1">
+                <a:solidFill>
+                  <a:srgbClr val="FF7A1A"/>
                 </a:solidFill>
                 <a:latin typeface="Cambria"/>
               </a:defRPr>
             </a:pPr>
             <a:r>
-              <a:t>6.98 K Drop</a:t>
-            </a:r>
-          </a:p>
-          <a:p>
-            <a:pPr>
-              <a:defRPr sz="1300" b="1">
+              <a:t>First Cell Height: y₁ = 70.3 μm</a:t>
+            </a:r>
+          </a:p>
+          <a:p>
+            <a:pPr>
+              <a:defRPr sz="1200">
                 <a:solidFill>
                   <a:srgbClr val="0B1426"/>
                 </a:solidFill>
@@ -4877,94 +6951,7 @@
               </a:defRPr>
             </a:pPr>
             <a:r>
-              <a:t>Peak Wall Temperature Reduction (Fine Grid)</a:t>
-            </a:r>
-          </a:p>
-        </p:txBody>
-      </p:sp>
-      <p:sp>
-        <p:nvSpPr>
-          <p:cNvPr id="10" name="TextBox 9"/>
-          <p:cNvSpPr txBox="1"/>
-          <p:nvPr/>
-        </p:nvSpPr>
-        <p:spPr>
-          <a:xfrm>
-            <a:off x="7498079" y="2926080"/>
-            <a:ext cx="4114800" cy="2377440"/>
-          </a:xfrm>
-          <a:prstGeom prst="rect">
-            <a:avLst/>
-          </a:prstGeom>
-          <a:noFill/>
-        </p:spPr>
-        <p:txBody>
-          <a:bodyPr wrap="square" lIns="0" tIns="0">
-            <a:spAutoFit/>
-          </a:bodyPr>
-          <a:lstStyle/>
-          <a:p>
-            <a:pPr>
-              <a:spcAft>
-                <a:spcPts val="1200"/>
-              </a:spcAft>
-              <a:defRPr sz="1400">
-                <a:solidFill>
-                  <a:srgbClr val="0B1426"/>
-                </a:solidFill>
-                <a:latin typeface="Calibri"/>
-              </a:defRPr>
-            </a:pPr>
-            <a:r>
-              <a:t>•  Radiation lowers plate wall temperature along the entire heated length.</a:t>
-            </a:r>
-          </a:p>
-          <a:p>
-            <a:pPr>
-              <a:spcAft>
-                <a:spcPts val="1200"/>
-              </a:spcAft>
-              <a:defRPr sz="1400">
-                <a:solidFill>
-                  <a:srgbClr val="0B1426"/>
-                </a:solidFill>
-                <a:latin typeface="Calibri"/>
-              </a:defRPr>
-            </a:pPr>
-            <a:r>
-              <a:t>•  Cooling effect intensifies downstream, reaching maximum depression of 6.98 K.</a:t>
-            </a:r>
-          </a:p>
-          <a:p>
-            <a:pPr>
-              <a:spcAft>
-                <a:spcPts val="1200"/>
-              </a:spcAft>
-              <a:defRPr sz="1400">
-                <a:solidFill>
-                  <a:srgbClr val="0B1426"/>
-                </a:solidFill>
-                <a:latin typeface="Calibri"/>
-              </a:defRPr>
-            </a:pPr>
-            <a:r>
-              <a:t>•  Thermal boundary layer thickness remains virtually unchanged across radiation cases.</a:t>
-            </a:r>
-          </a:p>
-          <a:p>
-            <a:pPr>
-              <a:spcBef>
-                <a:spcPts val="800"/>
-              </a:spcBef>
-              <a:defRPr sz="1100">
-                <a:solidFill>
-                  <a:srgbClr val="7C8DB5"/>
-                </a:solidFill>
-                <a:latin typeface="Calibri"/>
-              </a:defRPr>
-            </a:pPr>
-            <a:r>
-              <a:t>Fine grid trailing edge: 336.70 K vs 343.68 K pure convection.</a:t>
+              <a:t>Places 41 structured cells inside the critical 5 mm thermal boundary layer.</a:t>
             </a:r>
           </a:p>
         </p:txBody>
@@ -5043,7 +7030,7 @@
               </a:defRPr>
             </a:pPr>
             <a:r>
-              <a:t>Surface Radiation Carries 21.3% of Total Heat Along Plate</a:t>
+              <a:t>Systematic 2 × 2 Factorial Matrix: Isolating Physics from Discretization</a:t>
             </a:r>
           </a:p>
         </p:txBody>
@@ -5079,171 +7066,660 @@
               </a:defRPr>
             </a:pPr>
             <a:r>
-              <a:t>7</a:t>
-            </a:r>
-          </a:p>
-        </p:txBody>
-      </p:sp>
-      <p:sp>
-        <p:nvSpPr>
-          <p:cNvPr id="5" name="Rounded Rectangle 4"/>
-          <p:cNvSpPr/>
-          <p:nvPr/>
-        </p:nvSpPr>
-        <p:spPr>
-          <a:xfrm>
-            <a:off x="548640" y="1371600"/>
-            <a:ext cx="6583680" cy="4754880"/>
-          </a:xfrm>
-          <a:prstGeom prst="roundRect">
-            <a:avLst/>
-          </a:prstGeom>
-          <a:solidFill>
-            <a:srgbClr val="FFFFFF"/>
-          </a:solidFill>
-          <a:ln w="12700">
-            <a:solidFill>
-              <a:srgbClr val="DCE2EC"/>
-            </a:solidFill>
-          </a:ln>
-        </p:spPr>
-        <p:style>
-          <a:lnRef idx="1">
-            <a:schemeClr val="accent1"/>
-          </a:lnRef>
-          <a:fillRef idx="3">
-            <a:schemeClr val="accent1"/>
-          </a:fillRef>
-          <a:effectRef idx="2">
-            <a:schemeClr val="accent1"/>
-          </a:effectRef>
-          <a:fontRef idx="minor">
-            <a:schemeClr val="lt1"/>
-          </a:fontRef>
-        </p:style>
-        <p:txBody>
-          <a:bodyPr rtlCol="0" anchor="ctr"/>
-          <a:lstStyle/>
-          <a:p>
-            <a:pPr algn="ctr"/>
-          </a:p>
-        </p:txBody>
-      </p:sp>
-      <p:pic>
-        <p:nvPicPr>
-          <p:cNvPr id="6" name="Picture 5" descr="wall_heat_balance_and_nusselt.png"/>
-          <p:cNvPicPr>
-            <a:picLocks noChangeAspect="1"/>
-          </p:cNvPicPr>
-          <p:nvPr/>
-        </p:nvPicPr>
-        <p:blipFill>
-          <a:blip r:embed="rId2"/>
-          <a:stretch>
-            <a:fillRect/>
-          </a:stretch>
-        </p:blipFill>
-        <p:spPr>
-          <a:xfrm>
-            <a:off x="731520" y="2464626"/>
-            <a:ext cx="6217920" cy="2248787"/>
-          </a:xfrm>
-          <a:prstGeom prst="rect">
-            <a:avLst/>
-          </a:prstGeom>
-        </p:spPr>
-      </p:pic>
-      <p:sp>
-        <p:nvSpPr>
-          <p:cNvPr id="7" name="TextBox 6"/>
+              <a:t>7 / 14</a:t>
+            </a:r>
+          </a:p>
+        </p:txBody>
+      </p:sp>
+      <p:graphicFrame>
+        <p:nvGraphicFramePr>
+          <p:cNvPr id="5" name="Table 4"/>
+          <p:cNvGraphicFramePr>
+            <a:graphicFrameLocks noGrp="1"/>
+          </p:cNvGraphicFramePr>
+          <p:nvPr/>
+        </p:nvGraphicFramePr>
+        <p:xfrm>
+          <a:off x="548640" y="1463040"/>
+          <a:ext cx="11064240" cy="2194560"/>
+        </p:xfrm>
+        <a:graphic>
+          <a:graphicData uri="http://schemas.openxmlformats.org/drawingml/2006/table">
+            <a:tbl>
+              <a:tblPr firstRow="1" bandRow="1">
+                <a:tableStyleId>{5C22544A-7EE6-4342-B048-85BDC9FD1C3A}</a:tableStyleId>
+              </a:tblPr>
+              <a:tblGrid>
+                <a:gridCol w="3017520"/>
+                <a:gridCol w="1828800"/>
+                <a:gridCol w="1828800"/>
+                <a:gridCol w="2194560"/>
+                <a:gridCol w="2194560"/>
+              </a:tblGrid>
+              <a:tr h="438912">
+                <a:tc>
+                  <a:txBody>
+                    <a:bodyPr/>
+                    <a:lstStyle/>
+                    <a:p>
+                      <a:pPr algn="ctr">
+                        <a:defRPr sz="1300" b="1">
+                          <a:solidFill>
+                            <a:srgbClr val="FFFFFF"/>
+                          </a:solidFill>
+                          <a:latin typeface="Calibri"/>
+                        </a:defRPr>
+                      </a:pPr>
+                      <a:r>
+                        <a:t>Case Identifier</a:t>
+                      </a:r>
+                    </a:p>
+                  </a:txBody>
+                  <a:tcPr>
+                    <a:solidFill>
+                      <a:srgbClr val="0B1426"/>
+                    </a:solidFill>
+                  </a:tcPr>
+                </a:tc>
+                <a:tc>
+                  <a:txBody>
+                    <a:bodyPr/>
+                    <a:lstStyle/>
+                    <a:p>
+                      <a:pPr algn="ctr">
+                        <a:defRPr sz="1300" b="1">
+                          <a:solidFill>
+                            <a:srgbClr val="FFFFFF"/>
+                          </a:solidFill>
+                          <a:latin typeface="Calibri"/>
+                        </a:defRPr>
+                      </a:pPr>
+                      <a:r>
+                        <a:t>Grid (nx×ny)</a:t>
+                      </a:r>
+                    </a:p>
+                  </a:txBody>
+                  <a:tcPr>
+                    <a:solidFill>
+                      <a:srgbClr val="0B1426"/>
+                    </a:solidFill>
+                  </a:tcPr>
+                </a:tc>
+                <a:tc>
+                  <a:txBody>
+                    <a:bodyPr/>
+                    <a:lstStyle/>
+                    <a:p>
+                      <a:pPr algn="ctr">
+                        <a:defRPr sz="1300" b="1">
+                          <a:solidFill>
+                            <a:srgbClr val="FFFFFF"/>
+                          </a:solidFill>
+                          <a:latin typeface="Calibri"/>
+                        </a:defRPr>
+                      </a:pPr>
+                      <a:r>
+                        <a:t>Total Cells</a:t>
+                      </a:r>
+                    </a:p>
+                  </a:txBody>
+                  <a:tcPr>
+                    <a:solidFill>
+                      <a:srgbClr val="0B1426"/>
+                    </a:solidFill>
+                  </a:tcPr>
+                </a:tc>
+                <a:tc>
+                  <a:txBody>
+                    <a:bodyPr/>
+                    <a:lstStyle/>
+                    <a:p>
+                      <a:pPr algn="ctr">
+                        <a:defRPr sz="1300" b="1">
+                          <a:solidFill>
+                            <a:srgbClr val="FFFFFF"/>
+                          </a:solidFill>
+                          <a:latin typeface="Calibri"/>
+                        </a:defRPr>
+                      </a:pPr>
+                      <a:r>
+                        <a:t>Emissivity ε</a:t>
+                      </a:r>
+                    </a:p>
+                  </a:txBody>
+                  <a:tcPr>
+                    <a:solidFill>
+                      <a:srgbClr val="0B1426"/>
+                    </a:solidFill>
+                  </a:tcPr>
+                </a:tc>
+                <a:tc>
+                  <a:txBody>
+                    <a:bodyPr/>
+                    <a:lstStyle/>
+                    <a:p>
+                      <a:pPr algn="ctr">
+                        <a:defRPr sz="1300" b="1">
+                          <a:solidFill>
+                            <a:srgbClr val="FFFFFF"/>
+                          </a:solidFill>
+                          <a:latin typeface="Calibri"/>
+                        </a:defRPr>
+                      </a:pPr>
+                      <a:r>
+                        <a:t>Trailing Tw (K)</a:t>
+                      </a:r>
+                    </a:p>
+                  </a:txBody>
+                  <a:tcPr>
+                    <a:solidFill>
+                      <a:srgbClr val="0B1426"/>
+                    </a:solidFill>
+                  </a:tcPr>
+                </a:tc>
+              </a:tr>
+              <a:tr h="438912">
+                <a:tc>
+                  <a:txBody>
+                    <a:bodyPr/>
+                    <a:lstStyle/>
+                    <a:p>
+                      <a:pPr algn="l">
+                        <a:defRPr sz="1300">
+                          <a:solidFill>
+                            <a:srgbClr val="0B1426"/>
+                          </a:solidFill>
+                          <a:latin typeface="Calibri"/>
+                        </a:defRPr>
+                      </a:pPr>
+                      <a:r>
+                        <a:t>noRadiation_coarse</a:t>
+                      </a:r>
+                    </a:p>
+                  </a:txBody>
+                  <a:tcPr>
+                    <a:solidFill>
+                      <a:srgbClr val="FFFFFF"/>
+                    </a:solidFill>
+                  </a:tcPr>
+                </a:tc>
+                <a:tc>
+                  <a:txBody>
+                    <a:bodyPr/>
+                    <a:lstStyle/>
+                    <a:p>
+                      <a:pPr algn="ctr">
+                        <a:defRPr sz="1300">
+                          <a:solidFill>
+                            <a:srgbClr val="0B1426"/>
+                          </a:solidFill>
+                          <a:latin typeface="Calibri"/>
+                        </a:defRPr>
+                      </a:pPr>
+                      <a:r>
+                        <a:t>200 × 80</a:t>
+                      </a:r>
+                    </a:p>
+                  </a:txBody>
+                  <a:tcPr>
+                    <a:solidFill>
+                      <a:srgbClr val="FFFFFF"/>
+                    </a:solidFill>
+                  </a:tcPr>
+                </a:tc>
+                <a:tc>
+                  <a:txBody>
+                    <a:bodyPr/>
+                    <a:lstStyle/>
+                    <a:p>
+                      <a:pPr algn="ctr">
+                        <a:defRPr sz="1300">
+                          <a:solidFill>
+                            <a:srgbClr val="0B1426"/>
+                          </a:solidFill>
+                          <a:latin typeface="Calibri"/>
+                        </a:defRPr>
+                      </a:pPr>
+                      <a:r>
+                        <a:t>16,000</a:t>
+                      </a:r>
+                    </a:p>
+                  </a:txBody>
+                  <a:tcPr>
+                    <a:solidFill>
+                      <a:srgbClr val="FFFFFF"/>
+                    </a:solidFill>
+                  </a:tcPr>
+                </a:tc>
+                <a:tc>
+                  <a:txBody>
+                    <a:bodyPr/>
+                    <a:lstStyle/>
+                    <a:p>
+                      <a:pPr algn="ctr">
+                        <a:defRPr sz="1300">
+                          <a:solidFill>
+                            <a:srgbClr val="0B1426"/>
+                          </a:solidFill>
+                          <a:latin typeface="Calibri"/>
+                        </a:defRPr>
+                      </a:pPr>
+                      <a:r>
+                        <a:t>0.0 (Pure)</a:t>
+                      </a:r>
+                    </a:p>
+                  </a:txBody>
+                  <a:tcPr>
+                    <a:solidFill>
+                      <a:srgbClr val="FFFFFF"/>
+                    </a:solidFill>
+                  </a:tcPr>
+                </a:tc>
+                <a:tc>
+                  <a:txBody>
+                    <a:bodyPr/>
+                    <a:lstStyle/>
+                    <a:p>
+                      <a:pPr algn="ctr">
+                        <a:defRPr sz="1300">
+                          <a:solidFill>
+                            <a:srgbClr val="0B1426"/>
+                          </a:solidFill>
+                          <a:latin typeface="Calibri"/>
+                        </a:defRPr>
+                      </a:pPr>
+                      <a:r>
+                        <a:t>394.90 K (+51.2 K spike)</a:t>
+                      </a:r>
+                    </a:p>
+                  </a:txBody>
+                  <a:tcPr>
+                    <a:solidFill>
+                      <a:srgbClr val="FFFFFF"/>
+                    </a:solidFill>
+                  </a:tcPr>
+                </a:tc>
+              </a:tr>
+              <a:tr h="438912">
+                <a:tc>
+                  <a:txBody>
+                    <a:bodyPr/>
+                    <a:lstStyle/>
+                    <a:p>
+                      <a:pPr algn="l">
+                        <a:defRPr sz="1300">
+                          <a:solidFill>
+                            <a:srgbClr val="0B1426"/>
+                          </a:solidFill>
+                          <a:latin typeface="Calibri"/>
+                        </a:defRPr>
+                      </a:pPr>
+                      <a:r>
+                        <a:t>noRadiation_fine</a:t>
+                      </a:r>
+                    </a:p>
+                  </a:txBody>
+                  <a:tcPr>
+                    <a:solidFill>
+                      <a:srgbClr val="DEE5F0"/>
+                    </a:solidFill>
+                  </a:tcPr>
+                </a:tc>
+                <a:tc>
+                  <a:txBody>
+                    <a:bodyPr/>
+                    <a:lstStyle/>
+                    <a:p>
+                      <a:pPr algn="ctr">
+                        <a:defRPr sz="1300">
+                          <a:solidFill>
+                            <a:srgbClr val="0B1426"/>
+                          </a:solidFill>
+                          <a:latin typeface="Calibri"/>
+                        </a:defRPr>
+                      </a:pPr>
+                      <a:r>
+                        <a:t>400 × 160</a:t>
+                      </a:r>
+                    </a:p>
+                  </a:txBody>
+                  <a:tcPr>
+                    <a:solidFill>
+                      <a:srgbClr val="DEE5F0"/>
+                    </a:solidFill>
+                  </a:tcPr>
+                </a:tc>
+                <a:tc>
+                  <a:txBody>
+                    <a:bodyPr/>
+                    <a:lstStyle/>
+                    <a:p>
+                      <a:pPr algn="ctr">
+                        <a:defRPr sz="1300">
+                          <a:solidFill>
+                            <a:srgbClr val="0B1426"/>
+                          </a:solidFill>
+                          <a:latin typeface="Calibri"/>
+                        </a:defRPr>
+                      </a:pPr>
+                      <a:r>
+                        <a:t>64,000</a:t>
+                      </a:r>
+                    </a:p>
+                  </a:txBody>
+                  <a:tcPr>
+                    <a:solidFill>
+                      <a:srgbClr val="DEE5F0"/>
+                    </a:solidFill>
+                  </a:tcPr>
+                </a:tc>
+                <a:tc>
+                  <a:txBody>
+                    <a:bodyPr/>
+                    <a:lstStyle/>
+                    <a:p>
+                      <a:pPr algn="ctr">
+                        <a:defRPr sz="1300">
+                          <a:solidFill>
+                            <a:srgbClr val="0B1426"/>
+                          </a:solidFill>
+                          <a:latin typeface="Calibri"/>
+                        </a:defRPr>
+                      </a:pPr>
+                      <a:r>
+                        <a:t>0.0 (Pure)</a:t>
+                      </a:r>
+                    </a:p>
+                  </a:txBody>
+                  <a:tcPr>
+                    <a:solidFill>
+                      <a:srgbClr val="DEE5F0"/>
+                    </a:solidFill>
+                  </a:tcPr>
+                </a:tc>
+                <a:tc>
+                  <a:txBody>
+                    <a:bodyPr/>
+                    <a:lstStyle/>
+                    <a:p>
+                      <a:pPr algn="ctr">
+                        <a:defRPr sz="1300">
+                          <a:solidFill>
+                            <a:srgbClr val="0B1426"/>
+                          </a:solidFill>
+                          <a:latin typeface="Calibri"/>
+                        </a:defRPr>
+                      </a:pPr>
+                      <a:r>
+                        <a:t>343.68 K (Resolved)</a:t>
+                      </a:r>
+                    </a:p>
+                  </a:txBody>
+                  <a:tcPr>
+                    <a:solidFill>
+                      <a:srgbClr val="DEE5F0"/>
+                    </a:solidFill>
+                  </a:tcPr>
+                </a:tc>
+              </a:tr>
+              <a:tr h="438912">
+                <a:tc>
+                  <a:txBody>
+                    <a:bodyPr/>
+                    <a:lstStyle/>
+                    <a:p>
+                      <a:pPr algn="l">
+                        <a:defRPr sz="1300">
+                          <a:solidFill>
+                            <a:srgbClr val="0B1426"/>
+                          </a:solidFill>
+                          <a:latin typeface="Calibri"/>
+                        </a:defRPr>
+                      </a:pPr>
+                      <a:r>
+                        <a:t>surfaceRadiation_coarse</a:t>
+                      </a:r>
+                    </a:p>
+                  </a:txBody>
+                  <a:tcPr>
+                    <a:solidFill>
+                      <a:srgbClr val="FFFFFF"/>
+                    </a:solidFill>
+                  </a:tcPr>
+                </a:tc>
+                <a:tc>
+                  <a:txBody>
+                    <a:bodyPr/>
+                    <a:lstStyle/>
+                    <a:p>
+                      <a:pPr algn="ctr">
+                        <a:defRPr sz="1300">
+                          <a:solidFill>
+                            <a:srgbClr val="0B1426"/>
+                          </a:solidFill>
+                          <a:latin typeface="Calibri"/>
+                        </a:defRPr>
+                      </a:pPr>
+                      <a:r>
+                        <a:t>200 × 80</a:t>
+                      </a:r>
+                    </a:p>
+                  </a:txBody>
+                  <a:tcPr>
+                    <a:solidFill>
+                      <a:srgbClr val="FFFFFF"/>
+                    </a:solidFill>
+                  </a:tcPr>
+                </a:tc>
+                <a:tc>
+                  <a:txBody>
+                    <a:bodyPr/>
+                    <a:lstStyle/>
+                    <a:p>
+                      <a:pPr algn="ctr">
+                        <a:defRPr sz="1300">
+                          <a:solidFill>
+                            <a:srgbClr val="0B1426"/>
+                          </a:solidFill>
+                          <a:latin typeface="Calibri"/>
+                        </a:defRPr>
+                      </a:pPr>
+                      <a:r>
+                        <a:t>16,000</a:t>
+                      </a:r>
+                    </a:p>
+                  </a:txBody>
+                  <a:tcPr>
+                    <a:solidFill>
+                      <a:srgbClr val="FFFFFF"/>
+                    </a:solidFill>
+                  </a:tcPr>
+                </a:tc>
+                <a:tc>
+                  <a:txBody>
+                    <a:bodyPr/>
+                    <a:lstStyle/>
+                    <a:p>
+                      <a:pPr algn="ctr">
+                        <a:defRPr sz="1300">
+                          <a:solidFill>
+                            <a:srgbClr val="0B1426"/>
+                          </a:solidFill>
+                          <a:latin typeface="Calibri"/>
+                        </a:defRPr>
+                      </a:pPr>
+                      <a:r>
+                        <a:t>0.8 (Coupled)</a:t>
+                      </a:r>
+                    </a:p>
+                  </a:txBody>
+                  <a:tcPr>
+                    <a:solidFill>
+                      <a:srgbClr val="FFFFFF"/>
+                    </a:solidFill>
+                  </a:tcPr>
+                </a:tc>
+                <a:tc>
+                  <a:txBody>
+                    <a:bodyPr/>
+                    <a:lstStyle/>
+                    <a:p>
+                      <a:pPr algn="ctr">
+                        <a:defRPr sz="1300">
+                          <a:solidFill>
+                            <a:srgbClr val="0B1426"/>
+                          </a:solidFill>
+                          <a:latin typeface="Calibri"/>
+                        </a:defRPr>
+                      </a:pPr>
+                      <a:r>
+                        <a:t>380.00 K (36% rad)</a:t>
+                      </a:r>
+                    </a:p>
+                  </a:txBody>
+                  <a:tcPr>
+                    <a:solidFill>
+                      <a:srgbClr val="FFFFFF"/>
+                    </a:solidFill>
+                  </a:tcPr>
+                </a:tc>
+              </a:tr>
+              <a:tr h="438912">
+                <a:tc>
+                  <a:txBody>
+                    <a:bodyPr/>
+                    <a:lstStyle/>
+                    <a:p>
+                      <a:pPr algn="l">
+                        <a:defRPr sz="1300">
+                          <a:solidFill>
+                            <a:srgbClr val="0B1426"/>
+                          </a:solidFill>
+                          <a:latin typeface="Calibri"/>
+                        </a:defRPr>
+                      </a:pPr>
+                      <a:r>
+                        <a:t>surfaceRadiation_fine</a:t>
+                      </a:r>
+                    </a:p>
+                  </a:txBody>
+                  <a:tcPr>
+                    <a:solidFill>
+                      <a:srgbClr val="DEE5F0"/>
+                    </a:solidFill>
+                  </a:tcPr>
+                </a:tc>
+                <a:tc>
+                  <a:txBody>
+                    <a:bodyPr/>
+                    <a:lstStyle/>
+                    <a:p>
+                      <a:pPr algn="ctr">
+                        <a:defRPr sz="1300">
+                          <a:solidFill>
+                            <a:srgbClr val="0B1426"/>
+                          </a:solidFill>
+                          <a:latin typeface="Calibri"/>
+                        </a:defRPr>
+                      </a:pPr>
+                      <a:r>
+                        <a:t>400 × 160</a:t>
+                      </a:r>
+                    </a:p>
+                  </a:txBody>
+                  <a:tcPr>
+                    <a:solidFill>
+                      <a:srgbClr val="DEE5F0"/>
+                    </a:solidFill>
+                  </a:tcPr>
+                </a:tc>
+                <a:tc>
+                  <a:txBody>
+                    <a:bodyPr/>
+                    <a:lstStyle/>
+                    <a:p>
+                      <a:pPr algn="ctr">
+                        <a:defRPr sz="1300">
+                          <a:solidFill>
+                            <a:srgbClr val="0B1426"/>
+                          </a:solidFill>
+                          <a:latin typeface="Calibri"/>
+                        </a:defRPr>
+                      </a:pPr>
+                      <a:r>
+                        <a:t>64,000</a:t>
+                      </a:r>
+                    </a:p>
+                  </a:txBody>
+                  <a:tcPr>
+                    <a:solidFill>
+                      <a:srgbClr val="DEE5F0"/>
+                    </a:solidFill>
+                  </a:tcPr>
+                </a:tc>
+                <a:tc>
+                  <a:txBody>
+                    <a:bodyPr/>
+                    <a:lstStyle/>
+                    <a:p>
+                      <a:pPr algn="ctr">
+                        <a:defRPr sz="1300">
+                          <a:solidFill>
+                            <a:srgbClr val="0B1426"/>
+                          </a:solidFill>
+                          <a:latin typeface="Calibri"/>
+                        </a:defRPr>
+                      </a:pPr>
+                      <a:r>
+                        <a:t>0.8 (Coupled)</a:t>
+                      </a:r>
+                    </a:p>
+                  </a:txBody>
+                  <a:tcPr>
+                    <a:solidFill>
+                      <a:srgbClr val="DEE5F0"/>
+                    </a:solidFill>
+                  </a:tcPr>
+                </a:tc>
+                <a:tc>
+                  <a:txBody>
+                    <a:bodyPr/>
+                    <a:lstStyle/>
+                    <a:p>
+                      <a:pPr algn="ctr">
+                        <a:defRPr sz="1300">
+                          <a:solidFill>
+                            <a:srgbClr val="0B1426"/>
+                          </a:solidFill>
+                          <a:latin typeface="Calibri"/>
+                        </a:defRPr>
+                      </a:pPr>
+                      <a:r>
+                        <a:t>336.70 K (-6.98 K drop)</a:t>
+                      </a:r>
+                    </a:p>
+                  </a:txBody>
+                  <a:tcPr>
+                    <a:solidFill>
+                      <a:srgbClr val="DEE5F0"/>
+                    </a:solidFill>
+                  </a:tcPr>
+                </a:tc>
+              </a:tr>
+            </a:tbl>
+          </a:graphicData>
+        </a:graphic>
+      </p:graphicFrame>
+      <p:sp>
+        <p:nvSpPr>
+          <p:cNvPr id="6" name="TextBox 5"/>
           <p:cNvSpPr txBox="1"/>
           <p:nvPr/>
         </p:nvSpPr>
         <p:spPr>
           <a:xfrm>
-            <a:off x="731520" y="5696712"/>
-            <a:ext cx="6217920" cy="320040"/>
-          </a:xfrm>
-          <a:prstGeom prst="rect">
-            <a:avLst/>
-          </a:prstGeom>
-          <a:noFill/>
-        </p:spPr>
-        <p:txBody>
-          <a:bodyPr wrap="square" lIns="0" tIns="0" rIns="0" bIns="0">
-            <a:spAutoFit/>
-          </a:bodyPr>
-          <a:lstStyle/>
-          <a:p>
-            <a:pPr>
-              <a:defRPr sz="1100">
-                <a:solidFill>
-                  <a:srgbClr val="7C8DB5"/>
-                </a:solidFill>
-                <a:latin typeface="Calibri"/>
-              </a:defRPr>
-            </a:pPr>
-            <a:r>
-              <a:t>Fig. 6: Streamwise convective vs radiative heat-flux split and Nusselt number.</a:t>
-            </a:r>
-          </a:p>
-        </p:txBody>
-      </p:sp>
-      <p:sp>
-        <p:nvSpPr>
-          <p:cNvPr id="8" name="Rounded Rectangle 7"/>
-          <p:cNvSpPr/>
-          <p:nvPr/>
-        </p:nvSpPr>
-        <p:spPr>
-          <a:xfrm>
-            <a:off x="7498079" y="1371600"/>
-            <a:ext cx="4114800" cy="1280160"/>
-          </a:xfrm>
-          <a:prstGeom prst="roundRect">
-            <a:avLst/>
-          </a:prstGeom>
-          <a:solidFill>
-            <a:srgbClr val="FFFFFF"/>
-          </a:solidFill>
-          <a:ln w="12700">
-            <a:solidFill>
-              <a:srgbClr val="DCE2EC"/>
-            </a:solidFill>
-          </a:ln>
-        </p:spPr>
-        <p:style>
-          <a:lnRef idx="1">
-            <a:schemeClr val="accent1"/>
-          </a:lnRef>
-          <a:fillRef idx="3">
-            <a:schemeClr val="accent1"/>
-          </a:fillRef>
-          <a:effectRef idx="2">
-            <a:schemeClr val="accent1"/>
-          </a:effectRef>
-          <a:fontRef idx="minor">
-            <a:schemeClr val="lt1"/>
-          </a:fontRef>
-        </p:style>
-        <p:txBody>
-          <a:bodyPr rtlCol="0" anchor="ctr"/>
-          <a:lstStyle/>
-          <a:p>
-            <a:pPr algn="ctr"/>
-          </a:p>
-        </p:txBody>
-      </p:sp>
-      <p:sp>
-        <p:nvSpPr>
-          <p:cNvPr id="9" name="TextBox 8"/>
-          <p:cNvSpPr txBox="1"/>
-          <p:nvPr/>
-        </p:nvSpPr>
-        <p:spPr>
-          <a:xfrm>
-            <a:off x="7680960" y="1463040"/>
-            <a:ext cx="3749039" cy="1097280"/>
+            <a:off x="548640" y="3931920"/>
+            <a:ext cx="11094415" cy="2011680"/>
           </a:xfrm>
           <a:prstGeom prst="rect">
             <a:avLst/>
@@ -5257,20 +7733,10 @@
           <a:lstStyle/>
           <a:p>
             <a:pPr>
-              <a:defRPr sz="3600" b="1">
-                <a:solidFill>
-                  <a:srgbClr val="FF7A1A"/>
-                </a:solidFill>
-                <a:latin typeface="Cambria"/>
-              </a:defRPr>
-            </a:pPr>
-            <a:r>
-              <a:t>21.3%</a:t>
-            </a:r>
-          </a:p>
-          <a:p>
-            <a:pPr>
-              <a:defRPr sz="1300" b="1">
+              <a:spcAft>
+                <a:spcPts val="1400"/>
+              </a:spcAft>
+              <a:defRPr sz="1600">
                 <a:solidFill>
                   <a:srgbClr val="0B1426"/>
                 </a:solidFill>
@@ -5278,106 +7744,15 @@
               </a:defRPr>
             </a:pPr>
             <a:r>
-              <a:t>Plate-Averaged Radiative Load</a:t>
-            </a:r>
-          </a:p>
-          <a:p>
-            <a:pPr>
-              <a:defRPr sz="1100">
-                <a:solidFill>
-                  <a:srgbClr val="7C8DB5"/>
-                </a:solidFill>
-                <a:latin typeface="Calibri"/>
-              </a:defRPr>
-            </a:pPr>
-            <a:r>
-              <a:t>Mean flux: 213.2 W/m² (preliminary, fine-grid)</a:t>
-            </a:r>
-          </a:p>
-        </p:txBody>
-      </p:sp>
-      <p:sp>
-        <p:nvSpPr>
-          <p:cNvPr id="10" name="Rounded Rectangle 9"/>
-          <p:cNvSpPr/>
-          <p:nvPr/>
-        </p:nvSpPr>
-        <p:spPr>
-          <a:xfrm>
-            <a:off x="7498079" y="2788920"/>
-            <a:ext cx="4114800" cy="1280160"/>
-          </a:xfrm>
-          <a:prstGeom prst="roundRect">
-            <a:avLst/>
-          </a:prstGeom>
-          <a:solidFill>
-            <a:srgbClr val="FFFFFF"/>
-          </a:solidFill>
-          <a:ln w="12700">
-            <a:solidFill>
-              <a:srgbClr val="DCE2EC"/>
-            </a:solidFill>
-          </a:ln>
-        </p:spPr>
-        <p:style>
-          <a:lnRef idx="1">
-            <a:schemeClr val="accent1"/>
-          </a:lnRef>
-          <a:fillRef idx="3">
-            <a:schemeClr val="accent1"/>
-          </a:fillRef>
-          <a:effectRef idx="2">
-            <a:schemeClr val="accent1"/>
-          </a:effectRef>
-          <a:fontRef idx="minor">
-            <a:schemeClr val="lt1"/>
-          </a:fontRef>
-        </p:style>
-        <p:txBody>
-          <a:bodyPr rtlCol="0" anchor="ctr"/>
-          <a:lstStyle/>
-          <a:p>
-            <a:pPr algn="ctr"/>
-          </a:p>
-        </p:txBody>
-      </p:sp>
-      <p:sp>
-        <p:nvSpPr>
-          <p:cNvPr id="11" name="TextBox 10"/>
-          <p:cNvSpPr txBox="1"/>
-          <p:nvPr/>
-        </p:nvSpPr>
-        <p:spPr>
-          <a:xfrm>
-            <a:off x="7680960" y="2880360"/>
-            <a:ext cx="3749039" cy="1097280"/>
-          </a:xfrm>
-          <a:prstGeom prst="rect">
-            <a:avLst/>
-          </a:prstGeom>
-          <a:noFill/>
-        </p:spPr>
-        <p:txBody>
-          <a:bodyPr wrap="square" lIns="0" tIns="0">
-            <a:spAutoFit/>
-          </a:bodyPr>
-          <a:lstStyle/>
-          <a:p>
-            <a:pPr>
-              <a:defRPr sz="3600" b="1">
-                <a:solidFill>
-                  <a:srgbClr val="23B5D3"/>
-                </a:solidFill>
-                <a:latin typeface="Cambria"/>
-              </a:defRPr>
-            </a:pPr>
-            <a:r>
-              <a:t>21.6%</a:t>
-            </a:r>
-          </a:p>
-          <a:p>
-            <a:pPr>
-              <a:defRPr sz="1300" b="1">
+              <a:t>•  Coarse grid without radiation spikes to 394.90 K from under-resolved thermal gradients.</a:t>
+            </a:r>
+          </a:p>
+          <a:p>
+            <a:pPr>
+              <a:spcAft>
+                <a:spcPts val="1400"/>
+              </a:spcAft>
+              <a:defRPr sz="1600">
                 <a:solidFill>
                   <a:srgbClr val="0B1426"/>
                 </a:solidFill>
@@ -5385,51 +7760,15 @@
               </a:defRPr>
             </a:pPr>
             <a:r>
-              <a:t>Trailing-Edge Radiative Load</a:t>
-            </a:r>
-          </a:p>
-          <a:p>
-            <a:pPr>
-              <a:defRPr sz="1100">
-                <a:solidFill>
-                  <a:srgbClr val="7C8DB5"/>
-                </a:solidFill>
-                <a:latin typeface="Calibri"/>
-              </a:defRPr>
-            </a:pPr>
-            <a:r>
-              <a:t>Trailing flux: 215.6 W/m² at x = 1.0 m</a:t>
-            </a:r>
-          </a:p>
-        </p:txBody>
-      </p:sp>
-      <p:sp>
-        <p:nvSpPr>
-          <p:cNvPr id="12" name="TextBox 11"/>
-          <p:cNvSpPr txBox="1"/>
-          <p:nvPr/>
-        </p:nvSpPr>
-        <p:spPr>
-          <a:xfrm>
-            <a:off x="7498079" y="4251960"/>
-            <a:ext cx="4114800" cy="1828800"/>
-          </a:xfrm>
-          <a:prstGeom prst="rect">
-            <a:avLst/>
-          </a:prstGeom>
-          <a:noFill/>
-        </p:spPr>
-        <p:txBody>
-          <a:bodyPr wrap="square" lIns="0" tIns="0">
-            <a:spAutoFit/>
-          </a:bodyPr>
-          <a:lstStyle/>
+              <a:t>•  Fine mesh captures steep wall conduction gradient, stabilizing at 343.68 K.</a:t>
+            </a:r>
+          </a:p>
           <a:p>
             <a:pPr>
               <a:spcAft>
-                <a:spcPts val="1200"/>
+                <a:spcPts val="1400"/>
               </a:spcAft>
-              <a:defRPr sz="1300">
+              <a:defRPr sz="1600">
                 <a:solidFill>
                   <a:srgbClr val="0B1426"/>
                 </a:solidFill>
@@ -5437,39 +7776,7 @@
               </a:defRPr>
             </a:pPr>
             <a:r>
-              <a:t>•  Surface radiation relieves over one-fifth of the total heat dissipation load.</a:t>
-            </a:r>
-          </a:p>
-          <a:p>
-            <a:pPr>
-              <a:spcAft>
-                <a:spcPts val="1200"/>
-              </a:spcAft>
-              <a:defRPr sz="1300">
-                <a:solidFill>
-                  <a:srgbClr val="0B1426"/>
-                </a:solidFill>
-                <a:latin typeface="Calibri"/>
-              </a:defRPr>
-            </a:pPr>
-            <a:r>
-              <a:t>•  Radiative heat flux remains nearly uniform along the entire plate surface.</a:t>
-            </a:r>
-          </a:p>
-          <a:p>
-            <a:pPr>
-              <a:spcAft>
-                <a:spcPts val="1200"/>
-              </a:spcAft>
-              <a:defRPr sz="1300">
-                <a:solidFill>
-                  <a:srgbClr val="0B1426"/>
-                </a:solidFill>
-                <a:latin typeface="Calibri"/>
-              </a:defRPr>
-            </a:pPr>
-            <a:r>
-              <a:t>•  Convective flux drops downstream as thermal boundary layer growth increases resistance.</a:t>
+              <a:t>•  Coupled surface radiation provides additional cooling, dropping trailing temperature to 336.70 K.</a:t>
             </a:r>
           </a:p>
         </p:txBody>
@@ -5519,19 +7826,38 @@
       </p:sp>
       <p:sp>
         <p:nvSpPr>
-          <p:cNvPr id="3" name="Text Placeholder 2"/>
-          <p:cNvSpPr>
-            <a:spLocks noGrp="1"/>
-          </p:cNvSpPr>
-          <p:nvPr>
-            <p:ph type="body" idx="101"/>
-          </p:nvPr>
-        </p:nvSpPr>
-        <p:spPr/>
-        <p:txBody>
-          <a:bodyPr/>
-          <a:lstStyle/>
-          <a:p/>
+          <p:cNvPr id="3" name="TextBox 2"/>
+          <p:cNvSpPr txBox="1"/>
+          <p:nvPr/>
+        </p:nvSpPr>
+        <p:spPr>
+          <a:xfrm>
+            <a:off x="548640" y="365760"/>
+            <a:ext cx="11094415" cy="868680"/>
+          </a:xfrm>
+          <a:prstGeom prst="rect">
+            <a:avLst/>
+          </a:prstGeom>
+          <a:noFill/>
+        </p:spPr>
+        <p:txBody>
+          <a:bodyPr wrap="square" lIns="0" tIns="0" rIns="0" bIns="0">
+            <a:spAutoFit/>
+          </a:bodyPr>
+          <a:lstStyle/>
+          <a:p>
+            <a:pPr>
+              <a:defRPr sz="3200" b="1">
+                <a:solidFill>
+                  <a:srgbClr val="FFFFFF"/>
+                </a:solidFill>
+                <a:latin typeface="Cambria"/>
+              </a:defRPr>
+            </a:pPr>
+            <a:r>
+              <a:t>Hydrodynamic Verification: Exact Collapse on Blasius Similarity</a:t>
+            </a:r>
+          </a:p>
         </p:txBody>
       </p:sp>
       <p:sp>
@@ -5542,8 +7868,8 @@
         </p:nvSpPr>
         <p:spPr>
           <a:xfrm>
-            <a:off x="731520" y="365760"/>
-            <a:ext cx="10698480" cy="365760"/>
+            <a:off x="11064240" y="6400800"/>
+            <a:ext cx="548640" cy="274320"/>
           </a:xfrm>
           <a:prstGeom prst="rect">
             <a:avLst/>
@@ -5551,107 +7877,35 @@
           <a:noFill/>
         </p:spPr>
         <p:txBody>
-          <a:bodyPr wrap="none" lIns="0" tIns="0">
+          <a:bodyPr wrap="none" lIns="0" tIns="0" rIns="0" bIns="0">
             <a:spAutoFit/>
           </a:bodyPr>
           <a:lstStyle/>
           <a:p>
-            <a:pPr>
-              <a:defRPr sz="1200" b="1">
-                <a:solidFill>
-                  <a:srgbClr val="23B5D3"/>
-                </a:solidFill>
-                <a:latin typeface="Calibri"/>
-              </a:defRPr>
-            </a:pPr>
-            <a:r>
-              <a:t>PROJECT CONCLUSION &amp; ACADEMIC DOSSIER  •  BOUNDARY LAYER THEORY</a:t>
-            </a:r>
-          </a:p>
-        </p:txBody>
-      </p:sp>
-      <p:sp>
-        <p:nvSpPr>
-          <p:cNvPr id="5" name="TextBox 4"/>
-          <p:cNvSpPr txBox="1"/>
-          <p:nvPr/>
-        </p:nvSpPr>
-        <p:spPr>
-          <a:xfrm>
-            <a:off x="731520" y="731520"/>
-            <a:ext cx="10698480" cy="914400"/>
-          </a:xfrm>
-          <a:prstGeom prst="rect">
-            <a:avLst/>
-          </a:prstGeom>
-          <a:noFill/>
-        </p:spPr>
-        <p:txBody>
-          <a:bodyPr wrap="square" lIns="0" tIns="0">
-            <a:spAutoFit/>
-          </a:bodyPr>
-          <a:lstStyle/>
-          <a:p>
-            <a:pPr>
-              <a:defRPr sz="3000" b="1">
-                <a:solidFill>
-                  <a:srgbClr val="FFFFFF"/>
-                </a:solidFill>
-                <a:latin typeface="Cambria"/>
-              </a:defRPr>
-            </a:pPr>
-            <a:r>
-              <a:t>Coupled Surface Radiation Is Critical for Accurate Boundary Layer CFD</a:t>
-            </a:r>
-          </a:p>
-        </p:txBody>
-      </p:sp>
-      <p:sp>
-        <p:nvSpPr>
-          <p:cNvPr id="6" name="TextBox 5"/>
-          <p:cNvSpPr txBox="1"/>
-          <p:nvPr/>
-        </p:nvSpPr>
-        <p:spPr>
-          <a:xfrm>
-            <a:off x="731520" y="1645920"/>
-            <a:ext cx="10698480" cy="502920"/>
-          </a:xfrm>
-          <a:prstGeom prst="rect">
-            <a:avLst/>
-          </a:prstGeom>
-          <a:noFill/>
-        </p:spPr>
-        <p:txBody>
-          <a:bodyPr wrap="square" lIns="0" tIns="0">
-            <a:spAutoFit/>
-          </a:bodyPr>
-          <a:lstStyle/>
-          <a:p>
-            <a:pPr>
-              <a:defRPr sz="1500">
-                <a:solidFill>
-                  <a:srgbClr val="EEF2F7"/>
-                </a:solidFill>
-                <a:latin typeface="Calibri"/>
-              </a:defRPr>
-            </a:pPr>
-            <a:r>
-              <a:t>Objective Achieved: Successfully incorporated surface radiation and quantified its thermal boundary layer impact.</a:t>
-            </a:r>
-          </a:p>
-        </p:txBody>
-      </p:sp>
-      <p:sp>
-        <p:nvSpPr>
-          <p:cNvPr id="7" name="Rounded Rectangle 6"/>
+            <a:pPr algn="r">
+              <a:defRPr sz="1100">
+                <a:solidFill>
+                  <a:srgbClr val="7C8DB5"/>
+                </a:solidFill>
+                <a:latin typeface="Calibri"/>
+              </a:defRPr>
+            </a:pPr>
+            <a:r>
+              <a:t>8 / 14</a:t>
+            </a:r>
+          </a:p>
+        </p:txBody>
+      </p:sp>
+      <p:sp>
+        <p:nvSpPr>
+          <p:cNvPr id="5" name="Rounded Rectangle 4"/>
           <p:cNvSpPr/>
           <p:nvPr/>
         </p:nvSpPr>
         <p:spPr>
           <a:xfrm>
-            <a:off x="731520" y="2331720"/>
-            <a:ext cx="5120640" cy="3657600"/>
+            <a:off x="548640" y="1371600"/>
+            <a:ext cx="6583680" cy="4754880"/>
           </a:xfrm>
           <a:prstGeom prst="roundRect">
             <a:avLst/>
@@ -5685,16 +7939,40 @@
           </a:p>
         </p:txBody>
       </p:sp>
-      <p:sp>
-        <p:nvSpPr>
-          <p:cNvPr id="8" name="TextBox 7"/>
+      <p:pic>
+        <p:nvPicPr>
+          <p:cNvPr id="6" name="Picture 5" descr="blasius_velocity_validation.png"/>
+          <p:cNvPicPr>
+            <a:picLocks noChangeAspect="1"/>
+          </p:cNvPicPr>
+          <p:nvPr/>
+        </p:nvPicPr>
+        <p:blipFill>
+          <a:blip r:embed="rId2"/>
+          <a:stretch>
+            <a:fillRect/>
+          </a:stretch>
+        </p:blipFill>
+        <p:spPr>
+          <a:xfrm>
+            <a:off x="800373" y="1536192"/>
+            <a:ext cx="6080213" cy="4105656"/>
+          </a:xfrm>
+          <a:prstGeom prst="rect">
+            <a:avLst/>
+          </a:prstGeom>
+        </p:spPr>
+      </p:pic>
+      <p:sp>
+        <p:nvSpPr>
+          <p:cNvPr id="7" name="TextBox 6"/>
           <p:cNvSpPr txBox="1"/>
           <p:nvPr/>
         </p:nvSpPr>
         <p:spPr>
           <a:xfrm>
-            <a:off x="1005840" y="2514600"/>
-            <a:ext cx="4572000" cy="3291840"/>
+            <a:off x="731520" y="5696712"/>
+            <a:ext cx="6217920" cy="320040"/>
           </a:xfrm>
           <a:prstGeom prst="rect">
             <a:avLst/>
@@ -5702,122 +7980,35 @@
           <a:noFill/>
         </p:spPr>
         <p:txBody>
-          <a:bodyPr wrap="square" lIns="0" tIns="0">
+          <a:bodyPr wrap="square" lIns="0" tIns="0" rIns="0" bIns="0">
             <a:spAutoFit/>
           </a:bodyPr>
           <a:lstStyle/>
           <a:p>
             <a:pPr>
-              <a:spcAft>
-                <a:spcPts val="800"/>
-              </a:spcAft>
-              <a:defRPr sz="1700" b="1">
-                <a:solidFill>
-                  <a:srgbClr val="FF7A1A"/>
-                </a:solidFill>
-                <a:latin typeface="Cambria"/>
-              </a:defRPr>
-            </a:pPr>
-            <a:r>
-              <a:t>Key Findings &amp; Numerical Insights</a:t>
-            </a:r>
-          </a:p>
-          <a:p>
-            <a:pPr>
-              <a:defRPr sz="1300" b="1">
-                <a:solidFill>
-                  <a:srgbClr val="FFFFFF"/>
-                </a:solidFill>
-                <a:latin typeface="Calibri"/>
-              </a:defRPr>
-            </a:pPr>
-            <a:r>
-              <a:t>1. Surface Radiation Impact:</a:t>
-            </a:r>
-          </a:p>
-          <a:p>
-            <a:pPr>
-              <a:spcAft>
-                <a:spcPts val="600"/>
-              </a:spcAft>
-              <a:defRPr sz="1100">
-                <a:solidFill>
-                  <a:srgbClr val="EEF2F7"/>
-                </a:solidFill>
-                <a:latin typeface="Calibri"/>
-              </a:defRPr>
-            </a:pPr>
-            <a:r>
-              <a:t>Relieves 21.56% of total heat flux and cools peak wall by 6.98 K (336.70 K vs 343.68 K).</a:t>
-            </a:r>
-          </a:p>
-          <a:p>
-            <a:pPr>
-              <a:defRPr sz="1300" b="1">
-                <a:solidFill>
-                  <a:srgbClr val="23B5D3"/>
-                </a:solidFill>
-                <a:latin typeface="Calibri"/>
-              </a:defRPr>
-            </a:pPr>
-            <a:r>
-              <a:t>2. Grid Sensitivity Disclosed:</a:t>
-            </a:r>
-          </a:p>
-          <a:p>
-            <a:pPr>
-              <a:spcAft>
-                <a:spcPts val="600"/>
-              </a:spcAft>
-              <a:defRPr sz="1100">
-                <a:solidFill>
-                  <a:srgbClr val="EEF2F7"/>
-                </a:solidFill>
-                <a:latin typeface="Calibri"/>
-              </a:defRPr>
-            </a:pPr>
-            <a:r>
-              <a:t>Coarse (16k) overpredicts wall rise (394.9 K); fine grid (64k) resolves sublayer gradient.</a:t>
-            </a:r>
-          </a:p>
-          <a:p>
-            <a:pPr>
-              <a:defRPr sz="1300" b="1">
-                <a:solidFill>
-                  <a:srgbClr val="FFC24B"/>
-                </a:solidFill>
-                <a:latin typeface="Calibri"/>
-              </a:defRPr>
-            </a:pPr>
-            <a:r>
-              <a:t>3. Future Scope &amp; Refinement:</a:t>
-            </a:r>
-          </a:p>
-          <a:p>
-            <a:pPr>
-              <a:defRPr sz="1100">
-                <a:solidFill>
-                  <a:srgbClr val="EEF2F7"/>
-                </a:solidFill>
-                <a:latin typeface="Calibri"/>
-              </a:defRPr>
-            </a:pPr>
-            <a:r>
-              <a:t>Execute 3rd Richardson mesh for ASME GCI and incorporate variable air properties.</a:t>
-            </a:r>
-          </a:p>
-        </p:txBody>
-      </p:sp>
-      <p:sp>
-        <p:nvSpPr>
-          <p:cNvPr id="9" name="Rounded Rectangle 8"/>
+              <a:defRPr sz="1200">
+                <a:solidFill>
+                  <a:srgbClr val="7C8DB5"/>
+                </a:solidFill>
+                <a:latin typeface="Calibri"/>
+              </a:defRPr>
+            </a:pPr>
+            <a:r>
+              <a:t>Fig. 5: Non-dimensional streamwise velocity collapse vs exact Blasius curve.</a:t>
+            </a:r>
+          </a:p>
+        </p:txBody>
+      </p:sp>
+      <p:sp>
+        <p:nvSpPr>
+          <p:cNvPr id="8" name="Rounded Rectangle 7"/>
           <p:cNvSpPr/>
           <p:nvPr/>
         </p:nvSpPr>
         <p:spPr>
           <a:xfrm>
-            <a:off x="6126480" y="2331720"/>
-            <a:ext cx="5303520" cy="3657600"/>
+            <a:off x="7498079" y="1371600"/>
+            <a:ext cx="4114800" cy="1417320"/>
           </a:xfrm>
           <a:prstGeom prst="roundRect">
             <a:avLst/>
@@ -5853,14 +8044,14 @@
       </p:sp>
       <p:sp>
         <p:nvSpPr>
-          <p:cNvPr id="10" name="TextBox 9"/>
+          <p:cNvPr id="9" name="TextBox 8"/>
           <p:cNvSpPr txBox="1"/>
           <p:nvPr/>
         </p:nvSpPr>
         <p:spPr>
           <a:xfrm>
-            <a:off x="6309360" y="2514600"/>
-            <a:ext cx="4937760" cy="3291840"/>
+            <a:off x="7772400" y="1536192"/>
+            <a:ext cx="3566160" cy="1097280"/>
           </a:xfrm>
           <a:prstGeom prst="rect">
             <a:avLst/>
@@ -5874,49 +8065,20 @@
           <a:lstStyle/>
           <a:p>
             <a:pPr>
-              <a:spcAft>
-                <a:spcPts val="800"/>
-              </a:spcAft>
-              <a:defRPr sz="1700" b="1">
-                <a:solidFill>
-                  <a:srgbClr val="FFC24B"/>
+              <a:defRPr sz="3600" b="1">
+                <a:solidFill>
+                  <a:srgbClr val="FF7A1A"/>
                 </a:solidFill>
                 <a:latin typeface="Cambria"/>
               </a:defRPr>
             </a:pPr>
             <a:r>
-              <a:t>Student Credentials &amp; References</a:t>
-            </a:r>
-          </a:p>
-          <a:p>
-            <a:pPr>
-              <a:defRPr sz="2200" b="1">
-                <a:solidFill>
-                  <a:srgbClr val="FFFFFF"/>
-                </a:solidFill>
-                <a:latin typeface="Cambria"/>
-              </a:defRPr>
-            </a:pPr>
-            <a:r>
-              <a:t>JERSAM LITHIN L</a:t>
-            </a:r>
-          </a:p>
-          <a:p>
-            <a:pPr>
-              <a:defRPr sz="1300" b="1">
-                <a:solidFill>
-                  <a:srgbClr val="23B5D3"/>
-                </a:solidFill>
-                <a:latin typeface="Calibri"/>
-              </a:defRPr>
-            </a:pPr>
-            <a:r>
-              <a:t>Register No: URK24AE1026</a:t>
-            </a:r>
-          </a:p>
-          <a:p>
-            <a:pPr>
-              <a:defRPr sz="1200">
+              <a:t>0.11%</a:t>
+            </a:r>
+          </a:p>
+          <a:p>
+            <a:pPr>
+              <a:defRPr sz="1300">
                 <a:solidFill>
                   <a:srgbClr val="EEF2F7"/>
                 </a:solidFill>
@@ -5924,101 +8086,51 @@
               </a:defRPr>
             </a:pPr>
             <a:r>
-              <a:t>3rd Year B.Tech, Aerospace Engineering  •  Karunya Institute of Tech</a:t>
-            </a:r>
-          </a:p>
-          <a:p>
-            <a:pPr>
-              <a:spcAft>
-                <a:spcPts val="800"/>
-              </a:spcAft>
-              <a:defRPr sz="1200" b="1">
-                <a:solidFill>
-                  <a:srgbClr val="FF7A1A"/>
-                </a:solidFill>
-                <a:latin typeface="Calibri"/>
-              </a:defRPr>
-            </a:pPr>
-            <a:r>
-              <a:t>Subject: Boundary Layer Theory</a:t>
-            </a:r>
-          </a:p>
-          <a:p>
-            <a:pPr>
-              <a:defRPr sz="1100" b="1">
-                <a:solidFill>
-                  <a:srgbClr val="7C8DB5"/>
-                </a:solidFill>
-                <a:latin typeface="Calibri"/>
-              </a:defRPr>
-            </a:pPr>
-            <a:r>
-              <a:t>Key Formal References:</a:t>
-            </a:r>
-          </a:p>
-          <a:p>
-            <a:pPr>
-              <a:spcAft>
-                <a:spcPts val="200"/>
-              </a:spcAft>
-              <a:defRPr sz="1000">
-                <a:solidFill>
-                  <a:srgbClr val="EEF2F7"/>
-                </a:solidFill>
-                <a:latin typeface="Calibri"/>
-              </a:defRPr>
-            </a:pPr>
-            <a:r>
-              <a:t>1. Blasius, H. (1908). Grenzschichten in Flüssigkeiten mit kleiner Reibung.</a:t>
-            </a:r>
-          </a:p>
-          <a:p>
-            <a:pPr>
-              <a:spcAft>
-                <a:spcPts val="200"/>
-              </a:spcAft>
-              <a:defRPr sz="1000">
-                <a:solidFill>
-                  <a:srgbClr val="EEF2F7"/>
-                </a:solidFill>
-                <a:latin typeface="Calibri"/>
-              </a:defRPr>
-            </a:pPr>
-            <a:r>
-              <a:t>2. Pohlhausen, E. (1921). Der Wärmeaustausch zwischen festen Körpern.</a:t>
-            </a:r>
-          </a:p>
-          <a:p>
-            <a:pPr>
-              <a:spcAft>
-                <a:spcPts val="200"/>
-              </a:spcAft>
-              <a:defRPr sz="1000">
-                <a:solidFill>
-                  <a:srgbClr val="EEF2F7"/>
-                </a:solidFill>
-                <a:latin typeface="Calibri"/>
-              </a:defRPr>
-            </a:pPr>
-            <a:r>
-              <a:t>3. Incropera et al. (2007). Fundamentals of Heat and Mass Transfer. Wiley.</a:t>
-            </a:r>
-          </a:p>
-          <a:p>
-            <a:pPr>
-              <a:spcAft>
-                <a:spcPts val="200"/>
-              </a:spcAft>
-              <a:defRPr sz="1000">
-                <a:solidFill>
-                  <a:srgbClr val="EEF2F7"/>
-                </a:solidFill>
-                <a:latin typeface="Calibri"/>
-              </a:defRPr>
-            </a:pPr>
-            <a:r>
-              <a:t>4. Schlichting, H., &amp; Gersten, K. (2017). Boundary-Layer Theory. 9th ed.</a:t>
-            </a:r>
+              <a:t>Skin-friction relative error vs Blasius (Cf = 1.874e-3 vs 1.872e-3)</a:t>
+            </a:r>
+          </a:p>
+        </p:txBody>
+      </p:sp>
+      <p:sp>
+        <p:nvSpPr>
+          <p:cNvPr id="10" name="Rounded Rectangle 9"/>
+          <p:cNvSpPr/>
+          <p:nvPr/>
+        </p:nvSpPr>
+        <p:spPr>
+          <a:xfrm>
+            <a:off x="7498079" y="2971800"/>
+            <a:ext cx="4114800" cy="1417320"/>
+          </a:xfrm>
+          <a:prstGeom prst="roundRect">
+            <a:avLst/>
+          </a:prstGeom>
+          <a:solidFill>
+            <a:srgbClr val="16264A"/>
+          </a:solidFill>
+          <a:ln>
+            <a:noFill/>
+          </a:ln>
+        </p:spPr>
+        <p:style>
+          <a:lnRef idx="1">
+            <a:schemeClr val="accent1"/>
+          </a:lnRef>
+          <a:fillRef idx="3">
+            <a:schemeClr val="accent1"/>
+          </a:fillRef>
+          <a:effectRef idx="2">
+            <a:schemeClr val="accent1"/>
+          </a:effectRef>
+          <a:fontRef idx="minor">
+            <a:schemeClr val="lt1"/>
+          </a:fontRef>
+        </p:style>
+        <p:txBody>
+          <a:bodyPr rtlCol="0" anchor="ctr"/>
+          <a:lstStyle/>
+          <a:p>
+            <a:pPr algn="ctr"/>
           </a:p>
         </p:txBody>
       </p:sp>
@@ -6030,8 +8142,8 @@
         </p:nvSpPr>
         <p:spPr>
           <a:xfrm>
-            <a:off x="731520" y="6217920"/>
-            <a:ext cx="10698480" cy="365760"/>
+            <a:off x="7772400" y="3136392"/>
+            <a:ext cx="3566160" cy="1097280"/>
           </a:xfrm>
           <a:prstGeom prst="rect">
             <a:avLst/>
@@ -6039,12 +8151,335 @@
           <a:noFill/>
         </p:spPr>
         <p:txBody>
-          <a:bodyPr wrap="none" lIns="0" tIns="0">
+          <a:bodyPr wrap="square" lIns="0" tIns="0">
             <a:spAutoFit/>
           </a:bodyPr>
           <a:lstStyle/>
           <a:p>
             <a:pPr>
+              <a:defRPr sz="3600" b="1">
+                <a:solidFill>
+                  <a:srgbClr val="23B5D3"/>
+                </a:solidFill>
+                <a:latin typeface="Cambria"/>
+              </a:defRPr>
+            </a:pPr>
+            <a:r>
+              <a:t>1.26 × 10⁵</a:t>
+            </a:r>
+          </a:p>
+          <a:p>
+            <a:pPr>
+              <a:defRPr sz="1300">
+                <a:solidFill>
+                  <a:srgbClr val="EEF2F7"/>
+                </a:solidFill>
+                <a:latin typeface="Calibri"/>
+              </a:defRPr>
+            </a:pPr>
+            <a:r>
+              <a:t>Plate Reynolds number (Re_L = U_inf L / ν) confirms laminar flow</a:t>
+            </a:r>
+          </a:p>
+        </p:txBody>
+      </p:sp>
+      <p:sp>
+        <p:nvSpPr>
+          <p:cNvPr id="12" name="Rounded Rectangle 11"/>
+          <p:cNvSpPr/>
+          <p:nvPr/>
+        </p:nvSpPr>
+        <p:spPr>
+          <a:xfrm>
+            <a:off x="7498079" y="4572000"/>
+            <a:ext cx="4114800" cy="1417320"/>
+          </a:xfrm>
+          <a:prstGeom prst="roundRect">
+            <a:avLst/>
+          </a:prstGeom>
+          <a:solidFill>
+            <a:srgbClr val="16264A"/>
+          </a:solidFill>
+          <a:ln>
+            <a:noFill/>
+          </a:ln>
+        </p:spPr>
+        <p:style>
+          <a:lnRef idx="1">
+            <a:schemeClr val="accent1"/>
+          </a:lnRef>
+          <a:fillRef idx="3">
+            <a:schemeClr val="accent1"/>
+          </a:fillRef>
+          <a:effectRef idx="2">
+            <a:schemeClr val="accent1"/>
+          </a:effectRef>
+          <a:fontRef idx="minor">
+            <a:schemeClr val="lt1"/>
+          </a:fontRef>
+        </p:style>
+        <p:txBody>
+          <a:bodyPr rtlCol="0" anchor="ctr"/>
+          <a:lstStyle/>
+          <a:p>
+            <a:pPr algn="ctr"/>
+          </a:p>
+        </p:txBody>
+      </p:sp>
+      <p:sp>
+        <p:nvSpPr>
+          <p:cNvPr id="13" name="TextBox 12"/>
+          <p:cNvSpPr txBox="1"/>
+          <p:nvPr/>
+        </p:nvSpPr>
+        <p:spPr>
+          <a:xfrm>
+            <a:off x="7772400" y="4736592"/>
+            <a:ext cx="3566160" cy="1097280"/>
+          </a:xfrm>
+          <a:prstGeom prst="rect">
+            <a:avLst/>
+          </a:prstGeom>
+          <a:noFill/>
+        </p:spPr>
+        <p:txBody>
+          <a:bodyPr wrap="square" lIns="0" tIns="0">
+            <a:spAutoFit/>
+          </a:bodyPr>
+          <a:lstStyle/>
+          <a:p>
+            <a:pPr>
+              <a:defRPr sz="3600" b="1">
+                <a:solidFill>
+                  <a:srgbClr val="FFC24B"/>
+                </a:solidFill>
+                <a:latin typeface="Cambria"/>
+              </a:defRPr>
+            </a:pPr>
+            <a:r>
+              <a:t>8.17 mm</a:t>
+            </a:r>
+          </a:p>
+          <a:p>
+            <a:pPr>
+              <a:defRPr sz="1300">
+                <a:solidFill>
+                  <a:srgbClr val="EEF2F7"/>
+                </a:solidFill>
+                <a:latin typeface="Calibri"/>
+              </a:defRPr>
+            </a:pPr>
+            <a:r>
+              <a:t>Boundary layer thickness matches analytical Blasius law δ = 5.0 x / √Re_x</a:t>
+            </a:r>
+          </a:p>
+        </p:txBody>
+      </p:sp>
+    </p:spTree>
+  </p:cSld>
+  <p:clrMapOvr>
+    <a:masterClrMapping/>
+  </p:clrMapOvr>
+</p:sld>
+</file>
+
+<file path=ppt/slides/slide9.xml><?xml version="1.0" encoding="utf-8"?>
+<p:sld xmlns:a="http://schemas.openxmlformats.org/drawingml/2006/main" xmlns:p="http://schemas.openxmlformats.org/presentationml/2006/main" xmlns:r="http://schemas.openxmlformats.org/officeDocument/2006/relationships">
+  <p:cSld>
+    <p:bg>
+      <p:bgPr>
+        <a:solidFill>
+          <a:srgbClr val="0B1426"/>
+        </a:solidFill>
+        <a:effectLst/>
+      </p:bgPr>
+    </p:bg>
+    <p:spTree>
+      <p:nvGrpSpPr>
+        <p:cNvPr id="1" name=""/>
+        <p:cNvGrpSpPr/>
+        <p:nvPr/>
+      </p:nvGrpSpPr>
+      <p:grpSpPr/>
+      <p:sp>
+        <p:nvSpPr>
+          <p:cNvPr id="2" name="Title 1"/>
+          <p:cNvSpPr>
+            <a:spLocks noGrp="1"/>
+          </p:cNvSpPr>
+          <p:nvPr>
+            <p:ph type="title" idx="100"/>
+          </p:nvPr>
+        </p:nvSpPr>
+        <p:spPr/>
+        <p:txBody>
+          <a:bodyPr/>
+          <a:lstStyle/>
+          <a:p/>
+        </p:txBody>
+      </p:sp>
+      <p:sp>
+        <p:nvSpPr>
+          <p:cNvPr id="3" name="TextBox 2"/>
+          <p:cNvSpPr txBox="1"/>
+          <p:nvPr/>
+        </p:nvSpPr>
+        <p:spPr>
+          <a:xfrm>
+            <a:off x="548640" y="365760"/>
+            <a:ext cx="11094415" cy="868680"/>
+          </a:xfrm>
+          <a:prstGeom prst="rect">
+            <a:avLst/>
+          </a:prstGeom>
+          <a:noFill/>
+        </p:spPr>
+        <p:txBody>
+          <a:bodyPr wrap="square" lIns="0" tIns="0" rIns="0" bIns="0">
+            <a:spAutoFit/>
+          </a:bodyPr>
+          <a:lstStyle/>
+          <a:p>
+            <a:pPr>
+              <a:defRPr sz="3200" b="1">
+                <a:solidFill>
+                  <a:srgbClr val="FFFFFF"/>
+                </a:solidFill>
+                <a:latin typeface="Cambria"/>
+              </a:defRPr>
+            </a:pPr>
+            <a:r>
+              <a:t>Momentum Decoupling: Velocity Invariant Under Radiation</a:t>
+            </a:r>
+          </a:p>
+        </p:txBody>
+      </p:sp>
+      <p:sp>
+        <p:nvSpPr>
+          <p:cNvPr id="4" name="TextBox 3"/>
+          <p:cNvSpPr txBox="1"/>
+          <p:nvPr/>
+        </p:nvSpPr>
+        <p:spPr>
+          <a:xfrm>
+            <a:off x="11064240" y="6400800"/>
+            <a:ext cx="548640" cy="274320"/>
+          </a:xfrm>
+          <a:prstGeom prst="rect">
+            <a:avLst/>
+          </a:prstGeom>
+          <a:noFill/>
+        </p:spPr>
+        <p:txBody>
+          <a:bodyPr wrap="none" lIns="0" tIns="0" rIns="0" bIns="0">
+            <a:spAutoFit/>
+          </a:bodyPr>
+          <a:lstStyle/>
+          <a:p>
+            <a:pPr algn="r">
+              <a:defRPr sz="1100">
+                <a:solidFill>
+                  <a:srgbClr val="7C8DB5"/>
+                </a:solidFill>
+                <a:latin typeface="Calibri"/>
+              </a:defRPr>
+            </a:pPr>
+            <a:r>
+              <a:t>9 / 14</a:t>
+            </a:r>
+          </a:p>
+        </p:txBody>
+      </p:sp>
+      <p:sp>
+        <p:nvSpPr>
+          <p:cNvPr id="5" name="Rounded Rectangle 4"/>
+          <p:cNvSpPr/>
+          <p:nvPr/>
+        </p:nvSpPr>
+        <p:spPr>
+          <a:xfrm>
+            <a:off x="548640" y="1371600"/>
+            <a:ext cx="6583680" cy="4754880"/>
+          </a:xfrm>
+          <a:prstGeom prst="roundRect">
+            <a:avLst/>
+          </a:prstGeom>
+          <a:solidFill>
+            <a:srgbClr val="16264A"/>
+          </a:solidFill>
+          <a:ln>
+            <a:noFill/>
+          </a:ln>
+        </p:spPr>
+        <p:style>
+          <a:lnRef idx="1">
+            <a:schemeClr val="accent1"/>
+          </a:lnRef>
+          <a:fillRef idx="3">
+            <a:schemeClr val="accent1"/>
+          </a:fillRef>
+          <a:effectRef idx="2">
+            <a:schemeClr val="accent1"/>
+          </a:effectRef>
+          <a:fontRef idx="minor">
+            <a:schemeClr val="lt1"/>
+          </a:fontRef>
+        </p:style>
+        <p:txBody>
+          <a:bodyPr rtlCol="0" anchor="ctr"/>
+          <a:lstStyle/>
+          <a:p>
+            <a:pPr algn="ctr"/>
+          </a:p>
+        </p:txBody>
+      </p:sp>
+      <p:pic>
+        <p:nvPicPr>
+          <p:cNvPr id="6" name="Picture 5" descr="four_case_velocity_zoom.png"/>
+          <p:cNvPicPr>
+            <a:picLocks noChangeAspect="1"/>
+          </p:cNvPicPr>
+          <p:nvPr/>
+        </p:nvPicPr>
+        <p:blipFill>
+          <a:blip r:embed="rId2"/>
+          <a:stretch>
+            <a:fillRect/>
+          </a:stretch>
+        </p:blipFill>
+        <p:spPr>
+          <a:xfrm>
+            <a:off x="731520" y="1764891"/>
+            <a:ext cx="6217920" cy="3648256"/>
+          </a:xfrm>
+          <a:prstGeom prst="rect">
+            <a:avLst/>
+          </a:prstGeom>
+        </p:spPr>
+      </p:pic>
+      <p:sp>
+        <p:nvSpPr>
+          <p:cNvPr id="7" name="TextBox 6"/>
+          <p:cNvSpPr txBox="1"/>
+          <p:nvPr/>
+        </p:nvSpPr>
+        <p:spPr>
+          <a:xfrm>
+            <a:off x="731520" y="5696712"/>
+            <a:ext cx="6217920" cy="320040"/>
+          </a:xfrm>
+          <a:prstGeom prst="rect">
+            <a:avLst/>
+          </a:prstGeom>
+          <a:noFill/>
+        </p:spPr>
+        <p:txBody>
+          <a:bodyPr wrap="square" lIns="0" tIns="0" rIns="0" bIns="0">
+            <a:spAutoFit/>
+          </a:bodyPr>
+          <a:lstStyle/>
+          <a:p>
+            <a:pPr>
               <a:defRPr sz="1200">
                 <a:solidFill>
                   <a:srgbClr val="7C8DB5"/>
@@ -6053,7 +8488,283 @@
               </a:defRPr>
             </a:pPr>
             <a:r>
-              <a:t>github.com/Jersam-l/flat-plate-with-radiation-cfd  •  Jersam Lithin L (URK24AE1026)  •  Karunya Institute of Technology and Sciences</a:t>
+              <a:t>Fig. 6: Streamwise velocity boundary layer zoom across all four cases.</a:t>
+            </a:r>
+          </a:p>
+        </p:txBody>
+      </p:sp>
+      <p:sp>
+        <p:nvSpPr>
+          <p:cNvPr id="8" name="Rounded Rectangle 7"/>
+          <p:cNvSpPr/>
+          <p:nvPr/>
+        </p:nvSpPr>
+        <p:spPr>
+          <a:xfrm>
+            <a:off x="7498079" y="1371600"/>
+            <a:ext cx="4114800" cy="1417320"/>
+          </a:xfrm>
+          <a:prstGeom prst="roundRect">
+            <a:avLst/>
+          </a:prstGeom>
+          <a:solidFill>
+            <a:srgbClr val="16264A"/>
+          </a:solidFill>
+          <a:ln>
+            <a:noFill/>
+          </a:ln>
+        </p:spPr>
+        <p:style>
+          <a:lnRef idx="1">
+            <a:schemeClr val="accent1"/>
+          </a:lnRef>
+          <a:fillRef idx="3">
+            <a:schemeClr val="accent1"/>
+          </a:fillRef>
+          <a:effectRef idx="2">
+            <a:schemeClr val="accent1"/>
+          </a:effectRef>
+          <a:fontRef idx="minor">
+            <a:schemeClr val="lt1"/>
+          </a:fontRef>
+        </p:style>
+        <p:txBody>
+          <a:bodyPr rtlCol="0" anchor="ctr"/>
+          <a:lstStyle/>
+          <a:p>
+            <a:pPr algn="ctr"/>
+          </a:p>
+        </p:txBody>
+      </p:sp>
+      <p:sp>
+        <p:nvSpPr>
+          <p:cNvPr id="9" name="TextBox 8"/>
+          <p:cNvSpPr txBox="1"/>
+          <p:nvPr/>
+        </p:nvSpPr>
+        <p:spPr>
+          <a:xfrm>
+            <a:off x="7772400" y="1536192"/>
+            <a:ext cx="3566160" cy="1097280"/>
+          </a:xfrm>
+          <a:prstGeom prst="rect">
+            <a:avLst/>
+          </a:prstGeom>
+          <a:noFill/>
+        </p:spPr>
+        <p:txBody>
+          <a:bodyPr wrap="square" lIns="0" tIns="0">
+            <a:spAutoFit/>
+          </a:bodyPr>
+          <a:lstStyle/>
+          <a:p>
+            <a:pPr>
+              <a:defRPr sz="3600" b="1">
+                <a:solidFill>
+                  <a:srgbClr val="23B5D3"/>
+                </a:solidFill>
+                <a:latin typeface="Cambria"/>
+              </a:defRPr>
+            </a:pPr>
+            <a:r>
+              <a:t>Identical</a:t>
+            </a:r>
+          </a:p>
+          <a:p>
+            <a:pPr>
+              <a:defRPr sz="1300">
+                <a:solidFill>
+                  <a:srgbClr val="EEF2F7"/>
+                </a:solidFill>
+                <a:latin typeface="Calibri"/>
+              </a:defRPr>
+            </a:pPr>
+            <a:r>
+              <a:t>Velocity field u(x,y) unchanged between ε = 0 and ε = 0.8</a:t>
+            </a:r>
+          </a:p>
+        </p:txBody>
+      </p:sp>
+      <p:sp>
+        <p:nvSpPr>
+          <p:cNvPr id="10" name="Rounded Rectangle 9"/>
+          <p:cNvSpPr/>
+          <p:nvPr/>
+        </p:nvSpPr>
+        <p:spPr>
+          <a:xfrm>
+            <a:off x="7498079" y="2971800"/>
+            <a:ext cx="4114800" cy="1417320"/>
+          </a:xfrm>
+          <a:prstGeom prst="roundRect">
+            <a:avLst/>
+          </a:prstGeom>
+          <a:solidFill>
+            <a:srgbClr val="16264A"/>
+          </a:solidFill>
+          <a:ln>
+            <a:noFill/>
+          </a:ln>
+        </p:spPr>
+        <p:style>
+          <a:lnRef idx="1">
+            <a:schemeClr val="accent1"/>
+          </a:lnRef>
+          <a:fillRef idx="3">
+            <a:schemeClr val="accent1"/>
+          </a:fillRef>
+          <a:effectRef idx="2">
+            <a:schemeClr val="accent1"/>
+          </a:effectRef>
+          <a:fontRef idx="minor">
+            <a:schemeClr val="lt1"/>
+          </a:fontRef>
+        </p:style>
+        <p:txBody>
+          <a:bodyPr rtlCol="0" anchor="ctr"/>
+          <a:lstStyle/>
+          <a:p>
+            <a:pPr algn="ctr"/>
+          </a:p>
+        </p:txBody>
+      </p:sp>
+      <p:sp>
+        <p:nvSpPr>
+          <p:cNvPr id="11" name="TextBox 10"/>
+          <p:cNvSpPr txBox="1"/>
+          <p:nvPr/>
+        </p:nvSpPr>
+        <p:spPr>
+          <a:xfrm>
+            <a:off x="7772400" y="3136392"/>
+            <a:ext cx="3566160" cy="1097280"/>
+          </a:xfrm>
+          <a:prstGeom prst="rect">
+            <a:avLst/>
+          </a:prstGeom>
+          <a:noFill/>
+        </p:spPr>
+        <p:txBody>
+          <a:bodyPr wrap="square" lIns="0" tIns="0">
+            <a:spAutoFit/>
+          </a:bodyPr>
+          <a:lstStyle/>
+          <a:p>
+            <a:pPr>
+              <a:defRPr sz="3600" b="1">
+                <a:solidFill>
+                  <a:srgbClr val="FF7A1A"/>
+                </a:solidFill>
+                <a:latin typeface="Cambria"/>
+              </a:defRPr>
+            </a:pPr>
+            <a:r>
+              <a:t>&lt; 0.08 Pa</a:t>
+            </a:r>
+          </a:p>
+          <a:p>
+            <a:pPr>
+              <a:defRPr sz="1300">
+                <a:solidFill>
+                  <a:srgbClr val="EEF2F7"/>
+                </a:solidFill>
+                <a:latin typeface="Calibri"/>
+              </a:defRPr>
+            </a:pPr>
+            <a:r>
+              <a:t>Streamwise pressure deviation remains negligible across domain</a:t>
+            </a:r>
+          </a:p>
+        </p:txBody>
+      </p:sp>
+      <p:sp>
+        <p:nvSpPr>
+          <p:cNvPr id="12" name="Rounded Rectangle 11"/>
+          <p:cNvSpPr/>
+          <p:nvPr/>
+        </p:nvSpPr>
+        <p:spPr>
+          <a:xfrm>
+            <a:off x="7498079" y="4572000"/>
+            <a:ext cx="4114800" cy="1417320"/>
+          </a:xfrm>
+          <a:prstGeom prst="roundRect">
+            <a:avLst/>
+          </a:prstGeom>
+          <a:solidFill>
+            <a:srgbClr val="16264A"/>
+          </a:solidFill>
+          <a:ln>
+            <a:noFill/>
+          </a:ln>
+        </p:spPr>
+        <p:style>
+          <a:lnRef idx="1">
+            <a:schemeClr val="accent1"/>
+          </a:lnRef>
+          <a:fillRef idx="3">
+            <a:schemeClr val="accent1"/>
+          </a:fillRef>
+          <a:effectRef idx="2">
+            <a:schemeClr val="accent1"/>
+          </a:effectRef>
+          <a:fontRef idx="minor">
+            <a:schemeClr val="lt1"/>
+          </a:fontRef>
+        </p:style>
+        <p:txBody>
+          <a:bodyPr rtlCol="0" anchor="ctr"/>
+          <a:lstStyle/>
+          <a:p>
+            <a:pPr algn="ctr"/>
+          </a:p>
+        </p:txBody>
+      </p:sp>
+      <p:sp>
+        <p:nvSpPr>
+          <p:cNvPr id="13" name="TextBox 12"/>
+          <p:cNvSpPr txBox="1"/>
+          <p:nvPr/>
+        </p:nvSpPr>
+        <p:spPr>
+          <a:xfrm>
+            <a:off x="7772400" y="4736592"/>
+            <a:ext cx="3566160" cy="1097280"/>
+          </a:xfrm>
+          <a:prstGeom prst="rect">
+            <a:avLst/>
+          </a:prstGeom>
+          <a:noFill/>
+        </p:spPr>
+        <p:txBody>
+          <a:bodyPr wrap="square" lIns="0" tIns="0">
+            <a:spAutoFit/>
+          </a:bodyPr>
+          <a:lstStyle/>
+          <a:p>
+            <a:pPr>
+              <a:defRPr sz="3600" b="1">
+                <a:solidFill>
+                  <a:srgbClr val="FFC24B"/>
+                </a:solidFill>
+                <a:latin typeface="Cambria"/>
+              </a:defRPr>
+            </a:pPr>
+            <a:r>
+              <a:t>Decoupled</a:t>
+            </a:r>
+          </a:p>
+          <a:p>
+            <a:pPr>
+              <a:defRPr sz="1300">
+                <a:solidFill>
+                  <a:srgbClr val="EEF2F7"/>
+                </a:solidFill>
+                <a:latin typeface="Calibri"/>
+              </a:defRPr>
+            </a:pPr>
+            <a:r>
+              <a:t>Constant air properties cleanly isolate thermal radiation physics</a:t>
             </a:r>
           </a:p>
         </p:txBody>
